--- a/L02_baarah_saal/L02.pptx
+++ b/L02_baarah_saal/L02.pptx
@@ -22,8 +22,6 @@
     <p:sldId id="270" r:id="rId22"/>
     <p:sldId id="271" r:id="rId23"/>
     <p:sldId id="272" r:id="rId24"/>
-    <p:sldId id="273" r:id="rId25"/>
-    <p:sldId id="274" r:id="rId26"/>
   </p:sldIdLst>
   <p:sldSz cx="12191695" cy="6858000" type="screen4x3"/>
   <p:notesSz cx="6858000" cy="9144000"/>
@@ -520,12 +518,17 @@
           <a:lstStyle/>
           <a:p>
             <a:r>
-              <a:t>0:00 AGHAZ (3 min). Line + map up. Draw the bracket around 11-23 AH on the banner so</a:t>
-            </a:r>
-          </a:p>
-          <a:p>
-            <a:r>
-              <a:t>they SEE how narrow tonight is. 30-second note for newcomers: we are reading a book.</a:t>
+              <a:t>0:00 AGHAZ (3 min). Line + map up. On the BANNER, draw the bracket around 11-23 AH so</a:t>
+            </a:r>
+          </a:p>
+          <a:p>
+            <a:r>
+              <a:t>they see how narrow tonight is. 'pichhle hafte chaudah sau saal. aaj - barah.'</a:t>
+            </a:r>
+          </a:p>
+          <a:p>
+            <a:r>
+              <a:t>30 seconds for newcomers: we are reading a book; I am not a historian.</a:t>
             </a:r>
           </a:p>
         </p:txBody>
@@ -595,7 +598,7 @@
           <a:lstStyle/>
           <a:p>
             <a:r>
-              <a:t>Move 6 (2 min). [trim to the quotation alone if running long.] Map: arrow east.</a:t>
+              <a:t>0:28 TAARUF (7 min). Read from the printed card, never from memory.</a:t>
             </a:r>
           </a:p>
         </p:txBody>
@@ -665,7 +668,12 @@
           <a:lstStyle/>
           <a:p>
             <a:r>
-              <a:t>This does the work of a paragraph of explanation. Read it and move on. PEN-DOWN: arrow east.</a:t>
+              <a:t>EXTRA if you have room: Aisha (radiyallahu anha) - alone among the Muhajirun, his father</a:t>
+            </a:r>
+          </a:p>
+          <a:p>
+            <a:r>
+              <a:t>accepted Islam too. And Amr ibn al-As asking which man the Prophet loved most: 'Abu Bakr'.</a:t>
             </a:r>
           </a:p>
         </p:txBody>
@@ -735,7 +743,12 @@
           <a:lstStyle/>
           <a:p>
             <a:r>
-              <a:t>0:28 TAARUF (7 min). Read from the card. All three verified from Siyar A'lam al-Nubala.</a:t>
+              <a:t>THE LAQAB IS THE PROPHET'S OWN (peace be upon him): 'wa sammahu al-Nabi: Sayf Allah'.</a:t>
+            </a:r>
+          </a:p>
+          <a:p>
+            <a:r>
+              <a:t>Say that explicitly - it was not given by admirers later.</a:t>
             </a:r>
           </a:p>
         </p:txBody>
@@ -805,17 +818,12 @@
           <a:lstStyle/>
           <a:p>
             <a:r>
-              <a:t>40,000 dinars when he accepted Islam (Urwa b. al-Zubayr gives the figure), and the</a:t>
-            </a:r>
-          </a:p>
-          <a:p>
-            <a:r>
-              <a:t>Prophet (peace be upon him): 'ma nafa'ani malun ma nafa'ani malu Abi Bakr'.</a:t>
-            </a:r>
-          </a:p>
-          <a:p>
-            <a:r>
-              <a:t>EXTRA: Aisha (radiyallahu anha) - alone among the Muhajirun, his father accepted Islam too.</a:t>
+              <a:t>Also the Prophet's own naming (peace be upon him), and he was given the news of Paradise.</a:t>
+            </a:r>
+          </a:p>
+          <a:p>
+            <a:r>
+              <a:t>This incident ties straight back to tonight's opening block rather than standing apart.</a:t>
             </a:r>
           </a:p>
         </p:txBody>
@@ -885,22 +893,17 @@
           <a:lstStyle/>
           <a:p>
             <a:r>
-              <a:t>THE LAQAB IS THE PROPHET'S OWN (peace be upon him): 'wa sammahu al-Nabi: Sayf Allah'.</a:t>
-            </a:r>
-          </a:p>
-          <a:p>
-            <a:r>
-              <a:t>WAQI'A: at Mu'ta all three appointed commanders were martyred - Zayd, Ja'far dhu</a:t>
-            </a:r>
-          </a:p>
-          <a:p>
-            <a:r>
-              <a:t>al-janahayn, Ibn Rawaha - and the army stood with no commander. He took the banner on</a:t>
-            </a:r>
-          </a:p>
-          <a:p>
-            <a:r>
-              <a:t>the spot, charged, and the victory came.</a:t>
+              <a:t>0:35 (3 min). THREE MINUTES, no more - this is the only method content tonight.</a:t>
+            </a:r>
+          </a:p>
+          <a:p>
+            <a:r>
+              <a:t>[SOURCE: Take this from Rehan sahib's Urdu, NOT from Arabic pages we selected. It is</a:t>
+            </a:r>
+          </a:p>
+          <a:p>
+            <a:r>
+              <a:t>doctrinally weighty and the course narrates his book.]</a:t>
             </a:r>
           </a:p>
         </p:txBody>
@@ -970,12 +973,27 @@
           <a:lstStyle/>
           <a:p>
             <a:r>
-              <a:t>Also the Prophet's own naming (peace be upon him). WAQI'A that ties back to tonight's</a:t>
-            </a:r>
-          </a:p>
-          <a:p>
-            <a:r>
-              <a:t>opening: at al-Saqifa, Abu Bakr himself put his name forward - 'li-kamali ahliyyatihi'.</a:t>
+              <a:t>0:38 (4 min). ONE sentence and no more:</a:t>
+            </a:r>
+          </a:p>
+          <a:p>
+            <a:r>
+              <a:t>  'jo kaam us din ek aadmi ne akele khare ho kar kiya - Quran us ki taraf ishara</a:t>
+            </a:r>
+          </a:p>
+          <a:p>
+            <a:r>
+              <a:t>   karta hai.'</a:t>
+            </a:r>
+          </a:p>
+          <a:p>
+            <a:r>
+              <a:t>THEN STOP. 90 SECONDS OF SILENCE while they write. Two volunteers max, 'shukriya',</a:t>
+            </a:r>
+          </a:p>
+          <a:p>
+            <a:r>
+              <a:t>nothing else. ALTERNATE (do not use both): fa'ida 2 from the muqaddima, pp. 53-54.</a:t>
             </a:r>
           </a:p>
         </p:txBody>
@@ -1045,22 +1063,22 @@
           <a:lstStyle/>
           <a:p>
             <a:r>
-              <a:t>0:35 (3 min). How a text was secured by PROCEDURE rather than by chance.</a:t>
-            </a:r>
-          </a:p>
-          <a:p>
-            <a:r>
-              <a:t>[SOURCE: Tareekh-e-Ummat, the Abu Bakr chapter. Take this from Rehan sahib's Urdu,</a:t>
-            </a:r>
-          </a:p>
-          <a:p>
-            <a:r>
-              <a:t>NOT from Arabic pages we selected - it is doctrinally weighty and the course narrates</a:t>
-            </a:r>
-          </a:p>
-          <a:p>
-            <a:r>
-              <a:t>his book.]</a:t>
+              <a:t>0:42 (3 min). Next week OPENS with the principle - how such events are read with adab.</a:t>
+            </a:r>
+          </a:p>
+          <a:p>
+            <a:r>
+              <a:t>TAKE-HOME, say once and leave unanswered:</a:t>
+            </a:r>
+          </a:p>
+          <a:p>
+            <a:r>
+              <a:t>  'ek aadmi akela khara ho, aur sab us ke khilaf mashwara de rahe hon - to use kya</a:t>
+            </a:r>
+          </a:p>
+          <a:p>
+            <a:r>
+              <a:t>   cheez sambhalti hai?'</a:t>
             </a:r>
           </a:p>
         </p:txBody>
@@ -1130,172 +1148,7 @@
           <a:lstStyle/>
           <a:p>
             <a:r>
-              <a:t>0:38 (4 min). ONE sentence and no more: 'jo kaam us din ek aadmi ne akele khare ho kar</a:t>
-            </a:r>
-          </a:p>
-          <a:p>
-            <a:r>
-              <a:t>kiya - Quran us ki taraf ishara karta hai.' THEN STOP.</a:t>
-            </a:r>
-          </a:p>
-          <a:p>
-            <a:r>
-              <a:t>90 SECONDS OF SILENCE while they write. Two volunteers max. 'shukriya', nothing else.</a:t>
-            </a:r>
-          </a:p>
-          <a:p>
-            <a:r>
-              <a:t>ALTERNATE (do not use both): fa'ida 2 from the muqaddima, p.53-54.</a:t>
-            </a:r>
-          </a:p>
-        </p:txBody>
-      </p:sp>
-      <p:sp>
-        <p:nvSpPr>
-          <p:cNvPr id="4" name="Slide Number Placeholder 3"/>
-          <p:cNvSpPr>
-            <a:spLocks noGrp="1"/>
-          </p:cNvSpPr>
-          <p:nvPr>
-            <p:ph type="sldNum" idx="5" sz="quarter"/>
-          </p:nvPr>
-        </p:nvSpPr>
-        <p:spPr/>
-      </p:sp>
-    </p:spTree>
-  </p:cSld>
-  <p:clrMapOvr>
-    <a:masterClrMapping/>
-  </p:clrMapOvr>
-</p:notes>
-</file>
-
-<file path=ppt/notesSlides/notesSlide18.xml><?xml version="1.0" encoding="utf-8"?>
-<p:notes xmlns:a="http://schemas.openxmlformats.org/drawingml/2006/main" xmlns:p="http://schemas.openxmlformats.org/presentationml/2006/main" xmlns:r="http://schemas.openxmlformats.org/officeDocument/2006/relationships">
-  <p:cSld>
-    <p:spTree>
-      <p:nvGrpSpPr>
-        <p:cNvPr id="1" name=""/>
-        <p:cNvGrpSpPr/>
-        <p:nvPr/>
-      </p:nvGrpSpPr>
-      <p:grpSpPr>
-        <a:xfrm>
-          <a:off x="0" y="0"/>
-          <a:ext cx="0" cy="0"/>
-          <a:chOff x="0" y="0"/>
-          <a:chExt cx="0" cy="0"/>
-        </a:xfrm>
-      </p:grpSpPr>
-      <p:sp>
-        <p:nvSpPr>
-          <p:cNvPr id="2" name="Slide Image Placeholder 1"/>
-          <p:cNvSpPr>
-            <a:spLocks noGrp="1"/>
-          </p:cNvSpPr>
-          <p:nvPr>
-            <p:ph type="sldImg" idx="2"/>
-          </p:nvPr>
-        </p:nvSpPr>
-        <p:spPr/>
-      </p:sp>
-      <p:sp>
-        <p:nvSpPr>
-          <p:cNvPr id="3" name="Notes Placeholder 2"/>
-          <p:cNvSpPr>
-            <a:spLocks noGrp="1"/>
-          </p:cNvSpPr>
-          <p:nvPr>
-            <p:ph type="body" idx="3" sz="quarter"/>
-          </p:nvPr>
-        </p:nvSpPr>
-        <p:spPr/>
-        <p:txBody>
-          <a:bodyPr/>
-          <a:lstStyle/>
-          <a:p>
-            <a:r>
-              <a:t>0:42 (3 min). Next week opens WITH the principle - how such events are read with adab.</a:t>
-            </a:r>
-          </a:p>
-          <a:p>
-            <a:r>
-              <a:t>Say the take-home question once and leave it unanswered.</a:t>
-            </a:r>
-          </a:p>
-        </p:txBody>
-      </p:sp>
-      <p:sp>
-        <p:nvSpPr>
-          <p:cNvPr id="4" name="Slide Number Placeholder 3"/>
-          <p:cNvSpPr>
-            <a:spLocks noGrp="1"/>
-          </p:cNvSpPr>
-          <p:nvPr>
-            <p:ph type="sldNum" idx="5" sz="quarter"/>
-          </p:nvPr>
-        </p:nvSpPr>
-        <p:spPr/>
-      </p:sp>
-    </p:spTree>
-  </p:cSld>
-  <p:clrMapOvr>
-    <a:masterClrMapping/>
-  </p:clrMapOvr>
-</p:notes>
-</file>
-
-<file path=ppt/notesSlides/notesSlide19.xml><?xml version="1.0" encoding="utf-8"?>
-<p:notes xmlns:a="http://schemas.openxmlformats.org/drawingml/2006/main" xmlns:p="http://schemas.openxmlformats.org/presentationml/2006/main" xmlns:r="http://schemas.openxmlformats.org/officeDocument/2006/relationships">
-  <p:cSld>
-    <p:spTree>
-      <p:nvGrpSpPr>
-        <p:cNvPr id="1" name=""/>
-        <p:cNvGrpSpPr/>
-        <p:nvPr/>
-      </p:nvGrpSpPr>
-      <p:grpSpPr>
-        <a:xfrm>
-          <a:off x="0" y="0"/>
-          <a:ext cx="0" cy="0"/>
-          <a:chOff x="0" y="0"/>
-          <a:chExt cx="0" cy="0"/>
-        </a:xfrm>
-      </p:grpSpPr>
-      <p:sp>
-        <p:nvSpPr>
-          <p:cNvPr id="2" name="Slide Image Placeholder 1"/>
-          <p:cNvSpPr>
-            <a:spLocks noGrp="1"/>
-          </p:cNvSpPr>
-          <p:nvPr>
-            <p:ph type="sldImg" idx="2"/>
-          </p:nvPr>
-        </p:nvSpPr>
-        <p:spPr/>
-      </p:sp>
-      <p:sp>
-        <p:nvSpPr>
-          <p:cNvPr id="3" name="Notes Placeholder 2"/>
-          <p:cNvSpPr>
-            <a:spLocks noGrp="1"/>
-          </p:cNvSpPr>
-          <p:nvPr>
-            <p:ph type="body" idx="3" sz="quarter"/>
-          </p:nvPr>
-        </p:nvSpPr>
-        <p:spPr/>
-        <p:txBody>
-          <a:bodyPr/>
-          <a:lstStyle/>
-          <a:p>
-            <a:r>
-              <a:t>Both works are named and recommended in the muqaddima, so this stays inside the</a:t>
-            </a:r>
-          </a:p>
-          <a:p>
-            <a:r>
-              <a:t>course's own frame. Show only if someone asks.</a:t>
+              <a:t>Show only if someone asks where something came from.</a:t>
             </a:r>
           </a:p>
         </p:txBody>
@@ -1365,22 +1218,27 @@
           <a:lstStyle/>
           <a:p>
             <a:r>
-              <a:t>0:03 OPENING SCENE (5 min). STAND STILL. Weeks after the Prophet (peace be upon him)</a:t>
-            </a:r>
-          </a:p>
-          <a:p>
-            <a:r>
-              <a:t>died, Madina is under armed guard at night. Name the officers of the guard slowly:</a:t>
-            </a:r>
-          </a:p>
-          <a:p>
-            <a:r>
-              <a:t>Ali, Zubayr, Talha, Sa'd b. Abi Waqqas, Abd al-Rahman b. Awf, Ibn Mas'ud (radiyallahu</a:t>
-            </a:r>
-          </a:p>
-          <a:p>
-            <a:r>
-              <a:t>anhum). These are the names we read in fadail - and they are on night watch.</a:t>
+              <a:t>0:03 OPENING SCENE (5 min). STAND STILL.</a:t>
+            </a:r>
+          </a:p>
+          <a:p>
+            <a:r>
+              <a:t>Name the officers of the night watch SLOWLY - this is the whole effect:</a:t>
+            </a:r>
+          </a:p>
+          <a:p>
+            <a:r>
+              <a:t>  Ali, Zubayr, Talha, Sa'd b. Abi Waqqas, Abd al-Rahman b. Awf, Ibn Mas'ud</a:t>
+            </a:r>
+          </a:p>
+          <a:p>
+            <a:r>
+              <a:t>  (radiyallahu anhum).</a:t>
+            </a:r>
+          </a:p>
+          <a:p>
+            <a:r>
+              <a:t>'These are the names we read in fadail - and they are standing watch on the passes.'</a:t>
             </a:r>
           </a:p>
           <a:p>
@@ -1460,17 +1318,17 @@
           <a:lstStyle/>
           <a:p>
             <a:r>
-              <a:t>Move 2 (4 min). THE KEY DISTINCTION - say it slowly. Many were not denying prayer.</a:t>
-            </a:r>
-          </a:p>
-          <a:p>
-            <a:r>
-              <a:t>They said: prayer yes, zakat no. Some argued from 9:103 - we pay only to one whose</a:t>
-            </a:r>
-          </a:p>
-          <a:p>
-            <a:r>
-              <a:t>prayer is a comfort for us. VERIFIED al-Bidaya ج7 ص18.</a:t>
+              <a:t>Move 2 (4 min). THE DISTINCTION EVERYONE MISSES - say it slowly.</a:t>
+            </a:r>
+          </a:p>
+          <a:p>
+            <a:r>
+              <a:t>The question was never whether Islam is true. It was whether anything survives the</a:t>
+            </a:r>
+          </a:p>
+          <a:p>
+            <a:r>
+              <a:t>Prophet (peace be upon him). VERIFIED al-Bidaya ج7 ص18.</a:t>
             </a:r>
           </a:p>
         </p:txBody>
@@ -1540,12 +1398,12 @@
           <a:lstStyle/>
           <a:p>
             <a:r>
-              <a:t>One line of poetry opens the whole problem: the question was not whether Islam is true.</a:t>
-            </a:r>
-          </a:p>
-          <a:p>
-            <a:r>
-              <a:t>It was whether anything survives the Prophet (peace be upon him). VERIFIED ج7 ص18.</a:t>
+              <a:t>This single verse states the real question better than any explanation. Read it, let it</a:t>
+            </a:r>
+          </a:p>
+          <a:p>
+            <a:r>
+              <a:t>sit, move on. VERIFIED ج7 ص18.</a:t>
             </a:r>
           </a:p>
         </p:txBody>
@@ -1615,17 +1473,17 @@
           <a:lstStyle/>
           <a:p>
             <a:r>
-              <a:t>0:16 THE PEAK OF THE EVENING (5 min). SLOW DOWN.</a:t>
-            </a:r>
-          </a:p>
-          <a:p>
-            <a:r>
-              <a:t>First: a group of Companions advised leaving them be until iman settled. Abu Bakr</a:t>
-            </a:r>
-          </a:p>
-          <a:p>
-            <a:r>
-              <a:t>refused (ج7 ص18). THEN Umar himself questioned it. Umar was not a soft man.</a:t>
+              <a:t>0:16 THE PEAK OF THE EVENING (5 min). SLOW RIGHT DOWN.</a:t>
+            </a:r>
+          </a:p>
+          <a:p>
+            <a:r>
+              <a:t>First: a group of Companions advised leaving them until iman settled. Abu Bakr refused</a:t>
+            </a:r>
+          </a:p>
+          <a:p>
+            <a:r>
+              <a:t>(ج7 ص18). THEN Umar himself questioned it - and Umar was not a soft man.</a:t>
             </a:r>
           </a:p>
         </p:txBody>
@@ -1695,7 +1553,7 @@
           <a:lstStyle/>
           <a:p>
             <a:r>
-              <a:t>Read it. Then STOP for three full seconds. Do not comment.</a:t>
+              <a:t>Read it. Then STOP for three full seconds. DO NOT COMMENT.</a:t>
             </a:r>
           </a:p>
         </p:txBody>
@@ -1765,17 +1623,22 @@
           <a:lstStyle/>
           <a:p>
             <a:r>
-              <a:t>SAY NOTHING AFTER THIS. Do not explain it, do not draw the lesson - the room draws it.</a:t>
-            </a:r>
-          </a:p>
-          <a:p>
-            <a:r>
-              <a:t>The strongest thirty seconds of the whole ten weeks, and every word is someone else's.</a:t>
-            </a:r>
-          </a:p>
-          <a:p>
-            <a:r>
-              <a:t>THEN: PEN-DOWN. 'apni lakeer par 11 hijri ke paas nishaan lagaiye.'</a:t>
+              <a:t>SAY NOTHING AFTER THIS. Do not explain it, do not draw the lesson - the room draws it,</a:t>
+            </a:r>
+          </a:p>
+          <a:p>
+            <a:r>
+              <a:t>and Umar (radiyallahu anhu) has already drawn it for you.</a:t>
+            </a:r>
+          </a:p>
+          <a:p>
+            <a:r>
+              <a:t>The strongest thirty seconds of the whole ten weeks, and every word belongs to someone</a:t>
+            </a:r>
+          </a:p>
+          <a:p>
+            <a:r>
+              <a:t>else. THEN: PEN-DOWN - mark 632 on the line.</a:t>
             </a:r>
           </a:p>
         </p:txBody>
@@ -1845,17 +1708,37 @@
           <a:lstStyle/>
           <a:p>
             <a:r>
-              <a:t>Move 4 (3 min). Columns radiate out from Madina; draw the arrows. PEN-DOWN.</a:t>
-            </a:r>
-          </a:p>
-          <a:p>
-            <a:r>
-              <a:t>[SOURCE: al-Bidaya ج7 ص22-27 cached - commanders and sequence, read by eye.</a:t>
-            </a:r>
-          </a:p>
-          <a:p>
-            <a:r>
-              <a:t>DO NOT state a number of columns until the book gives it.]</a:t>
+              <a:t>0:21 (8 min). WALK THE ARROWS one at a time - this is the spine of the second half.</a:t>
+            </a:r>
+          </a:p>
+          <a:p>
+            <a:r>
+              <a:t>  Yamama -&gt; the Ridda held [SOURCE: al-Bidaya ج7 ص22-27 cached; do NOT state a number</a:t>
+            </a:r>
+          </a:p>
+          <a:p>
+            <a:r>
+              <a:t>  of columns until the book gives it]</a:t>
+            </a:r>
+          </a:p>
+          <a:p>
+            <a:r>
+              <a:t>  Yarmuk -&gt; Byzantium out of Syria [al-Bidaya ج7 ص85-95]</a:t>
+            </a:r>
+          </a:p>
+          <a:p>
+            <a:r>
+              <a:t>  Qadisiyya -&gt; Persia [ج7 ص132-140]</a:t>
+            </a:r>
+          </a:p>
+          <a:p>
+            <a:r>
+              <a:t>  Fustat -&gt; Egypt</a:t>
+            </a:r>
+          </a:p>
+          <a:p>
+            <a:r>
+              <a:t>PEN-DOWN after the arrows are drawn.</a:t>
             </a:r>
           </a:p>
         </p:txBody>
@@ -1925,7 +1808,7 @@
           <a:lstStyle/>
           <a:p>
             <a:r>
-              <a:t>Move 5 (3 min). [SOURCE: al-Bidaya ج7 ص85-95 cached.] Map: arrow north, mark Dimashq.</a:t>
+              <a:t>This does the work of a paragraph of explanation. Read it and move on.</a:t>
             </a:r>
           </a:p>
         </p:txBody>
@@ -4983,8 +4866,8 @@
         </p:nvSpPr>
         <p:spPr>
           <a:xfrm>
-            <a:off x="822960" y="1920240"/>
-            <a:ext cx="10515600" cy="1463040"/>
+            <a:off x="822960" y="1600200"/>
+            <a:ext cx="10515600" cy="1371600"/>
           </a:xfrm>
           <a:prstGeom prst="rect">
             <a:avLst/>
@@ -4997,60 +4880,59 @@
           </a:bodyPr>
           <a:lstStyle/>
           <a:p>
-            <a:pPr algn="r" rtl="1">
-              <a:lnSpc>
-                <a:spcPct val="160000"/>
-              </a:lnSpc>
-            </a:pPr>
-            <a:r>
-              <a:rPr sz="6400" b="0">
-                <a:solidFill>
-                  <a:srgbClr val="FAF7F0"/>
-                </a:solidFill>
-                <a:latin typeface="Georgia"/>
-                <a:cs typeface="Jameel Noori Nastaleeq"/>
-              </a:rPr>
-              <a:t>بارہ سال</a:t>
-            </a:r>
-          </a:p>
-        </p:txBody>
-      </p:sp>
-      <p:sp>
-        <p:nvSpPr>
-          <p:cNvPr id="4" name="TextBox 3"/>
-          <p:cNvSpPr txBox="1"/>
-          <p:nvPr/>
-        </p:nvSpPr>
-        <p:spPr>
-          <a:xfrm>
-            <a:off x="822960" y="3566160"/>
-            <a:ext cx="10515600" cy="640080"/>
-          </a:xfrm>
-          <a:prstGeom prst="rect">
-            <a:avLst/>
-          </a:prstGeom>
-          <a:noFill/>
-        </p:spPr>
-        <p:txBody>
-          <a:bodyPr wrap="square">
-            <a:spAutoFit/>
-          </a:bodyPr>
-          <a:lstStyle/>
-          <a:p>
-            <a:pPr algn="r" rtl="1">
+            <a:pPr algn="l">
               <a:lnSpc>
                 <a:spcPct val="100000"/>
               </a:lnSpc>
             </a:pPr>
             <a:r>
-              <a:rPr sz="2400" b="0">
+              <a:rPr sz="6200" b="0" i="0">
+                <a:solidFill>
+                  <a:srgbClr val="FAF7F0"/>
+                </a:solidFill>
+                <a:latin typeface="Georgia"/>
+              </a:rPr>
+              <a:t>Twelve Years</a:t>
+            </a:r>
+          </a:p>
+        </p:txBody>
+      </p:sp>
+      <p:sp>
+        <p:nvSpPr>
+          <p:cNvPr id="4" name="TextBox 3"/>
+          <p:cNvSpPr txBox="1"/>
+          <p:nvPr/>
+        </p:nvSpPr>
+        <p:spPr>
+          <a:xfrm>
+            <a:off x="822960" y="2880360"/>
+            <a:ext cx="10515600" cy="914400"/>
+          </a:xfrm>
+          <a:prstGeom prst="rect">
+            <a:avLst/>
+          </a:prstGeom>
+          <a:noFill/>
+        </p:spPr>
+        <p:txBody>
+          <a:bodyPr wrap="square">
+            <a:spAutoFit/>
+          </a:bodyPr>
+          <a:lstStyle/>
+          <a:p>
+            <a:pPr algn="r" rtl="1">
+              <a:lnSpc>
+                <a:spcPct val="190000"/>
+              </a:lnSpc>
+            </a:pPr>
+            <a:r>
+              <a:rPr sz="4000" b="0" i="0">
                 <a:solidFill>
                   <a:srgbClr val="C49A45"/>
                 </a:solidFill>
-                <a:latin typeface="Georgia"/>
-                <a:cs typeface="Jameel Noori Nastaleeq"/>
+                <a:latin typeface="Noto Nastaliq Urdu"/>
+                <a:cs typeface="Noto Nastaliq Urdu"/>
               </a:rPr>
-              <a:t>نشست ۲  ·  ۱۱ھ – ۲۳ھ</a:t>
+              <a:t>بارہ سال</a:t>
             </a:r>
           </a:p>
         </p:txBody>
@@ -5063,8 +4945,8 @@
         </p:nvSpPr>
         <p:spPr>
           <a:xfrm>
-            <a:off x="8961120" y="4480560"/>
-            <a:ext cx="2377440" cy="25400"/>
+            <a:off x="822960" y="4160520"/>
+            <a:ext cx="2377440" cy="31750"/>
           </a:xfrm>
           <a:prstGeom prst="rect">
             <a:avLst/>
@@ -5107,7 +4989,7 @@
         </p:nvSpPr>
         <p:spPr>
           <a:xfrm>
-            <a:off x="822960" y="4754880"/>
+            <a:off x="822960" y="4434840"/>
             <a:ext cx="10515600" cy="731520"/>
           </a:xfrm>
           <a:prstGeom prst="rect">
@@ -5121,20 +5003,58 @@
           </a:bodyPr>
           <a:lstStyle/>
           <a:p>
-            <a:pPr algn="r" rtl="1">
+            <a:pPr algn="l">
               <a:lnSpc>
                 <a:spcPct val="100000"/>
               </a:lnSpc>
             </a:pPr>
             <a:r>
-              <a:rPr sz="2200" b="0">
+              <a:rPr sz="2400" b="0" i="1">
                 <a:solidFill>
                   <a:srgbClr val="FAF7F0"/>
                 </a:solidFill>
                 <a:latin typeface="Georgia"/>
-                <a:cs typeface="Jameel Noori Nastaleeq"/>
               </a:rPr>
-              <a:t>ایک خطرے میں گھرے شہر سے — دو سلطنتوں کے گرنے تک</a:t>
+              <a:t>From a city under guard to two broken empires</a:t>
+            </a:r>
+          </a:p>
+        </p:txBody>
+      </p:sp>
+      <p:sp>
+        <p:nvSpPr>
+          <p:cNvPr id="7" name="TextBox 6"/>
+          <p:cNvSpPr txBox="1"/>
+          <p:nvPr/>
+        </p:nvSpPr>
+        <p:spPr>
+          <a:xfrm>
+            <a:off x="822960" y="5760720"/>
+            <a:ext cx="10515600" cy="457200"/>
+          </a:xfrm>
+          <a:prstGeom prst="rect">
+            <a:avLst/>
+          </a:prstGeom>
+          <a:noFill/>
+        </p:spPr>
+        <p:txBody>
+          <a:bodyPr wrap="square">
+            <a:spAutoFit/>
+          </a:bodyPr>
+          <a:lstStyle/>
+          <a:p>
+            <a:pPr algn="l">
+              <a:lnSpc>
+                <a:spcPct val="100000"/>
+              </a:lnSpc>
+            </a:pPr>
+            <a:r>
+              <a:rPr sz="1300" b="1" i="0">
+                <a:solidFill>
+                  <a:srgbClr val="C49A45"/>
+                </a:solidFill>
+                <a:latin typeface="Segoe UI"/>
+              </a:rPr>
+              <a:t>SESSION 2  ·  632 – 644  ·  DHA ISLAMABAD</a:t>
             </a:r>
           </a:p>
         </p:txBody>
@@ -5172,7 +5092,7 @@
             <a:avLst/>
           </a:prstGeom>
           <a:solidFill>
-            <a:srgbClr val="FAF7F0"/>
+            <a:srgbClr val="104A43"/>
           </a:solidFill>
           <a:ln>
             <a:noFill/>
@@ -5209,8 +5129,8 @@
         </p:nvSpPr>
         <p:spPr>
           <a:xfrm>
-            <a:off x="822960" y="2286000"/>
-            <a:ext cx="10515600" cy="1188720"/>
+            <a:off x="777240" y="420624"/>
+            <a:ext cx="8229600" cy="365760"/>
           </a:xfrm>
           <a:prstGeom prst="rect">
             <a:avLst/>
@@ -5223,20 +5143,19 @@
           </a:bodyPr>
           <a:lstStyle/>
           <a:p>
-            <a:pPr algn="r" rtl="1">
+            <a:pPr algn="l">
               <a:lnSpc>
-                <a:spcPct val="160000"/>
+                <a:spcPct val="100000"/>
               </a:lnSpc>
             </a:pPr>
             <a:r>
-              <a:rPr sz="5000" b="0">
-                <a:solidFill>
-                  <a:srgbClr val="104A43"/>
-                </a:solidFill>
-                <a:latin typeface="Georgia"/>
-                <a:cs typeface="Jameel Noori Nastaleeq"/>
+              <a:rPr sz="1200" b="1" i="0">
+                <a:solidFill>
+                  <a:srgbClr val="C49A45"/>
+                </a:solidFill>
+                <a:latin typeface="Segoe UI"/>
               </a:rPr>
-              <a:t>قادسیہ</a:t>
+              <a:t>تعارف  ·  WHO YOU ARE MEETING</a:t>
             </a:r>
           </a:p>
         </p:txBody>
@@ -5249,8 +5168,47 @@
         </p:nvSpPr>
         <p:spPr>
           <a:xfrm>
-            <a:off x="822960" y="3749039"/>
-            <a:ext cx="10515600" cy="731520"/>
+            <a:off x="822960" y="1965960"/>
+            <a:ext cx="10515600" cy="2011680"/>
+          </a:xfrm>
+          <a:prstGeom prst="rect">
+            <a:avLst/>
+          </a:prstGeom>
+          <a:noFill/>
+        </p:spPr>
+        <p:txBody>
+          <a:bodyPr wrap="square" anchor="ctr">
+            <a:spAutoFit/>
+          </a:bodyPr>
+          <a:lstStyle/>
+          <a:p>
+            <a:pPr algn="l">
+              <a:lnSpc>
+                <a:spcPct val="120000"/>
+              </a:lnSpc>
+            </a:pPr>
+            <a:r>
+              <a:rPr sz="5200" b="0" i="0">
+                <a:solidFill>
+                  <a:srgbClr val="FAF7F0"/>
+                </a:solidFill>
+                <a:latin typeface="Georgia"/>
+              </a:rPr>
+              <a:t>Three people</a:t>
+            </a:r>
+          </a:p>
+        </p:txBody>
+      </p:sp>
+      <p:sp>
+        <p:nvSpPr>
+          <p:cNvPr id="5" name="TextBox 4"/>
+          <p:cNvSpPr txBox="1"/>
+          <p:nvPr/>
+        </p:nvSpPr>
+        <p:spPr>
+          <a:xfrm>
+            <a:off x="822960" y="4160520"/>
+            <a:ext cx="10515600" cy="914400"/>
           </a:xfrm>
           <a:prstGeom prst="rect">
             <a:avLst/>
@@ -5263,20 +5221,19 @@
           </a:bodyPr>
           <a:lstStyle/>
           <a:p>
-            <a:pPr algn="r" rtl="1">
+            <a:pPr algn="l">
               <a:lnSpc>
-                <a:spcPct val="150000"/>
+                <a:spcPct val="130000"/>
               </a:lnSpc>
             </a:pPr>
             <a:r>
-              <a:rPr sz="2500" b="0">
-                <a:solidFill>
-                  <a:srgbClr val="1C2321"/>
+              <a:rPr sz="2300" b="0" i="1">
+                <a:solidFill>
+                  <a:srgbClr val="C49A45"/>
                 </a:solidFill>
                 <a:latin typeface="Georgia"/>
-                <a:cs typeface="Jameel Noori Nastaleeq"/>
               </a:rPr>
-              <a:t>اور فارس</a:t>
+              <a:t>All three verified from Siyar A'lam al-Nubala.</a:t>
             </a:r>
           </a:p>
         </p:txBody>
@@ -5351,8 +5308,8 @@
         </p:nvSpPr>
         <p:spPr>
           <a:xfrm>
-            <a:off x="822960" y="457200"/>
-            <a:ext cx="7315200" cy="365760"/>
+            <a:off x="777240" y="420624"/>
+            <a:ext cx="8229600" cy="365760"/>
           </a:xfrm>
           <a:prstGeom prst="rect">
             <a:avLst/>
@@ -5371,14 +5328,13 @@
               </a:lnSpc>
             </a:pPr>
             <a:r>
-              <a:rPr sz="1200" b="1">
+              <a:rPr sz="1200" b="1" i="0">
                 <a:solidFill>
                   <a:srgbClr val="104A43"/>
                 </a:solidFill>
                 <a:latin typeface="Segoe UI"/>
-                <a:cs typeface="Jameel Noori Nastaleeq"/>
               </a:rPr>
-              <a:t>قادسیہ</a:t>
+              <a:t>WHO YOU ARE MEETING</a:t>
             </a:r>
           </a:p>
         </p:txBody>
@@ -5391,8 +5347,8 @@
         </p:nvSpPr>
         <p:spPr>
           <a:xfrm>
-            <a:off x="640080" y="1737360"/>
-            <a:ext cx="10881360" cy="1737360"/>
+            <a:off x="777240" y="960120"/>
+            <a:ext cx="7680960" cy="822960"/>
           </a:xfrm>
           <a:prstGeom prst="rect">
             <a:avLst/>
@@ -5405,134 +5361,330 @@
           </a:bodyPr>
           <a:lstStyle/>
           <a:p>
-            <a:pPr algn="r" rtl="1">
-              <a:lnSpc>
-                <a:spcPct val="135000"/>
-              </a:lnSpc>
-            </a:pPr>
-            <a:r>
-              <a:rPr sz="3400" b="0">
-                <a:solidFill>
-                  <a:srgbClr val="0A322E"/>
-                </a:solidFill>
-                <a:latin typeface="Georgia"/>
-                <a:cs typeface="Traditional Arabic"/>
-              </a:rPr>
-              <a:t>وَإِخْرَاجُ الْعِبَادِ مِنْ عِبَادَةِ الْعِبَادِ إِلَى عِبَادَةِ اللهِ</a:t>
-            </a:r>
-          </a:p>
-          <a:p>
-            <a:pPr algn="r" rtl="1">
-              <a:lnSpc>
-                <a:spcPct val="135000"/>
-              </a:lnSpc>
-            </a:pPr>
-            <a:r>
-              <a:rPr sz="3400" b="0">
-                <a:solidFill>
-                  <a:srgbClr val="0A322E"/>
-                </a:solidFill>
-                <a:latin typeface="Georgia"/>
-                <a:cs typeface="Traditional Arabic"/>
-              </a:rPr>
-              <a:t>وَالنَّاسُ بَنُو آدَمَ، فَهُمْ إِخْوَةٌ لِأَبٍ وَأُمٍّ</a:t>
-            </a:r>
-          </a:p>
-        </p:txBody>
-      </p:sp>
-      <p:sp>
-        <p:nvSpPr>
-          <p:cNvPr id="5" name="TextBox 4"/>
-          <p:cNvSpPr txBox="1"/>
-          <p:nvPr/>
-        </p:nvSpPr>
-        <p:spPr>
-          <a:xfrm>
-            <a:off x="640080" y="3657600"/>
-            <a:ext cx="10881360" cy="1371600"/>
-          </a:xfrm>
-          <a:prstGeom prst="rect">
-            <a:avLst/>
-          </a:prstGeom>
-          <a:noFill/>
-        </p:spPr>
-        <p:txBody>
-          <a:bodyPr wrap="square">
-            <a:spAutoFit/>
-          </a:bodyPr>
-          <a:lstStyle/>
-          <a:p>
-            <a:pPr algn="r" rtl="1">
-              <a:lnSpc>
-                <a:spcPct val="150000"/>
-              </a:lnSpc>
-            </a:pPr>
-            <a:r>
-              <a:rPr sz="2300" b="0">
-                <a:solidFill>
-                  <a:srgbClr val="1C2321"/>
-                </a:solidFill>
-                <a:latin typeface="Georgia"/>
-                <a:cs typeface="Jameel Noori Nastaleeq"/>
-              </a:rPr>
-              <a:t>اور بندوں کو بندوں کی غلامی سے نکال کر اللہ کی بندگی میں لانا۔</a:t>
-            </a:r>
-          </a:p>
-          <a:p>
-            <a:pPr algn="r" rtl="1">
-              <a:lnSpc>
-                <a:spcPct val="150000"/>
-              </a:lnSpc>
-            </a:pPr>
-            <a:r>
-              <a:rPr sz="2300" b="0">
-                <a:solidFill>
-                  <a:srgbClr val="1C2321"/>
-                </a:solidFill>
-                <a:latin typeface="Georgia"/>
-                <a:cs typeface="Jameel Noori Nastaleeq"/>
-              </a:rPr>
-              <a:t>اور لوگ سب آدم کی اولاد ہیں — ایک ہی ماں باپ کے بھائی۔</a:t>
-            </a:r>
-          </a:p>
-        </p:txBody>
-      </p:sp>
-      <p:sp>
-        <p:nvSpPr>
-          <p:cNvPr id="6" name="TextBox 5"/>
-          <p:cNvSpPr txBox="1"/>
-          <p:nvPr/>
-        </p:nvSpPr>
-        <p:spPr>
-          <a:xfrm>
-            <a:off x="640080" y="5394960"/>
-            <a:ext cx="10881360" cy="457200"/>
-          </a:xfrm>
-          <a:prstGeom prst="rect">
-            <a:avLst/>
-          </a:prstGeom>
-          <a:noFill/>
-        </p:spPr>
-        <p:txBody>
-          <a:bodyPr wrap="square">
-            <a:spAutoFit/>
-          </a:bodyPr>
-          <a:lstStyle/>
-          <a:p>
-            <a:pPr algn="r" rtl="1">
+            <a:pPr algn="l">
               <a:lnSpc>
                 <a:spcPct val="100000"/>
               </a:lnSpc>
             </a:pPr>
             <a:r>
-              <a:rPr sz="1500" b="0">
+              <a:rPr sz="4000" b="0" i="0">
                 <a:solidFill>
                   <a:srgbClr val="104A43"/>
                 </a:solidFill>
                 <a:latin typeface="Georgia"/>
-                <a:cs typeface="Jameel Noori Nastaleeq"/>
               </a:rPr>
-              <a:t>رستم کے دربار میں  ·  البدایہ والنہایہ، ج۷ ص۱۳۴</a:t>
+              <a:t>Abu Bakr al-Siddiq</a:t>
+            </a:r>
+          </a:p>
+        </p:txBody>
+      </p:sp>
+      <p:sp>
+        <p:nvSpPr>
+          <p:cNvPr id="5" name="TextBox 4"/>
+          <p:cNvSpPr txBox="1"/>
+          <p:nvPr/>
+        </p:nvSpPr>
+        <p:spPr>
+          <a:xfrm>
+            <a:off x="7863840" y="914400"/>
+            <a:ext cx="3566160" cy="822960"/>
+          </a:xfrm>
+          <a:prstGeom prst="rect">
+            <a:avLst/>
+          </a:prstGeom>
+          <a:noFill/>
+        </p:spPr>
+        <p:txBody>
+          <a:bodyPr wrap="square">
+            <a:spAutoFit/>
+          </a:bodyPr>
+          <a:lstStyle/>
+          <a:p>
+            <a:pPr algn="r" rtl="1">
+              <a:lnSpc>
+                <a:spcPct val="190000"/>
+              </a:lnSpc>
+            </a:pPr>
+            <a:r>
+              <a:rPr sz="3000" b="0" i="0">
+                <a:solidFill>
+                  <a:srgbClr val="104A43"/>
+                </a:solidFill>
+                <a:latin typeface="Noto Nastaliq Urdu"/>
+                <a:cs typeface="Noto Nastaliq Urdu"/>
+              </a:rPr>
+              <a:t>سیدنا ابوبکر الصدیق ؓ</a:t>
+            </a:r>
+          </a:p>
+        </p:txBody>
+      </p:sp>
+      <p:sp>
+        <p:nvSpPr>
+          <p:cNvPr id="6" name="TextBox 5"/>
+          <p:cNvSpPr txBox="1"/>
+          <p:nvPr/>
+        </p:nvSpPr>
+        <p:spPr>
+          <a:xfrm>
+            <a:off x="777240" y="2633472"/>
+            <a:ext cx="10607040" cy="411480"/>
+          </a:xfrm>
+          <a:prstGeom prst="rect">
+            <a:avLst/>
+          </a:prstGeom>
+          <a:noFill/>
+        </p:spPr>
+        <p:txBody>
+          <a:bodyPr wrap="square">
+            <a:spAutoFit/>
+          </a:bodyPr>
+          <a:lstStyle/>
+          <a:p>
+            <a:pPr algn="l">
+              <a:lnSpc>
+                <a:spcPct val="100000"/>
+              </a:lnSpc>
+            </a:pPr>
+            <a:r>
+              <a:rPr sz="1500" b="1" i="0">
+                <a:solidFill>
+                  <a:srgbClr val="5A6862"/>
+                </a:solidFill>
+                <a:latin typeface="Segoe UI"/>
+              </a:rPr>
+              <a:t>FIRST CALIPH  ·  632 – 634</a:t>
+            </a:r>
+          </a:p>
+        </p:txBody>
+      </p:sp>
+      <p:sp>
+        <p:nvSpPr>
+          <p:cNvPr id="7" name="TextBox 6"/>
+          <p:cNvSpPr txBox="1"/>
+          <p:nvPr/>
+        </p:nvSpPr>
+        <p:spPr>
+          <a:xfrm>
+            <a:off x="777240" y="3108960"/>
+            <a:ext cx="10607040" cy="1188720"/>
+          </a:xfrm>
+          <a:prstGeom prst="rect">
+            <a:avLst/>
+          </a:prstGeom>
+          <a:noFill/>
+        </p:spPr>
+        <p:txBody>
+          <a:bodyPr wrap="square">
+            <a:spAutoFit/>
+          </a:bodyPr>
+          <a:lstStyle/>
+          <a:p>
+            <a:pPr algn="l">
+              <a:lnSpc>
+                <a:spcPct val="130000"/>
+              </a:lnSpc>
+            </a:pPr>
+            <a:r>
+              <a:rPr sz="2200" b="0" i="0">
+                <a:solidFill>
+                  <a:srgbClr val="1C2321"/>
+                </a:solidFill>
+                <a:latin typeface="Georgia"/>
+              </a:rPr>
+              <a:t>Held the community together when much of Arabia broke away, and had the Qur’an gathered</a:t>
+            </a:r>
+          </a:p>
+          <a:p>
+            <a:pPr algn="l">
+              <a:lnSpc>
+                <a:spcPct val="130000"/>
+              </a:lnSpc>
+            </a:pPr>
+            <a:r>
+              <a:rPr sz="2200" b="0" i="0">
+                <a:solidFill>
+                  <a:srgbClr val="1C2321"/>
+                </a:solidFill>
+                <a:latin typeface="Georgia"/>
+              </a:rPr>
+              <a:t>into a single written collection.</a:t>
+            </a:r>
+          </a:p>
+        </p:txBody>
+      </p:sp>
+      <p:sp>
+        <p:nvSpPr>
+          <p:cNvPr id="8" name="Rectangle 7"/>
+          <p:cNvSpPr/>
+          <p:nvPr/>
+        </p:nvSpPr>
+        <p:spPr>
+          <a:xfrm>
+            <a:off x="777240" y="4315968"/>
+            <a:ext cx="1463040" cy="25400"/>
+          </a:xfrm>
+          <a:prstGeom prst="rect">
+            <a:avLst/>
+          </a:prstGeom>
+          <a:solidFill>
+            <a:srgbClr val="C49A45"/>
+          </a:solidFill>
+          <a:ln>
+            <a:noFill/>
+          </a:ln>
+          <a:effectLst/>
+        </p:spPr>
+        <p:style>
+          <a:lnRef idx="1">
+            <a:schemeClr val="accent1"/>
+          </a:lnRef>
+          <a:fillRef idx="3">
+            <a:schemeClr val="accent1"/>
+          </a:fillRef>
+          <a:effectRef idx="2">
+            <a:schemeClr val="accent1"/>
+          </a:effectRef>
+          <a:fontRef idx="minor">
+            <a:schemeClr val="lt1"/>
+          </a:fontRef>
+        </p:style>
+        <p:txBody>
+          <a:bodyPr rtlCol="0" anchor="ctr"/>
+          <a:lstStyle/>
+          <a:p>
+            <a:pPr algn="ctr"/>
+          </a:p>
+        </p:txBody>
+      </p:sp>
+      <p:sp>
+        <p:nvSpPr>
+          <p:cNvPr id="9" name="TextBox 8"/>
+          <p:cNvSpPr txBox="1"/>
+          <p:nvPr/>
+        </p:nvSpPr>
+        <p:spPr>
+          <a:xfrm>
+            <a:off x="777240" y="4480560"/>
+            <a:ext cx="3657600" cy="320040"/>
+          </a:xfrm>
+          <a:prstGeom prst="rect">
+            <a:avLst/>
+          </a:prstGeom>
+          <a:noFill/>
+        </p:spPr>
+        <p:txBody>
+          <a:bodyPr wrap="square">
+            <a:spAutoFit/>
+          </a:bodyPr>
+          <a:lstStyle/>
+          <a:p>
+            <a:pPr algn="l">
+              <a:lnSpc>
+                <a:spcPct val="100000"/>
+              </a:lnSpc>
+            </a:pPr>
+            <a:r>
+              <a:rPr sz="1100" b="1" i="0">
+                <a:solidFill>
+                  <a:srgbClr val="5A6862"/>
+                </a:solidFill>
+                <a:latin typeface="Segoe UI"/>
+              </a:rPr>
+              <a:t>ONE INCIDENT</a:t>
+            </a:r>
+          </a:p>
+        </p:txBody>
+      </p:sp>
+      <p:sp>
+        <p:nvSpPr>
+          <p:cNvPr id="10" name="TextBox 9"/>
+          <p:cNvSpPr txBox="1"/>
+          <p:nvPr/>
+        </p:nvSpPr>
+        <p:spPr>
+          <a:xfrm>
+            <a:off x="777240" y="4809744"/>
+            <a:ext cx="10607040" cy="1143000"/>
+          </a:xfrm>
+          <a:prstGeom prst="rect">
+            <a:avLst/>
+          </a:prstGeom>
+          <a:noFill/>
+        </p:spPr>
+        <p:txBody>
+          <a:bodyPr wrap="square">
+            <a:spAutoFit/>
+          </a:bodyPr>
+          <a:lstStyle/>
+          <a:p>
+            <a:pPr algn="l">
+              <a:lnSpc>
+                <a:spcPct val="130000"/>
+              </a:lnSpc>
+            </a:pPr>
+            <a:r>
+              <a:rPr sz="2000" b="0" i="1">
+                <a:solidFill>
+                  <a:srgbClr val="0A322E"/>
+                </a:solidFill>
+                <a:latin typeface="Georgia"/>
+              </a:rPr>
+              <a:t>He accepted Islam owning forty thousand dinars — and the Prophet ﷺ said: “No wealth ever</a:t>
+            </a:r>
+          </a:p>
+          <a:p>
+            <a:pPr algn="l">
+              <a:lnSpc>
+                <a:spcPct val="130000"/>
+              </a:lnSpc>
+            </a:pPr>
+            <a:r>
+              <a:rPr sz="2000" b="0" i="1">
+                <a:solidFill>
+                  <a:srgbClr val="0A322E"/>
+                </a:solidFill>
+                <a:latin typeface="Georgia"/>
+              </a:rPr>
+              <a:t>benefited me as Abu Bakr’s wealth benefited me.”</a:t>
+            </a:r>
+          </a:p>
+        </p:txBody>
+      </p:sp>
+      <p:sp>
+        <p:nvSpPr>
+          <p:cNvPr id="11" name="TextBox 10"/>
+          <p:cNvSpPr txBox="1"/>
+          <p:nvPr/>
+        </p:nvSpPr>
+        <p:spPr>
+          <a:xfrm>
+            <a:off x="777240" y="6053328"/>
+            <a:ext cx="10607040" cy="365760"/>
+          </a:xfrm>
+          <a:prstGeom prst="rect">
+            <a:avLst/>
+          </a:prstGeom>
+          <a:noFill/>
+        </p:spPr>
+        <p:txBody>
+          <a:bodyPr wrap="square">
+            <a:spAutoFit/>
+          </a:bodyPr>
+          <a:lstStyle/>
+          <a:p>
+            <a:pPr algn="l">
+              <a:lnSpc>
+                <a:spcPct val="100000"/>
+              </a:lnSpc>
+            </a:pPr>
+            <a:r>
+              <a:rPr sz="1200" b="0" i="0">
+                <a:solidFill>
+                  <a:srgbClr val="104A43"/>
+                </a:solidFill>
+                <a:latin typeface="Segoe UI"/>
+              </a:rPr>
+              <a:t>SIYAR A'LAM AL-NUBALA, Rashidun p. 8  ·  the figure is from Urwa ibn al-Zubayr</a:t>
             </a:r>
           </a:p>
         </p:txBody>
@@ -5570,7 +5722,7 @@
             <a:avLst/>
           </a:prstGeom>
           <a:solidFill>
-            <a:srgbClr val="104A43"/>
+            <a:srgbClr val="FAF7F0"/>
           </a:solidFill>
           <a:ln>
             <a:noFill/>
@@ -5607,8 +5759,8 @@
         </p:nvSpPr>
         <p:spPr>
           <a:xfrm>
-            <a:off x="822960" y="2743200"/>
-            <a:ext cx="10515600" cy="1280160"/>
+            <a:off x="777240" y="420624"/>
+            <a:ext cx="8229600" cy="365760"/>
           </a:xfrm>
           <a:prstGeom prst="rect">
             <a:avLst/>
@@ -5621,20 +5773,476 @@
           </a:bodyPr>
           <a:lstStyle/>
           <a:p>
-            <a:pPr algn="ctr">
+            <a:pPr algn="l">
               <a:lnSpc>
                 <a:spcPct val="100000"/>
               </a:lnSpc>
             </a:pPr>
             <a:r>
-              <a:rPr sz="6400" b="0">
-                <a:solidFill>
-                  <a:srgbClr val="FAF7F0"/>
+              <a:rPr sz="1200" b="1" i="0">
+                <a:solidFill>
+                  <a:srgbClr val="104A43"/>
+                </a:solidFill>
+                <a:latin typeface="Segoe UI"/>
+              </a:rPr>
+              <a:t>WHO YOU ARE MEETING</a:t>
+            </a:r>
+          </a:p>
+        </p:txBody>
+      </p:sp>
+      <p:sp>
+        <p:nvSpPr>
+          <p:cNvPr id="4" name="TextBox 3"/>
+          <p:cNvSpPr txBox="1"/>
+          <p:nvPr/>
+        </p:nvSpPr>
+        <p:spPr>
+          <a:xfrm>
+            <a:off x="777240" y="960120"/>
+            <a:ext cx="7680960" cy="822960"/>
+          </a:xfrm>
+          <a:prstGeom prst="rect">
+            <a:avLst/>
+          </a:prstGeom>
+          <a:noFill/>
+        </p:spPr>
+        <p:txBody>
+          <a:bodyPr wrap="square">
+            <a:spAutoFit/>
+          </a:bodyPr>
+          <a:lstStyle/>
+          <a:p>
+            <a:pPr algn="l">
+              <a:lnSpc>
+                <a:spcPct val="100000"/>
+              </a:lnSpc>
+            </a:pPr>
+            <a:r>
+              <a:rPr sz="4000" b="0" i="0">
+                <a:solidFill>
+                  <a:srgbClr val="104A43"/>
                 </a:solidFill>
                 <a:latin typeface="Georgia"/>
-                <a:cs typeface="Jameel Noori Nastaleeq"/>
               </a:rPr>
-              <a:t>تعارف</a:t>
+              <a:t>Khalid ibn al-Walid</a:t>
+            </a:r>
+          </a:p>
+        </p:txBody>
+      </p:sp>
+      <p:sp>
+        <p:nvSpPr>
+          <p:cNvPr id="5" name="TextBox 4"/>
+          <p:cNvSpPr txBox="1"/>
+          <p:nvPr/>
+        </p:nvSpPr>
+        <p:spPr>
+          <a:xfrm>
+            <a:off x="7863840" y="914400"/>
+            <a:ext cx="3566160" cy="822960"/>
+          </a:xfrm>
+          <a:prstGeom prst="rect">
+            <a:avLst/>
+          </a:prstGeom>
+          <a:noFill/>
+        </p:spPr>
+        <p:txBody>
+          <a:bodyPr wrap="square">
+            <a:spAutoFit/>
+          </a:bodyPr>
+          <a:lstStyle/>
+          <a:p>
+            <a:pPr algn="r" rtl="1">
+              <a:lnSpc>
+                <a:spcPct val="190000"/>
+              </a:lnSpc>
+            </a:pPr>
+            <a:r>
+              <a:rPr sz="3000" b="0" i="0">
+                <a:solidFill>
+                  <a:srgbClr val="104A43"/>
+                </a:solidFill>
+                <a:latin typeface="Noto Nastaliq Urdu"/>
+                <a:cs typeface="Noto Nastaliq Urdu"/>
+              </a:rPr>
+              <a:t>سیدنا خالد بن الولید ؓ</a:t>
+            </a:r>
+          </a:p>
+        </p:txBody>
+      </p:sp>
+      <p:sp>
+        <p:nvSpPr>
+          <p:cNvPr id="6" name="Rectangle 5"/>
+          <p:cNvSpPr/>
+          <p:nvPr/>
+        </p:nvSpPr>
+        <p:spPr>
+          <a:xfrm>
+            <a:off x="777240" y="1810512"/>
+            <a:ext cx="10607040" cy="566928"/>
+          </a:xfrm>
+          <a:prstGeom prst="rect">
+            <a:avLst/>
+          </a:prstGeom>
+          <a:solidFill>
+            <a:srgbClr val="C49A45"/>
+          </a:solidFill>
+          <a:ln>
+            <a:noFill/>
+          </a:ln>
+          <a:effectLst/>
+        </p:spPr>
+        <p:style>
+          <a:lnRef idx="1">
+            <a:schemeClr val="accent1"/>
+          </a:lnRef>
+          <a:fillRef idx="3">
+            <a:schemeClr val="accent1"/>
+          </a:fillRef>
+          <a:effectRef idx="2">
+            <a:schemeClr val="accent1"/>
+          </a:effectRef>
+          <a:fontRef idx="minor">
+            <a:schemeClr val="lt1"/>
+          </a:fontRef>
+        </p:style>
+        <p:txBody>
+          <a:bodyPr rtlCol="0" anchor="ctr"/>
+          <a:lstStyle/>
+          <a:p>
+            <a:pPr algn="ctr"/>
+          </a:p>
+        </p:txBody>
+      </p:sp>
+      <p:sp>
+        <p:nvSpPr>
+          <p:cNvPr id="7" name="TextBox 6"/>
+          <p:cNvSpPr txBox="1"/>
+          <p:nvPr/>
+        </p:nvSpPr>
+        <p:spPr>
+          <a:xfrm>
+            <a:off x="960120" y="1883664"/>
+            <a:ext cx="6400800" cy="457200"/>
+          </a:xfrm>
+          <a:prstGeom prst="rect">
+            <a:avLst/>
+          </a:prstGeom>
+          <a:noFill/>
+        </p:spPr>
+        <p:txBody>
+          <a:bodyPr wrap="square">
+            <a:spAutoFit/>
+          </a:bodyPr>
+          <a:lstStyle/>
+          <a:p>
+            <a:pPr algn="l">
+              <a:lnSpc>
+                <a:spcPct val="100000"/>
+              </a:lnSpc>
+            </a:pPr>
+            <a:r>
+              <a:rPr sz="1900" b="1" i="0">
+                <a:solidFill>
+                  <a:srgbClr val="0A322E"/>
+                </a:solidFill>
+                <a:latin typeface="Segoe UI"/>
+              </a:rPr>
+              <a:t>SAYF ALLAH — the Sword of God</a:t>
+            </a:r>
+          </a:p>
+        </p:txBody>
+      </p:sp>
+      <p:sp>
+        <p:nvSpPr>
+          <p:cNvPr id="8" name="TextBox 7"/>
+          <p:cNvSpPr txBox="1"/>
+          <p:nvPr/>
+        </p:nvSpPr>
+        <p:spPr>
+          <a:xfrm>
+            <a:off x="7315200" y="1828800"/>
+            <a:ext cx="3931920" cy="502920"/>
+          </a:xfrm>
+          <a:prstGeom prst="rect">
+            <a:avLst/>
+          </a:prstGeom>
+          <a:noFill/>
+        </p:spPr>
+        <p:txBody>
+          <a:bodyPr wrap="square">
+            <a:spAutoFit/>
+          </a:bodyPr>
+          <a:lstStyle/>
+          <a:p>
+            <a:pPr algn="r" rtl="1">
+              <a:lnSpc>
+                <a:spcPct val="170000"/>
+              </a:lnSpc>
+            </a:pPr>
+            <a:r>
+              <a:rPr sz="2000" b="0" i="0">
+                <a:solidFill>
+                  <a:srgbClr val="0A322E"/>
+                </a:solidFill>
+                <a:latin typeface="Noto Nastaliq Urdu"/>
+                <a:cs typeface="Noto Nastaliq Urdu"/>
+              </a:rPr>
+              <a:t>سیف اللہ</a:t>
+            </a:r>
+          </a:p>
+        </p:txBody>
+      </p:sp>
+      <p:sp>
+        <p:nvSpPr>
+          <p:cNvPr id="9" name="TextBox 8"/>
+          <p:cNvSpPr txBox="1"/>
+          <p:nvPr/>
+        </p:nvSpPr>
+        <p:spPr>
+          <a:xfrm>
+            <a:off x="777240" y="2633472"/>
+            <a:ext cx="10607040" cy="411480"/>
+          </a:xfrm>
+          <a:prstGeom prst="rect">
+            <a:avLst/>
+          </a:prstGeom>
+          <a:noFill/>
+        </p:spPr>
+        <p:txBody>
+          <a:bodyPr wrap="square">
+            <a:spAutoFit/>
+          </a:bodyPr>
+          <a:lstStyle/>
+          <a:p>
+            <a:pPr algn="l">
+              <a:lnSpc>
+                <a:spcPct val="100000"/>
+              </a:lnSpc>
+            </a:pPr>
+            <a:r>
+              <a:rPr sz="1500" b="1" i="0">
+                <a:solidFill>
+                  <a:srgbClr val="5A6862"/>
+                </a:solidFill>
+                <a:latin typeface="Segoe UI"/>
+              </a:rPr>
+              <a:t>MIGRATED AS A MUSLIM, SAFAR 8 AH  ·  COMMANDER, RIDDA AND SYRIA</a:t>
+            </a:r>
+          </a:p>
+        </p:txBody>
+      </p:sp>
+      <p:sp>
+        <p:nvSpPr>
+          <p:cNvPr id="10" name="TextBox 9"/>
+          <p:cNvSpPr txBox="1"/>
+          <p:nvPr/>
+        </p:nvSpPr>
+        <p:spPr>
+          <a:xfrm>
+            <a:off x="777240" y="3108960"/>
+            <a:ext cx="10607040" cy="1188720"/>
+          </a:xfrm>
+          <a:prstGeom prst="rect">
+            <a:avLst/>
+          </a:prstGeom>
+          <a:noFill/>
+        </p:spPr>
+        <p:txBody>
+          <a:bodyPr wrap="square">
+            <a:spAutoFit/>
+          </a:bodyPr>
+          <a:lstStyle/>
+          <a:p>
+            <a:pPr algn="l">
+              <a:lnSpc>
+                <a:spcPct val="130000"/>
+              </a:lnSpc>
+            </a:pPr>
+            <a:r>
+              <a:rPr sz="2200" b="0" i="0">
+                <a:solidFill>
+                  <a:srgbClr val="1C2321"/>
+                </a:solidFill>
+                <a:latin typeface="Georgia"/>
+              </a:rPr>
+              <a:t>Commanded the Ridda campaigns, then the Syrian front through to Yarmuk.</a:t>
+            </a:r>
+          </a:p>
+        </p:txBody>
+      </p:sp>
+      <p:sp>
+        <p:nvSpPr>
+          <p:cNvPr id="11" name="Rectangle 10"/>
+          <p:cNvSpPr/>
+          <p:nvPr/>
+        </p:nvSpPr>
+        <p:spPr>
+          <a:xfrm>
+            <a:off x="777240" y="4315968"/>
+            <a:ext cx="1463040" cy="25400"/>
+          </a:xfrm>
+          <a:prstGeom prst="rect">
+            <a:avLst/>
+          </a:prstGeom>
+          <a:solidFill>
+            <a:srgbClr val="C49A45"/>
+          </a:solidFill>
+          <a:ln>
+            <a:noFill/>
+          </a:ln>
+          <a:effectLst/>
+        </p:spPr>
+        <p:style>
+          <a:lnRef idx="1">
+            <a:schemeClr val="accent1"/>
+          </a:lnRef>
+          <a:fillRef idx="3">
+            <a:schemeClr val="accent1"/>
+          </a:fillRef>
+          <a:effectRef idx="2">
+            <a:schemeClr val="accent1"/>
+          </a:effectRef>
+          <a:fontRef idx="minor">
+            <a:schemeClr val="lt1"/>
+          </a:fontRef>
+        </p:style>
+        <p:txBody>
+          <a:bodyPr rtlCol="0" anchor="ctr"/>
+          <a:lstStyle/>
+          <a:p>
+            <a:pPr algn="ctr"/>
+          </a:p>
+        </p:txBody>
+      </p:sp>
+      <p:sp>
+        <p:nvSpPr>
+          <p:cNvPr id="12" name="TextBox 11"/>
+          <p:cNvSpPr txBox="1"/>
+          <p:nvPr/>
+        </p:nvSpPr>
+        <p:spPr>
+          <a:xfrm>
+            <a:off x="777240" y="4480560"/>
+            <a:ext cx="3657600" cy="320040"/>
+          </a:xfrm>
+          <a:prstGeom prst="rect">
+            <a:avLst/>
+          </a:prstGeom>
+          <a:noFill/>
+        </p:spPr>
+        <p:txBody>
+          <a:bodyPr wrap="square">
+            <a:spAutoFit/>
+          </a:bodyPr>
+          <a:lstStyle/>
+          <a:p>
+            <a:pPr algn="l">
+              <a:lnSpc>
+                <a:spcPct val="100000"/>
+              </a:lnSpc>
+            </a:pPr>
+            <a:r>
+              <a:rPr sz="1100" b="1" i="0">
+                <a:solidFill>
+                  <a:srgbClr val="5A6862"/>
+                </a:solidFill>
+                <a:latin typeface="Segoe UI"/>
+              </a:rPr>
+              <a:t>ONE INCIDENT</a:t>
+            </a:r>
+          </a:p>
+        </p:txBody>
+      </p:sp>
+      <p:sp>
+        <p:nvSpPr>
+          <p:cNvPr id="13" name="TextBox 12"/>
+          <p:cNvSpPr txBox="1"/>
+          <p:nvPr/>
+        </p:nvSpPr>
+        <p:spPr>
+          <a:xfrm>
+            <a:off x="777240" y="4809744"/>
+            <a:ext cx="10607040" cy="1143000"/>
+          </a:xfrm>
+          <a:prstGeom prst="rect">
+            <a:avLst/>
+          </a:prstGeom>
+          <a:noFill/>
+        </p:spPr>
+        <p:txBody>
+          <a:bodyPr wrap="square">
+            <a:spAutoFit/>
+          </a:bodyPr>
+          <a:lstStyle/>
+          <a:p>
+            <a:pPr algn="l">
+              <a:lnSpc>
+                <a:spcPct val="130000"/>
+              </a:lnSpc>
+            </a:pPr>
+            <a:r>
+              <a:rPr sz="2000" b="0" i="1">
+                <a:solidFill>
+                  <a:srgbClr val="0A322E"/>
+                </a:solidFill>
+                <a:latin typeface="Georgia"/>
+              </a:rPr>
+              <a:t>At Mu’ta all three commanders the Prophet ﷺ had appointed were killed — Zayd, Ja’far, and</a:t>
+            </a:r>
+          </a:p>
+          <a:p>
+            <a:pPr algn="l">
+              <a:lnSpc>
+                <a:spcPct val="130000"/>
+              </a:lnSpc>
+            </a:pPr>
+            <a:r>
+              <a:rPr sz="2000" b="0" i="1">
+                <a:solidFill>
+                  <a:srgbClr val="0A322E"/>
+                </a:solidFill>
+                <a:latin typeface="Georgia"/>
+              </a:rPr>
+              <a:t>Ibn Rawaha. The army stood with no commander. He took the banner on the spot, and the victory came.</a:t>
+            </a:r>
+          </a:p>
+        </p:txBody>
+      </p:sp>
+      <p:sp>
+        <p:nvSpPr>
+          <p:cNvPr id="14" name="TextBox 13"/>
+          <p:cNvSpPr txBox="1"/>
+          <p:nvPr/>
+        </p:nvSpPr>
+        <p:spPr>
+          <a:xfrm>
+            <a:off x="777240" y="6053328"/>
+            <a:ext cx="10607040" cy="365760"/>
+          </a:xfrm>
+          <a:prstGeom prst="rect">
+            <a:avLst/>
+          </a:prstGeom>
+          <a:noFill/>
+        </p:spPr>
+        <p:txBody>
+          <a:bodyPr wrap="square">
+            <a:spAutoFit/>
+          </a:bodyPr>
+          <a:lstStyle/>
+          <a:p>
+            <a:pPr algn="l">
+              <a:lnSpc>
+                <a:spcPct val="100000"/>
+              </a:lnSpc>
+            </a:pPr>
+            <a:r>
+              <a:rPr sz="1200" b="0" i="0">
+                <a:solidFill>
+                  <a:srgbClr val="104A43"/>
+                </a:solidFill>
+                <a:latin typeface="Segoe UI"/>
+              </a:rPr>
+              <a:t>SIYAR A'LAM AL-NUBALA, vol. 1 p. 366</a:t>
             </a:r>
           </a:p>
         </p:txBody>
@@ -5709,8 +6317,209 @@
         </p:nvSpPr>
         <p:spPr>
           <a:xfrm>
-            <a:off x="822960" y="2011680"/>
-            <a:ext cx="10515600" cy="1280160"/>
+            <a:off x="777240" y="420624"/>
+            <a:ext cx="8229600" cy="365760"/>
+          </a:xfrm>
+          <a:prstGeom prst="rect">
+            <a:avLst/>
+          </a:prstGeom>
+          <a:noFill/>
+        </p:spPr>
+        <p:txBody>
+          <a:bodyPr wrap="square">
+            <a:spAutoFit/>
+          </a:bodyPr>
+          <a:lstStyle/>
+          <a:p>
+            <a:pPr algn="l">
+              <a:lnSpc>
+                <a:spcPct val="100000"/>
+              </a:lnSpc>
+            </a:pPr>
+            <a:r>
+              <a:rPr sz="1200" b="1" i="0">
+                <a:solidFill>
+                  <a:srgbClr val="104A43"/>
+                </a:solidFill>
+                <a:latin typeface="Segoe UI"/>
+              </a:rPr>
+              <a:t>WHO YOU ARE MEETING</a:t>
+            </a:r>
+          </a:p>
+        </p:txBody>
+      </p:sp>
+      <p:sp>
+        <p:nvSpPr>
+          <p:cNvPr id="4" name="TextBox 3"/>
+          <p:cNvSpPr txBox="1"/>
+          <p:nvPr/>
+        </p:nvSpPr>
+        <p:spPr>
+          <a:xfrm>
+            <a:off x="777240" y="960120"/>
+            <a:ext cx="7680960" cy="822960"/>
+          </a:xfrm>
+          <a:prstGeom prst="rect">
+            <a:avLst/>
+          </a:prstGeom>
+          <a:noFill/>
+        </p:spPr>
+        <p:txBody>
+          <a:bodyPr wrap="square">
+            <a:spAutoFit/>
+          </a:bodyPr>
+          <a:lstStyle/>
+          <a:p>
+            <a:pPr algn="l">
+              <a:lnSpc>
+                <a:spcPct val="100000"/>
+              </a:lnSpc>
+            </a:pPr>
+            <a:r>
+              <a:rPr sz="4000" b="0" i="0">
+                <a:solidFill>
+                  <a:srgbClr val="104A43"/>
+                </a:solidFill>
+                <a:latin typeface="Georgia"/>
+              </a:rPr>
+              <a:t>Abu Ubayda ibn al-Jarrah</a:t>
+            </a:r>
+          </a:p>
+        </p:txBody>
+      </p:sp>
+      <p:sp>
+        <p:nvSpPr>
+          <p:cNvPr id="5" name="TextBox 4"/>
+          <p:cNvSpPr txBox="1"/>
+          <p:nvPr/>
+        </p:nvSpPr>
+        <p:spPr>
+          <a:xfrm>
+            <a:off x="7863840" y="914400"/>
+            <a:ext cx="3566160" cy="822960"/>
+          </a:xfrm>
+          <a:prstGeom prst="rect">
+            <a:avLst/>
+          </a:prstGeom>
+          <a:noFill/>
+        </p:spPr>
+        <p:txBody>
+          <a:bodyPr wrap="square">
+            <a:spAutoFit/>
+          </a:bodyPr>
+          <a:lstStyle/>
+          <a:p>
+            <a:pPr algn="r" rtl="1">
+              <a:lnSpc>
+                <a:spcPct val="190000"/>
+              </a:lnSpc>
+            </a:pPr>
+            <a:r>
+              <a:rPr sz="3000" b="0" i="0">
+                <a:solidFill>
+                  <a:srgbClr val="104A43"/>
+                </a:solidFill>
+                <a:latin typeface="Noto Nastaliq Urdu"/>
+                <a:cs typeface="Noto Nastaliq Urdu"/>
+              </a:rPr>
+              <a:t>سیدنا ابو عبیدہ بن الجراح ؓ</a:t>
+            </a:r>
+          </a:p>
+        </p:txBody>
+      </p:sp>
+      <p:sp>
+        <p:nvSpPr>
+          <p:cNvPr id="6" name="Rectangle 5"/>
+          <p:cNvSpPr/>
+          <p:nvPr/>
+        </p:nvSpPr>
+        <p:spPr>
+          <a:xfrm>
+            <a:off x="777240" y="1810512"/>
+            <a:ext cx="10607040" cy="566928"/>
+          </a:xfrm>
+          <a:prstGeom prst="rect">
+            <a:avLst/>
+          </a:prstGeom>
+          <a:solidFill>
+            <a:srgbClr val="C49A45"/>
+          </a:solidFill>
+          <a:ln>
+            <a:noFill/>
+          </a:ln>
+          <a:effectLst/>
+        </p:spPr>
+        <p:style>
+          <a:lnRef idx="1">
+            <a:schemeClr val="accent1"/>
+          </a:lnRef>
+          <a:fillRef idx="3">
+            <a:schemeClr val="accent1"/>
+          </a:fillRef>
+          <a:effectRef idx="2">
+            <a:schemeClr val="accent1"/>
+          </a:effectRef>
+          <a:fontRef idx="minor">
+            <a:schemeClr val="lt1"/>
+          </a:fontRef>
+        </p:style>
+        <p:txBody>
+          <a:bodyPr rtlCol="0" anchor="ctr"/>
+          <a:lstStyle/>
+          <a:p>
+            <a:pPr algn="ctr"/>
+          </a:p>
+        </p:txBody>
+      </p:sp>
+      <p:sp>
+        <p:nvSpPr>
+          <p:cNvPr id="7" name="TextBox 6"/>
+          <p:cNvSpPr txBox="1"/>
+          <p:nvPr/>
+        </p:nvSpPr>
+        <p:spPr>
+          <a:xfrm>
+            <a:off x="960120" y="1883664"/>
+            <a:ext cx="6400800" cy="457200"/>
+          </a:xfrm>
+          <a:prstGeom prst="rect">
+            <a:avLst/>
+          </a:prstGeom>
+          <a:noFill/>
+        </p:spPr>
+        <p:txBody>
+          <a:bodyPr wrap="square">
+            <a:spAutoFit/>
+          </a:bodyPr>
+          <a:lstStyle/>
+          <a:p>
+            <a:pPr algn="l">
+              <a:lnSpc>
+                <a:spcPct val="100000"/>
+              </a:lnSpc>
+            </a:pPr>
+            <a:r>
+              <a:rPr sz="1900" b="1" i="0">
+                <a:solidFill>
+                  <a:srgbClr val="0A322E"/>
+                </a:solidFill>
+                <a:latin typeface="Segoe UI"/>
+              </a:rPr>
+              <a:t>AMIN AL-UMMA — the Trustee of this Community</a:t>
+            </a:r>
+          </a:p>
+        </p:txBody>
+      </p:sp>
+      <p:sp>
+        <p:nvSpPr>
+          <p:cNvPr id="8" name="TextBox 7"/>
+          <p:cNvSpPr txBox="1"/>
+          <p:nvPr/>
+        </p:nvSpPr>
+        <p:spPr>
+          <a:xfrm>
+            <a:off x="7315200" y="1828800"/>
+            <a:ext cx="3931920" cy="502920"/>
           </a:xfrm>
           <a:prstGeom prst="rect">
             <a:avLst/>
@@ -5729,28 +6538,28 @@
               </a:lnSpc>
             </a:pPr>
             <a:r>
-              <a:rPr sz="4400" b="0">
-                <a:solidFill>
-                  <a:srgbClr val="104A43"/>
-                </a:solidFill>
-                <a:latin typeface="Georgia"/>
-                <a:cs typeface="Jameel Noori Nastaleeq"/>
+              <a:rPr sz="2000" b="0" i="0">
+                <a:solidFill>
+                  <a:srgbClr val="0A322E"/>
+                </a:solidFill>
+                <a:latin typeface="Noto Nastaliq Urdu"/>
+                <a:cs typeface="Noto Nastaliq Urdu"/>
               </a:rPr>
-              <a:t>سیدنا ابوبکر الصدیق ؓ</a:t>
-            </a:r>
-          </a:p>
-        </p:txBody>
-      </p:sp>
-      <p:sp>
-        <p:nvSpPr>
-          <p:cNvPr id="4" name="TextBox 3"/>
+              <a:t>امین الامۃ</a:t>
+            </a:r>
+          </a:p>
+        </p:txBody>
+      </p:sp>
+      <p:sp>
+        <p:nvSpPr>
+          <p:cNvPr id="9" name="TextBox 8"/>
           <p:cNvSpPr txBox="1"/>
           <p:nvPr/>
         </p:nvSpPr>
         <p:spPr>
           <a:xfrm>
-            <a:off x="822960" y="5120640"/>
-            <a:ext cx="10515600" cy="457200"/>
+            <a:off x="777240" y="2633472"/>
+            <a:ext cx="10607040" cy="411480"/>
           </a:xfrm>
           <a:prstGeom prst="rect">
             <a:avLst/>
@@ -5763,20 +6572,235 @@
           </a:bodyPr>
           <a:lstStyle/>
           <a:p>
-            <a:pPr algn="r" rtl="1">
+            <a:pPr algn="l">
               <a:lnSpc>
                 <a:spcPct val="100000"/>
               </a:lnSpc>
             </a:pPr>
             <a:r>
-              <a:rPr sz="1500" b="0">
+              <a:rPr sz="1500" b="1" i="0">
+                <a:solidFill>
+                  <a:srgbClr val="5A6862"/>
+                </a:solidFill>
+                <a:latin typeface="Segoe UI"/>
+              </a:rPr>
+              <a:t>COMMANDER IN SYRIA AFTER KHALID</a:t>
+            </a:r>
+          </a:p>
+        </p:txBody>
+      </p:sp>
+      <p:sp>
+        <p:nvSpPr>
+          <p:cNvPr id="10" name="TextBox 9"/>
+          <p:cNvSpPr txBox="1"/>
+          <p:nvPr/>
+        </p:nvSpPr>
+        <p:spPr>
+          <a:xfrm>
+            <a:off x="777240" y="3108960"/>
+            <a:ext cx="10607040" cy="1188720"/>
+          </a:xfrm>
+          <a:prstGeom prst="rect">
+            <a:avLst/>
+          </a:prstGeom>
+          <a:noFill/>
+        </p:spPr>
+        <p:txBody>
+          <a:bodyPr wrap="square">
+            <a:spAutoFit/>
+          </a:bodyPr>
+          <a:lstStyle/>
+          <a:p>
+            <a:pPr algn="l">
+              <a:lnSpc>
+                <a:spcPct val="130000"/>
+              </a:lnSpc>
+            </a:pPr>
+            <a:r>
+              <a:rPr sz="2200" b="0" i="0">
+                <a:solidFill>
+                  <a:srgbClr val="1C2321"/>
+                </a:solidFill>
+                <a:latin typeface="Georgia"/>
+              </a:rPr>
+              <a:t>Narrated few hadith and fought many battles; took Syria after Khalid.</a:t>
+            </a:r>
+          </a:p>
+        </p:txBody>
+      </p:sp>
+      <p:sp>
+        <p:nvSpPr>
+          <p:cNvPr id="11" name="Rectangle 10"/>
+          <p:cNvSpPr/>
+          <p:nvPr/>
+        </p:nvSpPr>
+        <p:spPr>
+          <a:xfrm>
+            <a:off x="777240" y="4315968"/>
+            <a:ext cx="1463040" cy="25400"/>
+          </a:xfrm>
+          <a:prstGeom prst="rect">
+            <a:avLst/>
+          </a:prstGeom>
+          <a:solidFill>
+            <a:srgbClr val="C49A45"/>
+          </a:solidFill>
+          <a:ln>
+            <a:noFill/>
+          </a:ln>
+          <a:effectLst/>
+        </p:spPr>
+        <p:style>
+          <a:lnRef idx="1">
+            <a:schemeClr val="accent1"/>
+          </a:lnRef>
+          <a:fillRef idx="3">
+            <a:schemeClr val="accent1"/>
+          </a:fillRef>
+          <a:effectRef idx="2">
+            <a:schemeClr val="accent1"/>
+          </a:effectRef>
+          <a:fontRef idx="minor">
+            <a:schemeClr val="lt1"/>
+          </a:fontRef>
+        </p:style>
+        <p:txBody>
+          <a:bodyPr rtlCol="0" anchor="ctr"/>
+          <a:lstStyle/>
+          <a:p>
+            <a:pPr algn="ctr"/>
+          </a:p>
+        </p:txBody>
+      </p:sp>
+      <p:sp>
+        <p:nvSpPr>
+          <p:cNvPr id="12" name="TextBox 11"/>
+          <p:cNvSpPr txBox="1"/>
+          <p:nvPr/>
+        </p:nvSpPr>
+        <p:spPr>
+          <a:xfrm>
+            <a:off x="777240" y="4480560"/>
+            <a:ext cx="3657600" cy="320040"/>
+          </a:xfrm>
+          <a:prstGeom prst="rect">
+            <a:avLst/>
+          </a:prstGeom>
+          <a:noFill/>
+        </p:spPr>
+        <p:txBody>
+          <a:bodyPr wrap="square">
+            <a:spAutoFit/>
+          </a:bodyPr>
+          <a:lstStyle/>
+          <a:p>
+            <a:pPr algn="l">
+              <a:lnSpc>
+                <a:spcPct val="100000"/>
+              </a:lnSpc>
+            </a:pPr>
+            <a:r>
+              <a:rPr sz="1100" b="1" i="0">
+                <a:solidFill>
+                  <a:srgbClr val="5A6862"/>
+                </a:solidFill>
+                <a:latin typeface="Segoe UI"/>
+              </a:rPr>
+              <a:t>ONE INCIDENT</a:t>
+            </a:r>
+          </a:p>
+        </p:txBody>
+      </p:sp>
+      <p:sp>
+        <p:nvSpPr>
+          <p:cNvPr id="13" name="TextBox 12"/>
+          <p:cNvSpPr txBox="1"/>
+          <p:nvPr/>
+        </p:nvSpPr>
+        <p:spPr>
+          <a:xfrm>
+            <a:off x="777240" y="4809744"/>
+            <a:ext cx="10607040" cy="1143000"/>
+          </a:xfrm>
+          <a:prstGeom prst="rect">
+            <a:avLst/>
+          </a:prstGeom>
+          <a:noFill/>
+        </p:spPr>
+        <p:txBody>
+          <a:bodyPr wrap="square">
+            <a:spAutoFit/>
+          </a:bodyPr>
+          <a:lstStyle/>
+          <a:p>
+            <a:pPr algn="l">
+              <a:lnSpc>
+                <a:spcPct val="130000"/>
+              </a:lnSpc>
+            </a:pPr>
+            <a:r>
+              <a:rPr sz="2000" b="0" i="1">
+                <a:solidFill>
+                  <a:srgbClr val="0A322E"/>
+                </a:solidFill>
+                <a:latin typeface="Georgia"/>
+              </a:rPr>
+              <a:t>At Saqifa, Abu Bakr himself put his name forward for the succession — “for the completeness</a:t>
+            </a:r>
+          </a:p>
+          <a:p>
+            <a:pPr algn="l">
+              <a:lnSpc>
+                <a:spcPct val="130000"/>
+              </a:lnSpc>
+            </a:pPr>
+            <a:r>
+              <a:rPr sz="2000" b="0" i="1">
+                <a:solidFill>
+                  <a:srgbClr val="0A322E"/>
+                </a:solidFill>
+                <a:latin typeface="Georgia"/>
+              </a:rPr>
+              <a:t>of his fitness”, as al-Dhahabi records it.</a:t>
+            </a:r>
+          </a:p>
+        </p:txBody>
+      </p:sp>
+      <p:sp>
+        <p:nvSpPr>
+          <p:cNvPr id="14" name="TextBox 13"/>
+          <p:cNvSpPr txBox="1"/>
+          <p:nvPr/>
+        </p:nvSpPr>
+        <p:spPr>
+          <a:xfrm>
+            <a:off x="777240" y="6053328"/>
+            <a:ext cx="10607040" cy="365760"/>
+          </a:xfrm>
+          <a:prstGeom prst="rect">
+            <a:avLst/>
+          </a:prstGeom>
+          <a:noFill/>
+        </p:spPr>
+        <p:txBody>
+          <a:bodyPr wrap="square">
+            <a:spAutoFit/>
+          </a:bodyPr>
+          <a:lstStyle/>
+          <a:p>
+            <a:pPr algn="l">
+              <a:lnSpc>
+                <a:spcPct val="100000"/>
+              </a:lnSpc>
+            </a:pPr>
+            <a:r>
+              <a:rPr sz="1200" b="0" i="0">
                 <a:solidFill>
                   <a:srgbClr val="104A43"/>
                 </a:solidFill>
-                <a:latin typeface="Georgia"/>
-                <a:cs typeface="Jameel Noori Nastaleeq"/>
+                <a:latin typeface="Segoe UI"/>
               </a:rPr>
-              <a:t>سیر أعلام النبلاء، راشدون ص۸</a:t>
+              <a:t>SIYAR A'LAM AL-NUBALA, vol. 1 p. 6</a:t>
             </a:r>
           </a:p>
         </p:txBody>
@@ -5851,8 +6875,8 @@
         </p:nvSpPr>
         <p:spPr>
           <a:xfrm>
-            <a:off x="822960" y="2011680"/>
-            <a:ext cx="10515600" cy="1280160"/>
+            <a:off x="777240" y="420624"/>
+            <a:ext cx="8229600" cy="365760"/>
           </a:xfrm>
           <a:prstGeom prst="rect">
             <a:avLst/>
@@ -5865,74 +6889,33 @@
           </a:bodyPr>
           <a:lstStyle/>
           <a:p>
-            <a:pPr algn="r" rtl="1">
-              <a:lnSpc>
-                <a:spcPct val="170000"/>
-              </a:lnSpc>
-            </a:pPr>
-            <a:r>
-              <a:rPr sz="4400" b="0">
-                <a:solidFill>
-                  <a:srgbClr val="104A43"/>
-                </a:solidFill>
-                <a:latin typeface="Georgia"/>
-                <a:cs typeface="Jameel Noori Nastaleeq"/>
-              </a:rPr>
-              <a:t>سیدنا خالد بن الولید ؓ</a:t>
-            </a:r>
-          </a:p>
-        </p:txBody>
-      </p:sp>
-      <p:sp>
-        <p:nvSpPr>
-          <p:cNvPr id="4" name="TextBox 3"/>
-          <p:cNvSpPr txBox="1"/>
-          <p:nvPr/>
-        </p:nvSpPr>
-        <p:spPr>
-          <a:xfrm>
-            <a:off x="822960" y="3474720"/>
-            <a:ext cx="10515600" cy="822960"/>
-          </a:xfrm>
-          <a:prstGeom prst="rect">
-            <a:avLst/>
-          </a:prstGeom>
-          <a:noFill/>
-        </p:spPr>
-        <p:txBody>
-          <a:bodyPr wrap="square">
-            <a:spAutoFit/>
-          </a:bodyPr>
-          <a:lstStyle/>
-          <a:p>
-            <a:pPr algn="r" rtl="1">
+            <a:pPr algn="l">
               <a:lnSpc>
                 <a:spcPct val="100000"/>
               </a:lnSpc>
             </a:pPr>
             <a:r>
-              <a:rPr sz="3200" b="0">
-                <a:solidFill>
-                  <a:srgbClr val="C49A45"/>
-                </a:solidFill>
-                <a:latin typeface="Georgia"/>
-                <a:cs typeface="Jameel Noori Nastaleeq"/>
+              <a:rPr sz="1200" b="1" i="0">
+                <a:solidFill>
+                  <a:srgbClr val="104A43"/>
+                </a:solidFill>
+                <a:latin typeface="Segoe UI"/>
               </a:rPr>
-              <a:t>سیف اللہ</a:t>
-            </a:r>
-          </a:p>
-        </p:txBody>
-      </p:sp>
-      <p:sp>
-        <p:nvSpPr>
-          <p:cNvPr id="5" name="TextBox 4"/>
+              <a:t>HOW DO WE KNOW?</a:t>
+            </a:r>
+          </a:p>
+        </p:txBody>
+      </p:sp>
+      <p:sp>
+        <p:nvSpPr>
+          <p:cNvPr id="4" name="TextBox 3"/>
           <p:cNvSpPr txBox="1"/>
           <p:nvPr/>
         </p:nvSpPr>
         <p:spPr>
           <a:xfrm>
-            <a:off x="822960" y="5120640"/>
-            <a:ext cx="10515600" cy="457200"/>
+            <a:off x="777240" y="1280160"/>
+            <a:ext cx="10607040" cy="914400"/>
           </a:xfrm>
           <a:prstGeom prst="rect">
             <a:avLst/>
@@ -5945,20 +6928,97 @@
           </a:bodyPr>
           <a:lstStyle/>
           <a:p>
-            <a:pPr algn="r" rtl="1">
+            <a:pPr algn="l">
               <a:lnSpc>
                 <a:spcPct val="100000"/>
               </a:lnSpc>
             </a:pPr>
             <a:r>
-              <a:rPr sz="1500" b="0">
+              <a:rPr sz="4000" b="0" i="0">
                 <a:solidFill>
                   <a:srgbClr val="104A43"/>
                 </a:solidFill>
                 <a:latin typeface="Georgia"/>
-                <a:cs typeface="Jameel Noori Nastaleeq"/>
               </a:rPr>
-              <a:t>سیر أعلام النبلاء، ج۱ ص۳۶۶</a:t>
+              <a:t>How the Qur’an was gathered</a:t>
+            </a:r>
+          </a:p>
+        </p:txBody>
+      </p:sp>
+      <p:sp>
+        <p:nvSpPr>
+          <p:cNvPr id="5" name="TextBox 4"/>
+          <p:cNvSpPr txBox="1"/>
+          <p:nvPr/>
+        </p:nvSpPr>
+        <p:spPr>
+          <a:xfrm>
+            <a:off x="777240" y="2377440"/>
+            <a:ext cx="10607040" cy="640080"/>
+          </a:xfrm>
+          <a:prstGeom prst="rect">
+            <a:avLst/>
+          </a:prstGeom>
+          <a:noFill/>
+        </p:spPr>
+        <p:txBody>
+          <a:bodyPr wrap="square">
+            <a:spAutoFit/>
+          </a:bodyPr>
+          <a:lstStyle/>
+          <a:p>
+            <a:pPr algn="l">
+              <a:lnSpc>
+                <a:spcPct val="100000"/>
+              </a:lnSpc>
+            </a:pPr>
+            <a:r>
+              <a:rPr sz="2300" b="0" i="1">
+                <a:solidFill>
+                  <a:srgbClr val="1C2321"/>
+                </a:solidFill>
+                <a:latin typeface="Georgia"/>
+              </a:rPr>
+              <a:t>A text secured by procedure — not by chance, and not by one man’s memory.</a:t>
+            </a:r>
+          </a:p>
+        </p:txBody>
+      </p:sp>
+      <p:sp>
+        <p:nvSpPr>
+          <p:cNvPr id="6" name="TextBox 5"/>
+          <p:cNvSpPr txBox="1"/>
+          <p:nvPr/>
+        </p:nvSpPr>
+        <p:spPr>
+          <a:xfrm>
+            <a:off x="777240" y="3474720"/>
+            <a:ext cx="10607040" cy="457200"/>
+          </a:xfrm>
+          <a:prstGeom prst="rect">
+            <a:avLst/>
+          </a:prstGeom>
+          <a:noFill/>
+        </p:spPr>
+        <p:txBody>
+          <a:bodyPr wrap="square">
+            <a:spAutoFit/>
+          </a:bodyPr>
+          <a:lstStyle/>
+          <a:p>
+            <a:pPr algn="l">
+              <a:lnSpc>
+                <a:spcPct val="100000"/>
+              </a:lnSpc>
+            </a:pPr>
+            <a:r>
+              <a:rPr sz="1700" b="0" i="0">
+                <a:solidFill>
+                  <a:srgbClr val="7A2E2E"/>
+                </a:solidFill>
+                <a:latin typeface="Segoe UI"/>
+              </a:rPr>
+              <a:t>[ SOURCE: Tareekh-e-Ummat — the Abu Bakr chapter ]</a:t>
             </a:r>
           </a:p>
         </p:txBody>
@@ -6033,8 +7093,8 @@
         </p:nvSpPr>
         <p:spPr>
           <a:xfrm>
-            <a:off x="822960" y="2011680"/>
-            <a:ext cx="10515600" cy="1280160"/>
+            <a:off x="777240" y="420624"/>
+            <a:ext cx="8229600" cy="365760"/>
           </a:xfrm>
           <a:prstGeom prst="rect">
             <a:avLst/>
@@ -6047,20 +7107,19 @@
           </a:bodyPr>
           <a:lstStyle/>
           <a:p>
-            <a:pPr algn="r" rtl="1">
+            <a:pPr algn="l">
               <a:lnSpc>
-                <a:spcPct val="170000"/>
+                <a:spcPct val="100000"/>
               </a:lnSpc>
             </a:pPr>
             <a:r>
-              <a:rPr sz="4400" b="0">
+              <a:rPr sz="1200" b="1" i="0">
                 <a:solidFill>
                   <a:srgbClr val="104A43"/>
                 </a:solidFill>
-                <a:latin typeface="Georgia"/>
-                <a:cs typeface="Jameel Noori Nastaleeq"/>
+                <a:latin typeface="Segoe UI"/>
               </a:rPr>
-              <a:t>سیدنا ابو عبیدہ بن الجراح ؓ</a:t>
+              <a:t>آج کی بات  ·  TODAY'S POINT — NOT MINE</a:t>
             </a:r>
           </a:p>
         </p:txBody>
@@ -6073,8 +7132,47 @@
         </p:nvSpPr>
         <p:spPr>
           <a:xfrm>
-            <a:off x="822960" y="3474720"/>
-            <a:ext cx="10515600" cy="822960"/>
+            <a:off x="777240" y="960120"/>
+            <a:ext cx="10607040" cy="640080"/>
+          </a:xfrm>
+          <a:prstGeom prst="rect">
+            <a:avLst/>
+          </a:prstGeom>
+          <a:noFill/>
+        </p:spPr>
+        <p:txBody>
+          <a:bodyPr wrap="square">
+            <a:spAutoFit/>
+          </a:bodyPr>
+          <a:lstStyle/>
+          <a:p>
+            <a:pPr algn="l">
+              <a:lnSpc>
+                <a:spcPct val="100000"/>
+              </a:lnSpc>
+            </a:pPr>
+            <a:r>
+              <a:rPr sz="3000" b="0" i="0">
+                <a:solidFill>
+                  <a:srgbClr val="104A43"/>
+                </a:solidFill>
+                <a:latin typeface="Georgia"/>
+              </a:rPr>
+              <a:t>al-Hasan al-Basri and Qatada</a:t>
+            </a:r>
+          </a:p>
+        </p:txBody>
+      </p:sp>
+      <p:sp>
+        <p:nvSpPr>
+          <p:cNvPr id="5" name="TextBox 4"/>
+          <p:cNvSpPr txBox="1"/>
+          <p:nvPr/>
+        </p:nvSpPr>
+        <p:spPr>
+          <a:xfrm>
+            <a:off x="640080" y="1965960"/>
+            <a:ext cx="10881360" cy="914400"/>
           </a:xfrm>
           <a:prstGeom prst="rect">
             <a:avLst/>
@@ -6093,28 +7191,28 @@
               </a:lnSpc>
             </a:pPr>
             <a:r>
-              <a:rPr sz="3200" b="0">
-                <a:solidFill>
-                  <a:srgbClr val="C49A45"/>
-                </a:solidFill>
-                <a:latin typeface="Georgia"/>
-                <a:cs typeface="Jameel Noori Nastaleeq"/>
+              <a:rPr sz="3400" b="0" i="0">
+                <a:solidFill>
+                  <a:srgbClr val="0A322E"/>
+                </a:solidFill>
+                <a:latin typeface="Traditional Arabic"/>
+                <a:cs typeface="Traditional Arabic"/>
               </a:rPr>
-              <a:t>امین الامۃ</a:t>
-            </a:r>
-          </a:p>
-        </p:txBody>
-      </p:sp>
-      <p:sp>
-        <p:nvSpPr>
-          <p:cNvPr id="5" name="TextBox 4"/>
+              <a:t>﴿فَسَوْفَ يَأْتِي اللَّهُ بِقَوْمٍ يُحِبُّهُمْ وَيُحِبُّونَهُ﴾</a:t>
+            </a:r>
+          </a:p>
+        </p:txBody>
+      </p:sp>
+      <p:sp>
+        <p:nvSpPr>
+          <p:cNvPr id="6" name="TextBox 5"/>
           <p:cNvSpPr txBox="1"/>
           <p:nvPr/>
         </p:nvSpPr>
         <p:spPr>
           <a:xfrm>
-            <a:off x="822960" y="5120640"/>
-            <a:ext cx="10515600" cy="457200"/>
+            <a:off x="777240" y="3017520"/>
+            <a:ext cx="10607040" cy="548640"/>
           </a:xfrm>
           <a:prstGeom prst="rect">
             <a:avLst/>
@@ -6127,20 +7225,113 @@
           </a:bodyPr>
           <a:lstStyle/>
           <a:p>
-            <a:pPr algn="r" rtl="1">
+            <a:pPr algn="ctr">
               <a:lnSpc>
                 <a:spcPct val="100000"/>
               </a:lnSpc>
             </a:pPr>
             <a:r>
-              <a:rPr sz="1500" b="0">
+              <a:rPr sz="2400" b="0" i="1">
+                <a:solidFill>
+                  <a:srgbClr val="1C2321"/>
+                </a:solidFill>
+                <a:latin typeface="Georgia"/>
+              </a:rPr>
+              <a:t>“God will bring a people whom He loves and who love Him.”</a:t>
+            </a:r>
+          </a:p>
+        </p:txBody>
+      </p:sp>
+      <p:sp>
+        <p:nvSpPr>
+          <p:cNvPr id="7" name="TextBox 6"/>
+          <p:cNvSpPr txBox="1"/>
+          <p:nvPr/>
+        </p:nvSpPr>
+        <p:spPr>
+          <a:xfrm>
+            <a:off x="777240" y="3794760"/>
+            <a:ext cx="10607040" cy="1005840"/>
+          </a:xfrm>
+          <a:prstGeom prst="rect">
+            <a:avLst/>
+          </a:prstGeom>
+          <a:noFill/>
+        </p:spPr>
+        <p:txBody>
+          <a:bodyPr wrap="square">
+            <a:spAutoFit/>
+          </a:bodyPr>
+          <a:lstStyle/>
+          <a:p>
+            <a:pPr algn="ctr">
+              <a:lnSpc>
+                <a:spcPct val="135000"/>
+              </a:lnSpc>
+            </a:pPr>
+            <a:r>
+              <a:rPr sz="2500" b="0" i="0">
+                <a:solidFill>
+                  <a:srgbClr val="0A322E"/>
+                </a:solidFill>
+                <a:latin typeface="Georgia"/>
+              </a:rPr>
+              <a:t>The ones meant, they said, are Abu Bakr and his companions —</a:t>
+            </a:r>
+          </a:p>
+          <a:p>
+            <a:pPr algn="ctr">
+              <a:lnSpc>
+                <a:spcPct val="135000"/>
+              </a:lnSpc>
+            </a:pPr>
+            <a:r>
+              <a:rPr sz="2500" b="0" i="0">
+                <a:solidFill>
+                  <a:srgbClr val="0A322E"/>
+                </a:solidFill>
+                <a:latin typeface="Georgia"/>
+              </a:rPr>
+              <a:t>in exactly this fight.</a:t>
+            </a:r>
+          </a:p>
+        </p:txBody>
+      </p:sp>
+      <p:sp>
+        <p:nvSpPr>
+          <p:cNvPr id="8" name="TextBox 7"/>
+          <p:cNvSpPr txBox="1"/>
+          <p:nvPr/>
+        </p:nvSpPr>
+        <p:spPr>
+          <a:xfrm>
+            <a:off x="777240" y="5120640"/>
+            <a:ext cx="10607040" cy="365760"/>
+          </a:xfrm>
+          <a:prstGeom prst="rect">
+            <a:avLst/>
+          </a:prstGeom>
+          <a:noFill/>
+        </p:spPr>
+        <p:txBody>
+          <a:bodyPr wrap="square">
+            <a:spAutoFit/>
+          </a:bodyPr>
+          <a:lstStyle/>
+          <a:p>
+            <a:pPr algn="ctr">
+              <a:lnSpc>
+                <a:spcPct val="100000"/>
+              </a:lnSpc>
+            </a:pPr>
+            <a:r>
+              <a:rPr sz="1300" b="0" i="0">
                 <a:solidFill>
                   <a:srgbClr val="104A43"/>
                 </a:solidFill>
-                <a:latin typeface="Georgia"/>
-                <a:cs typeface="Jameel Noori Nastaleeq"/>
+                <a:latin typeface="Segoe UI"/>
               </a:rPr>
-              <a:t>سیر أعلام النبلاء، ج۱ ص۶</a:t>
+              <a:t>AL-MA'IDA 5:54  ·  AL-BIDAYA WA'L-NIHAYA, vol. 7 p. 19</a:t>
             </a:r>
           </a:p>
         </p:txBody>
@@ -6178,7 +7369,7 @@
             <a:avLst/>
           </a:prstGeom>
           <a:solidFill>
-            <a:srgbClr val="FAF7F0"/>
+            <a:srgbClr val="0A322E"/>
           </a:solidFill>
           <a:ln>
             <a:noFill/>
@@ -6215,8 +7406,8 @@
         </p:nvSpPr>
         <p:spPr>
           <a:xfrm>
-            <a:off x="822960" y="457200"/>
-            <a:ext cx="7315200" cy="365760"/>
+            <a:off x="777240" y="420624"/>
+            <a:ext cx="8229600" cy="365760"/>
           </a:xfrm>
           <a:prstGeom prst="rect">
             <a:avLst/>
@@ -6235,14 +7426,13 @@
               </a:lnSpc>
             </a:pPr>
             <a:r>
-              <a:rPr sz="1200" b="1">
-                <a:solidFill>
-                  <a:srgbClr val="104A43"/>
+              <a:rPr sz="1200" b="1" i="0">
+                <a:solidFill>
+                  <a:srgbClr val="C49A45"/>
                 </a:solidFill>
                 <a:latin typeface="Segoe UI"/>
-                <a:cs typeface="Jameel Noori Nastaleeq"/>
               </a:rPr>
-              <a:t>کیسے پتا چلا؟</a:t>
+              <a:t>اگلے ہفتے</a:t>
             </a:r>
           </a:p>
         </p:txBody>
@@ -6255,8 +7445,47 @@
         </p:nvSpPr>
         <p:spPr>
           <a:xfrm>
-            <a:off x="822960" y="2468880"/>
-            <a:ext cx="10515600" cy="1188720"/>
+            <a:off x="822960" y="1965960"/>
+            <a:ext cx="10515600" cy="2011680"/>
+          </a:xfrm>
+          <a:prstGeom prst="rect">
+            <a:avLst/>
+          </a:prstGeom>
+          <a:noFill/>
+        </p:spPr>
+        <p:txBody>
+          <a:bodyPr wrap="square" anchor="ctr">
+            <a:spAutoFit/>
+          </a:bodyPr>
+          <a:lstStyle/>
+          <a:p>
+            <a:pPr algn="l">
+              <a:lnSpc>
+                <a:spcPct val="120000"/>
+              </a:lnSpc>
+            </a:pPr>
+            <a:r>
+              <a:rPr sz="5200" b="0" i="0">
+                <a:solidFill>
+                  <a:srgbClr val="FAF7F0"/>
+                </a:solidFill>
+                <a:latin typeface="Georgia"/>
+              </a:rPr>
+              <a:t>Next week: the first test.</a:t>
+            </a:r>
+          </a:p>
+        </p:txBody>
+      </p:sp>
+      <p:sp>
+        <p:nvSpPr>
+          <p:cNvPr id="5" name="TextBox 4"/>
+          <p:cNvSpPr txBox="1"/>
+          <p:nvPr/>
+        </p:nvSpPr>
+        <p:spPr>
+          <a:xfrm>
+            <a:off x="822960" y="4160520"/>
+            <a:ext cx="10515600" cy="914400"/>
           </a:xfrm>
           <a:prstGeom prst="rect">
             <a:avLst/>
@@ -6269,24 +7498,47 @@
           </a:bodyPr>
           <a:lstStyle/>
           <a:p>
-            <a:pPr algn="r" rtl="1">
+            <a:pPr algn="l">
               <a:lnSpc>
-                <a:spcPct val="100000"/>
+                <a:spcPct val="130000"/>
               </a:lnSpc>
             </a:pPr>
             <a:r>
-              <a:rPr sz="5000" b="0">
-                <a:solidFill>
-                  <a:srgbClr val="104A43"/>
+              <a:rPr sz="2300" b="0" i="1">
+                <a:solidFill>
+                  <a:srgbClr val="C49A45"/>
                 </a:solidFill>
                 <a:latin typeface="Georgia"/>
-                <a:cs typeface="Jameel Noori Nastaleeq"/>
               </a:rPr>
-              <a:t>قرآن کی جمع</a:t>
-            </a:r>
-          </a:p>
-        </p:txBody>
-      </p:sp>
+              <a:t>644 to 661. When the trouble came from inside, not outside.</a:t>
+            </a:r>
+          </a:p>
+        </p:txBody>
+      </p:sp>
+      <p:pic>
+        <p:nvPicPr>
+          <p:cNvPr id="6" name="Picture 5" descr="line_s3.png"/>
+          <p:cNvPicPr>
+            <a:picLocks noChangeAspect="1"/>
+          </p:cNvPicPr>
+          <p:nvPr/>
+        </p:nvPicPr>
+        <p:blipFill>
+          <a:blip r:embed="rId2"/>
+          <a:stretch>
+            <a:fillRect/>
+          </a:stretch>
+        </p:blipFill>
+        <p:spPr>
+          <a:xfrm>
+            <a:off x="548640" y="6053328"/>
+            <a:ext cx="11091672" cy="1170788"/>
+          </a:xfrm>
+          <a:prstGeom prst="rect">
+            <a:avLst/>
+          </a:prstGeom>
+        </p:spPr>
+      </p:pic>
     </p:spTree>
   </p:cSld>
   <p:clrMapOvr>
@@ -6357,8 +7609,8 @@
         </p:nvSpPr>
         <p:spPr>
           <a:xfrm>
-            <a:off x="822960" y="457200"/>
-            <a:ext cx="7315200" cy="365760"/>
+            <a:off x="777240" y="420624"/>
+            <a:ext cx="8229600" cy="365760"/>
           </a:xfrm>
           <a:prstGeom prst="rect">
             <a:avLst/>
@@ -6377,14 +7629,13 @@
               </a:lnSpc>
             </a:pPr>
             <a:r>
-              <a:rPr sz="1200" b="1">
+              <a:rPr sz="1200" b="1" i="0">
                 <a:solidFill>
                   <a:srgbClr val="104A43"/>
                 </a:solidFill>
                 <a:latin typeface="Segoe UI"/>
-                <a:cs typeface="Jameel Noori Nastaleeq"/>
               </a:rPr>
-              <a:t>آج کی بات</a:t>
+              <a:t>SOURCES  ·  SHOW ONLY IF ASKED</a:t>
             </a:r>
           </a:p>
         </p:txBody>
@@ -6397,8 +7648,8 @@
         </p:nvSpPr>
         <p:spPr>
           <a:xfrm>
-            <a:off x="822960" y="1280160"/>
-            <a:ext cx="10515600" cy="731520"/>
+            <a:off x="822960" y="1645920"/>
+            <a:ext cx="10515600" cy="2926080"/>
           </a:xfrm>
           <a:prstGeom prst="rect">
             <a:avLst/>
@@ -6411,459 +7662,97 @@
           </a:bodyPr>
           <a:lstStyle/>
           <a:p>
-            <a:pPr algn="r" rtl="1">
-              <a:lnSpc>
-                <a:spcPct val="100000"/>
-              </a:lnSpc>
-            </a:pPr>
-            <a:r>
-              <a:rPr sz="2500" b="0">
-                <a:solidFill>
-                  <a:srgbClr val="104A43"/>
-                </a:solidFill>
-                <a:latin typeface="Georgia"/>
-                <a:cs typeface="Jameel Noori Nastaleeq"/>
-              </a:rPr>
-              <a:t>امام حسن بصریؒ اور امام قتادہؒ فرماتے ہیں</a:t>
-            </a:r>
-          </a:p>
-        </p:txBody>
-      </p:sp>
-      <p:sp>
-        <p:nvSpPr>
-          <p:cNvPr id="5" name="TextBox 4"/>
-          <p:cNvSpPr txBox="1"/>
-          <p:nvPr/>
-        </p:nvSpPr>
-        <p:spPr>
-          <a:xfrm>
-            <a:off x="640080" y="2194560"/>
-            <a:ext cx="10881360" cy="1097280"/>
-          </a:xfrm>
-          <a:prstGeom prst="rect">
-            <a:avLst/>
-          </a:prstGeom>
-          <a:noFill/>
-        </p:spPr>
-        <p:txBody>
-          <a:bodyPr wrap="square">
-            <a:spAutoFit/>
-          </a:bodyPr>
-          <a:lstStyle/>
-          <a:p>
-            <a:pPr algn="r" rtl="1">
-              <a:lnSpc>
-                <a:spcPct val="100000"/>
-              </a:lnSpc>
-            </a:pPr>
-            <a:r>
-              <a:rPr sz="3000" b="0">
-                <a:solidFill>
-                  <a:srgbClr val="0A322E"/>
-                </a:solidFill>
-                <a:latin typeface="Georgia"/>
-                <a:cs typeface="Traditional Arabic"/>
-              </a:rPr>
-              <a:t>﴿مَنْ يَرْتَدَّ مِنْكُمْ عَنْ دِينِهِ فَسَوْفَ يَأْتِي اللَّهُ بِقَوْمٍ يُحِبُّهُمْ وَيُحِبُّونَهُ﴾</a:t>
-            </a:r>
-          </a:p>
-        </p:txBody>
-      </p:sp>
-      <p:sp>
-        <p:nvSpPr>
-          <p:cNvPr id="6" name="TextBox 5"/>
-          <p:cNvSpPr txBox="1"/>
-          <p:nvPr/>
-        </p:nvSpPr>
-        <p:spPr>
-          <a:xfrm>
-            <a:off x="822960" y="3566160"/>
-            <a:ext cx="10515600" cy="1280160"/>
-          </a:xfrm>
-          <a:prstGeom prst="rect">
-            <a:avLst/>
-          </a:prstGeom>
-          <a:noFill/>
-        </p:spPr>
-        <p:txBody>
-          <a:bodyPr wrap="square">
-            <a:spAutoFit/>
-          </a:bodyPr>
-          <a:lstStyle/>
-          <a:p>
-            <a:pPr algn="r" rtl="1">
+            <a:pPr algn="l">
               <a:lnSpc>
                 <a:spcPct val="160000"/>
               </a:lnSpc>
             </a:pPr>
             <a:r>
-              <a:rPr sz="2400" b="0">
+              <a:rPr sz="2300" b="0" i="0">
                 <a:solidFill>
                   <a:srgbClr val="1C2321"/>
                 </a:solidFill>
                 <a:latin typeface="Georgia"/>
-                <a:cs typeface="Jameel Noori Nastaleeq"/>
               </a:rPr>
-              <a:t>اِس آیت میں مراد سیدنا ابوبکر ؓ اور اُن کے ساتھی ہیں —</a:t>
-            </a:r>
-          </a:p>
-          <a:p>
-            <a:pPr algn="r" rtl="1">
+              <a:t>al-Bidaya wa’l-Nihaya  —  Ibn Kathir</a:t>
+            </a:r>
+          </a:p>
+          <a:p>
+            <a:pPr algn="l">
               <a:lnSpc>
                 <a:spcPct val="160000"/>
               </a:lnSpc>
             </a:pPr>
             <a:r>
-              <a:rPr sz="2400" b="0">
+              <a:rPr sz="2300" b="0" i="0">
                 <a:solidFill>
                   <a:srgbClr val="1C2321"/>
                 </a:solidFill>
                 <a:latin typeface="Georgia"/>
-                <a:cs typeface="Jameel Noori Nastaleeq"/>
               </a:rPr>
-              <a:t>مرتدین اور مانعینِ زکوٰۃ سے اُن کے قتال میں</a:t>
-            </a:r>
-          </a:p>
-        </p:txBody>
-      </p:sp>
-      <p:sp>
-        <p:nvSpPr>
-          <p:cNvPr id="7" name="TextBox 6"/>
-          <p:cNvSpPr txBox="1"/>
-          <p:nvPr/>
-        </p:nvSpPr>
-        <p:spPr>
-          <a:xfrm>
-            <a:off x="822960" y="5120640"/>
-            <a:ext cx="10515600" cy="457200"/>
-          </a:xfrm>
-          <a:prstGeom prst="rect">
-            <a:avLst/>
-          </a:prstGeom>
-          <a:noFill/>
-        </p:spPr>
-        <p:txBody>
-          <a:bodyPr wrap="square">
-            <a:spAutoFit/>
-          </a:bodyPr>
-          <a:lstStyle/>
-          <a:p>
-            <a:pPr algn="r" rtl="1">
-              <a:lnSpc>
-                <a:spcPct val="100000"/>
-              </a:lnSpc>
-            </a:pPr>
-            <a:r>
-              <a:rPr sz="1500" b="0">
-                <a:solidFill>
-                  <a:srgbClr val="104A43"/>
-                </a:solidFill>
-                <a:latin typeface="Georgia"/>
-                <a:cs typeface="Jameel Noori Nastaleeq"/>
-              </a:rPr>
-              <a:t>المائدة ۵:۵۴  ·  البدایہ والنہایہ، ج۷ ص۱۹</a:t>
-            </a:r>
-          </a:p>
-        </p:txBody>
-      </p:sp>
-    </p:spTree>
-  </p:cSld>
-  <p:clrMapOvr>
-    <a:masterClrMapping/>
-  </p:clrMapOvr>
-</p:sld>
-</file>
-
-<file path=ppt/slides/slide18.xml><?xml version="1.0" encoding="utf-8"?>
-<p:sld xmlns:a="http://schemas.openxmlformats.org/drawingml/2006/main" xmlns:p="http://schemas.openxmlformats.org/presentationml/2006/main" xmlns:r="http://schemas.openxmlformats.org/officeDocument/2006/relationships">
-  <p:cSld>
-    <p:spTree>
-      <p:nvGrpSpPr>
-        <p:cNvPr id="1" name=""/>
-        <p:cNvGrpSpPr/>
-        <p:nvPr/>
-      </p:nvGrpSpPr>
-      <p:grpSpPr/>
-      <p:sp>
-        <p:nvSpPr>
-          <p:cNvPr id="2" name="Rectangle 1"/>
-          <p:cNvSpPr/>
-          <p:nvPr/>
-        </p:nvSpPr>
-        <p:spPr>
-          <a:xfrm>
-            <a:off x="0" y="0"/>
-            <a:ext cx="12191695" cy="6858000"/>
-          </a:xfrm>
-          <a:prstGeom prst="rect">
-            <a:avLst/>
-          </a:prstGeom>
-          <a:solidFill>
-            <a:srgbClr val="0A322E"/>
-          </a:solidFill>
-          <a:ln>
-            <a:noFill/>
-          </a:ln>
-          <a:effectLst/>
-        </p:spPr>
-        <p:style>
-          <a:lnRef idx="1">
-            <a:schemeClr val="accent1"/>
-          </a:lnRef>
-          <a:fillRef idx="3">
-            <a:schemeClr val="accent1"/>
-          </a:fillRef>
-          <a:effectRef idx="2">
-            <a:schemeClr val="accent1"/>
-          </a:effectRef>
-          <a:fontRef idx="minor">
-            <a:schemeClr val="lt1"/>
-          </a:fontRef>
-        </p:style>
-        <p:txBody>
-          <a:bodyPr rtlCol="0" anchor="ctr"/>
-          <a:lstStyle/>
-          <a:p>
-            <a:pPr algn="ctr"/>
-          </a:p>
-        </p:txBody>
-      </p:sp>
-      <p:sp>
-        <p:nvSpPr>
-          <p:cNvPr id="3" name="TextBox 2"/>
-          <p:cNvSpPr txBox="1"/>
-          <p:nvPr/>
-        </p:nvSpPr>
-        <p:spPr>
-          <a:xfrm>
-            <a:off x="822960" y="2194560"/>
-            <a:ext cx="10515600" cy="1188720"/>
-          </a:xfrm>
-          <a:prstGeom prst="rect">
-            <a:avLst/>
-          </a:prstGeom>
-          <a:noFill/>
-        </p:spPr>
-        <p:txBody>
-          <a:bodyPr wrap="square">
-            <a:spAutoFit/>
-          </a:bodyPr>
-          <a:lstStyle/>
-          <a:p>
-            <a:pPr algn="r" rtl="1">
+              <a:t>vol. 5 pp. 344–349  ·  vol. 7 pp. 17–27, 85–95, 132–140</a:t>
+            </a:r>
+          </a:p>
+          <a:p>
+            <a:pPr algn="l">
               <a:lnSpc>
                 <a:spcPct val="160000"/>
               </a:lnSpc>
             </a:pPr>
             <a:r>
-              <a:rPr sz="4800" b="0">
-                <a:solidFill>
-                  <a:srgbClr val="FAF7F0"/>
+              <a:rPr sz="2300" b="0" i="0">
+                <a:solidFill>
+                  <a:srgbClr val="1C2321"/>
                 </a:solidFill>
                 <a:latin typeface="Georgia"/>
-                <a:cs typeface="Jameel Noori Nastaleeq"/>
               </a:rPr>
-              <a:t>اگلے ہفتے — پہلا امتحان</a:t>
-            </a:r>
-          </a:p>
-        </p:txBody>
-      </p:sp>
-      <p:sp>
-        <p:nvSpPr>
-          <p:cNvPr id="4" name="TextBox 3"/>
-          <p:cNvSpPr txBox="1"/>
-          <p:nvPr/>
-        </p:nvSpPr>
-        <p:spPr>
-          <a:xfrm>
-            <a:off x="822960" y="3566160"/>
-            <a:ext cx="10515600" cy="731520"/>
-          </a:xfrm>
-          <a:prstGeom prst="rect">
-            <a:avLst/>
-          </a:prstGeom>
-          <a:noFill/>
-        </p:spPr>
-        <p:txBody>
-          <a:bodyPr wrap="square">
-            <a:spAutoFit/>
-          </a:bodyPr>
-          <a:lstStyle/>
-          <a:p>
-            <a:pPr algn="r" rtl="1">
+              <a:t/>
+            </a:r>
+          </a:p>
+          <a:p>
+            <a:pPr algn="l">
               <a:lnSpc>
-                <a:spcPct val="100000"/>
+                <a:spcPct val="160000"/>
               </a:lnSpc>
             </a:pPr>
             <a:r>
-              <a:rPr sz="2800" b="0">
-                <a:solidFill>
-                  <a:srgbClr val="C49A45"/>
+              <a:rPr sz="2300" b="0" i="0">
+                <a:solidFill>
+                  <a:srgbClr val="1C2321"/>
                 </a:solidFill>
                 <a:latin typeface="Georgia"/>
-                <a:cs typeface="Jameel Noori Nastaleeq"/>
               </a:rPr>
-              <a:t>۲۳ھ  ←  ۴۰ھ</a:t>
-            </a:r>
-          </a:p>
-        </p:txBody>
-      </p:sp>
-      <p:sp>
-        <p:nvSpPr>
-          <p:cNvPr id="5" name="Rectangle 4"/>
-          <p:cNvSpPr/>
-          <p:nvPr/>
-        </p:nvSpPr>
-        <p:spPr>
-          <a:xfrm>
-            <a:off x="822960" y="4572000"/>
-            <a:ext cx="10515600" cy="12700"/>
-          </a:xfrm>
-          <a:prstGeom prst="rect">
-            <a:avLst/>
-          </a:prstGeom>
-          <a:solidFill>
-            <a:srgbClr val="FAF7F0"/>
-          </a:solidFill>
-          <a:ln>
-            <a:noFill/>
-          </a:ln>
-          <a:effectLst/>
-        </p:spPr>
-        <p:style>
-          <a:lnRef idx="1">
-            <a:schemeClr val="accent1"/>
-          </a:lnRef>
-          <a:fillRef idx="3">
-            <a:schemeClr val="accent1"/>
-          </a:fillRef>
-          <a:effectRef idx="2">
-            <a:schemeClr val="accent1"/>
-          </a:effectRef>
-          <a:fontRef idx="minor">
-            <a:schemeClr val="lt1"/>
-          </a:fontRef>
-        </p:style>
-        <p:txBody>
-          <a:bodyPr rtlCol="0" anchor="ctr"/>
-          <a:lstStyle/>
-          <a:p>
-            <a:pPr algn="ctr"/>
-          </a:p>
-        </p:txBody>
-      </p:sp>
-      <p:sp>
-        <p:nvSpPr>
-          <p:cNvPr id="6" name="TextBox 5"/>
-          <p:cNvSpPr txBox="1"/>
-          <p:nvPr/>
-        </p:nvSpPr>
-        <p:spPr>
-          <a:xfrm>
-            <a:off x="822960" y="4846320"/>
-            <a:ext cx="10515600" cy="822960"/>
-          </a:xfrm>
-          <a:prstGeom prst="rect">
-            <a:avLst/>
-          </a:prstGeom>
-          <a:noFill/>
-        </p:spPr>
-        <p:txBody>
-          <a:bodyPr wrap="square">
-            <a:spAutoFit/>
-          </a:bodyPr>
-          <a:lstStyle/>
-          <a:p>
-            <a:pPr algn="r" rtl="1">
+              <a:t>Siyar A’lam al-Nubala  —  al-Dhahabi</a:t>
+            </a:r>
+          </a:p>
+          <a:p>
+            <a:pPr algn="l">
               <a:lnSpc>
-                <a:spcPct val="100000"/>
+                <a:spcPct val="160000"/>
               </a:lnSpc>
             </a:pPr>
             <a:r>
-              <a:rPr sz="2200" b="0">
-                <a:solidFill>
-                  <a:srgbClr val="C49A45"/>
+              <a:rPr sz="2300" b="0" i="0">
+                <a:solidFill>
+                  <a:srgbClr val="1C2321"/>
                 </a:solidFill>
                 <a:latin typeface="Georgia"/>
-                <a:cs typeface="Jameel Noori Nastaleeq"/>
               </a:rPr>
-              <a:t>ایک آدمی اکیلا کھڑا ہو، اور سب اُس کے خلاف مشورہ دے رہے ہوں — تو اُسے کیا چیز سنبھالتی ہے؟</a:t>
-            </a:r>
-          </a:p>
-        </p:txBody>
-      </p:sp>
-    </p:spTree>
-  </p:cSld>
-  <p:clrMapOvr>
-    <a:masterClrMapping/>
-  </p:clrMapOvr>
-</p:sld>
-</file>
-
-<file path=ppt/slides/slide19.xml><?xml version="1.0" encoding="utf-8"?>
-<p:sld xmlns:a="http://schemas.openxmlformats.org/drawingml/2006/main" xmlns:p="http://schemas.openxmlformats.org/presentationml/2006/main" xmlns:r="http://schemas.openxmlformats.org/officeDocument/2006/relationships">
-  <p:cSld>
-    <p:spTree>
-      <p:nvGrpSpPr>
-        <p:cNvPr id="1" name=""/>
-        <p:cNvGrpSpPr/>
-        <p:nvPr/>
-      </p:nvGrpSpPr>
-      <p:grpSpPr/>
-      <p:sp>
-        <p:nvSpPr>
-          <p:cNvPr id="2" name="Rectangle 1"/>
-          <p:cNvSpPr/>
-          <p:nvPr/>
-        </p:nvSpPr>
-        <p:spPr>
-          <a:xfrm>
-            <a:off x="0" y="0"/>
-            <a:ext cx="12191695" cy="6858000"/>
-          </a:xfrm>
-          <a:prstGeom prst="rect">
-            <a:avLst/>
-          </a:prstGeom>
-          <a:solidFill>
-            <a:srgbClr val="FAF7F0"/>
-          </a:solidFill>
-          <a:ln>
-            <a:noFill/>
-          </a:ln>
-          <a:effectLst/>
-        </p:spPr>
-        <p:style>
-          <a:lnRef idx="1">
-            <a:schemeClr val="accent1"/>
-          </a:lnRef>
-          <a:fillRef idx="3">
-            <a:schemeClr val="accent1"/>
-          </a:fillRef>
-          <a:effectRef idx="2">
-            <a:schemeClr val="accent1"/>
-          </a:effectRef>
-          <a:fontRef idx="minor">
-            <a:schemeClr val="lt1"/>
-          </a:fontRef>
-        </p:style>
-        <p:txBody>
-          <a:bodyPr rtlCol="0" anchor="ctr"/>
-          <a:lstStyle/>
-          <a:p>
-            <a:pPr algn="ctr"/>
-          </a:p>
-        </p:txBody>
-      </p:sp>
-      <p:sp>
-        <p:nvSpPr>
-          <p:cNvPr id="3" name="TextBox 2"/>
+              <a:t>Rashidun p. 8  ·  vol. 1 p. 6  ·  vol. 1 p. 366</a:t>
+            </a:r>
+          </a:p>
+        </p:txBody>
+      </p:sp>
+      <p:sp>
+        <p:nvSpPr>
+          <p:cNvPr id="5" name="TextBox 4"/>
           <p:cNvSpPr txBox="1"/>
           <p:nvPr/>
         </p:nvSpPr>
         <p:spPr>
           <a:xfrm>
-            <a:off x="822960" y="457200"/>
-            <a:ext cx="7315200" cy="365760"/>
+            <a:off x="822960" y="4846320"/>
+            <a:ext cx="10515600" cy="457200"/>
           </a:xfrm>
           <a:prstGeom prst="rect">
             <a:avLst/>
@@ -6882,122 +7771,13 @@
               </a:lnSpc>
             </a:pPr>
             <a:r>
-              <a:rPr sz="1200" b="1">
-                <a:solidFill>
-                  <a:srgbClr val="104A43"/>
-                </a:solidFill>
-                <a:latin typeface="Segoe UI"/>
-                <a:cs typeface="Jameel Noori Nastaleeq"/>
+              <a:rPr sz="1900" b="0" i="1">
+                <a:solidFill>
+                  <a:srgbClr val="7A2E2E"/>
+                </a:solidFill>
+                <a:latin typeface="Georgia"/>
               </a:rPr>
-              <a:t>SOURCES  ·  show only if asked</a:t>
-            </a:r>
-          </a:p>
-        </p:txBody>
-      </p:sp>
-      <p:sp>
-        <p:nvSpPr>
-          <p:cNvPr id="4" name="TextBox 3"/>
-          <p:cNvSpPr txBox="1"/>
-          <p:nvPr/>
-        </p:nvSpPr>
-        <p:spPr>
-          <a:xfrm>
-            <a:off x="822960" y="1828800"/>
-            <a:ext cx="10515600" cy="3108960"/>
-          </a:xfrm>
-          <a:prstGeom prst="rect">
-            <a:avLst/>
-          </a:prstGeom>
-          <a:noFill/>
-        </p:spPr>
-        <p:txBody>
-          <a:bodyPr wrap="square">
-            <a:spAutoFit/>
-          </a:bodyPr>
-          <a:lstStyle/>
-          <a:p>
-            <a:pPr algn="r" rtl="1">
-              <a:lnSpc>
-                <a:spcPct val="160000"/>
-              </a:lnSpc>
-            </a:pPr>
-            <a:r>
-              <a:rPr sz="2200" b="0">
-                <a:solidFill>
-                  <a:srgbClr val="1C2321"/>
-                </a:solidFill>
-                <a:latin typeface="Georgia"/>
-                <a:cs typeface="Jameel Noori Nastaleeq"/>
-              </a:rPr>
-              <a:t>البدایہ والنہایہ — ابن کثیر رحمہ اللہ</a:t>
-            </a:r>
-          </a:p>
-          <a:p>
-            <a:pPr algn="r" rtl="1">
-              <a:lnSpc>
-                <a:spcPct val="160000"/>
-              </a:lnSpc>
-            </a:pPr>
-            <a:r>
-              <a:rPr sz="2200" b="0">
-                <a:solidFill>
-                  <a:srgbClr val="1C2321"/>
-                </a:solidFill>
-                <a:latin typeface="Georgia"/>
-                <a:cs typeface="Jameel Noori Nastaleeq"/>
-              </a:rPr>
-              <a:t>ج۵ ص۳۴۴–۳۴۹ · ج۷ ص۱۷–۲۷ · ج۷ ص۸۵–۹۵ · ج۷ ص۱۳۲–۱۴۰</a:t>
-            </a:r>
-          </a:p>
-          <a:p>
-            <a:pPr algn="r" rtl="1">
-              <a:lnSpc>
-                <a:spcPct val="160000"/>
-              </a:lnSpc>
-            </a:pPr>
-            <a:r>
-              <a:rPr sz="2200" b="0">
-                <a:solidFill>
-                  <a:srgbClr val="1C2321"/>
-                </a:solidFill>
-                <a:latin typeface="Georgia"/>
-                <a:cs typeface="Jameel Noori Nastaleeq"/>
-              </a:rPr>
-              <a:t/>
-            </a:r>
-          </a:p>
-          <a:p>
-            <a:pPr algn="r" rtl="1">
-              <a:lnSpc>
-                <a:spcPct val="160000"/>
-              </a:lnSpc>
-            </a:pPr>
-            <a:r>
-              <a:rPr sz="2200" b="0">
-                <a:solidFill>
-                  <a:srgbClr val="1C2321"/>
-                </a:solidFill>
-                <a:latin typeface="Georgia"/>
-                <a:cs typeface="Jameel Noori Nastaleeq"/>
-              </a:rPr>
-              <a:t>سیر أعلام النبلاء — الذہبی رحمہ اللہ</a:t>
-            </a:r>
-          </a:p>
-          <a:p>
-            <a:pPr algn="r" rtl="1">
-              <a:lnSpc>
-                <a:spcPct val="160000"/>
-              </a:lnSpc>
-            </a:pPr>
-            <a:r>
-              <a:rPr sz="2200" b="0">
-                <a:solidFill>
-                  <a:srgbClr val="1C2321"/>
-                </a:solidFill>
-                <a:latin typeface="Georgia"/>
-                <a:cs typeface="Jameel Noori Nastaleeq"/>
-              </a:rPr>
-              <a:t>راشدون ص۸ · ج۱ ص۶ · ج۱ ص۳۶۶</a:t>
+              <a:t>Both works are named and recommended in the muqaddima of our own source.</a:t>
             </a:r>
           </a:p>
         </p:txBody>
@@ -7072,8 +7852,8 @@
         </p:nvSpPr>
         <p:spPr>
           <a:xfrm>
-            <a:off x="822960" y="2651760"/>
-            <a:ext cx="10515600" cy="1188720"/>
+            <a:off x="777240" y="420624"/>
+            <a:ext cx="8229600" cy="365760"/>
           </a:xfrm>
           <a:prstGeom prst="rect">
             <a:avLst/>
@@ -7086,20 +7866,97 @@
           </a:bodyPr>
           <a:lstStyle/>
           <a:p>
-            <a:pPr algn="r" rtl="1">
+            <a:pPr algn="l">
               <a:lnSpc>
                 <a:spcPct val="100000"/>
               </a:lnSpc>
             </a:pPr>
             <a:r>
-              <a:rPr sz="5400" b="0">
+              <a:rPr sz="1200" b="1" i="0">
                 <a:solidFill>
                   <a:srgbClr val="C49A45"/>
                 </a:solidFill>
+                <a:latin typeface="Segoe UI"/>
+              </a:rPr>
+              <a:t>632</a:t>
+            </a:r>
+          </a:p>
+        </p:txBody>
+      </p:sp>
+      <p:sp>
+        <p:nvSpPr>
+          <p:cNvPr id="4" name="TextBox 3"/>
+          <p:cNvSpPr txBox="1"/>
+          <p:nvPr/>
+        </p:nvSpPr>
+        <p:spPr>
+          <a:xfrm>
+            <a:off x="822960" y="1965960"/>
+            <a:ext cx="10515600" cy="2011680"/>
+          </a:xfrm>
+          <a:prstGeom prst="rect">
+            <a:avLst/>
+          </a:prstGeom>
+          <a:noFill/>
+        </p:spPr>
+        <p:txBody>
+          <a:bodyPr wrap="square" anchor="ctr">
+            <a:spAutoFit/>
+          </a:bodyPr>
+          <a:lstStyle/>
+          <a:p>
+            <a:pPr algn="l">
+              <a:lnSpc>
+                <a:spcPct val="120000"/>
+              </a:lnSpc>
+            </a:pPr>
+            <a:r>
+              <a:rPr sz="5200" b="0" i="0">
+                <a:solidFill>
+                  <a:srgbClr val="FAF7F0"/>
+                </a:solidFill>
                 <a:latin typeface="Georgia"/>
-                <a:cs typeface="Jameel Noori Nastaleeq"/>
               </a:rPr>
-              <a:t>مدینہ — پہرے پر</a:t>
+              <a:t>Madina is under armed guard at night.</a:t>
+            </a:r>
+          </a:p>
+        </p:txBody>
+      </p:sp>
+      <p:sp>
+        <p:nvSpPr>
+          <p:cNvPr id="5" name="TextBox 4"/>
+          <p:cNvSpPr txBox="1"/>
+          <p:nvPr/>
+        </p:nvSpPr>
+        <p:spPr>
+          <a:xfrm>
+            <a:off x="822960" y="4160520"/>
+            <a:ext cx="10515600" cy="914400"/>
+          </a:xfrm>
+          <a:prstGeom prst="rect">
+            <a:avLst/>
+          </a:prstGeom>
+          <a:noFill/>
+        </p:spPr>
+        <p:txBody>
+          <a:bodyPr wrap="square">
+            <a:spAutoFit/>
+          </a:bodyPr>
+          <a:lstStyle/>
+          <a:p>
+            <a:pPr algn="l">
+              <a:lnSpc>
+                <a:spcPct val="130000"/>
+              </a:lnSpc>
+            </a:pPr>
+            <a:r>
+              <a:rPr sz="2300" b="0" i="1">
+                <a:solidFill>
+                  <a:srgbClr val="C49A45"/>
+                </a:solidFill>
+                <a:latin typeface="Georgia"/>
+              </a:rPr>
+              <a:t>Weeks after the Prophet ﷺ died.</a:t>
             </a:r>
           </a:p>
         </p:txBody>
@@ -7174,8 +8031,8 @@
         </p:nvSpPr>
         <p:spPr>
           <a:xfrm>
-            <a:off x="822960" y="457200"/>
-            <a:ext cx="7315200" cy="365760"/>
+            <a:off x="777240" y="420624"/>
+            <a:ext cx="8229600" cy="365760"/>
           </a:xfrm>
           <a:prstGeom prst="rect">
             <a:avLst/>
@@ -7194,14 +8051,13 @@
               </a:lnSpc>
             </a:pPr>
             <a:r>
-              <a:rPr sz="1200" b="1">
+              <a:rPr sz="1200" b="1" i="0">
                 <a:solidFill>
                   <a:srgbClr val="104A43"/>
                 </a:solidFill>
                 <a:latin typeface="Segoe UI"/>
-                <a:cs typeface="Jameel Noori Nastaleeq"/>
               </a:rPr>
-              <a:t>۱۱ھ  ·  انکار</a:t>
+              <a:t>WHAT THEY ACTUALLY SAID</a:t>
             </a:r>
           </a:p>
         </p:txBody>
@@ -7214,8 +8070,8 @@
         </p:nvSpPr>
         <p:spPr>
           <a:xfrm>
-            <a:off x="822960" y="2286000"/>
-            <a:ext cx="10515600" cy="1188720"/>
+            <a:off x="777240" y="1371600"/>
+            <a:ext cx="10607040" cy="1005840"/>
           </a:xfrm>
           <a:prstGeom prst="rect">
             <a:avLst/>
@@ -7228,20 +8084,19 @@
           </a:bodyPr>
           <a:lstStyle/>
           <a:p>
-            <a:pPr algn="r" rtl="1">
+            <a:pPr algn="l">
               <a:lnSpc>
-                <a:spcPct val="160000"/>
+                <a:spcPct val="100000"/>
               </a:lnSpc>
             </a:pPr>
             <a:r>
-              <a:rPr sz="4800" b="0">
+              <a:rPr sz="4600" b="0" i="0">
                 <a:solidFill>
                   <a:srgbClr val="104A43"/>
                 </a:solidFill>
                 <a:latin typeface="Georgia"/>
-                <a:cs typeface="Jameel Noori Nastaleeq"/>
               </a:rPr>
-              <a:t>نماز ہاں — زکوٰۃ نہیں</a:t>
+              <a:t>“Prayer, yes. Zakat, no.”</a:t>
             </a:r>
           </a:p>
         </p:txBody>
@@ -7254,8 +8109,47 @@
         </p:nvSpPr>
         <p:spPr>
           <a:xfrm>
-            <a:off x="822960" y="3749039"/>
-            <a:ext cx="10515600" cy="822960"/>
+            <a:off x="777240" y="2514600"/>
+            <a:ext cx="10607040" cy="548640"/>
+          </a:xfrm>
+          <a:prstGeom prst="rect">
+            <a:avLst/>
+          </a:prstGeom>
+          <a:noFill/>
+        </p:spPr>
+        <p:txBody>
+          <a:bodyPr wrap="square">
+            <a:spAutoFit/>
+          </a:bodyPr>
+          <a:lstStyle/>
+          <a:p>
+            <a:pPr algn="l">
+              <a:lnSpc>
+                <a:spcPct val="100000"/>
+              </a:lnSpc>
+            </a:pPr>
+            <a:r>
+              <a:rPr sz="2100" b="0" i="1">
+                <a:solidFill>
+                  <a:srgbClr val="1C2321"/>
+                </a:solidFill>
+                <a:latin typeface="Georgia"/>
+              </a:rPr>
+              <a:t>Many of the tribes were not denying prayer. Some argued from the Qur’an itself —</a:t>
+            </a:r>
+          </a:p>
+        </p:txBody>
+      </p:sp>
+      <p:sp>
+        <p:nvSpPr>
+          <p:cNvPr id="6" name="TextBox 5"/>
+          <p:cNvSpPr txBox="1"/>
+          <p:nvPr/>
+        </p:nvSpPr>
+        <p:spPr>
+          <a:xfrm>
+            <a:off x="640080" y="3200400"/>
+            <a:ext cx="10881360" cy="822960"/>
           </a:xfrm>
           <a:prstGeom prst="rect">
             <a:avLst/>
@@ -7274,11 +8168,11 @@
               </a:lnSpc>
             </a:pPr>
             <a:r>
-              <a:rPr sz="2600" b="0">
+              <a:rPr sz="3000" b="0" i="0">
                 <a:solidFill>
                   <a:srgbClr val="0A322E"/>
                 </a:solidFill>
-                <a:latin typeface="Georgia"/>
+                <a:latin typeface="Traditional Arabic"/>
                 <a:cs typeface="Traditional Arabic"/>
               </a:rPr>
               <a:t>﴿خُذْ مِنْ أَمْوَالِهِمْ صَدَقَةً … وَصَلِّ عَلَيْهِمْ إِنَّ صَلَاتَكَ سَكَنٌ لَهُمْ﴾</a:t>
@@ -7288,14 +8182,14 @@
       </p:sp>
       <p:sp>
         <p:nvSpPr>
-          <p:cNvPr id="6" name="TextBox 5"/>
+          <p:cNvPr id="7" name="TextBox 6"/>
           <p:cNvSpPr txBox="1"/>
           <p:nvPr/>
         </p:nvSpPr>
         <p:spPr>
           <a:xfrm>
-            <a:off x="822960" y="4754880"/>
-            <a:ext cx="10515600" cy="457200"/>
+            <a:off x="777240" y="4114800"/>
+            <a:ext cx="10607040" cy="1005840"/>
           </a:xfrm>
           <a:prstGeom prst="rect">
             <a:avLst/>
@@ -7308,20 +8202,74 @@
           </a:bodyPr>
           <a:lstStyle/>
           <a:p>
-            <a:pPr algn="r" rtl="1">
+            <a:pPr algn="ctr">
+              <a:lnSpc>
+                <a:spcPct val="135000"/>
+              </a:lnSpc>
+            </a:pPr>
+            <a:r>
+              <a:rPr sz="2100" b="0" i="1">
+                <a:solidFill>
+                  <a:srgbClr val="1C2321"/>
+                </a:solidFill>
+                <a:latin typeface="Georgia"/>
+              </a:rPr>
+              <a:t>“…and pray for them; your prayer is a comfort for them.”</a:t>
+            </a:r>
+          </a:p>
+          <a:p>
+            <a:pPr algn="ctr">
+              <a:lnSpc>
+                <a:spcPct val="135000"/>
+              </a:lnSpc>
+            </a:pPr>
+            <a:r>
+              <a:rPr sz="2100" b="0" i="1">
+                <a:solidFill>
+                  <a:srgbClr val="1C2321"/>
+                </a:solidFill>
+                <a:latin typeface="Georgia"/>
+              </a:rPr>
+              <a:t>So, they said: we pay only to one whose prayer is a comfort for us.</a:t>
+            </a:r>
+          </a:p>
+        </p:txBody>
+      </p:sp>
+      <p:sp>
+        <p:nvSpPr>
+          <p:cNvPr id="8" name="TextBox 7"/>
+          <p:cNvSpPr txBox="1"/>
+          <p:nvPr/>
+        </p:nvSpPr>
+        <p:spPr>
+          <a:xfrm>
+            <a:off x="777240" y="5349240"/>
+            <a:ext cx="10607040" cy="365760"/>
+          </a:xfrm>
+          <a:prstGeom prst="rect">
+            <a:avLst/>
+          </a:prstGeom>
+          <a:noFill/>
+        </p:spPr>
+        <p:txBody>
+          <a:bodyPr wrap="square">
+            <a:spAutoFit/>
+          </a:bodyPr>
+          <a:lstStyle/>
+          <a:p>
+            <a:pPr algn="ctr">
               <a:lnSpc>
                 <a:spcPct val="100000"/>
               </a:lnSpc>
             </a:pPr>
             <a:r>
-              <a:rPr sz="1500" b="0">
+              <a:rPr sz="1300" b="0" i="0">
                 <a:solidFill>
                   <a:srgbClr val="104A43"/>
                 </a:solidFill>
-                <a:latin typeface="Georgia"/>
-                <a:cs typeface="Jameel Noori Nastaleeq"/>
+                <a:latin typeface="Segoe UI"/>
               </a:rPr>
-              <a:t>التوبة ۹:۱۰۳  ·  البدایہ والنہایہ، ج۷ ص۱۸</a:t>
+              <a:t>AL-TAWBA 9:103  ·  AL-BIDAYA WA'L-NIHAYA, vol. 7 p. 18</a:t>
             </a:r>
           </a:p>
         </p:txBody>
@@ -7396,8 +8344,8 @@
         </p:nvSpPr>
         <p:spPr>
           <a:xfrm>
-            <a:off x="822960" y="457200"/>
-            <a:ext cx="7315200" cy="365760"/>
+            <a:off x="777240" y="420624"/>
+            <a:ext cx="8229600" cy="365760"/>
           </a:xfrm>
           <a:prstGeom prst="rect">
             <a:avLst/>
@@ -7416,14 +8364,13 @@
               </a:lnSpc>
             </a:pPr>
             <a:r>
-              <a:rPr sz="1200" b="1">
+              <a:rPr sz="1200" b="1" i="0">
                 <a:solidFill>
                   <a:srgbClr val="104A43"/>
                 </a:solidFill>
                 <a:latin typeface="Segoe UI"/>
-                <a:cs typeface="Jameel Noori Nastaleeq"/>
               </a:rPr>
-              <a:t>اُس وقت کا ایک شعر</a:t>
+              <a:t>ONE LINE OPENS THE WHOLE PROBLEM</a:t>
             </a:r>
           </a:p>
         </p:txBody>
@@ -7436,8 +8383,8 @@
         </p:nvSpPr>
         <p:spPr>
           <a:xfrm>
-            <a:off x="640080" y="1737360"/>
-            <a:ext cx="10881360" cy="1737360"/>
+            <a:off x="640080" y="1325880"/>
+            <a:ext cx="10881360" cy="1554480"/>
           </a:xfrm>
           <a:prstGeom prst="rect">
             <a:avLst/>
@@ -7451,33 +8398,132 @@
           <a:lstStyle/>
           <a:p>
             <a:pPr algn="r" rtl="1">
+              <a:lnSpc>
+                <a:spcPct val="140000"/>
+              </a:lnSpc>
+            </a:pPr>
+            <a:r>
+              <a:rPr sz="3600" b="0" i="0">
+                <a:solidFill>
+                  <a:srgbClr val="0A322E"/>
+                </a:solidFill>
+                <a:latin typeface="Traditional Arabic"/>
+                <a:cs typeface="Traditional Arabic"/>
+              </a:rPr>
+              <a:t>أَطَعْنَا رَسُولَ اللهِ إِذْ كَانَ بَيْنَنَا … فَوَاعَجَبًا مَا بَالُ مُلْكِ أَبِي بَكْرِ</a:t>
+            </a:r>
+          </a:p>
+        </p:txBody>
+      </p:sp>
+      <p:sp>
+        <p:nvSpPr>
+          <p:cNvPr id="5" name="TextBox 4"/>
+          <p:cNvSpPr txBox="1"/>
+          <p:nvPr/>
+        </p:nvSpPr>
+        <p:spPr>
+          <a:xfrm>
+            <a:off x="1188720" y="3017520"/>
+            <a:ext cx="9784080" cy="1371600"/>
+          </a:xfrm>
+          <a:prstGeom prst="rect">
+            <a:avLst/>
+          </a:prstGeom>
+          <a:noFill/>
+        </p:spPr>
+        <p:txBody>
+          <a:bodyPr wrap="square">
+            <a:spAutoFit/>
+          </a:bodyPr>
+          <a:lstStyle/>
+          <a:p>
+            <a:pPr algn="ctr">
               <a:lnSpc>
                 <a:spcPct val="135000"/>
               </a:lnSpc>
             </a:pPr>
             <a:r>
-              <a:rPr sz="3400" b="0">
-                <a:solidFill>
-                  <a:srgbClr val="0A322E"/>
+              <a:rPr sz="2500" b="0" i="1">
+                <a:solidFill>
+                  <a:srgbClr val="1C2321"/>
                 </a:solidFill>
                 <a:latin typeface="Georgia"/>
-                <a:cs typeface="Traditional Arabic"/>
               </a:rPr>
-              <a:t>أَطَعْنَا رَسُولَ اللهِ إِذْ كَانَ بَيْنَنَا … فَوَاعَجَبًا مَا بَالُ مُلْكِ أَبِي بَكْرِ</a:t>
-            </a:r>
-          </a:p>
-        </p:txBody>
-      </p:sp>
-      <p:sp>
-        <p:nvSpPr>
-          <p:cNvPr id="5" name="TextBox 4"/>
+              <a:t>“We obeyed the Messenger of God while he was among us —</a:t>
+            </a:r>
+          </a:p>
+          <a:p>
+            <a:pPr algn="ctr">
+              <a:lnSpc>
+                <a:spcPct val="135000"/>
+              </a:lnSpc>
+            </a:pPr>
+            <a:r>
+              <a:rPr sz="2500" b="0" i="1">
+                <a:solidFill>
+                  <a:srgbClr val="1C2321"/>
+                </a:solidFill>
+                <a:latin typeface="Georgia"/>
+              </a:rPr>
+              <a:t>so what, we wonder, is this rule of Abu Bakr?”</a:t>
+            </a:r>
+          </a:p>
+        </p:txBody>
+      </p:sp>
+      <p:sp>
+        <p:nvSpPr>
+          <p:cNvPr id="6" name="Rectangle 5"/>
+          <p:cNvSpPr/>
+          <p:nvPr/>
+        </p:nvSpPr>
+        <p:spPr>
+          <a:xfrm>
+            <a:off x="5394960" y="4498848"/>
+            <a:ext cx="1371600" cy="19050"/>
+          </a:xfrm>
+          <a:prstGeom prst="rect">
+            <a:avLst/>
+          </a:prstGeom>
+          <a:solidFill>
+            <a:srgbClr val="C49A45"/>
+          </a:solidFill>
+          <a:ln>
+            <a:noFill/>
+          </a:ln>
+          <a:effectLst/>
+        </p:spPr>
+        <p:style>
+          <a:lnRef idx="1">
+            <a:schemeClr val="accent1"/>
+          </a:lnRef>
+          <a:fillRef idx="3">
+            <a:schemeClr val="accent1"/>
+          </a:fillRef>
+          <a:effectRef idx="2">
+            <a:schemeClr val="accent1"/>
+          </a:effectRef>
+          <a:fontRef idx="minor">
+            <a:schemeClr val="lt1"/>
+          </a:fontRef>
+        </p:style>
+        <p:txBody>
+          <a:bodyPr rtlCol="0" anchor="ctr"/>
+          <a:lstStyle/>
+          <a:p>
+            <a:pPr algn="ctr"/>
+          </a:p>
+        </p:txBody>
+      </p:sp>
+      <p:sp>
+        <p:nvSpPr>
+          <p:cNvPr id="7" name="TextBox 6"/>
           <p:cNvSpPr txBox="1"/>
           <p:nvPr/>
         </p:nvSpPr>
         <p:spPr>
           <a:xfrm>
-            <a:off x="640080" y="3657600"/>
-            <a:ext cx="10881360" cy="1371600"/>
+            <a:off x="640080" y="4663440"/>
+            <a:ext cx="10881360" cy="457200"/>
           </a:xfrm>
           <a:prstGeom prst="rect">
             <a:avLst/>
@@ -7490,60 +8536,19 @@
           </a:bodyPr>
           <a:lstStyle/>
           <a:p>
-            <a:pPr algn="r" rtl="1">
-              <a:lnSpc>
-                <a:spcPct val="150000"/>
-              </a:lnSpc>
-            </a:pPr>
-            <a:r>
-              <a:rPr sz="2300" b="0">
-                <a:solidFill>
-                  <a:srgbClr val="1C2321"/>
-                </a:solidFill>
-                <a:latin typeface="Georgia"/>
-                <a:cs typeface="Jameel Noori Nastaleeq"/>
-              </a:rPr>
-              <a:t>ہم نے رسول اللہ ﷺ کی اطاعت کی جب وہ ہمارے درمیان تھے — تو اب یہ ابوبکر کی حکومت کیسی؟</a:t>
-            </a:r>
-          </a:p>
-        </p:txBody>
-      </p:sp>
-      <p:sp>
-        <p:nvSpPr>
-          <p:cNvPr id="6" name="TextBox 5"/>
-          <p:cNvSpPr txBox="1"/>
-          <p:nvPr/>
-        </p:nvSpPr>
-        <p:spPr>
-          <a:xfrm>
-            <a:off x="640080" y="5394960"/>
-            <a:ext cx="10881360" cy="457200"/>
-          </a:xfrm>
-          <a:prstGeom prst="rect">
-            <a:avLst/>
-          </a:prstGeom>
-          <a:noFill/>
-        </p:spPr>
-        <p:txBody>
-          <a:bodyPr wrap="square">
-            <a:spAutoFit/>
-          </a:bodyPr>
-          <a:lstStyle/>
-          <a:p>
-            <a:pPr algn="r" rtl="1">
+            <a:pPr algn="ctr">
               <a:lnSpc>
                 <a:spcPct val="100000"/>
               </a:lnSpc>
             </a:pPr>
             <a:r>
-              <a:rPr sz="1500" b="0">
+              <a:rPr sz="1400" b="0" i="0">
                 <a:solidFill>
                   <a:srgbClr val="104A43"/>
                 </a:solidFill>
-                <a:latin typeface="Georgia"/>
-                <a:cs typeface="Jameel Noori Nastaleeq"/>
+                <a:latin typeface="Segoe UI"/>
               </a:rPr>
-              <a:t>البدایہ والنہایہ، ج۷ ص۱۸</a:t>
+              <a:t>A VERSE FROM THE TIME  ·  AL-BIDAYA WA'L-NIHAYA, vol. 7 p. 18</a:t>
             </a:r>
           </a:p>
         </p:txBody>
@@ -7618,8 +8623,8 @@
         </p:nvSpPr>
         <p:spPr>
           <a:xfrm>
-            <a:off x="822960" y="457200"/>
-            <a:ext cx="7315200" cy="365760"/>
+            <a:off x="777240" y="420624"/>
+            <a:ext cx="8229600" cy="365760"/>
           </a:xfrm>
           <a:prstGeom prst="rect">
             <a:avLst/>
@@ -7638,14 +8643,13 @@
               </a:lnSpc>
             </a:pPr>
             <a:r>
-              <a:rPr sz="1200" b="1">
+              <a:rPr sz="1200" b="1" i="0">
                 <a:solidFill>
                   <a:srgbClr val="104A43"/>
                 </a:solidFill>
                 <a:latin typeface="Segoe UI"/>
-                <a:cs typeface="Jameel Noori Nastaleeq"/>
               </a:rPr>
-              <a:t>فیصلہ  ·  ۱ / ۳</a:t>
+              <a:t>THE DECISION  ·  1 OF 3</a:t>
             </a:r>
           </a:p>
         </p:txBody>
@@ -7658,8 +8662,8 @@
         </p:nvSpPr>
         <p:spPr>
           <a:xfrm>
-            <a:off x="640080" y="1737360"/>
-            <a:ext cx="10881360" cy="1737360"/>
+            <a:off x="640080" y="1325880"/>
+            <a:ext cx="10881360" cy="1554480"/>
           </a:xfrm>
           <a:prstGeom prst="rect">
             <a:avLst/>
@@ -7673,50 +8677,132 @@
           <a:lstStyle/>
           <a:p>
             <a:pPr algn="r" rtl="1">
+              <a:lnSpc>
+                <a:spcPct val="140000"/>
+              </a:lnSpc>
+            </a:pPr>
+            <a:r>
+              <a:rPr sz="3600" b="0" i="0">
+                <a:solidFill>
+                  <a:srgbClr val="0A322E"/>
+                </a:solidFill>
+                <a:latin typeface="Traditional Arabic"/>
+                <a:cs typeface="Traditional Arabic"/>
+              </a:rPr>
+              <a:t>عَلَامَ تُقَاتِلُ النَّاسَ؟</a:t>
+            </a:r>
+          </a:p>
+        </p:txBody>
+      </p:sp>
+      <p:sp>
+        <p:nvSpPr>
+          <p:cNvPr id="5" name="TextBox 4"/>
+          <p:cNvSpPr txBox="1"/>
+          <p:nvPr/>
+        </p:nvSpPr>
+        <p:spPr>
+          <a:xfrm>
+            <a:off x="1188720" y="3017520"/>
+            <a:ext cx="9784080" cy="1371600"/>
+          </a:xfrm>
+          <a:prstGeom prst="rect">
+            <a:avLst/>
+          </a:prstGeom>
+          <a:noFill/>
+        </p:spPr>
+        <p:txBody>
+          <a:bodyPr wrap="square">
+            <a:spAutoFit/>
+          </a:bodyPr>
+          <a:lstStyle/>
+          <a:p>
+            <a:pPr algn="ctr">
               <a:lnSpc>
                 <a:spcPct val="135000"/>
               </a:lnSpc>
             </a:pPr>
             <a:r>
-              <a:rPr sz="3400" b="0">
-                <a:solidFill>
-                  <a:srgbClr val="0A322E"/>
+              <a:rPr sz="2500" b="0" i="1">
+                <a:solidFill>
+                  <a:srgbClr val="1C2321"/>
                 </a:solidFill>
                 <a:latin typeface="Georgia"/>
-                <a:cs typeface="Traditional Arabic"/>
               </a:rPr>
-              <a:t>عَلَامَ تُقَاتِلُ النَّاسَ؟ وَقَدْ قَالَ رَسُولُ اللهِ ﷺ:</a:t>
-            </a:r>
-          </a:p>
-          <a:p>
-            <a:pPr algn="r" rtl="1">
+              <a:t>“On what basis are you fighting these people?”</a:t>
+            </a:r>
+          </a:p>
+          <a:p>
+            <a:pPr algn="ctr">
               <a:lnSpc>
                 <a:spcPct val="135000"/>
               </a:lnSpc>
             </a:pPr>
             <a:r>
-              <a:rPr sz="3400" b="0">
-                <a:solidFill>
-                  <a:srgbClr val="0A322E"/>
+              <a:rPr sz="2500" b="0" i="1">
+                <a:solidFill>
+                  <a:srgbClr val="1C2321"/>
                 </a:solidFill>
                 <a:latin typeface="Georgia"/>
-                <a:cs typeface="Traditional Arabic"/>
               </a:rPr>
-              <a:t>«أُمِرْتُ أَنْ أُقَاتِلَ النَّاسَ حَتَّى يَشْهَدُوا أَنْ لَا إِلَهَ إِلَّا اللهُ»</a:t>
-            </a:r>
-          </a:p>
-        </p:txBody>
-      </p:sp>
-      <p:sp>
-        <p:nvSpPr>
-          <p:cNvPr id="5" name="TextBox 4"/>
+              <a:t>The Prophet ﷺ said to fight until they testify there is no god but God…</a:t>
+            </a:r>
+          </a:p>
+        </p:txBody>
+      </p:sp>
+      <p:sp>
+        <p:nvSpPr>
+          <p:cNvPr id="6" name="Rectangle 5"/>
+          <p:cNvSpPr/>
+          <p:nvPr/>
+        </p:nvSpPr>
+        <p:spPr>
+          <a:xfrm>
+            <a:off x="5394960" y="4498848"/>
+            <a:ext cx="1371600" cy="19050"/>
+          </a:xfrm>
+          <a:prstGeom prst="rect">
+            <a:avLst/>
+          </a:prstGeom>
+          <a:solidFill>
+            <a:srgbClr val="C49A45"/>
+          </a:solidFill>
+          <a:ln>
+            <a:noFill/>
+          </a:ln>
+          <a:effectLst/>
+        </p:spPr>
+        <p:style>
+          <a:lnRef idx="1">
+            <a:schemeClr val="accent1"/>
+          </a:lnRef>
+          <a:fillRef idx="3">
+            <a:schemeClr val="accent1"/>
+          </a:fillRef>
+          <a:effectRef idx="2">
+            <a:schemeClr val="accent1"/>
+          </a:effectRef>
+          <a:fontRef idx="minor">
+            <a:schemeClr val="lt1"/>
+          </a:fontRef>
+        </p:style>
+        <p:txBody>
+          <a:bodyPr rtlCol="0" anchor="ctr"/>
+          <a:lstStyle/>
+          <a:p>
+            <a:pPr algn="ctr"/>
+          </a:p>
+        </p:txBody>
+      </p:sp>
+      <p:sp>
+        <p:nvSpPr>
+          <p:cNvPr id="7" name="TextBox 6"/>
           <p:cNvSpPr txBox="1"/>
           <p:nvPr/>
         </p:nvSpPr>
         <p:spPr>
           <a:xfrm>
-            <a:off x="640080" y="3657600"/>
-            <a:ext cx="10881360" cy="1371600"/>
+            <a:off x="640080" y="4663440"/>
+            <a:ext cx="10881360" cy="457200"/>
           </a:xfrm>
           <a:prstGeom prst="rect">
             <a:avLst/>
@@ -7729,60 +8815,19 @@
           </a:bodyPr>
           <a:lstStyle/>
           <a:p>
-            <a:pPr algn="r" rtl="1">
-              <a:lnSpc>
-                <a:spcPct val="150000"/>
-              </a:lnSpc>
-            </a:pPr>
-            <a:r>
-              <a:rPr sz="2300" b="0">
-                <a:solidFill>
-                  <a:srgbClr val="1C2321"/>
-                </a:solidFill>
-                <a:latin typeface="Georgia"/>
-                <a:cs typeface="Jameel Noori Nastaleeq"/>
-              </a:rPr>
-              <a:t>آپ لوگوں سے کس بنیاد پر لڑ رہے ہیں؟ نبی ﷺ نے تو فرمایا تھا…</a:t>
-            </a:r>
-          </a:p>
-        </p:txBody>
-      </p:sp>
-      <p:sp>
-        <p:nvSpPr>
-          <p:cNvPr id="6" name="TextBox 5"/>
-          <p:cNvSpPr txBox="1"/>
-          <p:nvPr/>
-        </p:nvSpPr>
-        <p:spPr>
-          <a:xfrm>
-            <a:off x="640080" y="5394960"/>
-            <a:ext cx="10881360" cy="457200"/>
-          </a:xfrm>
-          <a:prstGeom prst="rect">
-            <a:avLst/>
-          </a:prstGeom>
-          <a:noFill/>
-        </p:spPr>
-        <p:txBody>
-          <a:bodyPr wrap="square">
-            <a:spAutoFit/>
-          </a:bodyPr>
-          <a:lstStyle/>
-          <a:p>
-            <a:pPr algn="r" rtl="1">
+            <a:pPr algn="ctr">
               <a:lnSpc>
                 <a:spcPct val="100000"/>
               </a:lnSpc>
             </a:pPr>
             <a:r>
-              <a:rPr sz="1500" b="0">
+              <a:rPr sz="1400" b="0" i="0">
                 <a:solidFill>
                   <a:srgbClr val="104A43"/>
                 </a:solidFill>
-                <a:latin typeface="Georgia"/>
-                <a:cs typeface="Jameel Noori Nastaleeq"/>
+                <a:latin typeface="Segoe UI"/>
               </a:rPr>
-              <a:t>سیدنا عمر بن الخطاب ؓ  ·  البدایہ والنہایہ، ج۷ ص۱۸</a:t>
+              <a:t>UMAR IBN AL-KHATTAB  ·  AL-BIDAYA WA'L-NIHAYA, vol. 7 p. 18</a:t>
             </a:r>
           </a:p>
         </p:txBody>
@@ -7857,8 +8902,8 @@
         </p:nvSpPr>
         <p:spPr>
           <a:xfrm>
-            <a:off x="822960" y="457200"/>
-            <a:ext cx="7315200" cy="365760"/>
+            <a:off x="777240" y="420624"/>
+            <a:ext cx="8229600" cy="365760"/>
           </a:xfrm>
           <a:prstGeom prst="rect">
             <a:avLst/>
@@ -7877,14 +8922,13 @@
               </a:lnSpc>
             </a:pPr>
             <a:r>
-              <a:rPr sz="1200" b="1">
+              <a:rPr sz="1200" b="1" i="0">
                 <a:solidFill>
                   <a:srgbClr val="104A43"/>
                 </a:solidFill>
                 <a:latin typeface="Segoe UI"/>
-                <a:cs typeface="Jameel Noori Nastaleeq"/>
               </a:rPr>
-              <a:t>فیصلہ  ·  ۲ / ۳</a:t>
+              <a:t>THE DECISION  ·  2 OF 3</a:t>
             </a:r>
           </a:p>
         </p:txBody>
@@ -7897,8 +8941,8 @@
         </p:nvSpPr>
         <p:spPr>
           <a:xfrm>
-            <a:off x="640080" y="1737360"/>
-            <a:ext cx="10881360" cy="1737360"/>
+            <a:off x="640080" y="1325880"/>
+            <a:ext cx="10881360" cy="1554480"/>
           </a:xfrm>
           <a:prstGeom prst="rect">
             <a:avLst/>
@@ -7912,50 +8956,132 @@
           <a:lstStyle/>
           <a:p>
             <a:pPr algn="r" rtl="1">
+              <a:lnSpc>
+                <a:spcPct val="140000"/>
+              </a:lnSpc>
+            </a:pPr>
+            <a:r>
+              <a:rPr sz="3600" b="0" i="0">
+                <a:solidFill>
+                  <a:srgbClr val="0A322E"/>
+                </a:solidFill>
+                <a:latin typeface="Traditional Arabic"/>
+                <a:cs typeface="Traditional Arabic"/>
+              </a:rPr>
+              <a:t>وَاللهِ لَأُقَاتِلَنَّ مَنْ فَرَّقَ بَيْنَ الصَّلَاةِ وَالزَّكَاةِ</a:t>
+            </a:r>
+          </a:p>
+        </p:txBody>
+      </p:sp>
+      <p:sp>
+        <p:nvSpPr>
+          <p:cNvPr id="5" name="TextBox 4"/>
+          <p:cNvSpPr txBox="1"/>
+          <p:nvPr/>
+        </p:nvSpPr>
+        <p:spPr>
+          <a:xfrm>
+            <a:off x="1188720" y="3017520"/>
+            <a:ext cx="9784080" cy="1371600"/>
+          </a:xfrm>
+          <a:prstGeom prst="rect">
+            <a:avLst/>
+          </a:prstGeom>
+          <a:noFill/>
+        </p:spPr>
+        <p:txBody>
+          <a:bodyPr wrap="square">
+            <a:spAutoFit/>
+          </a:bodyPr>
+          <a:lstStyle/>
+          <a:p>
+            <a:pPr algn="ctr">
               <a:lnSpc>
                 <a:spcPct val="135000"/>
               </a:lnSpc>
             </a:pPr>
             <a:r>
-              <a:rPr sz="3400" b="0">
-                <a:solidFill>
-                  <a:srgbClr val="0A322E"/>
+              <a:rPr sz="2500" b="0" i="1">
+                <a:solidFill>
+                  <a:srgbClr val="1C2321"/>
                 </a:solidFill>
                 <a:latin typeface="Georgia"/>
-                <a:cs typeface="Traditional Arabic"/>
               </a:rPr>
-              <a:t>وَاللهِ لَوْ مَنَعُونِي عَنَاقًا كَانُوا يُؤَدُّونَهُ إِلَى رَسُولِ اللهِ ﷺ لَأُقَاتِلَنَّهُمْ عَلَى مَنْعِهَا</a:t>
-            </a:r>
-          </a:p>
-          <a:p>
-            <a:pPr algn="r" rtl="1">
+              <a:t>“By God, I will fight whoever separates prayer from zakat.”</a:t>
+            </a:r>
+          </a:p>
+          <a:p>
+            <a:pPr algn="ctr">
               <a:lnSpc>
                 <a:spcPct val="135000"/>
               </a:lnSpc>
             </a:pPr>
             <a:r>
-              <a:rPr sz="3400" b="0">
-                <a:solidFill>
-                  <a:srgbClr val="0A322E"/>
+              <a:rPr sz="2500" b="0" i="1">
+                <a:solidFill>
+                  <a:srgbClr val="1C2321"/>
                 </a:solidFill>
                 <a:latin typeface="Georgia"/>
-                <a:cs typeface="Traditional Arabic"/>
               </a:rPr>
-              <a:t>وَاللهِ لَأُقَاتِلَنَّ مَنْ فَرَّقَ بَيْنَ الصَّلَاةِ وَالزَّكَاةِ</a:t>
-            </a:r>
-          </a:p>
-        </p:txBody>
-      </p:sp>
-      <p:sp>
-        <p:nvSpPr>
-          <p:cNvPr id="5" name="TextBox 4"/>
+              <a:t>Even if they withheld from me a kid goat they used to give the Messenger ﷺ.</a:t>
+            </a:r>
+          </a:p>
+        </p:txBody>
+      </p:sp>
+      <p:sp>
+        <p:nvSpPr>
+          <p:cNvPr id="6" name="Rectangle 5"/>
+          <p:cNvSpPr/>
+          <p:nvPr/>
+        </p:nvSpPr>
+        <p:spPr>
+          <a:xfrm>
+            <a:off x="5394960" y="4498848"/>
+            <a:ext cx="1371600" cy="19050"/>
+          </a:xfrm>
+          <a:prstGeom prst="rect">
+            <a:avLst/>
+          </a:prstGeom>
+          <a:solidFill>
+            <a:srgbClr val="C49A45"/>
+          </a:solidFill>
+          <a:ln>
+            <a:noFill/>
+          </a:ln>
+          <a:effectLst/>
+        </p:spPr>
+        <p:style>
+          <a:lnRef idx="1">
+            <a:schemeClr val="accent1"/>
+          </a:lnRef>
+          <a:fillRef idx="3">
+            <a:schemeClr val="accent1"/>
+          </a:fillRef>
+          <a:effectRef idx="2">
+            <a:schemeClr val="accent1"/>
+          </a:effectRef>
+          <a:fontRef idx="minor">
+            <a:schemeClr val="lt1"/>
+          </a:fontRef>
+        </p:style>
+        <p:txBody>
+          <a:bodyPr rtlCol="0" anchor="ctr"/>
+          <a:lstStyle/>
+          <a:p>
+            <a:pPr algn="ctr"/>
+          </a:p>
+        </p:txBody>
+      </p:sp>
+      <p:sp>
+        <p:nvSpPr>
+          <p:cNvPr id="7" name="TextBox 6"/>
           <p:cNvSpPr txBox="1"/>
           <p:nvPr/>
         </p:nvSpPr>
         <p:spPr>
           <a:xfrm>
-            <a:off x="640080" y="3657600"/>
-            <a:ext cx="10881360" cy="1371600"/>
+            <a:off x="640080" y="4663440"/>
+            <a:ext cx="10881360" cy="457200"/>
           </a:xfrm>
           <a:prstGeom prst="rect">
             <a:avLst/>
@@ -7968,77 +9094,19 @@
           </a:bodyPr>
           <a:lstStyle/>
           <a:p>
-            <a:pPr algn="r" rtl="1">
-              <a:lnSpc>
-                <a:spcPct val="150000"/>
-              </a:lnSpc>
-            </a:pPr>
-            <a:r>
-              <a:rPr sz="2300" b="0">
-                <a:solidFill>
-                  <a:srgbClr val="1C2321"/>
-                </a:solidFill>
-                <a:latin typeface="Georgia"/>
-                <a:cs typeface="Jameel Noori Nastaleeq"/>
-              </a:rPr>
-              <a:t>اللہ کی قسم! اگر یہ مجھ سے ایک بکری کا بچہ بھی روکیں گے جو وہ رسول اللہ ﷺ کو دیتے تھے، تو میں اُن سے لڑوں گا۔</a:t>
-            </a:r>
-          </a:p>
-          <a:p>
-            <a:pPr algn="r" rtl="1">
-              <a:lnSpc>
-                <a:spcPct val="150000"/>
-              </a:lnSpc>
-            </a:pPr>
-            <a:r>
-              <a:rPr sz="2300" b="0">
-                <a:solidFill>
-                  <a:srgbClr val="1C2321"/>
-                </a:solidFill>
-                <a:latin typeface="Georgia"/>
-                <a:cs typeface="Jameel Noori Nastaleeq"/>
-              </a:rPr>
-              <a:t>اللہ کی قسم، جو نماز اور زکوٰۃ میں فرق کرے گا، میں اُس سے لڑوں گا۔</a:t>
-            </a:r>
-          </a:p>
-        </p:txBody>
-      </p:sp>
-      <p:sp>
-        <p:nvSpPr>
-          <p:cNvPr id="6" name="TextBox 5"/>
-          <p:cNvSpPr txBox="1"/>
-          <p:nvPr/>
-        </p:nvSpPr>
-        <p:spPr>
-          <a:xfrm>
-            <a:off x="640080" y="5394960"/>
-            <a:ext cx="10881360" cy="457200"/>
-          </a:xfrm>
-          <a:prstGeom prst="rect">
-            <a:avLst/>
-          </a:prstGeom>
-          <a:noFill/>
-        </p:spPr>
-        <p:txBody>
-          <a:bodyPr wrap="square">
-            <a:spAutoFit/>
-          </a:bodyPr>
-          <a:lstStyle/>
-          <a:p>
-            <a:pPr algn="r" rtl="1">
+            <a:pPr algn="ctr">
               <a:lnSpc>
                 <a:spcPct val="100000"/>
               </a:lnSpc>
             </a:pPr>
             <a:r>
-              <a:rPr sz="1500" b="0">
+              <a:rPr sz="1400" b="0" i="0">
                 <a:solidFill>
                   <a:srgbClr val="104A43"/>
                 </a:solidFill>
-                <a:latin typeface="Georgia"/>
-                <a:cs typeface="Jameel Noori Nastaleeq"/>
+                <a:latin typeface="Segoe UI"/>
               </a:rPr>
-              <a:t>سیدنا ابوبکر الصدیق ؓ  ·  البدایہ والنہایہ، ج۷ ص۱۸  ·  رواہ الجماعۃ سوی ابن ماجہ</a:t>
+              <a:t>ABU BAKR AL-SIDDIQ  ·  AL-BIDAYA vol. 7 p. 18  ·  narrated by the collections except Ibn Majah</a:t>
             </a:r>
           </a:p>
         </p:txBody>
@@ -8113,8 +9181,8 @@
         </p:nvSpPr>
         <p:spPr>
           <a:xfrm>
-            <a:off x="822960" y="457200"/>
-            <a:ext cx="7315200" cy="365760"/>
+            <a:off x="777240" y="420624"/>
+            <a:ext cx="8229600" cy="365760"/>
           </a:xfrm>
           <a:prstGeom prst="rect">
             <a:avLst/>
@@ -8133,14 +9201,13 @@
               </a:lnSpc>
             </a:pPr>
             <a:r>
-              <a:rPr sz="1200" b="1">
+              <a:rPr sz="1200" b="1" i="0">
                 <a:solidFill>
                   <a:srgbClr val="104A43"/>
                 </a:solidFill>
                 <a:latin typeface="Segoe UI"/>
-                <a:cs typeface="Jameel Noori Nastaleeq"/>
               </a:rPr>
-              <a:t>فیصلہ  ·  ۳ / ۳</a:t>
+              <a:t>THE DECISION  ·  3 OF 3</a:t>
             </a:r>
           </a:p>
         </p:txBody>
@@ -8153,8 +9220,8 @@
         </p:nvSpPr>
         <p:spPr>
           <a:xfrm>
-            <a:off x="640080" y="1737360"/>
-            <a:ext cx="10881360" cy="1737360"/>
+            <a:off x="640080" y="1325880"/>
+            <a:ext cx="10881360" cy="1554480"/>
           </a:xfrm>
           <a:prstGeom prst="rect">
             <a:avLst/>
@@ -8168,33 +9235,132 @@
           <a:lstStyle/>
           <a:p>
             <a:pPr algn="r" rtl="1">
+              <a:lnSpc>
+                <a:spcPct val="140000"/>
+              </a:lnSpc>
+            </a:pPr>
+            <a:r>
+              <a:rPr sz="3600" b="0" i="0">
+                <a:solidFill>
+                  <a:srgbClr val="0A322E"/>
+                </a:solidFill>
+                <a:latin typeface="Traditional Arabic"/>
+                <a:cs typeface="Traditional Arabic"/>
+              </a:rPr>
+              <a:t>فَعَرَفْتُ أَنَّهُ الْحَقُّ</a:t>
+            </a:r>
+          </a:p>
+        </p:txBody>
+      </p:sp>
+      <p:sp>
+        <p:nvSpPr>
+          <p:cNvPr id="5" name="TextBox 4"/>
+          <p:cNvSpPr txBox="1"/>
+          <p:nvPr/>
+        </p:nvSpPr>
+        <p:spPr>
+          <a:xfrm>
+            <a:off x="1188720" y="3017520"/>
+            <a:ext cx="9784080" cy="1371600"/>
+          </a:xfrm>
+          <a:prstGeom prst="rect">
+            <a:avLst/>
+          </a:prstGeom>
+          <a:noFill/>
+        </p:spPr>
+        <p:txBody>
+          <a:bodyPr wrap="square">
+            <a:spAutoFit/>
+          </a:bodyPr>
+          <a:lstStyle/>
+          <a:p>
+            <a:pPr algn="ctr">
               <a:lnSpc>
                 <a:spcPct val="135000"/>
               </a:lnSpc>
             </a:pPr>
             <a:r>
-              <a:rPr sz="3400" b="0">
-                <a:solidFill>
-                  <a:srgbClr val="0A322E"/>
+              <a:rPr sz="2500" b="0" i="1">
+                <a:solidFill>
+                  <a:srgbClr val="1C2321"/>
                 </a:solidFill>
                 <a:latin typeface="Georgia"/>
-                <a:cs typeface="Traditional Arabic"/>
               </a:rPr>
-              <a:t>فَمَا هُوَ إِلَّا أَنْ رَأَيْتُ اللهَ قَدْ شَرَحَ صَدْرَ أَبِي بَكْرٍ لِلْقِتَالِ، فَعَرَفْتُ أَنَّهُ الْحَقُّ</a:t>
-            </a:r>
-          </a:p>
-        </p:txBody>
-      </p:sp>
-      <p:sp>
-        <p:nvSpPr>
-          <p:cNvPr id="5" name="TextBox 4"/>
+              <a:t>“When I saw that God had opened Abu Bakr’s heart to this,</a:t>
+            </a:r>
+          </a:p>
+          <a:p>
+            <a:pPr algn="ctr">
+              <a:lnSpc>
+                <a:spcPct val="135000"/>
+              </a:lnSpc>
+            </a:pPr>
+            <a:r>
+              <a:rPr sz="2500" b="0" i="1">
+                <a:solidFill>
+                  <a:srgbClr val="1C2321"/>
+                </a:solidFill>
+                <a:latin typeface="Georgia"/>
+              </a:rPr>
+              <a:t>I knew that it was the truth.”</a:t>
+            </a:r>
+          </a:p>
+        </p:txBody>
+      </p:sp>
+      <p:sp>
+        <p:nvSpPr>
+          <p:cNvPr id="6" name="Rectangle 5"/>
+          <p:cNvSpPr/>
+          <p:nvPr/>
+        </p:nvSpPr>
+        <p:spPr>
+          <a:xfrm>
+            <a:off x="5394960" y="4498848"/>
+            <a:ext cx="1371600" cy="19050"/>
+          </a:xfrm>
+          <a:prstGeom prst="rect">
+            <a:avLst/>
+          </a:prstGeom>
+          <a:solidFill>
+            <a:srgbClr val="C49A45"/>
+          </a:solidFill>
+          <a:ln>
+            <a:noFill/>
+          </a:ln>
+          <a:effectLst/>
+        </p:spPr>
+        <p:style>
+          <a:lnRef idx="1">
+            <a:schemeClr val="accent1"/>
+          </a:lnRef>
+          <a:fillRef idx="3">
+            <a:schemeClr val="accent1"/>
+          </a:fillRef>
+          <a:effectRef idx="2">
+            <a:schemeClr val="accent1"/>
+          </a:effectRef>
+          <a:fontRef idx="minor">
+            <a:schemeClr val="lt1"/>
+          </a:fontRef>
+        </p:style>
+        <p:txBody>
+          <a:bodyPr rtlCol="0" anchor="ctr"/>
+          <a:lstStyle/>
+          <a:p>
+            <a:pPr algn="ctr"/>
+          </a:p>
+        </p:txBody>
+      </p:sp>
+      <p:sp>
+        <p:nvSpPr>
+          <p:cNvPr id="7" name="TextBox 6"/>
           <p:cNvSpPr txBox="1"/>
           <p:nvPr/>
         </p:nvSpPr>
         <p:spPr>
           <a:xfrm>
-            <a:off x="640080" y="3657600"/>
-            <a:ext cx="10881360" cy="1371600"/>
+            <a:off x="640080" y="4663440"/>
+            <a:ext cx="10881360" cy="457200"/>
           </a:xfrm>
           <a:prstGeom prst="rect">
             <a:avLst/>
@@ -8207,60 +9373,19 @@
           </a:bodyPr>
           <a:lstStyle/>
           <a:p>
-            <a:pPr algn="r" rtl="1">
-              <a:lnSpc>
-                <a:spcPct val="150000"/>
-              </a:lnSpc>
-            </a:pPr>
-            <a:r>
-              <a:rPr sz="2300" b="0">
-                <a:solidFill>
-                  <a:srgbClr val="1C2321"/>
-                </a:solidFill>
-                <a:latin typeface="Georgia"/>
-                <a:cs typeface="Jameel Noori Nastaleeq"/>
-              </a:rPr>
-              <a:t>بس جب میں نے دیکھا کہ اللہ نے ابوبکر کا سینہ اِس کے لیے کھول دیا — تو مجھے یقین ہو گیا کہ یہی حق ہے۔</a:t>
-            </a:r>
-          </a:p>
-        </p:txBody>
-      </p:sp>
-      <p:sp>
-        <p:nvSpPr>
-          <p:cNvPr id="6" name="TextBox 5"/>
-          <p:cNvSpPr txBox="1"/>
-          <p:nvPr/>
-        </p:nvSpPr>
-        <p:spPr>
-          <a:xfrm>
-            <a:off x="640080" y="5394960"/>
-            <a:ext cx="10881360" cy="457200"/>
-          </a:xfrm>
-          <a:prstGeom prst="rect">
-            <a:avLst/>
-          </a:prstGeom>
-          <a:noFill/>
-        </p:spPr>
-        <p:txBody>
-          <a:bodyPr wrap="square">
-            <a:spAutoFit/>
-          </a:bodyPr>
-          <a:lstStyle/>
-          <a:p>
-            <a:pPr algn="r" rtl="1">
+            <a:pPr algn="ctr">
               <a:lnSpc>
                 <a:spcPct val="100000"/>
               </a:lnSpc>
             </a:pPr>
             <a:r>
-              <a:rPr sz="1500" b="0">
+              <a:rPr sz="1400" b="0" i="0">
                 <a:solidFill>
                   <a:srgbClr val="104A43"/>
                 </a:solidFill>
-                <a:latin typeface="Georgia"/>
-                <a:cs typeface="Jameel Noori Nastaleeq"/>
+                <a:latin typeface="Segoe UI"/>
               </a:rPr>
-              <a:t>سیدنا عمر بن الخطاب ؓ  ·  البدایہ والنہایہ، ج۷ ص۱۸</a:t>
+              <a:t>UMAR IBN AL-KHATTAB  ·  AL-BIDAYA WA'L-NIHAYA, vol. 7 p. 18</a:t>
             </a:r>
           </a:p>
         </p:txBody>
@@ -8327,16 +9452,84 @@
           </a:p>
         </p:txBody>
       </p:sp>
-      <p:sp>
-        <p:nvSpPr>
-          <p:cNvPr id="3" name="TextBox 2"/>
+      <p:pic>
+        <p:nvPicPr>
+          <p:cNvPr id="3" name="Picture 2" descr="map_s2_twelve.png"/>
+          <p:cNvPicPr>
+            <a:picLocks noChangeAspect="1"/>
+          </p:cNvPicPr>
+          <p:nvPr/>
+        </p:nvPicPr>
+        <p:blipFill>
+          <a:blip r:embed="rId2"/>
+          <a:stretch>
+            <a:fillRect/>
+          </a:stretch>
+        </p:blipFill>
+        <p:spPr>
+          <a:xfrm>
+            <a:off x="0" y="868680"/>
+            <a:ext cx="12191695" cy="6420959"/>
+          </a:xfrm>
+          <a:prstGeom prst="rect">
+            <a:avLst/>
+          </a:prstGeom>
+        </p:spPr>
+      </p:pic>
+      <p:sp>
+        <p:nvSpPr>
+          <p:cNvPr id="4" name="Rectangle 3"/>
+          <p:cNvSpPr/>
+          <p:nvPr/>
+        </p:nvSpPr>
+        <p:spPr>
+          <a:xfrm>
+            <a:off x="0" y="0"/>
+            <a:ext cx="12191695" cy="868680"/>
+          </a:xfrm>
+          <a:prstGeom prst="rect">
+            <a:avLst/>
+          </a:prstGeom>
+          <a:solidFill>
+            <a:srgbClr val="0A322E"/>
+          </a:solidFill>
+          <a:ln>
+            <a:noFill/>
+          </a:ln>
+          <a:effectLst/>
+        </p:spPr>
+        <p:style>
+          <a:lnRef idx="1">
+            <a:schemeClr val="accent1"/>
+          </a:lnRef>
+          <a:fillRef idx="3">
+            <a:schemeClr val="accent1"/>
+          </a:fillRef>
+          <a:effectRef idx="2">
+            <a:schemeClr val="accent1"/>
+          </a:effectRef>
+          <a:fontRef idx="minor">
+            <a:schemeClr val="lt1"/>
+          </a:fontRef>
+        </p:style>
+        <p:txBody>
+          <a:bodyPr rtlCol="0" anchor="ctr"/>
+          <a:lstStyle/>
+          <a:p>
+            <a:pPr algn="ctr"/>
+          </a:p>
+        </p:txBody>
+      </p:sp>
+      <p:sp>
+        <p:nvSpPr>
+          <p:cNvPr id="5" name="TextBox 4"/>
           <p:cNvSpPr txBox="1"/>
           <p:nvPr/>
         </p:nvSpPr>
         <p:spPr>
           <a:xfrm>
-            <a:off x="822960" y="2286000"/>
-            <a:ext cx="10515600" cy="1188720"/>
+            <a:off x="640080" y="146304"/>
+            <a:ext cx="7863840" cy="640080"/>
           </a:xfrm>
           <a:prstGeom prst="rect">
             <a:avLst/>
@@ -8349,34 +9542,33 @@
           </a:bodyPr>
           <a:lstStyle/>
           <a:p>
-            <a:pPr algn="r" rtl="1">
+            <a:pPr algn="l">
               <a:lnSpc>
-                <a:spcPct val="160000"/>
+                <a:spcPct val="100000"/>
               </a:lnSpc>
             </a:pPr>
             <a:r>
-              <a:rPr sz="5000" b="0">
-                <a:solidFill>
-                  <a:srgbClr val="104A43"/>
+              <a:rPr sz="3000" b="0" i="0">
+                <a:solidFill>
+                  <a:srgbClr val="FAF7F0"/>
                 </a:solidFill>
                 <a:latin typeface="Georgia"/>
-                <a:cs typeface="Jameel Noori Nastaleeq"/>
               </a:rPr>
-              <a:t>لشکر نکلتے ہیں</a:t>
-            </a:r>
-          </a:p>
-        </p:txBody>
-      </p:sp>
-      <p:sp>
-        <p:nvSpPr>
-          <p:cNvPr id="4" name="TextBox 3"/>
+              <a:t>Twelve years</a:t>
+            </a:r>
+          </a:p>
+        </p:txBody>
+      </p:sp>
+      <p:sp>
+        <p:nvSpPr>
+          <p:cNvPr id="6" name="TextBox 5"/>
           <p:cNvSpPr txBox="1"/>
           <p:nvPr/>
         </p:nvSpPr>
         <p:spPr>
           <a:xfrm>
-            <a:off x="822960" y="3749039"/>
-            <a:ext cx="10515600" cy="731520"/>
+            <a:off x="8595360" y="256032"/>
+            <a:ext cx="3017520" cy="457200"/>
           </a:xfrm>
           <a:prstGeom prst="rect">
             <a:avLst/>
@@ -8389,20 +9581,19 @@
           </a:bodyPr>
           <a:lstStyle/>
           <a:p>
-            <a:pPr algn="r" rtl="1">
+            <a:pPr algn="r">
               <a:lnSpc>
-                <a:spcPct val="150000"/>
+                <a:spcPct val="100000"/>
               </a:lnSpc>
             </a:pPr>
             <a:r>
-              <a:rPr sz="2500" b="0">
-                <a:solidFill>
-                  <a:srgbClr val="1C2321"/>
-                </a:solidFill>
-                <a:latin typeface="Georgia"/>
-                <a:cs typeface="Jameel Noori Nastaleeq"/>
+              <a:rPr sz="1500" b="0" i="0">
+                <a:solidFill>
+                  <a:srgbClr val="C49A45"/>
+                </a:solidFill>
+                <a:latin typeface="Segoe UI"/>
               </a:rPr>
-              <a:t>ذو القصہ سے — عرب سنبھل جاتا ہے</a:t>
+              <a:t>632 – 644</a:t>
             </a:r>
           </a:p>
         </p:txBody>
@@ -8477,8 +9668,8 @@
         </p:nvSpPr>
         <p:spPr>
           <a:xfrm>
-            <a:off x="822960" y="2286000"/>
-            <a:ext cx="10515600" cy="1188720"/>
+            <a:off x="777240" y="420624"/>
+            <a:ext cx="8229600" cy="365760"/>
           </a:xfrm>
           <a:prstGeom prst="rect">
             <a:avLst/>
@@ -8491,20 +9682,19 @@
           </a:bodyPr>
           <a:lstStyle/>
           <a:p>
-            <a:pPr algn="r" rtl="1">
+            <a:pPr algn="l">
               <a:lnSpc>
-                <a:spcPct val="160000"/>
+                <a:spcPct val="100000"/>
               </a:lnSpc>
             </a:pPr>
             <a:r>
-              <a:rPr sz="5000" b="0">
+              <a:rPr sz="1200" b="1" i="0">
                 <a:solidFill>
                   <a:srgbClr val="104A43"/>
                 </a:solidFill>
-                <a:latin typeface="Georgia"/>
-                <a:cs typeface="Jameel Noori Nastaleeq"/>
+                <a:latin typeface="Segoe UI"/>
               </a:rPr>
-              <a:t>یرموک</a:t>
+              <a:t>WHAT THEY SAID THEY WERE FOR</a:t>
             </a:r>
           </a:p>
         </p:txBody>
@@ -8517,8 +9707,8 @@
         </p:nvSpPr>
         <p:spPr>
           <a:xfrm>
-            <a:off x="822960" y="3749039"/>
-            <a:ext cx="10515600" cy="731520"/>
+            <a:off x="640080" y="1325880"/>
+            <a:ext cx="10881360" cy="1554480"/>
           </a:xfrm>
           <a:prstGeom prst="rect">
             <a:avLst/>
@@ -8533,18 +9723,173 @@
           <a:p>
             <a:pPr algn="r" rtl="1">
               <a:lnSpc>
-                <a:spcPct val="150000"/>
+                <a:spcPct val="140000"/>
               </a:lnSpc>
             </a:pPr>
             <a:r>
-              <a:rPr sz="2500" b="0">
+              <a:rPr sz="3600" b="0" i="0">
+                <a:solidFill>
+                  <a:srgbClr val="0A322E"/>
+                </a:solidFill>
+                <a:latin typeface="Traditional Arabic"/>
+                <a:cs typeface="Traditional Arabic"/>
+              </a:rPr>
+              <a:t>وَإِخْرَاجُ الْعِبَادِ مِنْ عِبَادَةِ الْعِبَادِ إِلَى عِبَادَةِ اللهِ</a:t>
+            </a:r>
+          </a:p>
+          <a:p>
+            <a:pPr algn="r" rtl="1">
+              <a:lnSpc>
+                <a:spcPct val="140000"/>
+              </a:lnSpc>
+            </a:pPr>
+            <a:r>
+              <a:rPr sz="3600" b="0" i="0">
+                <a:solidFill>
+                  <a:srgbClr val="0A322E"/>
+                </a:solidFill>
+                <a:latin typeface="Traditional Arabic"/>
+                <a:cs typeface="Traditional Arabic"/>
+              </a:rPr>
+              <a:t>وَالنَّاسُ بَنُو آدَمَ، فَهُمْ إِخْوَةٌ لِأَبٍ وَأُمٍّ</a:t>
+            </a:r>
+          </a:p>
+        </p:txBody>
+      </p:sp>
+      <p:sp>
+        <p:nvSpPr>
+          <p:cNvPr id="5" name="TextBox 4"/>
+          <p:cNvSpPr txBox="1"/>
+          <p:nvPr/>
+        </p:nvSpPr>
+        <p:spPr>
+          <a:xfrm>
+            <a:off x="1188720" y="3017520"/>
+            <a:ext cx="9784080" cy="1371600"/>
+          </a:xfrm>
+          <a:prstGeom prst="rect">
+            <a:avLst/>
+          </a:prstGeom>
+          <a:noFill/>
+        </p:spPr>
+        <p:txBody>
+          <a:bodyPr wrap="square">
+            <a:spAutoFit/>
+          </a:bodyPr>
+          <a:lstStyle/>
+          <a:p>
+            <a:pPr algn="ctr">
+              <a:lnSpc>
+                <a:spcPct val="135000"/>
+              </a:lnSpc>
+            </a:pPr>
+            <a:r>
+              <a:rPr sz="2500" b="0" i="1">
                 <a:solidFill>
                   <a:srgbClr val="1C2321"/>
                 </a:solidFill>
                 <a:latin typeface="Georgia"/>
-                <a:cs typeface="Jameel Noori Nastaleeq"/>
               </a:rPr>
-              <a:t>روم شام سے نکل جاتا ہے</a:t>
+              <a:t>“To bring people out of the worship of servants into the worship of God…</a:t>
+            </a:r>
+          </a:p>
+          <a:p>
+            <a:pPr algn="ctr">
+              <a:lnSpc>
+                <a:spcPct val="135000"/>
+              </a:lnSpc>
+            </a:pPr>
+            <a:r>
+              <a:rPr sz="2500" b="0" i="1">
+                <a:solidFill>
+                  <a:srgbClr val="1C2321"/>
+                </a:solidFill>
+                <a:latin typeface="Georgia"/>
+              </a:rPr>
+              <a:t>and people are the children of Adam — brothers of one father and mother.”</a:t>
+            </a:r>
+          </a:p>
+        </p:txBody>
+      </p:sp>
+      <p:sp>
+        <p:nvSpPr>
+          <p:cNvPr id="6" name="Rectangle 5"/>
+          <p:cNvSpPr/>
+          <p:nvPr/>
+        </p:nvSpPr>
+        <p:spPr>
+          <a:xfrm>
+            <a:off x="5394960" y="4498848"/>
+            <a:ext cx="1371600" cy="19050"/>
+          </a:xfrm>
+          <a:prstGeom prst="rect">
+            <a:avLst/>
+          </a:prstGeom>
+          <a:solidFill>
+            <a:srgbClr val="C49A45"/>
+          </a:solidFill>
+          <a:ln>
+            <a:noFill/>
+          </a:ln>
+          <a:effectLst/>
+        </p:spPr>
+        <p:style>
+          <a:lnRef idx="1">
+            <a:schemeClr val="accent1"/>
+          </a:lnRef>
+          <a:fillRef idx="3">
+            <a:schemeClr val="accent1"/>
+          </a:fillRef>
+          <a:effectRef idx="2">
+            <a:schemeClr val="accent1"/>
+          </a:effectRef>
+          <a:fontRef idx="minor">
+            <a:schemeClr val="lt1"/>
+          </a:fontRef>
+        </p:style>
+        <p:txBody>
+          <a:bodyPr rtlCol="0" anchor="ctr"/>
+          <a:lstStyle/>
+          <a:p>
+            <a:pPr algn="ctr"/>
+          </a:p>
+        </p:txBody>
+      </p:sp>
+      <p:sp>
+        <p:nvSpPr>
+          <p:cNvPr id="7" name="TextBox 6"/>
+          <p:cNvSpPr txBox="1"/>
+          <p:nvPr/>
+        </p:nvSpPr>
+        <p:spPr>
+          <a:xfrm>
+            <a:off x="640080" y="4663440"/>
+            <a:ext cx="10881360" cy="457200"/>
+          </a:xfrm>
+          <a:prstGeom prst="rect">
+            <a:avLst/>
+          </a:prstGeom>
+          <a:noFill/>
+        </p:spPr>
+        <p:txBody>
+          <a:bodyPr wrap="square">
+            <a:spAutoFit/>
+          </a:bodyPr>
+          <a:lstStyle/>
+          <a:p>
+            <a:pPr algn="ctr">
+              <a:lnSpc>
+                <a:spcPct val="100000"/>
+              </a:lnSpc>
+            </a:pPr>
+            <a:r>
+              <a:rPr sz="1400" b="0" i="0">
+                <a:solidFill>
+                  <a:srgbClr val="104A43"/>
+                </a:solidFill>
+                <a:latin typeface="Segoe UI"/>
+              </a:rPr>
+              <a:t>THE ENVOY, IN RUSTAM'S COURT  ·  AL-BIDAYA WA'L-NIHAYA, vol. 7 p. 134</a:t>
             </a:r>
           </a:p>
         </p:txBody>

--- a/L02_baarah_saal/L02.pptx
+++ b/L02_baarah_saal/L02.pptx
@@ -22,6 +22,10 @@
     <p:sldId id="270" r:id="rId22"/>
     <p:sldId id="271" r:id="rId23"/>
     <p:sldId id="272" r:id="rId24"/>
+    <p:sldId id="273" r:id="rId25"/>
+    <p:sldId id="274" r:id="rId26"/>
+    <p:sldId id="275" r:id="rId27"/>
+    <p:sldId id="276" r:id="rId28"/>
   </p:sldIdLst>
   <p:sldSz cx="12191695" cy="6858000" type="screen4x3"/>
   <p:notesSz cx="6858000" cy="9144000"/>
@@ -598,7 +602,37 @@
           <a:lstStyle/>
           <a:p>
             <a:r>
-              <a:t>0:28 TAARUF (7 min). Read from the printed card, never from memory.</a:t>
+              <a:t>SAY THIS BEFORE THE MAP. It stops the Ridda being heard as everyone apostatised.</a:t>
+            </a:r>
+          </a:p>
+          <a:p>
+            <a:r>
+              <a:t>The fourth column is the one that matters - large parts of Arabia never wavered.</a:t>
+            </a:r>
+          </a:p>
+          <a:p>
+            <a:r>
+              <a:t>VERIFIED in al-Bidaya: Tayyi came over through Adi b. Hatim, who brought 500 fighters</a:t>
+            </a:r>
+          </a:p>
+          <a:p>
+            <a:r>
+              <a:t>and then a thousand riders of Jadila (vol.7 p.25); Uyayna and Ghatafan backed Tulayha</a:t>
+            </a:r>
+          </a:p>
+          <a:p>
+            <a:r>
+              <a:t>and both men later returned to Islam (vol.7 p.26).</a:t>
+            </a:r>
+          </a:p>
+          <a:p>
+            <a:r>
+              <a:t>[VERIFY the remaining tribe assignments against Tareekh-e-Ummat before delivery -</a:t>
+            </a:r>
+          </a:p>
+          <a:p>
+            <a:r>
+              <a:t> the grouping came from the earlier classification artifact, not from a read page.]</a:t>
             </a:r>
           </a:p>
         </p:txBody>
@@ -668,12 +702,37 @@
           <a:lstStyle/>
           <a:p>
             <a:r>
-              <a:t>EXTRA if you have room: Aisha (radiyallahu anha) - alone among the Muhajirun, his father</a:t>
-            </a:r>
-          </a:p>
-          <a:p>
-            <a:r>
-              <a:t>accepted Islam too. And Amr ibn al-As asking which man the Prophet loved most: 'Abu Bakr'.</a:t>
+              <a:t>THIS CLOSES THE LOOP ON YOUR OPENING SCENE - say so explicitly.</a:t>
+            </a:r>
+          </a:p>
+          <a:p>
+            <a:r>
+              <a:t>One at the beginning of the night, one in the middle, one at the end:</a:t>
+            </a:r>
+          </a:p>
+          <a:p>
+            <a:r>
+              <a:t>  Safwan's      -&gt; announced by Sa'd ibn Abi Waqqas</a:t>
+            </a:r>
+          </a:p>
+          <a:p>
+            <a:r>
+              <a:t>  al-Zibriqan's -&gt; announced by Abd al-Rahman ibn Awf</a:t>
+            </a:r>
+          </a:p>
+          <a:p>
+            <a:r>
+              <a:t>  Adi ibn Hatim's -&gt; announced by Ibn Mas'ud, or Abu Qatada al-Ansari</a:t>
+            </a:r>
+          </a:p>
+          <a:p>
+            <a:r>
+              <a:t>The zakat is arriving after all. The argument has become a fact, and you never had</a:t>
+            </a:r>
+          </a:p>
+          <a:p>
+            <a:r>
+              <a:t>to make it. VERIFIED: al-Bidaya vol.7 p.21.</a:t>
             </a:r>
           </a:p>
         </p:txBody>
@@ -743,12 +802,27 @@
           <a:lstStyle/>
           <a:p>
             <a:r>
-              <a:t>THE LAQAB IS THE PROPHET'S OWN (peace be upon him): 'wa sammahu al-Nabi: Sayf Allah'.</a:t>
-            </a:r>
-          </a:p>
-          <a:p>
-            <a:r>
-              <a:t>Say that explicitly - it was not given by admirers later.</a:t>
+              <a:t>0:29 (4 min). Three arrows only, quickly:</a:t>
+            </a:r>
+          </a:p>
+          <a:p>
+            <a:r>
+              <a:t>  Yarmuk -&gt; Byzantium out of Syria [al-Bidaya ج7 ص85-95 cached, outline only]</a:t>
+            </a:r>
+          </a:p>
+          <a:p>
+            <a:r>
+              <a:t>  Qadisiyya -&gt; Persia [ج7 ص132-140]</a:t>
+            </a:r>
+          </a:p>
+          <a:p>
+            <a:r>
+              <a:t>  Fustat -&gt; Egypt</a:t>
+            </a:r>
+          </a:p>
+          <a:p>
+            <a:r>
+              <a:t>Do not linger - the weight of the evening was the decision, not the conquests.</a:t>
             </a:r>
           </a:p>
         </p:txBody>
@@ -818,12 +892,7 @@
           <a:lstStyle/>
           <a:p>
             <a:r>
-              <a:t>Also the Prophet's own naming (peace be upon him), and he was given the news of Paradise.</a:t>
-            </a:r>
-          </a:p>
-          <a:p>
-            <a:r>
-              <a:t>This incident ties straight back to tonight's opening block rather than standing apart.</a:t>
+              <a:t>This does the work of a paragraph of explanation. Read it and move on.</a:t>
             </a:r>
           </a:p>
         </p:txBody>
@@ -893,17 +962,7 @@
           <a:lstStyle/>
           <a:p>
             <a:r>
-              <a:t>0:35 (3 min). THREE MINUTES, no more - this is the only method content tonight.</a:t>
-            </a:r>
-          </a:p>
-          <a:p>
-            <a:r>
-              <a:t>[SOURCE: Take this from Rehan sahib's Urdu, NOT from Arabic pages we selected. It is</a:t>
-            </a:r>
-          </a:p>
-          <a:p>
-            <a:r>
-              <a:t>doctrinally weighty and the course narrates his book.]</a:t>
+              <a:t>0:28 TAARUF (7 min). Read from the printed card, never from memory.</a:t>
             </a:r>
           </a:p>
         </p:txBody>
@@ -973,27 +1032,12 @@
           <a:lstStyle/>
           <a:p>
             <a:r>
-              <a:t>0:38 (4 min). ONE sentence and no more:</a:t>
-            </a:r>
-          </a:p>
-          <a:p>
-            <a:r>
-              <a:t>  'jo kaam us din ek aadmi ne akele khare ho kar kiya - Quran us ki taraf ishara</a:t>
-            </a:r>
-          </a:p>
-          <a:p>
-            <a:r>
-              <a:t>   karta hai.'</a:t>
-            </a:r>
-          </a:p>
-          <a:p>
-            <a:r>
-              <a:t>THEN STOP. 90 SECONDS OF SILENCE while they write. Two volunteers max, 'shukriya',</a:t>
-            </a:r>
-          </a:p>
-          <a:p>
-            <a:r>
-              <a:t>nothing else. ALTERNATE (do not use both): fa'ida 2 from the muqaddima, pp. 53-54.</a:t>
+              <a:t>EXTRA if you have room: Aisha (radiyallahu anha) - alone among the Muhajirun, his father</a:t>
+            </a:r>
+          </a:p>
+          <a:p>
+            <a:r>
+              <a:t>accepted Islam too. And Amr ibn al-As asking which man the Prophet loved most: 'Abu Bakr'.</a:t>
             </a:r>
           </a:p>
         </p:txBody>
@@ -1063,22 +1107,12 @@
           <a:lstStyle/>
           <a:p>
             <a:r>
-              <a:t>0:42 (3 min). Next week OPENS with the principle - how such events are read with adab.</a:t>
-            </a:r>
-          </a:p>
-          <a:p>
-            <a:r>
-              <a:t>TAKE-HOME, say once and leave unanswered:</a:t>
-            </a:r>
-          </a:p>
-          <a:p>
-            <a:r>
-              <a:t>  'ek aadmi akela khara ho, aur sab us ke khilaf mashwara de rahe hon - to use kya</a:t>
-            </a:r>
-          </a:p>
-          <a:p>
-            <a:r>
-              <a:t>   cheez sambhalti hai?'</a:t>
+              <a:t>THE LAQAB IS THE PROPHET'S OWN (peace be upon him): 'wa sammahu al-Nabi: Sayf Allah'.</a:t>
+            </a:r>
+          </a:p>
+          <a:p>
+            <a:r>
+              <a:t>Say that explicitly - it was not given by admirers later.</a:t>
             </a:r>
           </a:p>
         </p:txBody>
@@ -1148,7 +1182,182 @@
           <a:lstStyle/>
           <a:p>
             <a:r>
-              <a:t>Show only if someone asks where something came from.</a:t>
+              <a:t>Also the Prophet's own naming (peace be upon him), and he was given the news of Paradise.</a:t>
+            </a:r>
+          </a:p>
+          <a:p>
+            <a:r>
+              <a:t>This incident ties straight back to tonight's opening block rather than standing apart.</a:t>
+            </a:r>
+          </a:p>
+        </p:txBody>
+      </p:sp>
+      <p:sp>
+        <p:nvSpPr>
+          <p:cNvPr id="4" name="Slide Number Placeholder 3"/>
+          <p:cNvSpPr>
+            <a:spLocks noGrp="1"/>
+          </p:cNvSpPr>
+          <p:nvPr>
+            <p:ph type="sldNum" idx="5" sz="quarter"/>
+          </p:nvPr>
+        </p:nvSpPr>
+        <p:spPr/>
+      </p:sp>
+    </p:spTree>
+  </p:cSld>
+  <p:clrMapOvr>
+    <a:masterClrMapping/>
+  </p:clrMapOvr>
+</p:notes>
+</file>
+
+<file path=ppt/notesSlides/notesSlide18.xml><?xml version="1.0" encoding="utf-8"?>
+<p:notes xmlns:a="http://schemas.openxmlformats.org/drawingml/2006/main" xmlns:p="http://schemas.openxmlformats.org/presentationml/2006/main" xmlns:r="http://schemas.openxmlformats.org/officeDocument/2006/relationships">
+  <p:cSld>
+    <p:spTree>
+      <p:nvGrpSpPr>
+        <p:cNvPr id="1" name=""/>
+        <p:cNvGrpSpPr/>
+        <p:nvPr/>
+      </p:nvGrpSpPr>
+      <p:grpSpPr>
+        <a:xfrm>
+          <a:off x="0" y="0"/>
+          <a:ext cx="0" cy="0"/>
+          <a:chOff x="0" y="0"/>
+          <a:chExt cx="0" cy="0"/>
+        </a:xfrm>
+      </p:grpSpPr>
+      <p:sp>
+        <p:nvSpPr>
+          <p:cNvPr id="2" name="Slide Image Placeholder 1"/>
+          <p:cNvSpPr>
+            <a:spLocks noGrp="1"/>
+          </p:cNvSpPr>
+          <p:nvPr>
+            <p:ph type="sldImg" idx="2"/>
+          </p:nvPr>
+        </p:nvSpPr>
+        <p:spPr/>
+      </p:sp>
+      <p:sp>
+        <p:nvSpPr>
+          <p:cNvPr id="3" name="Notes Placeholder 2"/>
+          <p:cNvSpPr>
+            <a:spLocks noGrp="1"/>
+          </p:cNvSpPr>
+          <p:nvPr>
+            <p:ph type="body" idx="3" sz="quarter"/>
+          </p:nvPr>
+        </p:nvSpPr>
+        <p:spPr/>
+        <p:txBody>
+          <a:bodyPr/>
+          <a:lstStyle/>
+          <a:p>
+            <a:r>
+              <a:t>0:35 (3 min). THREE MINUTES, no more - this is the only method content tonight.</a:t>
+            </a:r>
+          </a:p>
+          <a:p>
+            <a:r>
+              <a:t>[SOURCE: Take this from Rehan sahib's Urdu, NOT from Arabic pages we selected. It is</a:t>
+            </a:r>
+          </a:p>
+          <a:p>
+            <a:r>
+              <a:t>doctrinally weighty and the course narrates his book.]</a:t>
+            </a:r>
+          </a:p>
+        </p:txBody>
+      </p:sp>
+      <p:sp>
+        <p:nvSpPr>
+          <p:cNvPr id="4" name="Slide Number Placeholder 3"/>
+          <p:cNvSpPr>
+            <a:spLocks noGrp="1"/>
+          </p:cNvSpPr>
+          <p:nvPr>
+            <p:ph type="sldNum" idx="5" sz="quarter"/>
+          </p:nvPr>
+        </p:nvSpPr>
+        <p:spPr/>
+      </p:sp>
+    </p:spTree>
+  </p:cSld>
+  <p:clrMapOvr>
+    <a:masterClrMapping/>
+  </p:clrMapOvr>
+</p:notes>
+</file>
+
+<file path=ppt/notesSlides/notesSlide19.xml><?xml version="1.0" encoding="utf-8"?>
+<p:notes xmlns:a="http://schemas.openxmlformats.org/drawingml/2006/main" xmlns:p="http://schemas.openxmlformats.org/presentationml/2006/main" xmlns:r="http://schemas.openxmlformats.org/officeDocument/2006/relationships">
+  <p:cSld>
+    <p:spTree>
+      <p:nvGrpSpPr>
+        <p:cNvPr id="1" name=""/>
+        <p:cNvGrpSpPr/>
+        <p:nvPr/>
+      </p:nvGrpSpPr>
+      <p:grpSpPr>
+        <a:xfrm>
+          <a:off x="0" y="0"/>
+          <a:ext cx="0" cy="0"/>
+          <a:chOff x="0" y="0"/>
+          <a:chExt cx="0" cy="0"/>
+        </a:xfrm>
+      </p:grpSpPr>
+      <p:sp>
+        <p:nvSpPr>
+          <p:cNvPr id="2" name="Slide Image Placeholder 1"/>
+          <p:cNvSpPr>
+            <a:spLocks noGrp="1"/>
+          </p:cNvSpPr>
+          <p:nvPr>
+            <p:ph type="sldImg" idx="2"/>
+          </p:nvPr>
+        </p:nvSpPr>
+        <p:spPr/>
+      </p:sp>
+      <p:sp>
+        <p:nvSpPr>
+          <p:cNvPr id="3" name="Notes Placeholder 2"/>
+          <p:cNvSpPr>
+            <a:spLocks noGrp="1"/>
+          </p:cNvSpPr>
+          <p:nvPr>
+            <p:ph type="body" idx="3" sz="quarter"/>
+          </p:nvPr>
+        </p:nvSpPr>
+        <p:spPr/>
+        <p:txBody>
+          <a:bodyPr/>
+          <a:lstStyle/>
+          <a:p>
+            <a:r>
+              <a:t>0:38 (4 min). ONE sentence and no more:</a:t>
+            </a:r>
+          </a:p>
+          <a:p>
+            <a:r>
+              <a:t>  'jo kaam us din ek aadmi ne akele khare ho kar kiya - Quran us ki taraf ishara</a:t>
+            </a:r>
+          </a:p>
+          <a:p>
+            <a:r>
+              <a:t>   karta hai.'</a:t>
+            </a:r>
+          </a:p>
+          <a:p>
+            <a:r>
+              <a:t>THEN STOP. 90 SECONDS OF SILENCE while they write. Two volunteers max, 'shukriya',</a:t>
+            </a:r>
+          </a:p>
+          <a:p>
+            <a:r>
+              <a:t>nothing else. ALTERNATE (do not use both): fa'ida 2 from the muqaddima, pp. 53-54.</a:t>
             </a:r>
           </a:p>
         </p:txBody>
@@ -1273,6 +1482,161 @@
 </p:notes>
 </file>
 
+<file path=ppt/notesSlides/notesSlide20.xml><?xml version="1.0" encoding="utf-8"?>
+<p:notes xmlns:a="http://schemas.openxmlformats.org/drawingml/2006/main" xmlns:p="http://schemas.openxmlformats.org/presentationml/2006/main" xmlns:r="http://schemas.openxmlformats.org/officeDocument/2006/relationships">
+  <p:cSld>
+    <p:spTree>
+      <p:nvGrpSpPr>
+        <p:cNvPr id="1" name=""/>
+        <p:cNvGrpSpPr/>
+        <p:nvPr/>
+      </p:nvGrpSpPr>
+      <p:grpSpPr>
+        <a:xfrm>
+          <a:off x="0" y="0"/>
+          <a:ext cx="0" cy="0"/>
+          <a:chOff x="0" y="0"/>
+          <a:chExt cx="0" cy="0"/>
+        </a:xfrm>
+      </p:grpSpPr>
+      <p:sp>
+        <p:nvSpPr>
+          <p:cNvPr id="2" name="Slide Image Placeholder 1"/>
+          <p:cNvSpPr>
+            <a:spLocks noGrp="1"/>
+          </p:cNvSpPr>
+          <p:nvPr>
+            <p:ph type="sldImg" idx="2"/>
+          </p:nvPr>
+        </p:nvSpPr>
+        <p:spPr/>
+      </p:sp>
+      <p:sp>
+        <p:nvSpPr>
+          <p:cNvPr id="3" name="Notes Placeholder 2"/>
+          <p:cNvSpPr>
+            <a:spLocks noGrp="1"/>
+          </p:cNvSpPr>
+          <p:nvPr>
+            <p:ph type="body" idx="3" sz="quarter"/>
+          </p:nvPr>
+        </p:nvSpPr>
+        <p:spPr/>
+        <p:txBody>
+          <a:bodyPr/>
+          <a:lstStyle/>
+          <a:p>
+            <a:r>
+              <a:t>0:42 (3 min). Next week OPENS with the principle - how such events are read with adab.</a:t>
+            </a:r>
+          </a:p>
+          <a:p>
+            <a:r>
+              <a:t>TAKE-HOME, say once and leave unanswered:</a:t>
+            </a:r>
+          </a:p>
+          <a:p>
+            <a:r>
+              <a:t>  'ek aadmi akela khara ho, aur sab us ke khilaf mashwara de rahe hon - to use kya</a:t>
+            </a:r>
+          </a:p>
+          <a:p>
+            <a:r>
+              <a:t>   cheez sambhalti hai?'</a:t>
+            </a:r>
+          </a:p>
+        </p:txBody>
+      </p:sp>
+      <p:sp>
+        <p:nvSpPr>
+          <p:cNvPr id="4" name="Slide Number Placeholder 3"/>
+          <p:cNvSpPr>
+            <a:spLocks noGrp="1"/>
+          </p:cNvSpPr>
+          <p:nvPr>
+            <p:ph type="sldNum" idx="5" sz="quarter"/>
+          </p:nvPr>
+        </p:nvSpPr>
+        <p:spPr/>
+      </p:sp>
+    </p:spTree>
+  </p:cSld>
+  <p:clrMapOvr>
+    <a:masterClrMapping/>
+  </p:clrMapOvr>
+</p:notes>
+</file>
+
+<file path=ppt/notesSlides/notesSlide21.xml><?xml version="1.0" encoding="utf-8"?>
+<p:notes xmlns:a="http://schemas.openxmlformats.org/drawingml/2006/main" xmlns:p="http://schemas.openxmlformats.org/presentationml/2006/main" xmlns:r="http://schemas.openxmlformats.org/officeDocument/2006/relationships">
+  <p:cSld>
+    <p:spTree>
+      <p:nvGrpSpPr>
+        <p:cNvPr id="1" name=""/>
+        <p:cNvGrpSpPr/>
+        <p:nvPr/>
+      </p:nvGrpSpPr>
+      <p:grpSpPr>
+        <a:xfrm>
+          <a:off x="0" y="0"/>
+          <a:ext cx="0" cy="0"/>
+          <a:chOff x="0" y="0"/>
+          <a:chExt cx="0" cy="0"/>
+        </a:xfrm>
+      </p:grpSpPr>
+      <p:sp>
+        <p:nvSpPr>
+          <p:cNvPr id="2" name="Slide Image Placeholder 1"/>
+          <p:cNvSpPr>
+            <a:spLocks noGrp="1"/>
+          </p:cNvSpPr>
+          <p:nvPr>
+            <p:ph type="sldImg" idx="2"/>
+          </p:nvPr>
+        </p:nvSpPr>
+        <p:spPr/>
+      </p:sp>
+      <p:sp>
+        <p:nvSpPr>
+          <p:cNvPr id="3" name="Notes Placeholder 2"/>
+          <p:cNvSpPr>
+            <a:spLocks noGrp="1"/>
+          </p:cNvSpPr>
+          <p:nvPr>
+            <p:ph type="body" idx="3" sz="quarter"/>
+          </p:nvPr>
+        </p:nvSpPr>
+        <p:spPr/>
+        <p:txBody>
+          <a:bodyPr/>
+          <a:lstStyle/>
+          <a:p>
+            <a:r>
+              <a:t>Show only if someone asks where something came from.</a:t>
+            </a:r>
+          </a:p>
+        </p:txBody>
+      </p:sp>
+      <p:sp>
+        <p:nvSpPr>
+          <p:cNvPr id="4" name="Slide Number Placeholder 3"/>
+          <p:cNvSpPr>
+            <a:spLocks noGrp="1"/>
+          </p:cNvSpPr>
+          <p:nvPr>
+            <p:ph type="sldNum" idx="5" sz="quarter"/>
+          </p:nvPr>
+        </p:nvSpPr>
+        <p:spPr/>
+      </p:sp>
+    </p:spTree>
+  </p:cSld>
+  <p:clrMapOvr>
+    <a:masterClrMapping/>
+  </p:clrMapOvr>
+</p:notes>
+</file>
+
 <file path=ppt/notesSlides/notesSlide3.xml><?xml version="1.0" encoding="utf-8"?>
 <p:notes xmlns:a="http://schemas.openxmlformats.org/drawingml/2006/main" xmlns:p="http://schemas.openxmlformats.org/presentationml/2006/main" xmlns:r="http://schemas.openxmlformats.org/officeDocument/2006/relationships">
   <p:cSld>
@@ -1708,37 +2072,32 @@
           <a:lstStyle/>
           <a:p>
             <a:r>
-              <a:t>0:21 (8 min). WALK THE ARROWS one at a time - this is the spine of the second half.</a:t>
-            </a:r>
-          </a:p>
-          <a:p>
-            <a:r>
-              <a:t>  Yamama -&gt; the Ridda held [SOURCE: al-Bidaya ج7 ص22-27 cached; do NOT state a number</a:t>
-            </a:r>
-          </a:p>
-          <a:p>
-            <a:r>
-              <a:t>  of columns until the book gives it]</a:t>
-            </a:r>
-          </a:p>
-          <a:p>
-            <a:r>
-              <a:t>  Yarmuk -&gt; Byzantium out of Syria [al-Bidaya ج7 ص85-95]</a:t>
-            </a:r>
-          </a:p>
-          <a:p>
-            <a:r>
-              <a:t>  Qadisiyya -&gt; Persia [ج7 ص132-140]</a:t>
-            </a:r>
-          </a:p>
-          <a:p>
-            <a:r>
-              <a:t>  Fustat -&gt; Egypt</a:t>
-            </a:r>
-          </a:p>
-          <a:p>
-            <a:r>
-              <a:t>PEN-DOWN after the arrows are drawn.</a:t>
+              <a:t>0:21 (2 min). He went out with his sword drawn, and ALI took hold of his camel's reins:</a:t>
+            </a:r>
+          </a:p>
+          <a:p>
+            <a:r>
+              <a:t>  'Where to, O Caliph of the Messenger of God? I say to you what the Messenger said at</a:t>
+            </a:r>
+          </a:p>
+          <a:p>
+            <a:r>
+              <a:t>   Uhud: sheathe your sword, and do not afflict us with the loss of yourself.'</a:t>
+            </a:r>
+          </a:p>
+          <a:p>
+            <a:r>
+              <a:t>  (al-Bidaya ج7 ص22, al-Daraqutni; also from Aisha radiyallahu anha)</a:t>
+            </a:r>
+          </a:p>
+          <a:p>
+            <a:r>
+              <a:t>STATE IT AND MOVE ON. If anyone in the room carries an assumption about those two, this</a:t>
+            </a:r>
+          </a:p>
+          <a:p>
+            <a:r>
+              <a:t>answers it without you arguing anything.</a:t>
             </a:r>
           </a:p>
         </p:txBody>
@@ -1808,7 +2167,37 @@
           <a:lstStyle/>
           <a:p>
             <a:r>
-              <a:t>This does the work of a paragraph of explanation. Read it and move on.</a:t>
+              <a:t>0:23 (6 min). WALK THE ARROWS ONE AT A TIME - this is the map moment of the evening.</a:t>
+            </a:r>
+          </a:p>
+          <a:p>
+            <a:r>
+              <a:t>Eleven commissions, each written separately, all moving out from Dhu al-Qassa.</a:t>
+            </a:r>
+          </a:p>
+          <a:p>
+            <a:r>
+              <a:t>Name only the four or five the room can hold: Khalid to Buzakha against Tulayha;</a:t>
+            </a:r>
+          </a:p>
+          <a:p>
+            <a:r>
+              <a:t>Yamama against Musaylima; al-Ala' b. al-Hadrami to Bahrain; al-Muhajir to San'a.</a:t>
+            </a:r>
+          </a:p>
+          <a:p>
+            <a:r>
+              <a:t>THE INSTRUCTION IN THE LETTER, worth saying aloud: the sign is the adhan - if they</a:t>
+            </a:r>
+          </a:p>
+          <a:p>
+            <a:r>
+              <a:t>call it back, hold off from them (ج7 ص24).</a:t>
+            </a:r>
+          </a:p>
+          <a:p>
+            <a:r>
+              <a:t>PEN-DOWN once the arrows are drawn.</a:t>
             </a:r>
           </a:p>
         </p:txBody>
@@ -5092,7 +5481,7 @@
             <a:avLst/>
           </a:prstGeom>
           <a:solidFill>
-            <a:srgbClr val="104A43"/>
+            <a:srgbClr val="FAF7F0"/>
           </a:solidFill>
           <a:ln>
             <a:noFill/>
@@ -5151,11 +5540,11 @@
             <a:r>
               <a:rPr sz="1200" b="1" i="0">
                 <a:solidFill>
-                  <a:srgbClr val="C49A45"/>
+                  <a:srgbClr val="104A43"/>
                 </a:solidFill>
                 <a:latin typeface="Segoe UI"/>
               </a:rPr>
-              <a:t>تعارف  ·  WHO YOU ARE MEETING</a:t>
+              <a:t>IT WAS NOT ONE THING</a:t>
             </a:r>
           </a:p>
         </p:txBody>
@@ -5168,47 +5557,8 @@
         </p:nvSpPr>
         <p:spPr>
           <a:xfrm>
-            <a:off x="822960" y="1965960"/>
-            <a:ext cx="10515600" cy="2011680"/>
-          </a:xfrm>
-          <a:prstGeom prst="rect">
-            <a:avLst/>
-          </a:prstGeom>
-          <a:noFill/>
-        </p:spPr>
-        <p:txBody>
-          <a:bodyPr wrap="square" anchor="ctr">
-            <a:spAutoFit/>
-          </a:bodyPr>
-          <a:lstStyle/>
-          <a:p>
-            <a:pPr algn="l">
-              <a:lnSpc>
-                <a:spcPct val="120000"/>
-              </a:lnSpc>
-            </a:pPr>
-            <a:r>
-              <a:rPr sz="5200" b="0" i="0">
-                <a:solidFill>
-                  <a:srgbClr val="FAF7F0"/>
-                </a:solidFill>
-                <a:latin typeface="Georgia"/>
-              </a:rPr>
-              <a:t>Three people</a:t>
-            </a:r>
-          </a:p>
-        </p:txBody>
-      </p:sp>
-      <p:sp>
-        <p:nvSpPr>
-          <p:cNvPr id="5" name="TextBox 4"/>
-          <p:cNvSpPr txBox="1"/>
-          <p:nvPr/>
-        </p:nvSpPr>
-        <p:spPr>
-          <a:xfrm>
-            <a:off x="822960" y="4160520"/>
-            <a:ext cx="10515600" cy="914400"/>
+            <a:off x="777240" y="914400"/>
+            <a:ext cx="10607040" cy="822960"/>
           </a:xfrm>
           <a:prstGeom prst="rect">
             <a:avLst/>
@@ -5223,17 +5573,540 @@
           <a:p>
             <a:pPr algn="l">
               <a:lnSpc>
-                <a:spcPct val="130000"/>
-              </a:lnSpc>
-            </a:pPr>
-            <a:r>
-              <a:rPr sz="2300" b="0" i="1">
-                <a:solidFill>
-                  <a:srgbClr val="C49A45"/>
+                <a:spcPct val="100000"/>
+              </a:lnSpc>
+            </a:pPr>
+            <a:r>
+              <a:rPr sz="3400" b="0" i="0">
+                <a:solidFill>
+                  <a:srgbClr val="104A43"/>
                 </a:solidFill>
                 <a:latin typeface="Georgia"/>
               </a:rPr>
-              <a:t>All three verified from Siyar A'lam al-Nubala.</a:t>
+              <a:t>Four different problems, called by one name</a:t>
+            </a:r>
+          </a:p>
+        </p:txBody>
+      </p:sp>
+      <p:sp>
+        <p:nvSpPr>
+          <p:cNvPr id="5" name="Rectangle 4"/>
+          <p:cNvSpPr/>
+          <p:nvPr/>
+        </p:nvSpPr>
+        <p:spPr>
+          <a:xfrm>
+            <a:off x="777240" y="1847088"/>
+            <a:ext cx="10607040" cy="36576"/>
+          </a:xfrm>
+          <a:prstGeom prst="rect">
+            <a:avLst/>
+          </a:prstGeom>
+          <a:solidFill>
+            <a:srgbClr val="C49A45"/>
+          </a:solidFill>
+          <a:ln>
+            <a:noFill/>
+          </a:ln>
+          <a:effectLst/>
+        </p:spPr>
+        <p:style>
+          <a:lnRef idx="1">
+            <a:schemeClr val="accent1"/>
+          </a:lnRef>
+          <a:fillRef idx="3">
+            <a:schemeClr val="accent1"/>
+          </a:fillRef>
+          <a:effectRef idx="2">
+            <a:schemeClr val="accent1"/>
+          </a:effectRef>
+          <a:fontRef idx="minor">
+            <a:schemeClr val="lt1"/>
+          </a:fontRef>
+        </p:style>
+        <p:txBody>
+          <a:bodyPr rtlCol="0" anchor="ctr"/>
+          <a:lstStyle/>
+          <a:p>
+            <a:pPr algn="ctr"/>
+          </a:p>
+        </p:txBody>
+      </p:sp>
+      <p:sp>
+        <p:nvSpPr>
+          <p:cNvPr id="6" name="TextBox 5"/>
+          <p:cNvSpPr txBox="1"/>
+          <p:nvPr/>
+        </p:nvSpPr>
+        <p:spPr>
+          <a:xfrm>
+            <a:off x="777240" y="2212848"/>
+            <a:ext cx="2606040" cy="640080"/>
+          </a:xfrm>
+          <a:prstGeom prst="rect">
+            <a:avLst/>
+          </a:prstGeom>
+          <a:noFill/>
+        </p:spPr>
+        <p:txBody>
+          <a:bodyPr wrap="square">
+            <a:spAutoFit/>
+          </a:bodyPr>
+          <a:lstStyle/>
+          <a:p>
+            <a:pPr algn="l">
+              <a:lnSpc>
+                <a:spcPct val="100000"/>
+              </a:lnSpc>
+            </a:pPr>
+            <a:r>
+              <a:rPr sz="1900" b="1" i="0">
+                <a:solidFill>
+                  <a:srgbClr val="7A2E2E"/>
+                </a:solidFill>
+                <a:latin typeface="Segoe UI"/>
+              </a:rPr>
+              <a:t>Rival prophecy</a:t>
+            </a:r>
+          </a:p>
+        </p:txBody>
+      </p:sp>
+      <p:sp>
+        <p:nvSpPr>
+          <p:cNvPr id="7" name="TextBox 6"/>
+          <p:cNvSpPr txBox="1"/>
+          <p:nvPr/>
+        </p:nvSpPr>
+        <p:spPr>
+          <a:xfrm>
+            <a:off x="777240" y="2926080"/>
+            <a:ext cx="2606040" cy="1828800"/>
+          </a:xfrm>
+          <a:prstGeom prst="rect">
+            <a:avLst/>
+          </a:prstGeom>
+          <a:noFill/>
+        </p:spPr>
+        <p:txBody>
+          <a:bodyPr wrap="square">
+            <a:spAutoFit/>
+          </a:bodyPr>
+          <a:lstStyle/>
+          <a:p>
+            <a:pPr algn="l">
+              <a:lnSpc>
+                <a:spcPct val="140000"/>
+              </a:lnSpc>
+            </a:pPr>
+            <a:r>
+              <a:rPr sz="1700" b="0" i="0">
+                <a:solidFill>
+                  <a:srgbClr val="1C2321"/>
+                </a:solidFill>
+                <a:latin typeface="Georgia"/>
+              </a:rPr>
+              <a:t>Musaylima at Yamama</a:t>
+            </a:r>
+          </a:p>
+          <a:p>
+            <a:pPr algn="l">
+              <a:lnSpc>
+                <a:spcPct val="140000"/>
+              </a:lnSpc>
+            </a:pPr>
+            <a:r>
+              <a:rPr sz="1700" b="0" i="0">
+                <a:solidFill>
+                  <a:srgbClr val="1C2321"/>
+                </a:solidFill>
+                <a:latin typeface="Georgia"/>
+              </a:rPr>
+              <a:t>Tulayha of Banu Asad</a:t>
+            </a:r>
+          </a:p>
+          <a:p>
+            <a:pPr algn="l">
+              <a:lnSpc>
+                <a:spcPct val="140000"/>
+              </a:lnSpc>
+            </a:pPr>
+            <a:r>
+              <a:rPr sz="1700" b="0" i="0">
+                <a:solidFill>
+                  <a:srgbClr val="1C2321"/>
+                </a:solidFill>
+                <a:latin typeface="Georgia"/>
+              </a:rPr>
+              <a:t>al-Aswad al-Ansi, Yemen</a:t>
+            </a:r>
+          </a:p>
+        </p:txBody>
+      </p:sp>
+      <p:sp>
+        <p:nvSpPr>
+          <p:cNvPr id="8" name="TextBox 7"/>
+          <p:cNvSpPr txBox="1"/>
+          <p:nvPr/>
+        </p:nvSpPr>
+        <p:spPr>
+          <a:xfrm>
+            <a:off x="3538728" y="2212848"/>
+            <a:ext cx="2606040" cy="640080"/>
+          </a:xfrm>
+          <a:prstGeom prst="rect">
+            <a:avLst/>
+          </a:prstGeom>
+          <a:noFill/>
+        </p:spPr>
+        <p:txBody>
+          <a:bodyPr wrap="square">
+            <a:spAutoFit/>
+          </a:bodyPr>
+          <a:lstStyle/>
+          <a:p>
+            <a:pPr algn="l">
+              <a:lnSpc>
+                <a:spcPct val="100000"/>
+              </a:lnSpc>
+            </a:pPr>
+            <a:r>
+              <a:rPr sz="1900" b="1" i="0">
+                <a:solidFill>
+                  <a:srgbClr val="7A2E2E"/>
+                </a:solidFill>
+                <a:latin typeface="Segoe UI"/>
+              </a:rPr>
+              <a:t>Withheld the zakat</a:t>
+            </a:r>
+          </a:p>
+        </p:txBody>
+      </p:sp>
+      <p:sp>
+        <p:nvSpPr>
+          <p:cNvPr id="9" name="TextBox 8"/>
+          <p:cNvSpPr txBox="1"/>
+          <p:nvPr/>
+        </p:nvSpPr>
+        <p:spPr>
+          <a:xfrm>
+            <a:off x="3538728" y="2926080"/>
+            <a:ext cx="2606040" cy="1828800"/>
+          </a:xfrm>
+          <a:prstGeom prst="rect">
+            <a:avLst/>
+          </a:prstGeom>
+          <a:noFill/>
+        </p:spPr>
+        <p:txBody>
+          <a:bodyPr wrap="square">
+            <a:spAutoFit/>
+          </a:bodyPr>
+          <a:lstStyle/>
+          <a:p>
+            <a:pPr algn="l">
+              <a:lnSpc>
+                <a:spcPct val="140000"/>
+              </a:lnSpc>
+            </a:pPr>
+            <a:r>
+              <a:rPr sz="1700" b="0" i="0">
+                <a:solidFill>
+                  <a:srgbClr val="1C2321"/>
+                </a:solidFill>
+                <a:latin typeface="Georgia"/>
+              </a:rPr>
+              <a:t>The delegations who came</a:t>
+            </a:r>
+          </a:p>
+          <a:p>
+            <a:pPr algn="l">
+              <a:lnSpc>
+                <a:spcPct val="140000"/>
+              </a:lnSpc>
+            </a:pPr>
+            <a:r>
+              <a:rPr sz="1700" b="0" i="0">
+                <a:solidFill>
+                  <a:srgbClr val="1C2321"/>
+                </a:solidFill>
+                <a:latin typeface="Georgia"/>
+              </a:rPr>
+              <a:t>affirming prayer</a:t>
+            </a:r>
+          </a:p>
+          <a:p>
+            <a:pPr algn="l">
+              <a:lnSpc>
+                <a:spcPct val="140000"/>
+              </a:lnSpc>
+            </a:pPr>
+            <a:r>
+              <a:rPr sz="1700" b="0" i="0">
+                <a:solidFill>
+                  <a:srgbClr val="1C2321"/>
+                </a:solidFill>
+                <a:latin typeface="Georgia"/>
+              </a:rPr>
+              <a:t>Uyayna and Ghatafan</a:t>
+            </a:r>
+          </a:p>
+        </p:txBody>
+      </p:sp>
+      <p:sp>
+        <p:nvSpPr>
+          <p:cNvPr id="10" name="TextBox 9"/>
+          <p:cNvSpPr txBox="1"/>
+          <p:nvPr/>
+        </p:nvSpPr>
+        <p:spPr>
+          <a:xfrm>
+            <a:off x="6300216" y="2212848"/>
+            <a:ext cx="2606040" cy="640080"/>
+          </a:xfrm>
+          <a:prstGeom prst="rect">
+            <a:avLst/>
+          </a:prstGeom>
+          <a:noFill/>
+        </p:spPr>
+        <p:txBody>
+          <a:bodyPr wrap="square">
+            <a:spAutoFit/>
+          </a:bodyPr>
+          <a:lstStyle/>
+          <a:p>
+            <a:pPr algn="l">
+              <a:lnSpc>
+                <a:spcPct val="100000"/>
+              </a:lnSpc>
+            </a:pPr>
+            <a:r>
+              <a:rPr sz="1900" b="1" i="0">
+                <a:solidFill>
+                  <a:srgbClr val="5A6862"/>
+                </a:solidFill>
+                <a:latin typeface="Segoe UI"/>
+              </a:rPr>
+              <a:t>Political secession</a:t>
+            </a:r>
+          </a:p>
+        </p:txBody>
+      </p:sp>
+      <p:sp>
+        <p:nvSpPr>
+          <p:cNvPr id="11" name="TextBox 10"/>
+          <p:cNvSpPr txBox="1"/>
+          <p:nvPr/>
+        </p:nvSpPr>
+        <p:spPr>
+          <a:xfrm>
+            <a:off x="6300216" y="2926080"/>
+            <a:ext cx="2606040" cy="1828800"/>
+          </a:xfrm>
+          <a:prstGeom prst="rect">
+            <a:avLst/>
+          </a:prstGeom>
+          <a:noFill/>
+        </p:spPr>
+        <p:txBody>
+          <a:bodyPr wrap="square">
+            <a:spAutoFit/>
+          </a:bodyPr>
+          <a:lstStyle/>
+          <a:p>
+            <a:pPr algn="l">
+              <a:lnSpc>
+                <a:spcPct val="140000"/>
+              </a:lnSpc>
+            </a:pPr>
+            <a:r>
+              <a:rPr sz="1700" b="0" i="0">
+                <a:solidFill>
+                  <a:srgbClr val="1C2321"/>
+                </a:solidFill>
+                <a:latin typeface="Georgia"/>
+              </a:rPr>
+              <a:t>Tribes breaking away from</a:t>
+            </a:r>
+          </a:p>
+          <a:p>
+            <a:pPr algn="l">
+              <a:lnSpc>
+                <a:spcPct val="140000"/>
+              </a:lnSpc>
+            </a:pPr>
+            <a:r>
+              <a:rPr sz="1700" b="0" i="0">
+                <a:solidFill>
+                  <a:srgbClr val="1C2321"/>
+                </a:solidFill>
+                <a:latin typeface="Georgia"/>
+              </a:rPr>
+              <a:t>Madina rather than from</a:t>
+            </a:r>
+          </a:p>
+          <a:p>
+            <a:pPr algn="l">
+              <a:lnSpc>
+                <a:spcPct val="140000"/>
+              </a:lnSpc>
+            </a:pPr>
+            <a:r>
+              <a:rPr sz="1700" b="0" i="0">
+                <a:solidFill>
+                  <a:srgbClr val="1C2321"/>
+                </a:solidFill>
+                <a:latin typeface="Georgia"/>
+              </a:rPr>
+              <a:t>the religion</a:t>
+            </a:r>
+          </a:p>
+        </p:txBody>
+      </p:sp>
+      <p:sp>
+        <p:nvSpPr>
+          <p:cNvPr id="12" name="TextBox 11"/>
+          <p:cNvSpPr txBox="1"/>
+          <p:nvPr/>
+        </p:nvSpPr>
+        <p:spPr>
+          <a:xfrm>
+            <a:off x="9061704" y="2212848"/>
+            <a:ext cx="2606040" cy="640080"/>
+          </a:xfrm>
+          <a:prstGeom prst="rect">
+            <a:avLst/>
+          </a:prstGeom>
+          <a:noFill/>
+        </p:spPr>
+        <p:txBody>
+          <a:bodyPr wrap="square">
+            <a:spAutoFit/>
+          </a:bodyPr>
+          <a:lstStyle/>
+          <a:p>
+            <a:pPr algn="l">
+              <a:lnSpc>
+                <a:spcPct val="100000"/>
+              </a:lnSpc>
+            </a:pPr>
+            <a:r>
+              <a:rPr sz="1900" b="1" i="0">
+                <a:solidFill>
+                  <a:srgbClr val="104A43"/>
+                </a:solidFill>
+                <a:latin typeface="Segoe UI"/>
+              </a:rPr>
+              <a:t>HELD LOYAL</a:t>
+            </a:r>
+          </a:p>
+        </p:txBody>
+      </p:sp>
+      <p:sp>
+        <p:nvSpPr>
+          <p:cNvPr id="13" name="TextBox 12"/>
+          <p:cNvSpPr txBox="1"/>
+          <p:nvPr/>
+        </p:nvSpPr>
+        <p:spPr>
+          <a:xfrm>
+            <a:off x="9061704" y="2926080"/>
+            <a:ext cx="2606040" cy="1828800"/>
+          </a:xfrm>
+          <a:prstGeom prst="rect">
+            <a:avLst/>
+          </a:prstGeom>
+          <a:noFill/>
+        </p:spPr>
+        <p:txBody>
+          <a:bodyPr wrap="square">
+            <a:spAutoFit/>
+          </a:bodyPr>
+          <a:lstStyle/>
+          <a:p>
+            <a:pPr algn="l">
+              <a:lnSpc>
+                <a:spcPct val="140000"/>
+              </a:lnSpc>
+            </a:pPr>
+            <a:r>
+              <a:rPr sz="1700" b="0" i="0">
+                <a:solidFill>
+                  <a:srgbClr val="1C2321"/>
+                </a:solidFill>
+                <a:latin typeface="Georgia"/>
+              </a:rPr>
+              <a:t>Quraysh · Thaqif</a:t>
+            </a:r>
+          </a:p>
+          <a:p>
+            <a:pPr algn="l">
+              <a:lnSpc>
+                <a:spcPct val="140000"/>
+              </a:lnSpc>
+            </a:pPr>
+            <a:r>
+              <a:rPr sz="1700" b="0" i="0">
+                <a:solidFill>
+                  <a:srgbClr val="1C2321"/>
+                </a:solidFill>
+                <a:latin typeface="Georgia"/>
+              </a:rPr>
+              <a:t>Aws and Khazraj</a:t>
+            </a:r>
+          </a:p>
+          <a:p>
+            <a:pPr algn="l">
+              <a:lnSpc>
+                <a:spcPct val="140000"/>
+              </a:lnSpc>
+            </a:pPr>
+            <a:r>
+              <a:rPr sz="1700" b="0" i="0">
+                <a:solidFill>
+                  <a:srgbClr val="1C2321"/>
+                </a:solidFill>
+                <a:latin typeface="Georgia"/>
+              </a:rPr>
+              <a:t>Tayyi · Abd al-Qays</a:t>
+            </a:r>
+          </a:p>
+        </p:txBody>
+      </p:sp>
+      <p:sp>
+        <p:nvSpPr>
+          <p:cNvPr id="14" name="TextBox 13"/>
+          <p:cNvSpPr txBox="1"/>
+          <p:nvPr/>
+        </p:nvSpPr>
+        <p:spPr>
+          <a:xfrm>
+            <a:off x="777240" y="5029200"/>
+            <a:ext cx="10607040" cy="548640"/>
+          </a:xfrm>
+          <a:prstGeom prst="rect">
+            <a:avLst/>
+          </a:prstGeom>
+          <a:noFill/>
+        </p:spPr>
+        <p:txBody>
+          <a:bodyPr wrap="square">
+            <a:spAutoFit/>
+          </a:bodyPr>
+          <a:lstStyle/>
+          <a:p>
+            <a:pPr algn="l">
+              <a:lnSpc>
+                <a:spcPct val="100000"/>
+              </a:lnSpc>
+            </a:pPr>
+            <a:r>
+              <a:rPr sz="2000" b="0" i="1">
+                <a:solidFill>
+                  <a:srgbClr val="7A2E2E"/>
+                </a:solidFill>
+                <a:latin typeface="Georgia"/>
+              </a:rPr>
+              <a:t>Only the first group left Islam. That distinction is the whole evening.</a:t>
             </a:r>
           </a:p>
         </p:txBody>
@@ -5334,7 +6207,7 @@
                 </a:solidFill>
                 <a:latin typeface="Segoe UI"/>
               </a:rPr>
-              <a:t>WHO YOU ARE MEETING</a:t>
+              <a:t>SIXTY NIGHTS AFTER THE PROPHET’S PASSING</a:t>
             </a:r>
           </a:p>
         </p:txBody>
@@ -5347,8 +6220,47 @@
         </p:nvSpPr>
         <p:spPr>
           <a:xfrm>
-            <a:off x="777240" y="960120"/>
-            <a:ext cx="7680960" cy="822960"/>
+            <a:off x="822960" y="1965960"/>
+            <a:ext cx="10515600" cy="2011680"/>
+          </a:xfrm>
+          <a:prstGeom prst="rect">
+            <a:avLst/>
+          </a:prstGeom>
+          <a:noFill/>
+        </p:spPr>
+        <p:txBody>
+          <a:bodyPr wrap="square" anchor="ctr">
+            <a:spAutoFit/>
+          </a:bodyPr>
+          <a:lstStyle/>
+          <a:p>
+            <a:pPr algn="l">
+              <a:lnSpc>
+                <a:spcPct val="120000"/>
+              </a:lnSpc>
+            </a:pPr>
+            <a:r>
+              <a:rPr sz="5200" b="0" i="0">
+                <a:solidFill>
+                  <a:srgbClr val="104A43"/>
+                </a:solidFill>
+                <a:latin typeface="Georgia"/>
+              </a:rPr>
+              <a:t>Three zakat caravans reach Madina in one night.</a:t>
+            </a:r>
+          </a:p>
+        </p:txBody>
+      </p:sp>
+      <p:sp>
+        <p:nvSpPr>
+          <p:cNvPr id="5" name="TextBox 4"/>
+          <p:cNvSpPr txBox="1"/>
+          <p:nvPr/>
+        </p:nvSpPr>
+        <p:spPr>
+          <a:xfrm>
+            <a:off x="822960" y="4160520"/>
+            <a:ext cx="10515600" cy="914400"/>
           </a:xfrm>
           <a:prstGeom prst="rect">
             <a:avLst/>
@@ -5363,332 +6275,45 @@
           <a:p>
             <a:pPr algn="l">
               <a:lnSpc>
-                <a:spcPct val="100000"/>
-              </a:lnSpc>
-            </a:pPr>
-            <a:r>
-              <a:rPr sz="4000" b="0" i="0">
-                <a:solidFill>
-                  <a:srgbClr val="104A43"/>
+                <a:spcPct val="130000"/>
+              </a:lnSpc>
+            </a:pPr>
+            <a:r>
+              <a:rPr sz="2300" b="0" i="1">
+                <a:solidFill>
+                  <a:srgbClr val="5A6862"/>
                 </a:solidFill>
                 <a:latin typeface="Georgia"/>
               </a:rPr>
-              <a:t>Abu Bakr al-Siddiq</a:t>
-            </a:r>
-          </a:p>
-        </p:txBody>
-      </p:sp>
-      <p:sp>
-        <p:nvSpPr>
-          <p:cNvPr id="5" name="TextBox 4"/>
-          <p:cNvSpPr txBox="1"/>
-          <p:nvPr/>
-        </p:nvSpPr>
-        <p:spPr>
-          <a:xfrm>
-            <a:off x="7863840" y="914400"/>
-            <a:ext cx="3566160" cy="822960"/>
-          </a:xfrm>
-          <a:prstGeom prst="rect">
-            <a:avLst/>
-          </a:prstGeom>
-          <a:noFill/>
-        </p:spPr>
-        <p:txBody>
-          <a:bodyPr wrap="square">
-            <a:spAutoFit/>
-          </a:bodyPr>
-          <a:lstStyle/>
-          <a:p>
-            <a:pPr algn="r" rtl="1">
-              <a:lnSpc>
-                <a:spcPct val="190000"/>
-              </a:lnSpc>
-            </a:pPr>
-            <a:r>
-              <a:rPr sz="3000" b="0" i="0">
-                <a:solidFill>
-                  <a:srgbClr val="104A43"/>
-                </a:solidFill>
-                <a:latin typeface="Noto Nastaliq Urdu"/>
-                <a:cs typeface="Noto Nastaliq Urdu"/>
-              </a:rPr>
-              <a:t>سیدنا ابوبکر الصدیق ؓ</a:t>
-            </a:r>
-          </a:p>
-        </p:txBody>
-      </p:sp>
-      <p:sp>
-        <p:nvSpPr>
-          <p:cNvPr id="6" name="TextBox 5"/>
-          <p:cNvSpPr txBox="1"/>
-          <p:nvPr/>
-        </p:nvSpPr>
-        <p:spPr>
-          <a:xfrm>
-            <a:off x="777240" y="2633472"/>
-            <a:ext cx="10607040" cy="411480"/>
-          </a:xfrm>
-          <a:prstGeom prst="rect">
-            <a:avLst/>
-          </a:prstGeom>
-          <a:noFill/>
-        </p:spPr>
-        <p:txBody>
-          <a:bodyPr wrap="square">
-            <a:spAutoFit/>
-          </a:bodyPr>
-          <a:lstStyle/>
-          <a:p>
-            <a:pPr algn="l">
-              <a:lnSpc>
-                <a:spcPct val="100000"/>
-              </a:lnSpc>
-            </a:pPr>
-            <a:r>
-              <a:rPr sz="1500" b="1" i="0">
-                <a:solidFill>
-                  <a:srgbClr val="5A6862"/>
-                </a:solidFill>
-                <a:latin typeface="Segoe UI"/>
-              </a:rPr>
-              <a:t>FIRST CALIPH  ·  632 – 634</a:t>
-            </a:r>
-          </a:p>
-        </p:txBody>
-      </p:sp>
-      <p:sp>
-        <p:nvSpPr>
-          <p:cNvPr id="7" name="TextBox 6"/>
-          <p:cNvSpPr txBox="1"/>
-          <p:nvPr/>
-        </p:nvSpPr>
-        <p:spPr>
-          <a:xfrm>
-            <a:off x="777240" y="3108960"/>
-            <a:ext cx="10607040" cy="1188720"/>
-          </a:xfrm>
-          <a:prstGeom prst="rect">
-            <a:avLst/>
-          </a:prstGeom>
-          <a:noFill/>
-        </p:spPr>
-        <p:txBody>
-          <a:bodyPr wrap="square">
-            <a:spAutoFit/>
-          </a:bodyPr>
-          <a:lstStyle/>
-          <a:p>
-            <a:pPr algn="l">
-              <a:lnSpc>
-                <a:spcPct val="130000"/>
-              </a:lnSpc>
-            </a:pPr>
-            <a:r>
-              <a:rPr sz="2200" b="0" i="0">
-                <a:solidFill>
-                  <a:srgbClr val="1C2321"/>
-                </a:solidFill>
-                <a:latin typeface="Georgia"/>
-              </a:rPr>
-              <a:t>Held the community together when much of Arabia broke away, and had the Qur’an gathered</a:t>
-            </a:r>
-          </a:p>
-          <a:p>
-            <a:pPr algn="l">
-              <a:lnSpc>
-                <a:spcPct val="130000"/>
-              </a:lnSpc>
-            </a:pPr>
-            <a:r>
-              <a:rPr sz="2200" b="0" i="0">
-                <a:solidFill>
-                  <a:srgbClr val="1C2321"/>
-                </a:solidFill>
-                <a:latin typeface="Georgia"/>
-              </a:rPr>
-              <a:t>into a single written collection.</a:t>
-            </a:r>
-          </a:p>
-        </p:txBody>
-      </p:sp>
-      <p:sp>
-        <p:nvSpPr>
-          <p:cNvPr id="8" name="Rectangle 7"/>
-          <p:cNvSpPr/>
-          <p:nvPr/>
-        </p:nvSpPr>
-        <p:spPr>
-          <a:xfrm>
-            <a:off x="777240" y="4315968"/>
-            <a:ext cx="1463040" cy="25400"/>
-          </a:xfrm>
-          <a:prstGeom prst="rect">
-            <a:avLst/>
-          </a:prstGeom>
-          <a:solidFill>
-            <a:srgbClr val="C49A45"/>
-          </a:solidFill>
-          <a:ln>
-            <a:noFill/>
-          </a:ln>
-          <a:effectLst/>
-        </p:spPr>
-        <p:style>
-          <a:lnRef idx="1">
-            <a:schemeClr val="accent1"/>
-          </a:lnRef>
-          <a:fillRef idx="3">
-            <a:schemeClr val="accent1"/>
-          </a:fillRef>
-          <a:effectRef idx="2">
-            <a:schemeClr val="accent1"/>
-          </a:effectRef>
-          <a:fontRef idx="minor">
-            <a:schemeClr val="lt1"/>
-          </a:fontRef>
-        </p:style>
-        <p:txBody>
-          <a:bodyPr rtlCol="0" anchor="ctr"/>
-          <a:lstStyle/>
-          <a:p>
-            <a:pPr algn="ctr"/>
-          </a:p>
-        </p:txBody>
-      </p:sp>
-      <p:sp>
-        <p:nvSpPr>
-          <p:cNvPr id="9" name="TextBox 8"/>
-          <p:cNvSpPr txBox="1"/>
-          <p:nvPr/>
-        </p:nvSpPr>
-        <p:spPr>
-          <a:xfrm>
-            <a:off x="777240" y="4480560"/>
-            <a:ext cx="3657600" cy="320040"/>
-          </a:xfrm>
-          <a:prstGeom prst="rect">
-            <a:avLst/>
-          </a:prstGeom>
-          <a:noFill/>
-        </p:spPr>
-        <p:txBody>
-          <a:bodyPr wrap="square">
-            <a:spAutoFit/>
-          </a:bodyPr>
-          <a:lstStyle/>
-          <a:p>
-            <a:pPr algn="l">
-              <a:lnSpc>
-                <a:spcPct val="100000"/>
-              </a:lnSpc>
-            </a:pPr>
-            <a:r>
-              <a:rPr sz="1100" b="1" i="0">
-                <a:solidFill>
-                  <a:srgbClr val="5A6862"/>
-                </a:solidFill>
-                <a:latin typeface="Segoe UI"/>
-              </a:rPr>
-              <a:t>ONE INCIDENT</a:t>
-            </a:r>
-          </a:p>
-        </p:txBody>
-      </p:sp>
-      <p:sp>
-        <p:nvSpPr>
-          <p:cNvPr id="10" name="TextBox 9"/>
-          <p:cNvSpPr txBox="1"/>
-          <p:nvPr/>
-        </p:nvSpPr>
-        <p:spPr>
-          <a:xfrm>
-            <a:off x="777240" y="4809744"/>
-            <a:ext cx="10607040" cy="1143000"/>
-          </a:xfrm>
-          <a:prstGeom prst="rect">
-            <a:avLst/>
-          </a:prstGeom>
-          <a:noFill/>
-        </p:spPr>
-        <p:txBody>
-          <a:bodyPr wrap="square">
-            <a:spAutoFit/>
-          </a:bodyPr>
-          <a:lstStyle/>
-          <a:p>
-            <a:pPr algn="l">
-              <a:lnSpc>
-                <a:spcPct val="130000"/>
-              </a:lnSpc>
-            </a:pPr>
-            <a:r>
-              <a:rPr sz="2000" b="0" i="1">
-                <a:solidFill>
-                  <a:srgbClr val="0A322E"/>
-                </a:solidFill>
-                <a:latin typeface="Georgia"/>
-              </a:rPr>
-              <a:t>He accepted Islam owning forty thousand dinars — and the Prophet ﷺ said: “No wealth ever</a:t>
-            </a:r>
-          </a:p>
-          <a:p>
-            <a:pPr algn="l">
-              <a:lnSpc>
-                <a:spcPct val="130000"/>
-              </a:lnSpc>
-            </a:pPr>
-            <a:r>
-              <a:rPr sz="2000" b="0" i="1">
-                <a:solidFill>
-                  <a:srgbClr val="0A322E"/>
-                </a:solidFill>
-                <a:latin typeface="Georgia"/>
-              </a:rPr>
-              <a:t>benefited me as Abu Bakr’s wealth benefited me.”</a:t>
-            </a:r>
-          </a:p>
-        </p:txBody>
-      </p:sp>
-      <p:sp>
-        <p:nvSpPr>
-          <p:cNvPr id="11" name="TextBox 10"/>
-          <p:cNvSpPr txBox="1"/>
-          <p:nvPr/>
-        </p:nvSpPr>
-        <p:spPr>
-          <a:xfrm>
-            <a:off x="777240" y="6053328"/>
-            <a:ext cx="10607040" cy="365760"/>
-          </a:xfrm>
-          <a:prstGeom prst="rect">
-            <a:avLst/>
-          </a:prstGeom>
-          <a:noFill/>
-        </p:spPr>
-        <p:txBody>
-          <a:bodyPr wrap="square">
-            <a:spAutoFit/>
-          </a:bodyPr>
-          <a:lstStyle/>
-          <a:p>
-            <a:pPr algn="l">
-              <a:lnSpc>
-                <a:spcPct val="100000"/>
-              </a:lnSpc>
-            </a:pPr>
-            <a:r>
-              <a:rPr sz="1200" b="0" i="0">
-                <a:solidFill>
-                  <a:srgbClr val="104A43"/>
-                </a:solidFill>
-                <a:latin typeface="Segoe UI"/>
-              </a:rPr>
-              <a:t>SIYAR A'LAM AL-NUBALA, Rashidun p. 8  ·  the figure is from Urwa ibn al-Zubayr</a:t>
-            </a:r>
-          </a:p>
-        </p:txBody>
-      </p:sp>
+              <a:t>Announced by the same men who had been standing guard on the passes.</a:t>
+            </a:r>
+          </a:p>
+        </p:txBody>
+      </p:sp>
+      <p:pic>
+        <p:nvPicPr>
+          <p:cNvPr id="6" name="Picture 5" descr="line_s2.png"/>
+          <p:cNvPicPr>
+            <a:picLocks noChangeAspect="1"/>
+          </p:cNvPicPr>
+          <p:nvPr/>
+        </p:nvPicPr>
+        <p:blipFill>
+          <a:blip r:embed="rId2"/>
+          <a:stretch>
+            <a:fillRect/>
+          </a:stretch>
+        </p:blipFill>
+        <p:spPr>
+          <a:xfrm>
+            <a:off x="548640" y="6053328"/>
+            <a:ext cx="11091672" cy="1170788"/>
+          </a:xfrm>
+          <a:prstGeom prst="rect">
+            <a:avLst/>
+          </a:prstGeom>
+        </p:spPr>
+      </p:pic>
     </p:spTree>
   </p:cSld>
   <p:clrMapOvr>
@@ -5751,140 +6376,46 @@
           </a:p>
         </p:txBody>
       </p:sp>
-      <p:sp>
-        <p:nvSpPr>
-          <p:cNvPr id="3" name="TextBox 2"/>
-          <p:cNvSpPr txBox="1"/>
-          <p:nvPr/>
-        </p:nvSpPr>
-        <p:spPr>
-          <a:xfrm>
-            <a:off x="777240" y="420624"/>
-            <a:ext cx="8229600" cy="365760"/>
-          </a:xfrm>
-          <a:prstGeom prst="rect">
-            <a:avLst/>
-          </a:prstGeom>
-          <a:noFill/>
-        </p:spPr>
-        <p:txBody>
-          <a:bodyPr wrap="square">
-            <a:spAutoFit/>
-          </a:bodyPr>
-          <a:lstStyle/>
-          <a:p>
-            <a:pPr algn="l">
-              <a:lnSpc>
-                <a:spcPct val="100000"/>
-              </a:lnSpc>
-            </a:pPr>
-            <a:r>
-              <a:rPr sz="1200" b="1" i="0">
-                <a:solidFill>
-                  <a:srgbClr val="104A43"/>
-                </a:solidFill>
-                <a:latin typeface="Segoe UI"/>
-              </a:rPr>
-              <a:t>WHO YOU ARE MEETING</a:t>
-            </a:r>
-          </a:p>
-        </p:txBody>
-      </p:sp>
-      <p:sp>
-        <p:nvSpPr>
-          <p:cNvPr id="4" name="TextBox 3"/>
-          <p:cNvSpPr txBox="1"/>
-          <p:nvPr/>
-        </p:nvSpPr>
-        <p:spPr>
-          <a:xfrm>
-            <a:off x="777240" y="960120"/>
-            <a:ext cx="7680960" cy="822960"/>
-          </a:xfrm>
-          <a:prstGeom prst="rect">
-            <a:avLst/>
-          </a:prstGeom>
-          <a:noFill/>
-        </p:spPr>
-        <p:txBody>
-          <a:bodyPr wrap="square">
-            <a:spAutoFit/>
-          </a:bodyPr>
-          <a:lstStyle/>
-          <a:p>
-            <a:pPr algn="l">
-              <a:lnSpc>
-                <a:spcPct val="100000"/>
-              </a:lnSpc>
-            </a:pPr>
-            <a:r>
-              <a:rPr sz="4000" b="0" i="0">
-                <a:solidFill>
-                  <a:srgbClr val="104A43"/>
-                </a:solidFill>
-                <a:latin typeface="Georgia"/>
-              </a:rPr>
-              <a:t>Khalid ibn al-Walid</a:t>
-            </a:r>
-          </a:p>
-        </p:txBody>
-      </p:sp>
-      <p:sp>
-        <p:nvSpPr>
-          <p:cNvPr id="5" name="TextBox 4"/>
-          <p:cNvSpPr txBox="1"/>
-          <p:nvPr/>
-        </p:nvSpPr>
-        <p:spPr>
-          <a:xfrm>
-            <a:off x="7863840" y="914400"/>
-            <a:ext cx="3566160" cy="822960"/>
-          </a:xfrm>
-          <a:prstGeom prst="rect">
-            <a:avLst/>
-          </a:prstGeom>
-          <a:noFill/>
-        </p:spPr>
-        <p:txBody>
-          <a:bodyPr wrap="square">
-            <a:spAutoFit/>
-          </a:bodyPr>
-          <a:lstStyle/>
-          <a:p>
-            <a:pPr algn="r" rtl="1">
-              <a:lnSpc>
-                <a:spcPct val="190000"/>
-              </a:lnSpc>
-            </a:pPr>
-            <a:r>
-              <a:rPr sz="3000" b="0" i="0">
-                <a:solidFill>
-                  <a:srgbClr val="104A43"/>
-                </a:solidFill>
-                <a:latin typeface="Noto Nastaliq Urdu"/>
-                <a:cs typeface="Noto Nastaliq Urdu"/>
-              </a:rPr>
-              <a:t>سیدنا خالد بن الولید ؓ</a:t>
-            </a:r>
-          </a:p>
-        </p:txBody>
-      </p:sp>
-      <p:sp>
-        <p:nvSpPr>
-          <p:cNvPr id="6" name="Rectangle 5"/>
+      <p:pic>
+        <p:nvPicPr>
+          <p:cNvPr id="3" name="Picture 2" descr="map_s2_twelve.png"/>
+          <p:cNvPicPr>
+            <a:picLocks noChangeAspect="1"/>
+          </p:cNvPicPr>
+          <p:nvPr/>
+        </p:nvPicPr>
+        <p:blipFill>
+          <a:blip r:embed="rId2"/>
+          <a:stretch>
+            <a:fillRect/>
+          </a:stretch>
+        </p:blipFill>
+        <p:spPr>
+          <a:xfrm>
+            <a:off x="513956" y="868680"/>
+            <a:ext cx="11163782" cy="5879592"/>
+          </a:xfrm>
+          <a:prstGeom prst="rect">
+            <a:avLst/>
+          </a:prstGeom>
+        </p:spPr>
+      </p:pic>
+      <p:sp>
+        <p:nvSpPr>
+          <p:cNvPr id="4" name="Rectangle 3"/>
           <p:cNvSpPr/>
           <p:nvPr/>
         </p:nvSpPr>
         <p:spPr>
           <a:xfrm>
-            <a:off x="777240" y="1810512"/>
-            <a:ext cx="10607040" cy="566928"/>
+            <a:off x="0" y="0"/>
+            <a:ext cx="12191695" cy="868680"/>
           </a:xfrm>
           <a:prstGeom prst="rect">
             <a:avLst/>
           </a:prstGeom>
           <a:solidFill>
-            <a:srgbClr val="C49A45"/>
+            <a:srgbClr val="0A322E"/>
           </a:solidFill>
           <a:ln>
             <a:noFill/>
@@ -5915,14 +6446,14 @@
       </p:sp>
       <p:sp>
         <p:nvSpPr>
-          <p:cNvPr id="7" name="TextBox 6"/>
+          <p:cNvPr id="5" name="TextBox 4"/>
           <p:cNvSpPr txBox="1"/>
           <p:nvPr/>
         </p:nvSpPr>
         <p:spPr>
           <a:xfrm>
-            <a:off x="960120" y="1883664"/>
-            <a:ext cx="6400800" cy="457200"/>
+            <a:off x="640080" y="146304"/>
+            <a:ext cx="7863840" cy="640080"/>
           </a:xfrm>
           <a:prstGeom prst="rect">
             <a:avLst/>
@@ -5941,27 +6472,27 @@
               </a:lnSpc>
             </a:pPr>
             <a:r>
-              <a:rPr sz="1900" b="1" i="0">
-                <a:solidFill>
-                  <a:srgbClr val="0A322E"/>
-                </a:solidFill>
-                <a:latin typeface="Segoe UI"/>
-              </a:rPr>
-              <a:t>SAYF ALLAH — the Sword of God</a:t>
-            </a:r>
-          </a:p>
-        </p:txBody>
-      </p:sp>
-      <p:sp>
-        <p:nvSpPr>
-          <p:cNvPr id="8" name="TextBox 7"/>
+              <a:rPr sz="3000" b="0" i="0">
+                <a:solidFill>
+                  <a:srgbClr val="FAF7F0"/>
+                </a:solidFill>
+                <a:latin typeface="Georgia"/>
+              </a:rPr>
+              <a:t>Then outward</a:t>
+            </a:r>
+          </a:p>
+        </p:txBody>
+      </p:sp>
+      <p:sp>
+        <p:nvSpPr>
+          <p:cNvPr id="6" name="TextBox 5"/>
           <p:cNvSpPr txBox="1"/>
           <p:nvPr/>
         </p:nvSpPr>
         <p:spPr>
           <a:xfrm>
-            <a:off x="7315200" y="1828800"/>
-            <a:ext cx="3931920" cy="502920"/>
+            <a:off x="8595360" y="256032"/>
+            <a:ext cx="3017520" cy="457200"/>
           </a:xfrm>
           <a:prstGeom prst="rect">
             <a:avLst/>
@@ -5974,275 +6505,19 @@
           </a:bodyPr>
           <a:lstStyle/>
           <a:p>
-            <a:pPr algn="r" rtl="1">
-              <a:lnSpc>
-                <a:spcPct val="170000"/>
-              </a:lnSpc>
-            </a:pPr>
-            <a:r>
-              <a:rPr sz="2000" b="0" i="0">
-                <a:solidFill>
-                  <a:srgbClr val="0A322E"/>
-                </a:solidFill>
-                <a:latin typeface="Noto Nastaliq Urdu"/>
-                <a:cs typeface="Noto Nastaliq Urdu"/>
-              </a:rPr>
-              <a:t>سیف اللہ</a:t>
-            </a:r>
-          </a:p>
-        </p:txBody>
-      </p:sp>
-      <p:sp>
-        <p:nvSpPr>
-          <p:cNvPr id="9" name="TextBox 8"/>
-          <p:cNvSpPr txBox="1"/>
-          <p:nvPr/>
-        </p:nvSpPr>
-        <p:spPr>
-          <a:xfrm>
-            <a:off x="777240" y="2633472"/>
-            <a:ext cx="10607040" cy="411480"/>
-          </a:xfrm>
-          <a:prstGeom prst="rect">
-            <a:avLst/>
-          </a:prstGeom>
-          <a:noFill/>
-        </p:spPr>
-        <p:txBody>
-          <a:bodyPr wrap="square">
-            <a:spAutoFit/>
-          </a:bodyPr>
-          <a:lstStyle/>
-          <a:p>
-            <a:pPr algn="l">
+            <a:pPr algn="r">
               <a:lnSpc>
                 <a:spcPct val="100000"/>
               </a:lnSpc>
             </a:pPr>
             <a:r>
-              <a:rPr sz="1500" b="1" i="0">
-                <a:solidFill>
-                  <a:srgbClr val="5A6862"/>
+              <a:rPr sz="1500" b="0" i="0">
+                <a:solidFill>
+                  <a:srgbClr val="C49A45"/>
                 </a:solidFill>
                 <a:latin typeface="Segoe UI"/>
               </a:rPr>
-              <a:t>MIGRATED AS A MUSLIM, SAFAR 8 AH  ·  COMMANDER, RIDDA AND SYRIA</a:t>
-            </a:r>
-          </a:p>
-        </p:txBody>
-      </p:sp>
-      <p:sp>
-        <p:nvSpPr>
-          <p:cNvPr id="10" name="TextBox 9"/>
-          <p:cNvSpPr txBox="1"/>
-          <p:nvPr/>
-        </p:nvSpPr>
-        <p:spPr>
-          <a:xfrm>
-            <a:off x="777240" y="3108960"/>
-            <a:ext cx="10607040" cy="1188720"/>
-          </a:xfrm>
-          <a:prstGeom prst="rect">
-            <a:avLst/>
-          </a:prstGeom>
-          <a:noFill/>
-        </p:spPr>
-        <p:txBody>
-          <a:bodyPr wrap="square">
-            <a:spAutoFit/>
-          </a:bodyPr>
-          <a:lstStyle/>
-          <a:p>
-            <a:pPr algn="l">
-              <a:lnSpc>
-                <a:spcPct val="130000"/>
-              </a:lnSpc>
-            </a:pPr>
-            <a:r>
-              <a:rPr sz="2200" b="0" i="0">
-                <a:solidFill>
-                  <a:srgbClr val="1C2321"/>
-                </a:solidFill>
-                <a:latin typeface="Georgia"/>
-              </a:rPr>
-              <a:t>Commanded the Ridda campaigns, then the Syrian front through to Yarmuk.</a:t>
-            </a:r>
-          </a:p>
-        </p:txBody>
-      </p:sp>
-      <p:sp>
-        <p:nvSpPr>
-          <p:cNvPr id="11" name="Rectangle 10"/>
-          <p:cNvSpPr/>
-          <p:nvPr/>
-        </p:nvSpPr>
-        <p:spPr>
-          <a:xfrm>
-            <a:off x="777240" y="4315968"/>
-            <a:ext cx="1463040" cy="25400"/>
-          </a:xfrm>
-          <a:prstGeom prst="rect">
-            <a:avLst/>
-          </a:prstGeom>
-          <a:solidFill>
-            <a:srgbClr val="C49A45"/>
-          </a:solidFill>
-          <a:ln>
-            <a:noFill/>
-          </a:ln>
-          <a:effectLst/>
-        </p:spPr>
-        <p:style>
-          <a:lnRef idx="1">
-            <a:schemeClr val="accent1"/>
-          </a:lnRef>
-          <a:fillRef idx="3">
-            <a:schemeClr val="accent1"/>
-          </a:fillRef>
-          <a:effectRef idx="2">
-            <a:schemeClr val="accent1"/>
-          </a:effectRef>
-          <a:fontRef idx="minor">
-            <a:schemeClr val="lt1"/>
-          </a:fontRef>
-        </p:style>
-        <p:txBody>
-          <a:bodyPr rtlCol="0" anchor="ctr"/>
-          <a:lstStyle/>
-          <a:p>
-            <a:pPr algn="ctr"/>
-          </a:p>
-        </p:txBody>
-      </p:sp>
-      <p:sp>
-        <p:nvSpPr>
-          <p:cNvPr id="12" name="TextBox 11"/>
-          <p:cNvSpPr txBox="1"/>
-          <p:nvPr/>
-        </p:nvSpPr>
-        <p:spPr>
-          <a:xfrm>
-            <a:off x="777240" y="4480560"/>
-            <a:ext cx="3657600" cy="320040"/>
-          </a:xfrm>
-          <a:prstGeom prst="rect">
-            <a:avLst/>
-          </a:prstGeom>
-          <a:noFill/>
-        </p:spPr>
-        <p:txBody>
-          <a:bodyPr wrap="square">
-            <a:spAutoFit/>
-          </a:bodyPr>
-          <a:lstStyle/>
-          <a:p>
-            <a:pPr algn="l">
-              <a:lnSpc>
-                <a:spcPct val="100000"/>
-              </a:lnSpc>
-            </a:pPr>
-            <a:r>
-              <a:rPr sz="1100" b="1" i="0">
-                <a:solidFill>
-                  <a:srgbClr val="5A6862"/>
-                </a:solidFill>
-                <a:latin typeface="Segoe UI"/>
-              </a:rPr>
-              <a:t>ONE INCIDENT</a:t>
-            </a:r>
-          </a:p>
-        </p:txBody>
-      </p:sp>
-      <p:sp>
-        <p:nvSpPr>
-          <p:cNvPr id="13" name="TextBox 12"/>
-          <p:cNvSpPr txBox="1"/>
-          <p:nvPr/>
-        </p:nvSpPr>
-        <p:spPr>
-          <a:xfrm>
-            <a:off x="777240" y="4809744"/>
-            <a:ext cx="10607040" cy="1143000"/>
-          </a:xfrm>
-          <a:prstGeom prst="rect">
-            <a:avLst/>
-          </a:prstGeom>
-          <a:noFill/>
-        </p:spPr>
-        <p:txBody>
-          <a:bodyPr wrap="square">
-            <a:spAutoFit/>
-          </a:bodyPr>
-          <a:lstStyle/>
-          <a:p>
-            <a:pPr algn="l">
-              <a:lnSpc>
-                <a:spcPct val="130000"/>
-              </a:lnSpc>
-            </a:pPr>
-            <a:r>
-              <a:rPr sz="2000" b="0" i="1">
-                <a:solidFill>
-                  <a:srgbClr val="0A322E"/>
-                </a:solidFill>
-                <a:latin typeface="Georgia"/>
-              </a:rPr>
-              <a:t>At Mu’ta all three commanders the Prophet ﷺ had appointed were killed — Zayd, Ja’far, and</a:t>
-            </a:r>
-          </a:p>
-          <a:p>
-            <a:pPr algn="l">
-              <a:lnSpc>
-                <a:spcPct val="130000"/>
-              </a:lnSpc>
-            </a:pPr>
-            <a:r>
-              <a:rPr sz="2000" b="0" i="1">
-                <a:solidFill>
-                  <a:srgbClr val="0A322E"/>
-                </a:solidFill>
-                <a:latin typeface="Georgia"/>
-              </a:rPr>
-              <a:t>Ibn Rawaha. The army stood with no commander. He took the banner on the spot, and the victory came.</a:t>
-            </a:r>
-          </a:p>
-        </p:txBody>
-      </p:sp>
-      <p:sp>
-        <p:nvSpPr>
-          <p:cNvPr id="14" name="TextBox 13"/>
-          <p:cNvSpPr txBox="1"/>
-          <p:nvPr/>
-        </p:nvSpPr>
-        <p:spPr>
-          <a:xfrm>
-            <a:off x="777240" y="6053328"/>
-            <a:ext cx="10607040" cy="365760"/>
-          </a:xfrm>
-          <a:prstGeom prst="rect">
-            <a:avLst/>
-          </a:prstGeom>
-          <a:noFill/>
-        </p:spPr>
-        <p:txBody>
-          <a:bodyPr wrap="square">
-            <a:spAutoFit/>
-          </a:bodyPr>
-          <a:lstStyle/>
-          <a:p>
-            <a:pPr algn="l">
-              <a:lnSpc>
-                <a:spcPct val="100000"/>
-              </a:lnSpc>
-            </a:pPr>
-            <a:r>
-              <a:rPr sz="1200" b="0" i="0">
-                <a:solidFill>
-                  <a:srgbClr val="104A43"/>
-                </a:solidFill>
-                <a:latin typeface="Segoe UI"/>
-              </a:rPr>
-              <a:t>SIYAR A'LAM AL-NUBALA, vol. 1 p. 366</a:t>
+              <a:t>632 – 644</a:t>
             </a:r>
           </a:p>
         </p:txBody>
@@ -6343,7 +6618,7 @@
                 </a:solidFill>
                 <a:latin typeface="Segoe UI"/>
               </a:rPr>
-              <a:t>WHO YOU ARE MEETING</a:t>
+              <a:t>WHAT THEY SAID THEY WERE FOR</a:t>
             </a:r>
           </a:p>
         </p:txBody>
@@ -6356,8 +6631,8 @@
         </p:nvSpPr>
         <p:spPr>
           <a:xfrm>
-            <a:off x="777240" y="960120"/>
-            <a:ext cx="7680960" cy="822960"/>
+            <a:off x="640080" y="1325880"/>
+            <a:ext cx="10881360" cy="1554480"/>
           </a:xfrm>
           <a:prstGeom prst="rect">
             <a:avLst/>
@@ -6370,19 +6645,37 @@
           </a:bodyPr>
           <a:lstStyle/>
           <a:p>
-            <a:pPr algn="l">
-              <a:lnSpc>
-                <a:spcPct val="100000"/>
-              </a:lnSpc>
-            </a:pPr>
-            <a:r>
-              <a:rPr sz="4000" b="0" i="0">
-                <a:solidFill>
-                  <a:srgbClr val="104A43"/>
-                </a:solidFill>
-                <a:latin typeface="Georgia"/>
-              </a:rPr>
-              <a:t>Abu Ubayda ibn al-Jarrah</a:t>
+            <a:pPr algn="r" rtl="1">
+              <a:lnSpc>
+                <a:spcPct val="140000"/>
+              </a:lnSpc>
+            </a:pPr>
+            <a:r>
+              <a:rPr sz="3600" b="0" i="0">
+                <a:solidFill>
+                  <a:srgbClr val="0A322E"/>
+                </a:solidFill>
+                <a:latin typeface="Traditional Arabic"/>
+                <a:cs typeface="Traditional Arabic"/>
+              </a:rPr>
+              <a:t>وَإِخْرَاجُ الْعِبَادِ مِنْ عِبَادَةِ الْعِبَادِ إِلَى عِبَادَةِ اللهِ</a:t>
+            </a:r>
+          </a:p>
+          <a:p>
+            <a:pPr algn="r" rtl="1">
+              <a:lnSpc>
+                <a:spcPct val="140000"/>
+              </a:lnSpc>
+            </a:pPr>
+            <a:r>
+              <a:rPr sz="3600" b="0" i="0">
+                <a:solidFill>
+                  <a:srgbClr val="0A322E"/>
+                </a:solidFill>
+                <a:latin typeface="Traditional Arabic"/>
+                <a:cs typeface="Traditional Arabic"/>
+              </a:rPr>
+              <a:t>وَالنَّاسُ بَنُو آدَمَ، فَهُمْ إِخْوَةٌ لِأَبٍ وَأُمٍّ</a:t>
             </a:r>
           </a:p>
         </p:txBody>
@@ -6395,8 +6688,8 @@
         </p:nvSpPr>
         <p:spPr>
           <a:xfrm>
-            <a:off x="7863840" y="914400"/>
-            <a:ext cx="3566160" cy="822960"/>
+            <a:off x="1188720" y="3017520"/>
+            <a:ext cx="9784080" cy="1371600"/>
           </a:xfrm>
           <a:prstGeom prst="rect">
             <a:avLst/>
@@ -6409,20 +6702,35 @@
           </a:bodyPr>
           <a:lstStyle/>
           <a:p>
-            <a:pPr algn="r" rtl="1">
-              <a:lnSpc>
-                <a:spcPct val="190000"/>
-              </a:lnSpc>
-            </a:pPr>
-            <a:r>
-              <a:rPr sz="3000" b="0" i="0">
-                <a:solidFill>
-                  <a:srgbClr val="104A43"/>
-                </a:solidFill>
-                <a:latin typeface="Noto Nastaliq Urdu"/>
-                <a:cs typeface="Noto Nastaliq Urdu"/>
-              </a:rPr>
-              <a:t>سیدنا ابو عبیدہ بن الجراح ؓ</a:t>
+            <a:pPr algn="ctr">
+              <a:lnSpc>
+                <a:spcPct val="135000"/>
+              </a:lnSpc>
+            </a:pPr>
+            <a:r>
+              <a:rPr sz="2500" b="0" i="1">
+                <a:solidFill>
+                  <a:srgbClr val="1C2321"/>
+                </a:solidFill>
+                <a:latin typeface="Georgia"/>
+              </a:rPr>
+              <a:t>“To bring people out of the worship of servants into the worship of God…</a:t>
+            </a:r>
+          </a:p>
+          <a:p>
+            <a:pPr algn="ctr">
+              <a:lnSpc>
+                <a:spcPct val="135000"/>
+              </a:lnSpc>
+            </a:pPr>
+            <a:r>
+              <a:rPr sz="2500" b="0" i="1">
+                <a:solidFill>
+                  <a:srgbClr val="1C2321"/>
+                </a:solidFill>
+                <a:latin typeface="Georgia"/>
+              </a:rPr>
+              <a:t>and people are the children of Adam — brothers of one father and mother.”</a:t>
             </a:r>
           </a:p>
         </p:txBody>
@@ -6435,8 +6743,8 @@
         </p:nvSpPr>
         <p:spPr>
           <a:xfrm>
-            <a:off x="777240" y="1810512"/>
-            <a:ext cx="10607040" cy="566928"/>
+            <a:off x="5394960" y="4498848"/>
+            <a:ext cx="1371600" cy="19050"/>
           </a:xfrm>
           <a:prstGeom prst="rect">
             <a:avLst/>
@@ -6479,8 +6787,8 @@
         </p:nvSpPr>
         <p:spPr>
           <a:xfrm>
-            <a:off x="960120" y="1883664"/>
-            <a:ext cx="6400800" cy="457200"/>
+            <a:off x="640080" y="4663440"/>
+            <a:ext cx="10881360" cy="457200"/>
           </a:xfrm>
           <a:prstGeom prst="rect">
             <a:avLst/>
@@ -6493,314 +6801,19 @@
           </a:bodyPr>
           <a:lstStyle/>
           <a:p>
-            <a:pPr algn="l">
+            <a:pPr algn="ctr">
               <a:lnSpc>
                 <a:spcPct val="100000"/>
               </a:lnSpc>
             </a:pPr>
             <a:r>
-              <a:rPr sz="1900" b="1" i="0">
-                <a:solidFill>
-                  <a:srgbClr val="0A322E"/>
+              <a:rPr sz="1400" b="0" i="0">
+                <a:solidFill>
+                  <a:srgbClr val="104A43"/>
                 </a:solidFill>
                 <a:latin typeface="Segoe UI"/>
               </a:rPr>
-              <a:t>AMIN AL-UMMA — the Trustee of this Community</a:t>
-            </a:r>
-          </a:p>
-        </p:txBody>
-      </p:sp>
-      <p:sp>
-        <p:nvSpPr>
-          <p:cNvPr id="8" name="TextBox 7"/>
-          <p:cNvSpPr txBox="1"/>
-          <p:nvPr/>
-        </p:nvSpPr>
-        <p:spPr>
-          <a:xfrm>
-            <a:off x="7315200" y="1828800"/>
-            <a:ext cx="3931920" cy="502920"/>
-          </a:xfrm>
-          <a:prstGeom prst="rect">
-            <a:avLst/>
-          </a:prstGeom>
-          <a:noFill/>
-        </p:spPr>
-        <p:txBody>
-          <a:bodyPr wrap="square">
-            <a:spAutoFit/>
-          </a:bodyPr>
-          <a:lstStyle/>
-          <a:p>
-            <a:pPr algn="r" rtl="1">
-              <a:lnSpc>
-                <a:spcPct val="170000"/>
-              </a:lnSpc>
-            </a:pPr>
-            <a:r>
-              <a:rPr sz="2000" b="0" i="0">
-                <a:solidFill>
-                  <a:srgbClr val="0A322E"/>
-                </a:solidFill>
-                <a:latin typeface="Noto Nastaliq Urdu"/>
-                <a:cs typeface="Noto Nastaliq Urdu"/>
-              </a:rPr>
-              <a:t>امین الامۃ</a:t>
-            </a:r>
-          </a:p>
-        </p:txBody>
-      </p:sp>
-      <p:sp>
-        <p:nvSpPr>
-          <p:cNvPr id="9" name="TextBox 8"/>
-          <p:cNvSpPr txBox="1"/>
-          <p:nvPr/>
-        </p:nvSpPr>
-        <p:spPr>
-          <a:xfrm>
-            <a:off x="777240" y="2633472"/>
-            <a:ext cx="10607040" cy="411480"/>
-          </a:xfrm>
-          <a:prstGeom prst="rect">
-            <a:avLst/>
-          </a:prstGeom>
-          <a:noFill/>
-        </p:spPr>
-        <p:txBody>
-          <a:bodyPr wrap="square">
-            <a:spAutoFit/>
-          </a:bodyPr>
-          <a:lstStyle/>
-          <a:p>
-            <a:pPr algn="l">
-              <a:lnSpc>
-                <a:spcPct val="100000"/>
-              </a:lnSpc>
-            </a:pPr>
-            <a:r>
-              <a:rPr sz="1500" b="1" i="0">
-                <a:solidFill>
-                  <a:srgbClr val="5A6862"/>
-                </a:solidFill>
-                <a:latin typeface="Segoe UI"/>
-              </a:rPr>
-              <a:t>COMMANDER IN SYRIA AFTER KHALID</a:t>
-            </a:r>
-          </a:p>
-        </p:txBody>
-      </p:sp>
-      <p:sp>
-        <p:nvSpPr>
-          <p:cNvPr id="10" name="TextBox 9"/>
-          <p:cNvSpPr txBox="1"/>
-          <p:nvPr/>
-        </p:nvSpPr>
-        <p:spPr>
-          <a:xfrm>
-            <a:off x="777240" y="3108960"/>
-            <a:ext cx="10607040" cy="1188720"/>
-          </a:xfrm>
-          <a:prstGeom prst="rect">
-            <a:avLst/>
-          </a:prstGeom>
-          <a:noFill/>
-        </p:spPr>
-        <p:txBody>
-          <a:bodyPr wrap="square">
-            <a:spAutoFit/>
-          </a:bodyPr>
-          <a:lstStyle/>
-          <a:p>
-            <a:pPr algn="l">
-              <a:lnSpc>
-                <a:spcPct val="130000"/>
-              </a:lnSpc>
-            </a:pPr>
-            <a:r>
-              <a:rPr sz="2200" b="0" i="0">
-                <a:solidFill>
-                  <a:srgbClr val="1C2321"/>
-                </a:solidFill>
-                <a:latin typeface="Georgia"/>
-              </a:rPr>
-              <a:t>Narrated few hadith and fought many battles; took Syria after Khalid.</a:t>
-            </a:r>
-          </a:p>
-        </p:txBody>
-      </p:sp>
-      <p:sp>
-        <p:nvSpPr>
-          <p:cNvPr id="11" name="Rectangle 10"/>
-          <p:cNvSpPr/>
-          <p:nvPr/>
-        </p:nvSpPr>
-        <p:spPr>
-          <a:xfrm>
-            <a:off x="777240" y="4315968"/>
-            <a:ext cx="1463040" cy="25400"/>
-          </a:xfrm>
-          <a:prstGeom prst="rect">
-            <a:avLst/>
-          </a:prstGeom>
-          <a:solidFill>
-            <a:srgbClr val="C49A45"/>
-          </a:solidFill>
-          <a:ln>
-            <a:noFill/>
-          </a:ln>
-          <a:effectLst/>
-        </p:spPr>
-        <p:style>
-          <a:lnRef idx="1">
-            <a:schemeClr val="accent1"/>
-          </a:lnRef>
-          <a:fillRef idx="3">
-            <a:schemeClr val="accent1"/>
-          </a:fillRef>
-          <a:effectRef idx="2">
-            <a:schemeClr val="accent1"/>
-          </a:effectRef>
-          <a:fontRef idx="minor">
-            <a:schemeClr val="lt1"/>
-          </a:fontRef>
-        </p:style>
-        <p:txBody>
-          <a:bodyPr rtlCol="0" anchor="ctr"/>
-          <a:lstStyle/>
-          <a:p>
-            <a:pPr algn="ctr"/>
-          </a:p>
-        </p:txBody>
-      </p:sp>
-      <p:sp>
-        <p:nvSpPr>
-          <p:cNvPr id="12" name="TextBox 11"/>
-          <p:cNvSpPr txBox="1"/>
-          <p:nvPr/>
-        </p:nvSpPr>
-        <p:spPr>
-          <a:xfrm>
-            <a:off x="777240" y="4480560"/>
-            <a:ext cx="3657600" cy="320040"/>
-          </a:xfrm>
-          <a:prstGeom prst="rect">
-            <a:avLst/>
-          </a:prstGeom>
-          <a:noFill/>
-        </p:spPr>
-        <p:txBody>
-          <a:bodyPr wrap="square">
-            <a:spAutoFit/>
-          </a:bodyPr>
-          <a:lstStyle/>
-          <a:p>
-            <a:pPr algn="l">
-              <a:lnSpc>
-                <a:spcPct val="100000"/>
-              </a:lnSpc>
-            </a:pPr>
-            <a:r>
-              <a:rPr sz="1100" b="1" i="0">
-                <a:solidFill>
-                  <a:srgbClr val="5A6862"/>
-                </a:solidFill>
-                <a:latin typeface="Segoe UI"/>
-              </a:rPr>
-              <a:t>ONE INCIDENT</a:t>
-            </a:r>
-          </a:p>
-        </p:txBody>
-      </p:sp>
-      <p:sp>
-        <p:nvSpPr>
-          <p:cNvPr id="13" name="TextBox 12"/>
-          <p:cNvSpPr txBox="1"/>
-          <p:nvPr/>
-        </p:nvSpPr>
-        <p:spPr>
-          <a:xfrm>
-            <a:off x="777240" y="4809744"/>
-            <a:ext cx="10607040" cy="1143000"/>
-          </a:xfrm>
-          <a:prstGeom prst="rect">
-            <a:avLst/>
-          </a:prstGeom>
-          <a:noFill/>
-        </p:spPr>
-        <p:txBody>
-          <a:bodyPr wrap="square">
-            <a:spAutoFit/>
-          </a:bodyPr>
-          <a:lstStyle/>
-          <a:p>
-            <a:pPr algn="l">
-              <a:lnSpc>
-                <a:spcPct val="130000"/>
-              </a:lnSpc>
-            </a:pPr>
-            <a:r>
-              <a:rPr sz="2000" b="0" i="1">
-                <a:solidFill>
-                  <a:srgbClr val="0A322E"/>
-                </a:solidFill>
-                <a:latin typeface="Georgia"/>
-              </a:rPr>
-              <a:t>At Saqifa, Abu Bakr himself put his name forward for the succession — “for the completeness</a:t>
-            </a:r>
-          </a:p>
-          <a:p>
-            <a:pPr algn="l">
-              <a:lnSpc>
-                <a:spcPct val="130000"/>
-              </a:lnSpc>
-            </a:pPr>
-            <a:r>
-              <a:rPr sz="2000" b="0" i="1">
-                <a:solidFill>
-                  <a:srgbClr val="0A322E"/>
-                </a:solidFill>
-                <a:latin typeface="Georgia"/>
-              </a:rPr>
-              <a:t>of his fitness”, as al-Dhahabi records it.</a:t>
-            </a:r>
-          </a:p>
-        </p:txBody>
-      </p:sp>
-      <p:sp>
-        <p:nvSpPr>
-          <p:cNvPr id="14" name="TextBox 13"/>
-          <p:cNvSpPr txBox="1"/>
-          <p:nvPr/>
-        </p:nvSpPr>
-        <p:spPr>
-          <a:xfrm>
-            <a:off x="777240" y="6053328"/>
-            <a:ext cx="10607040" cy="365760"/>
-          </a:xfrm>
-          <a:prstGeom prst="rect">
-            <a:avLst/>
-          </a:prstGeom>
-          <a:noFill/>
-        </p:spPr>
-        <p:txBody>
-          <a:bodyPr wrap="square">
-            <a:spAutoFit/>
-          </a:bodyPr>
-          <a:lstStyle/>
-          <a:p>
-            <a:pPr algn="l">
-              <a:lnSpc>
-                <a:spcPct val="100000"/>
-              </a:lnSpc>
-            </a:pPr>
-            <a:r>
-              <a:rPr sz="1200" b="0" i="0">
-                <a:solidFill>
-                  <a:srgbClr val="104A43"/>
-                </a:solidFill>
-                <a:latin typeface="Segoe UI"/>
-              </a:rPr>
-              <a:t>SIYAR A'LAM AL-NUBALA, vol. 1 p. 6</a:t>
+              <a:t>THE ENVOY, IN RUSTAM'S COURT  ·  AL-BIDAYA WA'L-NIHAYA, vol. 7 p. 134</a:t>
             </a:r>
           </a:p>
         </p:txBody>
@@ -6838,7 +6851,7 @@
             <a:avLst/>
           </a:prstGeom>
           <a:solidFill>
-            <a:srgbClr val="FAF7F0"/>
+            <a:srgbClr val="104A43"/>
           </a:solidFill>
           <a:ln>
             <a:noFill/>
@@ -6897,11 +6910,11 @@
             <a:r>
               <a:rPr sz="1200" b="1" i="0">
                 <a:solidFill>
-                  <a:srgbClr val="104A43"/>
+                  <a:srgbClr val="C49A45"/>
                 </a:solidFill>
                 <a:latin typeface="Segoe UI"/>
               </a:rPr>
-              <a:t>HOW DO WE KNOW?</a:t>
+              <a:t>تعارف  ·  WHO YOU ARE MEETING</a:t>
             </a:r>
           </a:p>
         </p:txBody>
@@ -6914,8 +6927,47 @@
         </p:nvSpPr>
         <p:spPr>
           <a:xfrm>
-            <a:off x="777240" y="1280160"/>
-            <a:ext cx="10607040" cy="914400"/>
+            <a:off x="822960" y="1965960"/>
+            <a:ext cx="10515600" cy="2011680"/>
+          </a:xfrm>
+          <a:prstGeom prst="rect">
+            <a:avLst/>
+          </a:prstGeom>
+          <a:noFill/>
+        </p:spPr>
+        <p:txBody>
+          <a:bodyPr wrap="square" anchor="ctr">
+            <a:spAutoFit/>
+          </a:bodyPr>
+          <a:lstStyle/>
+          <a:p>
+            <a:pPr algn="l">
+              <a:lnSpc>
+                <a:spcPct val="120000"/>
+              </a:lnSpc>
+            </a:pPr>
+            <a:r>
+              <a:rPr sz="5200" b="0" i="0">
+                <a:solidFill>
+                  <a:srgbClr val="FAF7F0"/>
+                </a:solidFill>
+                <a:latin typeface="Georgia"/>
+              </a:rPr>
+              <a:t>Three people</a:t>
+            </a:r>
+          </a:p>
+        </p:txBody>
+      </p:sp>
+      <p:sp>
+        <p:nvSpPr>
+          <p:cNvPr id="5" name="TextBox 4"/>
+          <p:cNvSpPr txBox="1"/>
+          <p:nvPr/>
+        </p:nvSpPr>
+        <p:spPr>
+          <a:xfrm>
+            <a:off x="822960" y="4160520"/>
+            <a:ext cx="10515600" cy="914400"/>
           </a:xfrm>
           <a:prstGeom prst="rect">
             <a:avLst/>
@@ -6930,95 +6982,17 @@
           <a:p>
             <a:pPr algn="l">
               <a:lnSpc>
-                <a:spcPct val="100000"/>
-              </a:lnSpc>
-            </a:pPr>
-            <a:r>
-              <a:rPr sz="4000" b="0" i="0">
-                <a:solidFill>
-                  <a:srgbClr val="104A43"/>
+                <a:spcPct val="130000"/>
+              </a:lnSpc>
+            </a:pPr>
+            <a:r>
+              <a:rPr sz="2300" b="0" i="1">
+                <a:solidFill>
+                  <a:srgbClr val="C49A45"/>
                 </a:solidFill>
                 <a:latin typeface="Georgia"/>
               </a:rPr>
-              <a:t>How the Qur’an was gathered</a:t>
-            </a:r>
-          </a:p>
-        </p:txBody>
-      </p:sp>
-      <p:sp>
-        <p:nvSpPr>
-          <p:cNvPr id="5" name="TextBox 4"/>
-          <p:cNvSpPr txBox="1"/>
-          <p:nvPr/>
-        </p:nvSpPr>
-        <p:spPr>
-          <a:xfrm>
-            <a:off x="777240" y="2377440"/>
-            <a:ext cx="10607040" cy="640080"/>
-          </a:xfrm>
-          <a:prstGeom prst="rect">
-            <a:avLst/>
-          </a:prstGeom>
-          <a:noFill/>
-        </p:spPr>
-        <p:txBody>
-          <a:bodyPr wrap="square">
-            <a:spAutoFit/>
-          </a:bodyPr>
-          <a:lstStyle/>
-          <a:p>
-            <a:pPr algn="l">
-              <a:lnSpc>
-                <a:spcPct val="100000"/>
-              </a:lnSpc>
-            </a:pPr>
-            <a:r>
-              <a:rPr sz="2300" b="0" i="1">
-                <a:solidFill>
-                  <a:srgbClr val="1C2321"/>
-                </a:solidFill>
-                <a:latin typeface="Georgia"/>
-              </a:rPr>
-              <a:t>A text secured by procedure — not by chance, and not by one man’s memory.</a:t>
-            </a:r>
-          </a:p>
-        </p:txBody>
-      </p:sp>
-      <p:sp>
-        <p:nvSpPr>
-          <p:cNvPr id="6" name="TextBox 5"/>
-          <p:cNvSpPr txBox="1"/>
-          <p:nvPr/>
-        </p:nvSpPr>
-        <p:spPr>
-          <a:xfrm>
-            <a:off x="777240" y="3474720"/>
-            <a:ext cx="10607040" cy="457200"/>
-          </a:xfrm>
-          <a:prstGeom prst="rect">
-            <a:avLst/>
-          </a:prstGeom>
-          <a:noFill/>
-        </p:spPr>
-        <p:txBody>
-          <a:bodyPr wrap="square">
-            <a:spAutoFit/>
-          </a:bodyPr>
-          <a:lstStyle/>
-          <a:p>
-            <a:pPr algn="l">
-              <a:lnSpc>
-                <a:spcPct val="100000"/>
-              </a:lnSpc>
-            </a:pPr>
-            <a:r>
-              <a:rPr sz="1700" b="0" i="0">
-                <a:solidFill>
-                  <a:srgbClr val="7A2E2E"/>
-                </a:solidFill>
-                <a:latin typeface="Segoe UI"/>
-              </a:rPr>
-              <a:t>[ SOURCE: Tareekh-e-Ummat — the Abu Bakr chapter ]</a:t>
+              <a:t>All three verified from Siyar A'lam al-Nubala.</a:t>
             </a:r>
           </a:p>
         </p:txBody>
@@ -7119,7 +7093,7 @@
                 </a:solidFill>
                 <a:latin typeface="Segoe UI"/>
               </a:rPr>
-              <a:t>آج کی بات  ·  TODAY'S POINT — NOT MINE</a:t>
+              <a:t>WHO YOU ARE MEETING</a:t>
             </a:r>
           </a:p>
         </p:txBody>
@@ -7133,7 +7107,7 @@
         <p:spPr>
           <a:xfrm>
             <a:off x="777240" y="960120"/>
-            <a:ext cx="10607040" cy="640080"/>
+            <a:ext cx="7680960" cy="822960"/>
           </a:xfrm>
           <a:prstGeom prst="rect">
             <a:avLst/>
@@ -7152,13 +7126,13 @@
               </a:lnSpc>
             </a:pPr>
             <a:r>
-              <a:rPr sz="3000" b="0" i="0">
+              <a:rPr sz="4000" b="0" i="0">
                 <a:solidFill>
                   <a:srgbClr val="104A43"/>
                 </a:solidFill>
                 <a:latin typeface="Georgia"/>
               </a:rPr>
-              <a:t>al-Hasan al-Basri and Qatada</a:t>
+              <a:t>Abu Bakr al-Siddiq</a:t>
             </a:r>
           </a:p>
         </p:txBody>
@@ -7171,8 +7145,8 @@
         </p:nvSpPr>
         <p:spPr>
           <a:xfrm>
-            <a:off x="640080" y="1965960"/>
-            <a:ext cx="10881360" cy="914400"/>
+            <a:off x="7863840" y="914400"/>
+            <a:ext cx="3566160" cy="822960"/>
           </a:xfrm>
           <a:prstGeom prst="rect">
             <a:avLst/>
@@ -7187,18 +7161,18 @@
           <a:p>
             <a:pPr algn="r" rtl="1">
               <a:lnSpc>
-                <a:spcPct val="100000"/>
-              </a:lnSpc>
-            </a:pPr>
-            <a:r>
-              <a:rPr sz="3400" b="0" i="0">
-                <a:solidFill>
-                  <a:srgbClr val="0A322E"/>
-                </a:solidFill>
-                <a:latin typeface="Traditional Arabic"/>
-                <a:cs typeface="Traditional Arabic"/>
-              </a:rPr>
-              <a:t>﴿فَسَوْفَ يَأْتِي اللَّهُ بِقَوْمٍ يُحِبُّهُمْ وَيُحِبُّونَهُ﴾</a:t>
+                <a:spcPct val="190000"/>
+              </a:lnSpc>
+            </a:pPr>
+            <a:r>
+              <a:rPr sz="3000" b="0" i="0">
+                <a:solidFill>
+                  <a:srgbClr val="104A43"/>
+                </a:solidFill>
+                <a:latin typeface="Noto Nastaliq Urdu"/>
+                <a:cs typeface="Noto Nastaliq Urdu"/>
+              </a:rPr>
+              <a:t>سیدنا ابوبکر الصدیق ؓ</a:t>
             </a:r>
           </a:p>
         </p:txBody>
@@ -7211,8 +7185,8 @@
         </p:nvSpPr>
         <p:spPr>
           <a:xfrm>
-            <a:off x="777240" y="3017520"/>
-            <a:ext cx="10607040" cy="548640"/>
+            <a:off x="777240" y="2633472"/>
+            <a:ext cx="10607040" cy="411480"/>
           </a:xfrm>
           <a:prstGeom prst="rect">
             <a:avLst/>
@@ -7225,19 +7199,19 @@
           </a:bodyPr>
           <a:lstStyle/>
           <a:p>
-            <a:pPr algn="ctr">
+            <a:pPr algn="l">
               <a:lnSpc>
                 <a:spcPct val="100000"/>
               </a:lnSpc>
             </a:pPr>
             <a:r>
-              <a:rPr sz="2400" b="0" i="1">
-                <a:solidFill>
-                  <a:srgbClr val="1C2321"/>
-                </a:solidFill>
-                <a:latin typeface="Georgia"/>
-              </a:rPr>
-              <a:t>“God will bring a people whom He loves and who love Him.”</a:t>
+              <a:rPr sz="1500" b="1" i="0">
+                <a:solidFill>
+                  <a:srgbClr val="5A6862"/>
+                </a:solidFill>
+                <a:latin typeface="Segoe UI"/>
+              </a:rPr>
+              <a:t>FIRST CALIPH  ·  632 – 634</a:t>
             </a:r>
           </a:p>
         </p:txBody>
@@ -7250,8 +7224,8 @@
         </p:nvSpPr>
         <p:spPr>
           <a:xfrm>
-            <a:off x="777240" y="3794760"/>
-            <a:ext cx="10607040" cy="1005840"/>
+            <a:off x="777240" y="3108960"/>
+            <a:ext cx="10607040" cy="1188720"/>
           </a:xfrm>
           <a:prstGeom prst="rect">
             <a:avLst/>
@@ -7264,49 +7238,93 @@
           </a:bodyPr>
           <a:lstStyle/>
           <a:p>
-            <a:pPr algn="ctr">
-              <a:lnSpc>
-                <a:spcPct val="135000"/>
-              </a:lnSpc>
-            </a:pPr>
-            <a:r>
-              <a:rPr sz="2500" b="0" i="0">
-                <a:solidFill>
-                  <a:srgbClr val="0A322E"/>
+            <a:pPr algn="l">
+              <a:lnSpc>
+                <a:spcPct val="130000"/>
+              </a:lnSpc>
+            </a:pPr>
+            <a:r>
+              <a:rPr sz="2200" b="0" i="0">
+                <a:solidFill>
+                  <a:srgbClr val="1C2321"/>
                 </a:solidFill>
                 <a:latin typeface="Georgia"/>
               </a:rPr>
-              <a:t>The ones meant, they said, are Abu Bakr and his companions —</a:t>
-            </a:r>
-          </a:p>
-          <a:p>
-            <a:pPr algn="ctr">
-              <a:lnSpc>
-                <a:spcPct val="135000"/>
-              </a:lnSpc>
-            </a:pPr>
-            <a:r>
-              <a:rPr sz="2500" b="0" i="0">
-                <a:solidFill>
-                  <a:srgbClr val="0A322E"/>
+              <a:t>Held the community together when much of Arabia broke away, and had the Qur’an gathered</a:t>
+            </a:r>
+          </a:p>
+          <a:p>
+            <a:pPr algn="l">
+              <a:lnSpc>
+                <a:spcPct val="130000"/>
+              </a:lnSpc>
+            </a:pPr>
+            <a:r>
+              <a:rPr sz="2200" b="0" i="0">
+                <a:solidFill>
+                  <a:srgbClr val="1C2321"/>
                 </a:solidFill>
                 <a:latin typeface="Georgia"/>
               </a:rPr>
-              <a:t>in exactly this fight.</a:t>
-            </a:r>
-          </a:p>
-        </p:txBody>
-      </p:sp>
-      <p:sp>
-        <p:nvSpPr>
-          <p:cNvPr id="8" name="TextBox 7"/>
+              <a:t>into a single written collection.</a:t>
+            </a:r>
+          </a:p>
+        </p:txBody>
+      </p:sp>
+      <p:sp>
+        <p:nvSpPr>
+          <p:cNvPr id="8" name="Rectangle 7"/>
+          <p:cNvSpPr/>
+          <p:nvPr/>
+        </p:nvSpPr>
+        <p:spPr>
+          <a:xfrm>
+            <a:off x="777240" y="4315968"/>
+            <a:ext cx="1463040" cy="25400"/>
+          </a:xfrm>
+          <a:prstGeom prst="rect">
+            <a:avLst/>
+          </a:prstGeom>
+          <a:solidFill>
+            <a:srgbClr val="C49A45"/>
+          </a:solidFill>
+          <a:ln>
+            <a:noFill/>
+          </a:ln>
+          <a:effectLst/>
+        </p:spPr>
+        <p:style>
+          <a:lnRef idx="1">
+            <a:schemeClr val="accent1"/>
+          </a:lnRef>
+          <a:fillRef idx="3">
+            <a:schemeClr val="accent1"/>
+          </a:fillRef>
+          <a:effectRef idx="2">
+            <a:schemeClr val="accent1"/>
+          </a:effectRef>
+          <a:fontRef idx="minor">
+            <a:schemeClr val="lt1"/>
+          </a:fontRef>
+        </p:style>
+        <p:txBody>
+          <a:bodyPr rtlCol="0" anchor="ctr"/>
+          <a:lstStyle/>
+          <a:p>
+            <a:pPr algn="ctr"/>
+          </a:p>
+        </p:txBody>
+      </p:sp>
+      <p:sp>
+        <p:nvSpPr>
+          <p:cNvPr id="9" name="TextBox 8"/>
           <p:cNvSpPr txBox="1"/>
           <p:nvPr/>
         </p:nvSpPr>
         <p:spPr>
           <a:xfrm>
-            <a:off x="777240" y="5120640"/>
-            <a:ext cx="10607040" cy="365760"/>
+            <a:off x="777240" y="4480560"/>
+            <a:ext cx="3657600" cy="320040"/>
           </a:xfrm>
           <a:prstGeom prst="rect">
             <a:avLst/>
@@ -7319,19 +7337,113 @@
           </a:bodyPr>
           <a:lstStyle/>
           <a:p>
-            <a:pPr algn="ctr">
+            <a:pPr algn="l">
               <a:lnSpc>
                 <a:spcPct val="100000"/>
               </a:lnSpc>
             </a:pPr>
             <a:r>
-              <a:rPr sz="1300" b="0" i="0">
+              <a:rPr sz="1100" b="1" i="0">
+                <a:solidFill>
+                  <a:srgbClr val="5A6862"/>
+                </a:solidFill>
+                <a:latin typeface="Segoe UI"/>
+              </a:rPr>
+              <a:t>ONE INCIDENT</a:t>
+            </a:r>
+          </a:p>
+        </p:txBody>
+      </p:sp>
+      <p:sp>
+        <p:nvSpPr>
+          <p:cNvPr id="10" name="TextBox 9"/>
+          <p:cNvSpPr txBox="1"/>
+          <p:nvPr/>
+        </p:nvSpPr>
+        <p:spPr>
+          <a:xfrm>
+            <a:off x="777240" y="4809744"/>
+            <a:ext cx="10607040" cy="1143000"/>
+          </a:xfrm>
+          <a:prstGeom prst="rect">
+            <a:avLst/>
+          </a:prstGeom>
+          <a:noFill/>
+        </p:spPr>
+        <p:txBody>
+          <a:bodyPr wrap="square">
+            <a:spAutoFit/>
+          </a:bodyPr>
+          <a:lstStyle/>
+          <a:p>
+            <a:pPr algn="l">
+              <a:lnSpc>
+                <a:spcPct val="130000"/>
+              </a:lnSpc>
+            </a:pPr>
+            <a:r>
+              <a:rPr sz="2000" b="0" i="1">
+                <a:solidFill>
+                  <a:srgbClr val="0A322E"/>
+                </a:solidFill>
+                <a:latin typeface="Georgia"/>
+              </a:rPr>
+              <a:t>He accepted Islam owning forty thousand dinars — and the Prophet ﷺ said: “No wealth ever</a:t>
+            </a:r>
+          </a:p>
+          <a:p>
+            <a:pPr algn="l">
+              <a:lnSpc>
+                <a:spcPct val="130000"/>
+              </a:lnSpc>
+            </a:pPr>
+            <a:r>
+              <a:rPr sz="2000" b="0" i="1">
+                <a:solidFill>
+                  <a:srgbClr val="0A322E"/>
+                </a:solidFill>
+                <a:latin typeface="Georgia"/>
+              </a:rPr>
+              <a:t>benefited me as Abu Bakr’s wealth benefited me.”</a:t>
+            </a:r>
+          </a:p>
+        </p:txBody>
+      </p:sp>
+      <p:sp>
+        <p:nvSpPr>
+          <p:cNvPr id="11" name="TextBox 10"/>
+          <p:cNvSpPr txBox="1"/>
+          <p:nvPr/>
+        </p:nvSpPr>
+        <p:spPr>
+          <a:xfrm>
+            <a:off x="777240" y="6053328"/>
+            <a:ext cx="10607040" cy="365760"/>
+          </a:xfrm>
+          <a:prstGeom prst="rect">
+            <a:avLst/>
+          </a:prstGeom>
+          <a:noFill/>
+        </p:spPr>
+        <p:txBody>
+          <a:bodyPr wrap="square">
+            <a:spAutoFit/>
+          </a:bodyPr>
+          <a:lstStyle/>
+          <a:p>
+            <a:pPr algn="l">
+              <a:lnSpc>
+                <a:spcPct val="100000"/>
+              </a:lnSpc>
+            </a:pPr>
+            <a:r>
+              <a:rPr sz="1200" b="0" i="0">
                 <a:solidFill>
                   <a:srgbClr val="104A43"/>
                 </a:solidFill>
                 <a:latin typeface="Segoe UI"/>
               </a:rPr>
-              <a:t>AL-MA'IDA 5:54  ·  AL-BIDAYA WA'L-NIHAYA, vol. 7 p. 19</a:t>
+              <a:t>SIYAR A'LAM AL-NUBALA, Rashidun p. 8  ·  the figure is from Urwa ibn al-Zubayr</a:t>
             </a:r>
           </a:p>
         </p:txBody>
@@ -7369,7 +7481,7 @@
             <a:avLst/>
           </a:prstGeom>
           <a:solidFill>
-            <a:srgbClr val="0A322E"/>
+            <a:srgbClr val="FAF7F0"/>
           </a:solidFill>
           <a:ln>
             <a:noFill/>
@@ -7428,11 +7540,11 @@
             <a:r>
               <a:rPr sz="1200" b="1" i="0">
                 <a:solidFill>
-                  <a:srgbClr val="C49A45"/>
+                  <a:srgbClr val="104A43"/>
                 </a:solidFill>
                 <a:latin typeface="Segoe UI"/>
               </a:rPr>
-              <a:t>اگلے ہفتے</a:t>
+              <a:t>WHO YOU ARE MEETING</a:t>
             </a:r>
           </a:p>
         </p:txBody>
@@ -7445,47 +7557,8 @@
         </p:nvSpPr>
         <p:spPr>
           <a:xfrm>
-            <a:off x="822960" y="1965960"/>
-            <a:ext cx="10515600" cy="2011680"/>
-          </a:xfrm>
-          <a:prstGeom prst="rect">
-            <a:avLst/>
-          </a:prstGeom>
-          <a:noFill/>
-        </p:spPr>
-        <p:txBody>
-          <a:bodyPr wrap="square" anchor="ctr">
-            <a:spAutoFit/>
-          </a:bodyPr>
-          <a:lstStyle/>
-          <a:p>
-            <a:pPr algn="l">
-              <a:lnSpc>
-                <a:spcPct val="120000"/>
-              </a:lnSpc>
-            </a:pPr>
-            <a:r>
-              <a:rPr sz="5200" b="0" i="0">
-                <a:solidFill>
-                  <a:srgbClr val="FAF7F0"/>
-                </a:solidFill>
-                <a:latin typeface="Georgia"/>
-              </a:rPr>
-              <a:t>Next week: the first test.</a:t>
-            </a:r>
-          </a:p>
-        </p:txBody>
-      </p:sp>
-      <p:sp>
-        <p:nvSpPr>
-          <p:cNvPr id="5" name="TextBox 4"/>
-          <p:cNvSpPr txBox="1"/>
-          <p:nvPr/>
-        </p:nvSpPr>
-        <p:spPr>
-          <a:xfrm>
-            <a:off x="822960" y="4160520"/>
-            <a:ext cx="10515600" cy="914400"/>
+            <a:off x="777240" y="960120"/>
+            <a:ext cx="7680960" cy="822960"/>
           </a:xfrm>
           <a:prstGeom prst="rect">
             <a:avLst/>
@@ -7500,45 +7573,439 @@
           <a:p>
             <a:pPr algn="l">
               <a:lnSpc>
+                <a:spcPct val="100000"/>
+              </a:lnSpc>
+            </a:pPr>
+            <a:r>
+              <a:rPr sz="4000" b="0" i="0">
+                <a:solidFill>
+                  <a:srgbClr val="104A43"/>
+                </a:solidFill>
+                <a:latin typeface="Georgia"/>
+              </a:rPr>
+              <a:t>Khalid ibn al-Walid</a:t>
+            </a:r>
+          </a:p>
+        </p:txBody>
+      </p:sp>
+      <p:sp>
+        <p:nvSpPr>
+          <p:cNvPr id="5" name="TextBox 4"/>
+          <p:cNvSpPr txBox="1"/>
+          <p:nvPr/>
+        </p:nvSpPr>
+        <p:spPr>
+          <a:xfrm>
+            <a:off x="7863840" y="914400"/>
+            <a:ext cx="3566160" cy="822960"/>
+          </a:xfrm>
+          <a:prstGeom prst="rect">
+            <a:avLst/>
+          </a:prstGeom>
+          <a:noFill/>
+        </p:spPr>
+        <p:txBody>
+          <a:bodyPr wrap="square">
+            <a:spAutoFit/>
+          </a:bodyPr>
+          <a:lstStyle/>
+          <a:p>
+            <a:pPr algn="r" rtl="1">
+              <a:lnSpc>
+                <a:spcPct val="190000"/>
+              </a:lnSpc>
+            </a:pPr>
+            <a:r>
+              <a:rPr sz="3000" b="0" i="0">
+                <a:solidFill>
+                  <a:srgbClr val="104A43"/>
+                </a:solidFill>
+                <a:latin typeface="Noto Nastaliq Urdu"/>
+                <a:cs typeface="Noto Nastaliq Urdu"/>
+              </a:rPr>
+              <a:t>سیدنا خالد بن الولید ؓ</a:t>
+            </a:r>
+          </a:p>
+        </p:txBody>
+      </p:sp>
+      <p:sp>
+        <p:nvSpPr>
+          <p:cNvPr id="6" name="Rectangle 5"/>
+          <p:cNvSpPr/>
+          <p:nvPr/>
+        </p:nvSpPr>
+        <p:spPr>
+          <a:xfrm>
+            <a:off x="777240" y="1810512"/>
+            <a:ext cx="10607040" cy="566928"/>
+          </a:xfrm>
+          <a:prstGeom prst="rect">
+            <a:avLst/>
+          </a:prstGeom>
+          <a:solidFill>
+            <a:srgbClr val="C49A45"/>
+          </a:solidFill>
+          <a:ln>
+            <a:noFill/>
+          </a:ln>
+          <a:effectLst/>
+        </p:spPr>
+        <p:style>
+          <a:lnRef idx="1">
+            <a:schemeClr val="accent1"/>
+          </a:lnRef>
+          <a:fillRef idx="3">
+            <a:schemeClr val="accent1"/>
+          </a:fillRef>
+          <a:effectRef idx="2">
+            <a:schemeClr val="accent1"/>
+          </a:effectRef>
+          <a:fontRef idx="minor">
+            <a:schemeClr val="lt1"/>
+          </a:fontRef>
+        </p:style>
+        <p:txBody>
+          <a:bodyPr rtlCol="0" anchor="ctr"/>
+          <a:lstStyle/>
+          <a:p>
+            <a:pPr algn="ctr"/>
+          </a:p>
+        </p:txBody>
+      </p:sp>
+      <p:sp>
+        <p:nvSpPr>
+          <p:cNvPr id="7" name="TextBox 6"/>
+          <p:cNvSpPr txBox="1"/>
+          <p:nvPr/>
+        </p:nvSpPr>
+        <p:spPr>
+          <a:xfrm>
+            <a:off x="960120" y="1883664"/>
+            <a:ext cx="6400800" cy="457200"/>
+          </a:xfrm>
+          <a:prstGeom prst="rect">
+            <a:avLst/>
+          </a:prstGeom>
+          <a:noFill/>
+        </p:spPr>
+        <p:txBody>
+          <a:bodyPr wrap="square">
+            <a:spAutoFit/>
+          </a:bodyPr>
+          <a:lstStyle/>
+          <a:p>
+            <a:pPr algn="l">
+              <a:lnSpc>
+                <a:spcPct val="100000"/>
+              </a:lnSpc>
+            </a:pPr>
+            <a:r>
+              <a:rPr sz="1900" b="1" i="0">
+                <a:solidFill>
+                  <a:srgbClr val="0A322E"/>
+                </a:solidFill>
+                <a:latin typeface="Segoe UI"/>
+              </a:rPr>
+              <a:t>SAYF ALLAH — the Sword of God</a:t>
+            </a:r>
+          </a:p>
+        </p:txBody>
+      </p:sp>
+      <p:sp>
+        <p:nvSpPr>
+          <p:cNvPr id="8" name="TextBox 7"/>
+          <p:cNvSpPr txBox="1"/>
+          <p:nvPr/>
+        </p:nvSpPr>
+        <p:spPr>
+          <a:xfrm>
+            <a:off x="7315200" y="1828800"/>
+            <a:ext cx="3931920" cy="502920"/>
+          </a:xfrm>
+          <a:prstGeom prst="rect">
+            <a:avLst/>
+          </a:prstGeom>
+          <a:noFill/>
+        </p:spPr>
+        <p:txBody>
+          <a:bodyPr wrap="square">
+            <a:spAutoFit/>
+          </a:bodyPr>
+          <a:lstStyle/>
+          <a:p>
+            <a:pPr algn="r" rtl="1">
+              <a:lnSpc>
+                <a:spcPct val="170000"/>
+              </a:lnSpc>
+            </a:pPr>
+            <a:r>
+              <a:rPr sz="2000" b="0" i="0">
+                <a:solidFill>
+                  <a:srgbClr val="0A322E"/>
+                </a:solidFill>
+                <a:latin typeface="Noto Nastaliq Urdu"/>
+                <a:cs typeface="Noto Nastaliq Urdu"/>
+              </a:rPr>
+              <a:t>سیف اللہ</a:t>
+            </a:r>
+          </a:p>
+        </p:txBody>
+      </p:sp>
+      <p:sp>
+        <p:nvSpPr>
+          <p:cNvPr id="9" name="TextBox 8"/>
+          <p:cNvSpPr txBox="1"/>
+          <p:nvPr/>
+        </p:nvSpPr>
+        <p:spPr>
+          <a:xfrm>
+            <a:off x="777240" y="2633472"/>
+            <a:ext cx="10607040" cy="411480"/>
+          </a:xfrm>
+          <a:prstGeom prst="rect">
+            <a:avLst/>
+          </a:prstGeom>
+          <a:noFill/>
+        </p:spPr>
+        <p:txBody>
+          <a:bodyPr wrap="square">
+            <a:spAutoFit/>
+          </a:bodyPr>
+          <a:lstStyle/>
+          <a:p>
+            <a:pPr algn="l">
+              <a:lnSpc>
+                <a:spcPct val="100000"/>
+              </a:lnSpc>
+            </a:pPr>
+            <a:r>
+              <a:rPr sz="1500" b="1" i="0">
+                <a:solidFill>
+                  <a:srgbClr val="5A6862"/>
+                </a:solidFill>
+                <a:latin typeface="Segoe UI"/>
+              </a:rPr>
+              <a:t>MIGRATED AS A MUSLIM, SAFAR 8 AH  ·  COMMANDER, RIDDA AND SYRIA</a:t>
+            </a:r>
+          </a:p>
+        </p:txBody>
+      </p:sp>
+      <p:sp>
+        <p:nvSpPr>
+          <p:cNvPr id="10" name="TextBox 9"/>
+          <p:cNvSpPr txBox="1"/>
+          <p:nvPr/>
+        </p:nvSpPr>
+        <p:spPr>
+          <a:xfrm>
+            <a:off x="777240" y="3108960"/>
+            <a:ext cx="10607040" cy="1188720"/>
+          </a:xfrm>
+          <a:prstGeom prst="rect">
+            <a:avLst/>
+          </a:prstGeom>
+          <a:noFill/>
+        </p:spPr>
+        <p:txBody>
+          <a:bodyPr wrap="square">
+            <a:spAutoFit/>
+          </a:bodyPr>
+          <a:lstStyle/>
+          <a:p>
+            <a:pPr algn="l">
+              <a:lnSpc>
                 <a:spcPct val="130000"/>
               </a:lnSpc>
             </a:pPr>
             <a:r>
-              <a:rPr sz="2300" b="0" i="1">
-                <a:solidFill>
-                  <a:srgbClr val="C49A45"/>
+              <a:rPr sz="2200" b="0" i="0">
+                <a:solidFill>
+                  <a:srgbClr val="1C2321"/>
                 </a:solidFill>
                 <a:latin typeface="Georgia"/>
               </a:rPr>
-              <a:t>644 to 661. When the trouble came from inside, not outside.</a:t>
-            </a:r>
-          </a:p>
-        </p:txBody>
-      </p:sp>
-      <p:pic>
-        <p:nvPicPr>
-          <p:cNvPr id="6" name="Picture 5" descr="line_s3.png"/>
-          <p:cNvPicPr>
-            <a:picLocks noChangeAspect="1"/>
-          </p:cNvPicPr>
-          <p:nvPr/>
-        </p:nvPicPr>
-        <p:blipFill>
-          <a:blip r:embed="rId2"/>
-          <a:stretch>
-            <a:fillRect/>
-          </a:stretch>
-        </p:blipFill>
-        <p:spPr>
-          <a:xfrm>
-            <a:off x="548640" y="6053328"/>
-            <a:ext cx="11091672" cy="1170788"/>
-          </a:xfrm>
-          <a:prstGeom prst="rect">
-            <a:avLst/>
-          </a:prstGeom>
-        </p:spPr>
-      </p:pic>
+              <a:t>Commanded the Ridda campaigns, then the Syrian front through to Yarmuk.</a:t>
+            </a:r>
+          </a:p>
+        </p:txBody>
+      </p:sp>
+      <p:sp>
+        <p:nvSpPr>
+          <p:cNvPr id="11" name="Rectangle 10"/>
+          <p:cNvSpPr/>
+          <p:nvPr/>
+        </p:nvSpPr>
+        <p:spPr>
+          <a:xfrm>
+            <a:off x="777240" y="4315968"/>
+            <a:ext cx="1463040" cy="25400"/>
+          </a:xfrm>
+          <a:prstGeom prst="rect">
+            <a:avLst/>
+          </a:prstGeom>
+          <a:solidFill>
+            <a:srgbClr val="C49A45"/>
+          </a:solidFill>
+          <a:ln>
+            <a:noFill/>
+          </a:ln>
+          <a:effectLst/>
+        </p:spPr>
+        <p:style>
+          <a:lnRef idx="1">
+            <a:schemeClr val="accent1"/>
+          </a:lnRef>
+          <a:fillRef idx="3">
+            <a:schemeClr val="accent1"/>
+          </a:fillRef>
+          <a:effectRef idx="2">
+            <a:schemeClr val="accent1"/>
+          </a:effectRef>
+          <a:fontRef idx="minor">
+            <a:schemeClr val="lt1"/>
+          </a:fontRef>
+        </p:style>
+        <p:txBody>
+          <a:bodyPr rtlCol="0" anchor="ctr"/>
+          <a:lstStyle/>
+          <a:p>
+            <a:pPr algn="ctr"/>
+          </a:p>
+        </p:txBody>
+      </p:sp>
+      <p:sp>
+        <p:nvSpPr>
+          <p:cNvPr id="12" name="TextBox 11"/>
+          <p:cNvSpPr txBox="1"/>
+          <p:nvPr/>
+        </p:nvSpPr>
+        <p:spPr>
+          <a:xfrm>
+            <a:off x="777240" y="4480560"/>
+            <a:ext cx="3657600" cy="320040"/>
+          </a:xfrm>
+          <a:prstGeom prst="rect">
+            <a:avLst/>
+          </a:prstGeom>
+          <a:noFill/>
+        </p:spPr>
+        <p:txBody>
+          <a:bodyPr wrap="square">
+            <a:spAutoFit/>
+          </a:bodyPr>
+          <a:lstStyle/>
+          <a:p>
+            <a:pPr algn="l">
+              <a:lnSpc>
+                <a:spcPct val="100000"/>
+              </a:lnSpc>
+            </a:pPr>
+            <a:r>
+              <a:rPr sz="1100" b="1" i="0">
+                <a:solidFill>
+                  <a:srgbClr val="5A6862"/>
+                </a:solidFill>
+                <a:latin typeface="Segoe UI"/>
+              </a:rPr>
+              <a:t>ONE INCIDENT</a:t>
+            </a:r>
+          </a:p>
+        </p:txBody>
+      </p:sp>
+      <p:sp>
+        <p:nvSpPr>
+          <p:cNvPr id="13" name="TextBox 12"/>
+          <p:cNvSpPr txBox="1"/>
+          <p:nvPr/>
+        </p:nvSpPr>
+        <p:spPr>
+          <a:xfrm>
+            <a:off x="777240" y="4809744"/>
+            <a:ext cx="10607040" cy="1143000"/>
+          </a:xfrm>
+          <a:prstGeom prst="rect">
+            <a:avLst/>
+          </a:prstGeom>
+          <a:noFill/>
+        </p:spPr>
+        <p:txBody>
+          <a:bodyPr wrap="square">
+            <a:spAutoFit/>
+          </a:bodyPr>
+          <a:lstStyle/>
+          <a:p>
+            <a:pPr algn="l">
+              <a:lnSpc>
+                <a:spcPct val="130000"/>
+              </a:lnSpc>
+            </a:pPr>
+            <a:r>
+              <a:rPr sz="2000" b="0" i="1">
+                <a:solidFill>
+                  <a:srgbClr val="0A322E"/>
+                </a:solidFill>
+                <a:latin typeface="Georgia"/>
+              </a:rPr>
+              <a:t>At Mu’ta all three commanders the Prophet ﷺ had appointed were killed — Zayd, Ja’far, and</a:t>
+            </a:r>
+          </a:p>
+          <a:p>
+            <a:pPr algn="l">
+              <a:lnSpc>
+                <a:spcPct val="130000"/>
+              </a:lnSpc>
+            </a:pPr>
+            <a:r>
+              <a:rPr sz="2000" b="0" i="1">
+                <a:solidFill>
+                  <a:srgbClr val="0A322E"/>
+                </a:solidFill>
+                <a:latin typeface="Georgia"/>
+              </a:rPr>
+              <a:t>Ibn Rawaha. The army stood with no commander. He took the banner on the spot, and the victory came.</a:t>
+            </a:r>
+          </a:p>
+        </p:txBody>
+      </p:sp>
+      <p:sp>
+        <p:nvSpPr>
+          <p:cNvPr id="14" name="TextBox 13"/>
+          <p:cNvSpPr txBox="1"/>
+          <p:nvPr/>
+        </p:nvSpPr>
+        <p:spPr>
+          <a:xfrm>
+            <a:off x="777240" y="6053328"/>
+            <a:ext cx="10607040" cy="365760"/>
+          </a:xfrm>
+          <a:prstGeom prst="rect">
+            <a:avLst/>
+          </a:prstGeom>
+          <a:noFill/>
+        </p:spPr>
+        <p:txBody>
+          <a:bodyPr wrap="square">
+            <a:spAutoFit/>
+          </a:bodyPr>
+          <a:lstStyle/>
+          <a:p>
+            <a:pPr algn="l">
+              <a:lnSpc>
+                <a:spcPct val="100000"/>
+              </a:lnSpc>
+            </a:pPr>
+            <a:r>
+              <a:rPr sz="1200" b="0" i="0">
+                <a:solidFill>
+                  <a:srgbClr val="104A43"/>
+                </a:solidFill>
+                <a:latin typeface="Segoe UI"/>
+              </a:rPr>
+              <a:t>SIYAR A'LAM AL-NUBALA, vol. 1 p. 366</a:t>
+            </a:r>
+          </a:p>
+        </p:txBody>
+      </p:sp>
     </p:spTree>
   </p:cSld>
   <p:clrMapOvr>
@@ -7635,7 +8102,7 @@
                 </a:solidFill>
                 <a:latin typeface="Segoe UI"/>
               </a:rPr>
-              <a:t>SOURCES  ·  SHOW ONLY IF ASKED</a:t>
+              <a:t>WHO YOU ARE MEETING</a:t>
             </a:r>
           </a:p>
         </p:txBody>
@@ -7648,8 +8115,8 @@
         </p:nvSpPr>
         <p:spPr>
           <a:xfrm>
-            <a:off x="822960" y="1645920"/>
-            <a:ext cx="10515600" cy="2926080"/>
+            <a:off x="777240" y="960120"/>
+            <a:ext cx="7680960" cy="822960"/>
           </a:xfrm>
           <a:prstGeom prst="rect">
             <a:avLst/>
@@ -7664,81 +8131,17 @@
           <a:p>
             <a:pPr algn="l">
               <a:lnSpc>
-                <a:spcPct val="160000"/>
-              </a:lnSpc>
-            </a:pPr>
-            <a:r>
-              <a:rPr sz="2300" b="0" i="0">
-                <a:solidFill>
-                  <a:srgbClr val="1C2321"/>
+                <a:spcPct val="100000"/>
+              </a:lnSpc>
+            </a:pPr>
+            <a:r>
+              <a:rPr sz="4000" b="0" i="0">
+                <a:solidFill>
+                  <a:srgbClr val="104A43"/>
                 </a:solidFill>
                 <a:latin typeface="Georgia"/>
               </a:rPr>
-              <a:t>al-Bidaya wa’l-Nihaya  —  Ibn Kathir</a:t>
-            </a:r>
-          </a:p>
-          <a:p>
-            <a:pPr algn="l">
-              <a:lnSpc>
-                <a:spcPct val="160000"/>
-              </a:lnSpc>
-            </a:pPr>
-            <a:r>
-              <a:rPr sz="2300" b="0" i="0">
-                <a:solidFill>
-                  <a:srgbClr val="1C2321"/>
-                </a:solidFill>
-                <a:latin typeface="Georgia"/>
-              </a:rPr>
-              <a:t>vol. 5 pp. 344–349  ·  vol. 7 pp. 17–27, 85–95, 132–140</a:t>
-            </a:r>
-          </a:p>
-          <a:p>
-            <a:pPr algn="l">
-              <a:lnSpc>
-                <a:spcPct val="160000"/>
-              </a:lnSpc>
-            </a:pPr>
-            <a:r>
-              <a:rPr sz="2300" b="0" i="0">
-                <a:solidFill>
-                  <a:srgbClr val="1C2321"/>
-                </a:solidFill>
-                <a:latin typeface="Georgia"/>
-              </a:rPr>
-              <a:t/>
-            </a:r>
-          </a:p>
-          <a:p>
-            <a:pPr algn="l">
-              <a:lnSpc>
-                <a:spcPct val="160000"/>
-              </a:lnSpc>
-            </a:pPr>
-            <a:r>
-              <a:rPr sz="2300" b="0" i="0">
-                <a:solidFill>
-                  <a:srgbClr val="1C2321"/>
-                </a:solidFill>
-                <a:latin typeface="Georgia"/>
-              </a:rPr>
-              <a:t>Siyar A’lam al-Nubala  —  al-Dhahabi</a:t>
-            </a:r>
-          </a:p>
-          <a:p>
-            <a:pPr algn="l">
-              <a:lnSpc>
-                <a:spcPct val="160000"/>
-              </a:lnSpc>
-            </a:pPr>
-            <a:r>
-              <a:rPr sz="2300" b="0" i="0">
-                <a:solidFill>
-                  <a:srgbClr val="1C2321"/>
-                </a:solidFill>
-                <a:latin typeface="Georgia"/>
-              </a:rPr>
-              <a:t>Rashidun p. 8  ·  vol. 1 p. 6  ·  vol. 1 p. 366</a:t>
+              <a:t>Abu Ubayda ibn al-Jarrah</a:t>
             </a:r>
           </a:p>
         </p:txBody>
@@ -7751,8 +8154,8 @@
         </p:nvSpPr>
         <p:spPr>
           <a:xfrm>
-            <a:off x="822960" y="4846320"/>
-            <a:ext cx="10515600" cy="457200"/>
+            <a:off x="7863840" y="914400"/>
+            <a:ext cx="3566160" cy="822960"/>
           </a:xfrm>
           <a:prstGeom prst="rect">
             <a:avLst/>
@@ -7765,19 +8168,929 @@
           </a:bodyPr>
           <a:lstStyle/>
           <a:p>
+            <a:pPr algn="r" rtl="1">
+              <a:lnSpc>
+                <a:spcPct val="190000"/>
+              </a:lnSpc>
+            </a:pPr>
+            <a:r>
+              <a:rPr sz="3000" b="0" i="0">
+                <a:solidFill>
+                  <a:srgbClr val="104A43"/>
+                </a:solidFill>
+                <a:latin typeface="Noto Nastaliq Urdu"/>
+                <a:cs typeface="Noto Nastaliq Urdu"/>
+              </a:rPr>
+              <a:t>سیدنا ابو عبیدہ بن الجراح ؓ</a:t>
+            </a:r>
+          </a:p>
+        </p:txBody>
+      </p:sp>
+      <p:sp>
+        <p:nvSpPr>
+          <p:cNvPr id="6" name="Rectangle 5"/>
+          <p:cNvSpPr/>
+          <p:nvPr/>
+        </p:nvSpPr>
+        <p:spPr>
+          <a:xfrm>
+            <a:off x="777240" y="1810512"/>
+            <a:ext cx="10607040" cy="566928"/>
+          </a:xfrm>
+          <a:prstGeom prst="rect">
+            <a:avLst/>
+          </a:prstGeom>
+          <a:solidFill>
+            <a:srgbClr val="C49A45"/>
+          </a:solidFill>
+          <a:ln>
+            <a:noFill/>
+          </a:ln>
+          <a:effectLst/>
+        </p:spPr>
+        <p:style>
+          <a:lnRef idx="1">
+            <a:schemeClr val="accent1"/>
+          </a:lnRef>
+          <a:fillRef idx="3">
+            <a:schemeClr val="accent1"/>
+          </a:fillRef>
+          <a:effectRef idx="2">
+            <a:schemeClr val="accent1"/>
+          </a:effectRef>
+          <a:fontRef idx="minor">
+            <a:schemeClr val="lt1"/>
+          </a:fontRef>
+        </p:style>
+        <p:txBody>
+          <a:bodyPr rtlCol="0" anchor="ctr"/>
+          <a:lstStyle/>
+          <a:p>
+            <a:pPr algn="ctr"/>
+          </a:p>
+        </p:txBody>
+      </p:sp>
+      <p:sp>
+        <p:nvSpPr>
+          <p:cNvPr id="7" name="TextBox 6"/>
+          <p:cNvSpPr txBox="1"/>
+          <p:nvPr/>
+        </p:nvSpPr>
+        <p:spPr>
+          <a:xfrm>
+            <a:off x="960120" y="1883664"/>
+            <a:ext cx="6400800" cy="457200"/>
+          </a:xfrm>
+          <a:prstGeom prst="rect">
+            <a:avLst/>
+          </a:prstGeom>
+          <a:noFill/>
+        </p:spPr>
+        <p:txBody>
+          <a:bodyPr wrap="square">
+            <a:spAutoFit/>
+          </a:bodyPr>
+          <a:lstStyle/>
+          <a:p>
             <a:pPr algn="l">
               <a:lnSpc>
                 <a:spcPct val="100000"/>
               </a:lnSpc>
             </a:pPr>
             <a:r>
-              <a:rPr sz="1900" b="0" i="1">
+              <a:rPr sz="1900" b="1" i="0">
+                <a:solidFill>
+                  <a:srgbClr val="0A322E"/>
+                </a:solidFill>
+                <a:latin typeface="Segoe UI"/>
+              </a:rPr>
+              <a:t>AMIN AL-UMMA — the Trustee of this Community</a:t>
+            </a:r>
+          </a:p>
+        </p:txBody>
+      </p:sp>
+      <p:sp>
+        <p:nvSpPr>
+          <p:cNvPr id="8" name="TextBox 7"/>
+          <p:cNvSpPr txBox="1"/>
+          <p:nvPr/>
+        </p:nvSpPr>
+        <p:spPr>
+          <a:xfrm>
+            <a:off x="7315200" y="1828800"/>
+            <a:ext cx="3931920" cy="502920"/>
+          </a:xfrm>
+          <a:prstGeom prst="rect">
+            <a:avLst/>
+          </a:prstGeom>
+          <a:noFill/>
+        </p:spPr>
+        <p:txBody>
+          <a:bodyPr wrap="square">
+            <a:spAutoFit/>
+          </a:bodyPr>
+          <a:lstStyle/>
+          <a:p>
+            <a:pPr algn="r" rtl="1">
+              <a:lnSpc>
+                <a:spcPct val="170000"/>
+              </a:lnSpc>
+            </a:pPr>
+            <a:r>
+              <a:rPr sz="2000" b="0" i="0">
+                <a:solidFill>
+                  <a:srgbClr val="0A322E"/>
+                </a:solidFill>
+                <a:latin typeface="Noto Nastaliq Urdu"/>
+                <a:cs typeface="Noto Nastaliq Urdu"/>
+              </a:rPr>
+              <a:t>امین الامۃ</a:t>
+            </a:r>
+          </a:p>
+        </p:txBody>
+      </p:sp>
+      <p:sp>
+        <p:nvSpPr>
+          <p:cNvPr id="9" name="TextBox 8"/>
+          <p:cNvSpPr txBox="1"/>
+          <p:nvPr/>
+        </p:nvSpPr>
+        <p:spPr>
+          <a:xfrm>
+            <a:off x="777240" y="2633472"/>
+            <a:ext cx="10607040" cy="411480"/>
+          </a:xfrm>
+          <a:prstGeom prst="rect">
+            <a:avLst/>
+          </a:prstGeom>
+          <a:noFill/>
+        </p:spPr>
+        <p:txBody>
+          <a:bodyPr wrap="square">
+            <a:spAutoFit/>
+          </a:bodyPr>
+          <a:lstStyle/>
+          <a:p>
+            <a:pPr algn="l">
+              <a:lnSpc>
+                <a:spcPct val="100000"/>
+              </a:lnSpc>
+            </a:pPr>
+            <a:r>
+              <a:rPr sz="1500" b="1" i="0">
+                <a:solidFill>
+                  <a:srgbClr val="5A6862"/>
+                </a:solidFill>
+                <a:latin typeface="Segoe UI"/>
+              </a:rPr>
+              <a:t>COMMANDER IN SYRIA AFTER KHALID</a:t>
+            </a:r>
+          </a:p>
+        </p:txBody>
+      </p:sp>
+      <p:sp>
+        <p:nvSpPr>
+          <p:cNvPr id="10" name="TextBox 9"/>
+          <p:cNvSpPr txBox="1"/>
+          <p:nvPr/>
+        </p:nvSpPr>
+        <p:spPr>
+          <a:xfrm>
+            <a:off x="777240" y="3108960"/>
+            <a:ext cx="10607040" cy="1188720"/>
+          </a:xfrm>
+          <a:prstGeom prst="rect">
+            <a:avLst/>
+          </a:prstGeom>
+          <a:noFill/>
+        </p:spPr>
+        <p:txBody>
+          <a:bodyPr wrap="square">
+            <a:spAutoFit/>
+          </a:bodyPr>
+          <a:lstStyle/>
+          <a:p>
+            <a:pPr algn="l">
+              <a:lnSpc>
+                <a:spcPct val="130000"/>
+              </a:lnSpc>
+            </a:pPr>
+            <a:r>
+              <a:rPr sz="2200" b="0" i="0">
+                <a:solidFill>
+                  <a:srgbClr val="1C2321"/>
+                </a:solidFill>
+                <a:latin typeface="Georgia"/>
+              </a:rPr>
+              <a:t>Narrated few hadith and fought many battles; took Syria after Khalid.</a:t>
+            </a:r>
+          </a:p>
+        </p:txBody>
+      </p:sp>
+      <p:sp>
+        <p:nvSpPr>
+          <p:cNvPr id="11" name="Rectangle 10"/>
+          <p:cNvSpPr/>
+          <p:nvPr/>
+        </p:nvSpPr>
+        <p:spPr>
+          <a:xfrm>
+            <a:off x="777240" y="4315968"/>
+            <a:ext cx="1463040" cy="25400"/>
+          </a:xfrm>
+          <a:prstGeom prst="rect">
+            <a:avLst/>
+          </a:prstGeom>
+          <a:solidFill>
+            <a:srgbClr val="C49A45"/>
+          </a:solidFill>
+          <a:ln>
+            <a:noFill/>
+          </a:ln>
+          <a:effectLst/>
+        </p:spPr>
+        <p:style>
+          <a:lnRef idx="1">
+            <a:schemeClr val="accent1"/>
+          </a:lnRef>
+          <a:fillRef idx="3">
+            <a:schemeClr val="accent1"/>
+          </a:fillRef>
+          <a:effectRef idx="2">
+            <a:schemeClr val="accent1"/>
+          </a:effectRef>
+          <a:fontRef idx="minor">
+            <a:schemeClr val="lt1"/>
+          </a:fontRef>
+        </p:style>
+        <p:txBody>
+          <a:bodyPr rtlCol="0" anchor="ctr"/>
+          <a:lstStyle/>
+          <a:p>
+            <a:pPr algn="ctr"/>
+          </a:p>
+        </p:txBody>
+      </p:sp>
+      <p:sp>
+        <p:nvSpPr>
+          <p:cNvPr id="12" name="TextBox 11"/>
+          <p:cNvSpPr txBox="1"/>
+          <p:nvPr/>
+        </p:nvSpPr>
+        <p:spPr>
+          <a:xfrm>
+            <a:off x="777240" y="4480560"/>
+            <a:ext cx="3657600" cy="320040"/>
+          </a:xfrm>
+          <a:prstGeom prst="rect">
+            <a:avLst/>
+          </a:prstGeom>
+          <a:noFill/>
+        </p:spPr>
+        <p:txBody>
+          <a:bodyPr wrap="square">
+            <a:spAutoFit/>
+          </a:bodyPr>
+          <a:lstStyle/>
+          <a:p>
+            <a:pPr algn="l">
+              <a:lnSpc>
+                <a:spcPct val="100000"/>
+              </a:lnSpc>
+            </a:pPr>
+            <a:r>
+              <a:rPr sz="1100" b="1" i="0">
+                <a:solidFill>
+                  <a:srgbClr val="5A6862"/>
+                </a:solidFill>
+                <a:latin typeface="Segoe UI"/>
+              </a:rPr>
+              <a:t>ONE INCIDENT</a:t>
+            </a:r>
+          </a:p>
+        </p:txBody>
+      </p:sp>
+      <p:sp>
+        <p:nvSpPr>
+          <p:cNvPr id="13" name="TextBox 12"/>
+          <p:cNvSpPr txBox="1"/>
+          <p:nvPr/>
+        </p:nvSpPr>
+        <p:spPr>
+          <a:xfrm>
+            <a:off x="777240" y="4809744"/>
+            <a:ext cx="10607040" cy="1143000"/>
+          </a:xfrm>
+          <a:prstGeom prst="rect">
+            <a:avLst/>
+          </a:prstGeom>
+          <a:noFill/>
+        </p:spPr>
+        <p:txBody>
+          <a:bodyPr wrap="square">
+            <a:spAutoFit/>
+          </a:bodyPr>
+          <a:lstStyle/>
+          <a:p>
+            <a:pPr algn="l">
+              <a:lnSpc>
+                <a:spcPct val="130000"/>
+              </a:lnSpc>
+            </a:pPr>
+            <a:r>
+              <a:rPr sz="2000" b="0" i="1">
+                <a:solidFill>
+                  <a:srgbClr val="0A322E"/>
+                </a:solidFill>
+                <a:latin typeface="Georgia"/>
+              </a:rPr>
+              <a:t>At Saqifa, Abu Bakr himself put his name forward for the succession — “for the completeness</a:t>
+            </a:r>
+          </a:p>
+          <a:p>
+            <a:pPr algn="l">
+              <a:lnSpc>
+                <a:spcPct val="130000"/>
+              </a:lnSpc>
+            </a:pPr>
+            <a:r>
+              <a:rPr sz="2000" b="0" i="1">
+                <a:solidFill>
+                  <a:srgbClr val="0A322E"/>
+                </a:solidFill>
+                <a:latin typeface="Georgia"/>
+              </a:rPr>
+              <a:t>of his fitness”, as al-Dhahabi records it.</a:t>
+            </a:r>
+          </a:p>
+        </p:txBody>
+      </p:sp>
+      <p:sp>
+        <p:nvSpPr>
+          <p:cNvPr id="14" name="TextBox 13"/>
+          <p:cNvSpPr txBox="1"/>
+          <p:nvPr/>
+        </p:nvSpPr>
+        <p:spPr>
+          <a:xfrm>
+            <a:off x="777240" y="6053328"/>
+            <a:ext cx="10607040" cy="365760"/>
+          </a:xfrm>
+          <a:prstGeom prst="rect">
+            <a:avLst/>
+          </a:prstGeom>
+          <a:noFill/>
+        </p:spPr>
+        <p:txBody>
+          <a:bodyPr wrap="square">
+            <a:spAutoFit/>
+          </a:bodyPr>
+          <a:lstStyle/>
+          <a:p>
+            <a:pPr algn="l">
+              <a:lnSpc>
+                <a:spcPct val="100000"/>
+              </a:lnSpc>
+            </a:pPr>
+            <a:r>
+              <a:rPr sz="1200" b="0" i="0">
+                <a:solidFill>
+                  <a:srgbClr val="104A43"/>
+                </a:solidFill>
+                <a:latin typeface="Segoe UI"/>
+              </a:rPr>
+              <a:t>SIYAR A'LAM AL-NUBALA, vol. 1 p. 6</a:t>
+            </a:r>
+          </a:p>
+        </p:txBody>
+      </p:sp>
+    </p:spTree>
+  </p:cSld>
+  <p:clrMapOvr>
+    <a:masterClrMapping/>
+  </p:clrMapOvr>
+</p:sld>
+</file>
+
+<file path=ppt/slides/slide18.xml><?xml version="1.0" encoding="utf-8"?>
+<p:sld xmlns:a="http://schemas.openxmlformats.org/drawingml/2006/main" xmlns:p="http://schemas.openxmlformats.org/presentationml/2006/main" xmlns:r="http://schemas.openxmlformats.org/officeDocument/2006/relationships">
+  <p:cSld>
+    <p:spTree>
+      <p:nvGrpSpPr>
+        <p:cNvPr id="1" name=""/>
+        <p:cNvGrpSpPr/>
+        <p:nvPr/>
+      </p:nvGrpSpPr>
+      <p:grpSpPr/>
+      <p:sp>
+        <p:nvSpPr>
+          <p:cNvPr id="2" name="Rectangle 1"/>
+          <p:cNvSpPr/>
+          <p:nvPr/>
+        </p:nvSpPr>
+        <p:spPr>
+          <a:xfrm>
+            <a:off x="0" y="0"/>
+            <a:ext cx="12191695" cy="6858000"/>
+          </a:xfrm>
+          <a:prstGeom prst="rect">
+            <a:avLst/>
+          </a:prstGeom>
+          <a:solidFill>
+            <a:srgbClr val="FAF7F0"/>
+          </a:solidFill>
+          <a:ln>
+            <a:noFill/>
+          </a:ln>
+          <a:effectLst/>
+        </p:spPr>
+        <p:style>
+          <a:lnRef idx="1">
+            <a:schemeClr val="accent1"/>
+          </a:lnRef>
+          <a:fillRef idx="3">
+            <a:schemeClr val="accent1"/>
+          </a:fillRef>
+          <a:effectRef idx="2">
+            <a:schemeClr val="accent1"/>
+          </a:effectRef>
+          <a:fontRef idx="minor">
+            <a:schemeClr val="lt1"/>
+          </a:fontRef>
+        </p:style>
+        <p:txBody>
+          <a:bodyPr rtlCol="0" anchor="ctr"/>
+          <a:lstStyle/>
+          <a:p>
+            <a:pPr algn="ctr"/>
+          </a:p>
+        </p:txBody>
+      </p:sp>
+      <p:sp>
+        <p:nvSpPr>
+          <p:cNvPr id="3" name="TextBox 2"/>
+          <p:cNvSpPr txBox="1"/>
+          <p:nvPr/>
+        </p:nvSpPr>
+        <p:spPr>
+          <a:xfrm>
+            <a:off x="777240" y="420624"/>
+            <a:ext cx="8229600" cy="365760"/>
+          </a:xfrm>
+          <a:prstGeom prst="rect">
+            <a:avLst/>
+          </a:prstGeom>
+          <a:noFill/>
+        </p:spPr>
+        <p:txBody>
+          <a:bodyPr wrap="square">
+            <a:spAutoFit/>
+          </a:bodyPr>
+          <a:lstStyle/>
+          <a:p>
+            <a:pPr algn="l">
+              <a:lnSpc>
+                <a:spcPct val="100000"/>
+              </a:lnSpc>
+            </a:pPr>
+            <a:r>
+              <a:rPr sz="1200" b="1" i="0">
+                <a:solidFill>
+                  <a:srgbClr val="104A43"/>
+                </a:solidFill>
+                <a:latin typeface="Segoe UI"/>
+              </a:rPr>
+              <a:t>HOW DO WE KNOW?</a:t>
+            </a:r>
+          </a:p>
+        </p:txBody>
+      </p:sp>
+      <p:sp>
+        <p:nvSpPr>
+          <p:cNvPr id="4" name="TextBox 3"/>
+          <p:cNvSpPr txBox="1"/>
+          <p:nvPr/>
+        </p:nvSpPr>
+        <p:spPr>
+          <a:xfrm>
+            <a:off x="777240" y="1280160"/>
+            <a:ext cx="10607040" cy="914400"/>
+          </a:xfrm>
+          <a:prstGeom prst="rect">
+            <a:avLst/>
+          </a:prstGeom>
+          <a:noFill/>
+        </p:spPr>
+        <p:txBody>
+          <a:bodyPr wrap="square">
+            <a:spAutoFit/>
+          </a:bodyPr>
+          <a:lstStyle/>
+          <a:p>
+            <a:pPr algn="l">
+              <a:lnSpc>
+                <a:spcPct val="100000"/>
+              </a:lnSpc>
+            </a:pPr>
+            <a:r>
+              <a:rPr sz="4000" b="0" i="0">
+                <a:solidFill>
+                  <a:srgbClr val="104A43"/>
+                </a:solidFill>
+                <a:latin typeface="Georgia"/>
+              </a:rPr>
+              <a:t>How the Qur’an was gathered</a:t>
+            </a:r>
+          </a:p>
+        </p:txBody>
+      </p:sp>
+      <p:sp>
+        <p:nvSpPr>
+          <p:cNvPr id="5" name="TextBox 4"/>
+          <p:cNvSpPr txBox="1"/>
+          <p:nvPr/>
+        </p:nvSpPr>
+        <p:spPr>
+          <a:xfrm>
+            <a:off x="777240" y="2377440"/>
+            <a:ext cx="10607040" cy="640080"/>
+          </a:xfrm>
+          <a:prstGeom prst="rect">
+            <a:avLst/>
+          </a:prstGeom>
+          <a:noFill/>
+        </p:spPr>
+        <p:txBody>
+          <a:bodyPr wrap="square">
+            <a:spAutoFit/>
+          </a:bodyPr>
+          <a:lstStyle/>
+          <a:p>
+            <a:pPr algn="l">
+              <a:lnSpc>
+                <a:spcPct val="100000"/>
+              </a:lnSpc>
+            </a:pPr>
+            <a:r>
+              <a:rPr sz="2300" b="0" i="1">
+                <a:solidFill>
+                  <a:srgbClr val="1C2321"/>
+                </a:solidFill>
+                <a:latin typeface="Georgia"/>
+              </a:rPr>
+              <a:t>A text secured by procedure — not by chance, and not by one man’s memory.</a:t>
+            </a:r>
+          </a:p>
+        </p:txBody>
+      </p:sp>
+      <p:sp>
+        <p:nvSpPr>
+          <p:cNvPr id="6" name="TextBox 5"/>
+          <p:cNvSpPr txBox="1"/>
+          <p:nvPr/>
+        </p:nvSpPr>
+        <p:spPr>
+          <a:xfrm>
+            <a:off x="777240" y="3474720"/>
+            <a:ext cx="10607040" cy="457200"/>
+          </a:xfrm>
+          <a:prstGeom prst="rect">
+            <a:avLst/>
+          </a:prstGeom>
+          <a:noFill/>
+        </p:spPr>
+        <p:txBody>
+          <a:bodyPr wrap="square">
+            <a:spAutoFit/>
+          </a:bodyPr>
+          <a:lstStyle/>
+          <a:p>
+            <a:pPr algn="l">
+              <a:lnSpc>
+                <a:spcPct val="100000"/>
+              </a:lnSpc>
+            </a:pPr>
+            <a:r>
+              <a:rPr sz="1700" b="0" i="0">
                 <a:solidFill>
                   <a:srgbClr val="7A2E2E"/>
                 </a:solidFill>
+                <a:latin typeface="Segoe UI"/>
+              </a:rPr>
+              <a:t>[ SOURCE: Tareekh-e-Ummat — the Abu Bakr chapter ]</a:t>
+            </a:r>
+          </a:p>
+        </p:txBody>
+      </p:sp>
+    </p:spTree>
+  </p:cSld>
+  <p:clrMapOvr>
+    <a:masterClrMapping/>
+  </p:clrMapOvr>
+</p:sld>
+</file>
+
+<file path=ppt/slides/slide19.xml><?xml version="1.0" encoding="utf-8"?>
+<p:sld xmlns:a="http://schemas.openxmlformats.org/drawingml/2006/main" xmlns:p="http://schemas.openxmlformats.org/presentationml/2006/main" xmlns:r="http://schemas.openxmlformats.org/officeDocument/2006/relationships">
+  <p:cSld>
+    <p:spTree>
+      <p:nvGrpSpPr>
+        <p:cNvPr id="1" name=""/>
+        <p:cNvGrpSpPr/>
+        <p:nvPr/>
+      </p:nvGrpSpPr>
+      <p:grpSpPr/>
+      <p:sp>
+        <p:nvSpPr>
+          <p:cNvPr id="2" name="Rectangle 1"/>
+          <p:cNvSpPr/>
+          <p:nvPr/>
+        </p:nvSpPr>
+        <p:spPr>
+          <a:xfrm>
+            <a:off x="0" y="0"/>
+            <a:ext cx="12191695" cy="6858000"/>
+          </a:xfrm>
+          <a:prstGeom prst="rect">
+            <a:avLst/>
+          </a:prstGeom>
+          <a:solidFill>
+            <a:srgbClr val="FAF7F0"/>
+          </a:solidFill>
+          <a:ln>
+            <a:noFill/>
+          </a:ln>
+          <a:effectLst/>
+        </p:spPr>
+        <p:style>
+          <a:lnRef idx="1">
+            <a:schemeClr val="accent1"/>
+          </a:lnRef>
+          <a:fillRef idx="3">
+            <a:schemeClr val="accent1"/>
+          </a:fillRef>
+          <a:effectRef idx="2">
+            <a:schemeClr val="accent1"/>
+          </a:effectRef>
+          <a:fontRef idx="minor">
+            <a:schemeClr val="lt1"/>
+          </a:fontRef>
+        </p:style>
+        <p:txBody>
+          <a:bodyPr rtlCol="0" anchor="ctr"/>
+          <a:lstStyle/>
+          <a:p>
+            <a:pPr algn="ctr"/>
+          </a:p>
+        </p:txBody>
+      </p:sp>
+      <p:sp>
+        <p:nvSpPr>
+          <p:cNvPr id="3" name="TextBox 2"/>
+          <p:cNvSpPr txBox="1"/>
+          <p:nvPr/>
+        </p:nvSpPr>
+        <p:spPr>
+          <a:xfrm>
+            <a:off x="777240" y="420624"/>
+            <a:ext cx="8229600" cy="365760"/>
+          </a:xfrm>
+          <a:prstGeom prst="rect">
+            <a:avLst/>
+          </a:prstGeom>
+          <a:noFill/>
+        </p:spPr>
+        <p:txBody>
+          <a:bodyPr wrap="square">
+            <a:spAutoFit/>
+          </a:bodyPr>
+          <a:lstStyle/>
+          <a:p>
+            <a:pPr algn="l">
+              <a:lnSpc>
+                <a:spcPct val="100000"/>
+              </a:lnSpc>
+            </a:pPr>
+            <a:r>
+              <a:rPr sz="1200" b="1" i="0">
+                <a:solidFill>
+                  <a:srgbClr val="104A43"/>
+                </a:solidFill>
+                <a:latin typeface="Segoe UI"/>
+              </a:rPr>
+              <a:t>آج کی بات  ·  TODAY'S POINT — NOT MINE</a:t>
+            </a:r>
+          </a:p>
+        </p:txBody>
+      </p:sp>
+      <p:sp>
+        <p:nvSpPr>
+          <p:cNvPr id="4" name="TextBox 3"/>
+          <p:cNvSpPr txBox="1"/>
+          <p:nvPr/>
+        </p:nvSpPr>
+        <p:spPr>
+          <a:xfrm>
+            <a:off x="777240" y="960120"/>
+            <a:ext cx="10607040" cy="640080"/>
+          </a:xfrm>
+          <a:prstGeom prst="rect">
+            <a:avLst/>
+          </a:prstGeom>
+          <a:noFill/>
+        </p:spPr>
+        <p:txBody>
+          <a:bodyPr wrap="square">
+            <a:spAutoFit/>
+          </a:bodyPr>
+          <a:lstStyle/>
+          <a:p>
+            <a:pPr algn="l">
+              <a:lnSpc>
+                <a:spcPct val="100000"/>
+              </a:lnSpc>
+            </a:pPr>
+            <a:r>
+              <a:rPr sz="3000" b="0" i="0">
+                <a:solidFill>
+                  <a:srgbClr val="104A43"/>
+                </a:solidFill>
                 <a:latin typeface="Georgia"/>
               </a:rPr>
-              <a:t>Both works are named and recommended in the muqaddima of our own source.</a:t>
+              <a:t>al-Hasan al-Basri and Qatada</a:t>
+            </a:r>
+          </a:p>
+        </p:txBody>
+      </p:sp>
+      <p:sp>
+        <p:nvSpPr>
+          <p:cNvPr id="5" name="TextBox 4"/>
+          <p:cNvSpPr txBox="1"/>
+          <p:nvPr/>
+        </p:nvSpPr>
+        <p:spPr>
+          <a:xfrm>
+            <a:off x="640080" y="1965960"/>
+            <a:ext cx="10881360" cy="914400"/>
+          </a:xfrm>
+          <a:prstGeom prst="rect">
+            <a:avLst/>
+          </a:prstGeom>
+          <a:noFill/>
+        </p:spPr>
+        <p:txBody>
+          <a:bodyPr wrap="square">
+            <a:spAutoFit/>
+          </a:bodyPr>
+          <a:lstStyle/>
+          <a:p>
+            <a:pPr algn="r" rtl="1">
+              <a:lnSpc>
+                <a:spcPct val="100000"/>
+              </a:lnSpc>
+            </a:pPr>
+            <a:r>
+              <a:rPr sz="3400" b="0" i="0">
+                <a:solidFill>
+                  <a:srgbClr val="0A322E"/>
+                </a:solidFill>
+                <a:latin typeface="Traditional Arabic"/>
+                <a:cs typeface="Traditional Arabic"/>
+              </a:rPr>
+              <a:t>﴿فَسَوْفَ يَأْتِي اللَّهُ بِقَوْمٍ يُحِبُّهُمْ وَيُحِبُّونَهُ﴾</a:t>
+            </a:r>
+          </a:p>
+        </p:txBody>
+      </p:sp>
+      <p:sp>
+        <p:nvSpPr>
+          <p:cNvPr id="6" name="TextBox 5"/>
+          <p:cNvSpPr txBox="1"/>
+          <p:nvPr/>
+        </p:nvSpPr>
+        <p:spPr>
+          <a:xfrm>
+            <a:off x="777240" y="3017520"/>
+            <a:ext cx="10607040" cy="548640"/>
+          </a:xfrm>
+          <a:prstGeom prst="rect">
+            <a:avLst/>
+          </a:prstGeom>
+          <a:noFill/>
+        </p:spPr>
+        <p:txBody>
+          <a:bodyPr wrap="square">
+            <a:spAutoFit/>
+          </a:bodyPr>
+          <a:lstStyle/>
+          <a:p>
+            <a:pPr algn="ctr">
+              <a:lnSpc>
+                <a:spcPct val="100000"/>
+              </a:lnSpc>
+            </a:pPr>
+            <a:r>
+              <a:rPr sz="2400" b="0" i="1">
+                <a:solidFill>
+                  <a:srgbClr val="1C2321"/>
+                </a:solidFill>
+                <a:latin typeface="Georgia"/>
+              </a:rPr>
+              <a:t>“God will bring a people whom He loves and who love Him.”</a:t>
+            </a:r>
+          </a:p>
+        </p:txBody>
+      </p:sp>
+      <p:sp>
+        <p:nvSpPr>
+          <p:cNvPr id="7" name="TextBox 6"/>
+          <p:cNvSpPr txBox="1"/>
+          <p:nvPr/>
+        </p:nvSpPr>
+        <p:spPr>
+          <a:xfrm>
+            <a:off x="777240" y="3794760"/>
+            <a:ext cx="10607040" cy="1005840"/>
+          </a:xfrm>
+          <a:prstGeom prst="rect">
+            <a:avLst/>
+          </a:prstGeom>
+          <a:noFill/>
+        </p:spPr>
+        <p:txBody>
+          <a:bodyPr wrap="square">
+            <a:spAutoFit/>
+          </a:bodyPr>
+          <a:lstStyle/>
+          <a:p>
+            <a:pPr algn="ctr">
+              <a:lnSpc>
+                <a:spcPct val="135000"/>
+              </a:lnSpc>
+            </a:pPr>
+            <a:r>
+              <a:rPr sz="2500" b="0" i="0">
+                <a:solidFill>
+                  <a:srgbClr val="0A322E"/>
+                </a:solidFill>
+                <a:latin typeface="Georgia"/>
+              </a:rPr>
+              <a:t>The ones meant, they said, are Abu Bakr and his companions —</a:t>
+            </a:r>
+          </a:p>
+          <a:p>
+            <a:pPr algn="ctr">
+              <a:lnSpc>
+                <a:spcPct val="135000"/>
+              </a:lnSpc>
+            </a:pPr>
+            <a:r>
+              <a:rPr sz="2500" b="0" i="0">
+                <a:solidFill>
+                  <a:srgbClr val="0A322E"/>
+                </a:solidFill>
+                <a:latin typeface="Georgia"/>
+              </a:rPr>
+              <a:t>in exactly this fight.</a:t>
+            </a:r>
+          </a:p>
+        </p:txBody>
+      </p:sp>
+      <p:sp>
+        <p:nvSpPr>
+          <p:cNvPr id="8" name="TextBox 7"/>
+          <p:cNvSpPr txBox="1"/>
+          <p:nvPr/>
+        </p:nvSpPr>
+        <p:spPr>
+          <a:xfrm>
+            <a:off x="777240" y="5120640"/>
+            <a:ext cx="10607040" cy="365760"/>
+          </a:xfrm>
+          <a:prstGeom prst="rect">
+            <a:avLst/>
+          </a:prstGeom>
+          <a:noFill/>
+        </p:spPr>
+        <p:txBody>
+          <a:bodyPr wrap="square">
+            <a:spAutoFit/>
+          </a:bodyPr>
+          <a:lstStyle/>
+          <a:p>
+            <a:pPr algn="ctr">
+              <a:lnSpc>
+                <a:spcPct val="100000"/>
+              </a:lnSpc>
+            </a:pPr>
+            <a:r>
+              <a:rPr sz="1300" b="0" i="0">
+                <a:solidFill>
+                  <a:srgbClr val="104A43"/>
+                </a:solidFill>
+                <a:latin typeface="Segoe UI"/>
+              </a:rPr>
+              <a:t>AL-MA'IDA 5:54  ·  AL-BIDAYA WA'L-NIHAYA, vol. 7 p. 19</a:t>
             </a:r>
           </a:p>
         </p:txBody>
@@ -7969,6 +9282,452 @@
 </p:sld>
 </file>
 
+<file path=ppt/slides/slide20.xml><?xml version="1.0" encoding="utf-8"?>
+<p:sld xmlns:a="http://schemas.openxmlformats.org/drawingml/2006/main" xmlns:p="http://schemas.openxmlformats.org/presentationml/2006/main" xmlns:r="http://schemas.openxmlformats.org/officeDocument/2006/relationships">
+  <p:cSld>
+    <p:spTree>
+      <p:nvGrpSpPr>
+        <p:cNvPr id="1" name=""/>
+        <p:cNvGrpSpPr/>
+        <p:nvPr/>
+      </p:nvGrpSpPr>
+      <p:grpSpPr/>
+      <p:sp>
+        <p:nvSpPr>
+          <p:cNvPr id="2" name="Rectangle 1"/>
+          <p:cNvSpPr/>
+          <p:nvPr/>
+        </p:nvSpPr>
+        <p:spPr>
+          <a:xfrm>
+            <a:off x="0" y="0"/>
+            <a:ext cx="12191695" cy="6858000"/>
+          </a:xfrm>
+          <a:prstGeom prst="rect">
+            <a:avLst/>
+          </a:prstGeom>
+          <a:solidFill>
+            <a:srgbClr val="0A322E"/>
+          </a:solidFill>
+          <a:ln>
+            <a:noFill/>
+          </a:ln>
+          <a:effectLst/>
+        </p:spPr>
+        <p:style>
+          <a:lnRef idx="1">
+            <a:schemeClr val="accent1"/>
+          </a:lnRef>
+          <a:fillRef idx="3">
+            <a:schemeClr val="accent1"/>
+          </a:fillRef>
+          <a:effectRef idx="2">
+            <a:schemeClr val="accent1"/>
+          </a:effectRef>
+          <a:fontRef idx="minor">
+            <a:schemeClr val="lt1"/>
+          </a:fontRef>
+        </p:style>
+        <p:txBody>
+          <a:bodyPr rtlCol="0" anchor="ctr"/>
+          <a:lstStyle/>
+          <a:p>
+            <a:pPr algn="ctr"/>
+          </a:p>
+        </p:txBody>
+      </p:sp>
+      <p:sp>
+        <p:nvSpPr>
+          <p:cNvPr id="3" name="TextBox 2"/>
+          <p:cNvSpPr txBox="1"/>
+          <p:nvPr/>
+        </p:nvSpPr>
+        <p:spPr>
+          <a:xfrm>
+            <a:off x="777240" y="420624"/>
+            <a:ext cx="8229600" cy="365760"/>
+          </a:xfrm>
+          <a:prstGeom prst="rect">
+            <a:avLst/>
+          </a:prstGeom>
+          <a:noFill/>
+        </p:spPr>
+        <p:txBody>
+          <a:bodyPr wrap="square">
+            <a:spAutoFit/>
+          </a:bodyPr>
+          <a:lstStyle/>
+          <a:p>
+            <a:pPr algn="l">
+              <a:lnSpc>
+                <a:spcPct val="100000"/>
+              </a:lnSpc>
+            </a:pPr>
+            <a:r>
+              <a:rPr sz="1200" b="1" i="0">
+                <a:solidFill>
+                  <a:srgbClr val="C49A45"/>
+                </a:solidFill>
+                <a:latin typeface="Segoe UI"/>
+              </a:rPr>
+              <a:t>اگلے ہفتے</a:t>
+            </a:r>
+          </a:p>
+        </p:txBody>
+      </p:sp>
+      <p:sp>
+        <p:nvSpPr>
+          <p:cNvPr id="4" name="TextBox 3"/>
+          <p:cNvSpPr txBox="1"/>
+          <p:nvPr/>
+        </p:nvSpPr>
+        <p:spPr>
+          <a:xfrm>
+            <a:off x="822960" y="1965960"/>
+            <a:ext cx="10515600" cy="2011680"/>
+          </a:xfrm>
+          <a:prstGeom prst="rect">
+            <a:avLst/>
+          </a:prstGeom>
+          <a:noFill/>
+        </p:spPr>
+        <p:txBody>
+          <a:bodyPr wrap="square" anchor="ctr">
+            <a:spAutoFit/>
+          </a:bodyPr>
+          <a:lstStyle/>
+          <a:p>
+            <a:pPr algn="l">
+              <a:lnSpc>
+                <a:spcPct val="120000"/>
+              </a:lnSpc>
+            </a:pPr>
+            <a:r>
+              <a:rPr sz="5200" b="0" i="0">
+                <a:solidFill>
+                  <a:srgbClr val="FAF7F0"/>
+                </a:solidFill>
+                <a:latin typeface="Georgia"/>
+              </a:rPr>
+              <a:t>Next week: the first test.</a:t>
+            </a:r>
+          </a:p>
+        </p:txBody>
+      </p:sp>
+      <p:sp>
+        <p:nvSpPr>
+          <p:cNvPr id="5" name="TextBox 4"/>
+          <p:cNvSpPr txBox="1"/>
+          <p:nvPr/>
+        </p:nvSpPr>
+        <p:spPr>
+          <a:xfrm>
+            <a:off x="822960" y="4160520"/>
+            <a:ext cx="10515600" cy="914400"/>
+          </a:xfrm>
+          <a:prstGeom prst="rect">
+            <a:avLst/>
+          </a:prstGeom>
+          <a:noFill/>
+        </p:spPr>
+        <p:txBody>
+          <a:bodyPr wrap="square">
+            <a:spAutoFit/>
+          </a:bodyPr>
+          <a:lstStyle/>
+          <a:p>
+            <a:pPr algn="l">
+              <a:lnSpc>
+                <a:spcPct val="130000"/>
+              </a:lnSpc>
+            </a:pPr>
+            <a:r>
+              <a:rPr sz="2300" b="0" i="1">
+                <a:solidFill>
+                  <a:srgbClr val="C49A45"/>
+                </a:solidFill>
+                <a:latin typeface="Georgia"/>
+              </a:rPr>
+              <a:t>644 to 661. When the trouble came from inside, not outside.</a:t>
+            </a:r>
+          </a:p>
+        </p:txBody>
+      </p:sp>
+      <p:pic>
+        <p:nvPicPr>
+          <p:cNvPr id="6" name="Picture 5" descr="line_s3.png"/>
+          <p:cNvPicPr>
+            <a:picLocks noChangeAspect="1"/>
+          </p:cNvPicPr>
+          <p:nvPr/>
+        </p:nvPicPr>
+        <p:blipFill>
+          <a:blip r:embed="rId2"/>
+          <a:stretch>
+            <a:fillRect/>
+          </a:stretch>
+        </p:blipFill>
+        <p:spPr>
+          <a:xfrm>
+            <a:off x="548640" y="6053328"/>
+            <a:ext cx="11091672" cy="1170788"/>
+          </a:xfrm>
+          <a:prstGeom prst="rect">
+            <a:avLst/>
+          </a:prstGeom>
+        </p:spPr>
+      </p:pic>
+    </p:spTree>
+  </p:cSld>
+  <p:clrMapOvr>
+    <a:masterClrMapping/>
+  </p:clrMapOvr>
+</p:sld>
+</file>
+
+<file path=ppt/slides/slide21.xml><?xml version="1.0" encoding="utf-8"?>
+<p:sld xmlns:a="http://schemas.openxmlformats.org/drawingml/2006/main" xmlns:p="http://schemas.openxmlformats.org/presentationml/2006/main" xmlns:r="http://schemas.openxmlformats.org/officeDocument/2006/relationships">
+  <p:cSld>
+    <p:spTree>
+      <p:nvGrpSpPr>
+        <p:cNvPr id="1" name=""/>
+        <p:cNvGrpSpPr/>
+        <p:nvPr/>
+      </p:nvGrpSpPr>
+      <p:grpSpPr/>
+      <p:sp>
+        <p:nvSpPr>
+          <p:cNvPr id="2" name="Rectangle 1"/>
+          <p:cNvSpPr/>
+          <p:nvPr/>
+        </p:nvSpPr>
+        <p:spPr>
+          <a:xfrm>
+            <a:off x="0" y="0"/>
+            <a:ext cx="12191695" cy="6858000"/>
+          </a:xfrm>
+          <a:prstGeom prst="rect">
+            <a:avLst/>
+          </a:prstGeom>
+          <a:solidFill>
+            <a:srgbClr val="FAF7F0"/>
+          </a:solidFill>
+          <a:ln>
+            <a:noFill/>
+          </a:ln>
+          <a:effectLst/>
+        </p:spPr>
+        <p:style>
+          <a:lnRef idx="1">
+            <a:schemeClr val="accent1"/>
+          </a:lnRef>
+          <a:fillRef idx="3">
+            <a:schemeClr val="accent1"/>
+          </a:fillRef>
+          <a:effectRef idx="2">
+            <a:schemeClr val="accent1"/>
+          </a:effectRef>
+          <a:fontRef idx="minor">
+            <a:schemeClr val="lt1"/>
+          </a:fontRef>
+        </p:style>
+        <p:txBody>
+          <a:bodyPr rtlCol="0" anchor="ctr"/>
+          <a:lstStyle/>
+          <a:p>
+            <a:pPr algn="ctr"/>
+          </a:p>
+        </p:txBody>
+      </p:sp>
+      <p:sp>
+        <p:nvSpPr>
+          <p:cNvPr id="3" name="TextBox 2"/>
+          <p:cNvSpPr txBox="1"/>
+          <p:nvPr/>
+        </p:nvSpPr>
+        <p:spPr>
+          <a:xfrm>
+            <a:off x="777240" y="420624"/>
+            <a:ext cx="8229600" cy="365760"/>
+          </a:xfrm>
+          <a:prstGeom prst="rect">
+            <a:avLst/>
+          </a:prstGeom>
+          <a:noFill/>
+        </p:spPr>
+        <p:txBody>
+          <a:bodyPr wrap="square">
+            <a:spAutoFit/>
+          </a:bodyPr>
+          <a:lstStyle/>
+          <a:p>
+            <a:pPr algn="l">
+              <a:lnSpc>
+                <a:spcPct val="100000"/>
+              </a:lnSpc>
+            </a:pPr>
+            <a:r>
+              <a:rPr sz="1200" b="1" i="0">
+                <a:solidFill>
+                  <a:srgbClr val="104A43"/>
+                </a:solidFill>
+                <a:latin typeface="Segoe UI"/>
+              </a:rPr>
+              <a:t>SOURCES  ·  SHOW ONLY IF ASKED</a:t>
+            </a:r>
+          </a:p>
+        </p:txBody>
+      </p:sp>
+      <p:sp>
+        <p:nvSpPr>
+          <p:cNvPr id="4" name="TextBox 3"/>
+          <p:cNvSpPr txBox="1"/>
+          <p:nvPr/>
+        </p:nvSpPr>
+        <p:spPr>
+          <a:xfrm>
+            <a:off x="822960" y="1645920"/>
+            <a:ext cx="10515600" cy="2926080"/>
+          </a:xfrm>
+          <a:prstGeom prst="rect">
+            <a:avLst/>
+          </a:prstGeom>
+          <a:noFill/>
+        </p:spPr>
+        <p:txBody>
+          <a:bodyPr wrap="square">
+            <a:spAutoFit/>
+          </a:bodyPr>
+          <a:lstStyle/>
+          <a:p>
+            <a:pPr algn="l">
+              <a:lnSpc>
+                <a:spcPct val="160000"/>
+              </a:lnSpc>
+            </a:pPr>
+            <a:r>
+              <a:rPr sz="2300" b="0" i="0">
+                <a:solidFill>
+                  <a:srgbClr val="1C2321"/>
+                </a:solidFill>
+                <a:latin typeface="Georgia"/>
+              </a:rPr>
+              <a:t>al-Bidaya wa’l-Nihaya  —  Ibn Kathir</a:t>
+            </a:r>
+          </a:p>
+          <a:p>
+            <a:pPr algn="l">
+              <a:lnSpc>
+                <a:spcPct val="160000"/>
+              </a:lnSpc>
+            </a:pPr>
+            <a:r>
+              <a:rPr sz="2300" b="0" i="0">
+                <a:solidFill>
+                  <a:srgbClr val="1C2321"/>
+                </a:solidFill>
+                <a:latin typeface="Georgia"/>
+              </a:rPr>
+              <a:t>vol. 5 pp. 344–349  ·  vol. 7 pp. 17–27, 85–95, 132–140</a:t>
+            </a:r>
+          </a:p>
+          <a:p>
+            <a:pPr algn="l">
+              <a:lnSpc>
+                <a:spcPct val="160000"/>
+              </a:lnSpc>
+            </a:pPr>
+            <a:r>
+              <a:rPr sz="2300" b="0" i="0">
+                <a:solidFill>
+                  <a:srgbClr val="1C2321"/>
+                </a:solidFill>
+                <a:latin typeface="Georgia"/>
+              </a:rPr>
+              <a:t/>
+            </a:r>
+          </a:p>
+          <a:p>
+            <a:pPr algn="l">
+              <a:lnSpc>
+                <a:spcPct val="160000"/>
+              </a:lnSpc>
+            </a:pPr>
+            <a:r>
+              <a:rPr sz="2300" b="0" i="0">
+                <a:solidFill>
+                  <a:srgbClr val="1C2321"/>
+                </a:solidFill>
+                <a:latin typeface="Georgia"/>
+              </a:rPr>
+              <a:t>Siyar A’lam al-Nubala  —  al-Dhahabi</a:t>
+            </a:r>
+          </a:p>
+          <a:p>
+            <a:pPr algn="l">
+              <a:lnSpc>
+                <a:spcPct val="160000"/>
+              </a:lnSpc>
+            </a:pPr>
+            <a:r>
+              <a:rPr sz="2300" b="0" i="0">
+                <a:solidFill>
+                  <a:srgbClr val="1C2321"/>
+                </a:solidFill>
+                <a:latin typeface="Georgia"/>
+              </a:rPr>
+              <a:t>Rashidun p. 8  ·  vol. 1 p. 6  ·  vol. 1 p. 366</a:t>
+            </a:r>
+          </a:p>
+        </p:txBody>
+      </p:sp>
+      <p:sp>
+        <p:nvSpPr>
+          <p:cNvPr id="5" name="TextBox 4"/>
+          <p:cNvSpPr txBox="1"/>
+          <p:nvPr/>
+        </p:nvSpPr>
+        <p:spPr>
+          <a:xfrm>
+            <a:off x="822960" y="4846320"/>
+            <a:ext cx="10515600" cy="457200"/>
+          </a:xfrm>
+          <a:prstGeom prst="rect">
+            <a:avLst/>
+          </a:prstGeom>
+          <a:noFill/>
+        </p:spPr>
+        <p:txBody>
+          <a:bodyPr wrap="square">
+            <a:spAutoFit/>
+          </a:bodyPr>
+          <a:lstStyle/>
+          <a:p>
+            <a:pPr algn="l">
+              <a:lnSpc>
+                <a:spcPct val="100000"/>
+              </a:lnSpc>
+            </a:pPr>
+            <a:r>
+              <a:rPr sz="1900" b="0" i="1">
+                <a:solidFill>
+                  <a:srgbClr val="7A2E2E"/>
+                </a:solidFill>
+                <a:latin typeface="Georgia"/>
+              </a:rPr>
+              <a:t>Both works are named and recommended in the muqaddima of our own source.</a:t>
+            </a:r>
+          </a:p>
+        </p:txBody>
+      </p:sp>
+    </p:spTree>
+  </p:cSld>
+  <p:clrMapOvr>
+    <a:masterClrMapping/>
+  </p:clrMapOvr>
+</p:sld>
+</file>
+
 <file path=ppt/slides/slide3.xml><?xml version="1.0" encoding="utf-8"?>
 <p:sld xmlns:a="http://schemas.openxmlformats.org/drawingml/2006/main" xmlns:p="http://schemas.openxmlformats.org/presentationml/2006/main" xmlns:r="http://schemas.openxmlformats.org/officeDocument/2006/relationships">
   <p:cSld>
@@ -9452,46 +11211,156 @@
           </a:p>
         </p:txBody>
       </p:sp>
-      <p:pic>
-        <p:nvPicPr>
-          <p:cNvPr id="3" name="Picture 2" descr="map_s2_twelve.png"/>
-          <p:cNvPicPr>
-            <a:picLocks noChangeAspect="1"/>
-          </p:cNvPicPr>
-          <p:nvPr/>
-        </p:nvPicPr>
-        <p:blipFill>
-          <a:blip r:embed="rId2"/>
-          <a:stretch>
-            <a:fillRect/>
-          </a:stretch>
-        </p:blipFill>
-        <p:spPr>
-          <a:xfrm>
-            <a:off x="0" y="868680"/>
-            <a:ext cx="12191695" cy="6420959"/>
-          </a:xfrm>
-          <a:prstGeom prst="rect">
-            <a:avLst/>
-          </a:prstGeom>
-        </p:spPr>
-      </p:pic>
-      <p:sp>
-        <p:nvSpPr>
-          <p:cNvPr id="4" name="Rectangle 3"/>
+      <p:sp>
+        <p:nvSpPr>
+          <p:cNvPr id="3" name="TextBox 2"/>
+          <p:cNvSpPr txBox="1"/>
+          <p:nvPr/>
+        </p:nvSpPr>
+        <p:spPr>
+          <a:xfrm>
+            <a:off x="777240" y="420624"/>
+            <a:ext cx="8229600" cy="365760"/>
+          </a:xfrm>
+          <a:prstGeom prst="rect">
+            <a:avLst/>
+          </a:prstGeom>
+          <a:noFill/>
+        </p:spPr>
+        <p:txBody>
+          <a:bodyPr wrap="square">
+            <a:spAutoFit/>
+          </a:bodyPr>
+          <a:lstStyle/>
+          <a:p>
+            <a:pPr algn="l">
+              <a:lnSpc>
+                <a:spcPct val="100000"/>
+              </a:lnSpc>
+            </a:pPr>
+            <a:r>
+              <a:rPr sz="1200" b="1" i="0">
+                <a:solidFill>
+                  <a:srgbClr val="104A43"/>
+                </a:solidFill>
+                <a:latin typeface="Segoe UI"/>
+              </a:rPr>
+              <a:t>HE RODE OUT HIMSELF</a:t>
+            </a:r>
+          </a:p>
+        </p:txBody>
+      </p:sp>
+      <p:sp>
+        <p:nvSpPr>
+          <p:cNvPr id="4" name="TextBox 3"/>
+          <p:cNvSpPr txBox="1"/>
+          <p:nvPr/>
+        </p:nvSpPr>
+        <p:spPr>
+          <a:xfrm>
+            <a:off x="640080" y="1325880"/>
+            <a:ext cx="10881360" cy="1554480"/>
+          </a:xfrm>
+          <a:prstGeom prst="rect">
+            <a:avLst/>
+          </a:prstGeom>
+          <a:noFill/>
+        </p:spPr>
+        <p:txBody>
+          <a:bodyPr wrap="square">
+            <a:spAutoFit/>
+          </a:bodyPr>
+          <a:lstStyle/>
+          <a:p>
+            <a:pPr algn="r" rtl="1">
+              <a:lnSpc>
+                <a:spcPct val="140000"/>
+              </a:lnSpc>
+            </a:pPr>
+            <a:r>
+              <a:rPr sz="3600" b="0" i="0">
+                <a:solidFill>
+                  <a:srgbClr val="0A322E"/>
+                </a:solidFill>
+                <a:latin typeface="Traditional Arabic"/>
+                <a:cs typeface="Traditional Arabic"/>
+              </a:rPr>
+              <a:t>وَاللهِ لَا أَفْعَلُ، وَلَأُوَاسِيَنَّكُمْ بِنَفْسِي</a:t>
+            </a:r>
+          </a:p>
+        </p:txBody>
+      </p:sp>
+      <p:sp>
+        <p:nvSpPr>
+          <p:cNvPr id="5" name="TextBox 4"/>
+          <p:cNvSpPr txBox="1"/>
+          <p:nvPr/>
+        </p:nvSpPr>
+        <p:spPr>
+          <a:xfrm>
+            <a:off x="1188720" y="3017520"/>
+            <a:ext cx="9784080" cy="1371600"/>
+          </a:xfrm>
+          <a:prstGeom prst="rect">
+            <a:avLst/>
+          </a:prstGeom>
+          <a:noFill/>
+        </p:spPr>
+        <p:txBody>
+          <a:bodyPr wrap="square">
+            <a:spAutoFit/>
+          </a:bodyPr>
+          <a:lstStyle/>
+          <a:p>
+            <a:pPr algn="ctr">
+              <a:lnSpc>
+                <a:spcPct val="135000"/>
+              </a:lnSpc>
+            </a:pPr>
+            <a:r>
+              <a:rPr sz="2500" b="0" i="1">
+                <a:solidFill>
+                  <a:srgbClr val="1C2321"/>
+                </a:solidFill>
+                <a:latin typeface="Georgia"/>
+              </a:rPr>
+              <a:t>“By God I will not. I will share it with you in person.”</a:t>
+            </a:r>
+          </a:p>
+          <a:p>
+            <a:pPr algn="ctr">
+              <a:lnSpc>
+                <a:spcPct val="135000"/>
+              </a:lnSpc>
+            </a:pPr>
+            <a:r>
+              <a:rPr sz="2500" b="0" i="1">
+                <a:solidFill>
+                  <a:srgbClr val="1C2321"/>
+                </a:solidFill>
+                <a:latin typeface="Georgia"/>
+              </a:rPr>
+              <a:t>When the Companions asked him to stay behind and send someone else.</a:t>
+            </a:r>
+          </a:p>
+        </p:txBody>
+      </p:sp>
+      <p:sp>
+        <p:nvSpPr>
+          <p:cNvPr id="6" name="Rectangle 5"/>
           <p:cNvSpPr/>
           <p:nvPr/>
         </p:nvSpPr>
         <p:spPr>
           <a:xfrm>
-            <a:off x="0" y="0"/>
-            <a:ext cx="12191695" cy="868680"/>
+            <a:off x="5394960" y="4498848"/>
+            <a:ext cx="1371600" cy="19050"/>
           </a:xfrm>
           <a:prstGeom prst="rect">
             <a:avLst/>
           </a:prstGeom>
           <a:solidFill>
-            <a:srgbClr val="0A322E"/>
+            <a:srgbClr val="C49A45"/>
           </a:solidFill>
           <a:ln>
             <a:noFill/>
@@ -9522,14 +11391,14 @@
       </p:sp>
       <p:sp>
         <p:nvSpPr>
-          <p:cNvPr id="5" name="TextBox 4"/>
+          <p:cNvPr id="7" name="TextBox 6"/>
           <p:cNvSpPr txBox="1"/>
           <p:nvPr/>
         </p:nvSpPr>
         <p:spPr>
           <a:xfrm>
-            <a:off x="640080" y="146304"/>
-            <a:ext cx="7863840" cy="640080"/>
+            <a:off x="640080" y="4663440"/>
+            <a:ext cx="10881360" cy="457200"/>
           </a:xfrm>
           <a:prstGeom prst="rect">
             <a:avLst/>
@@ -9542,58 +11411,19 @@
           </a:bodyPr>
           <a:lstStyle/>
           <a:p>
-            <a:pPr algn="l">
+            <a:pPr algn="ctr">
               <a:lnSpc>
                 <a:spcPct val="100000"/>
               </a:lnSpc>
             </a:pPr>
             <a:r>
-              <a:rPr sz="3000" b="0" i="0">
-                <a:solidFill>
-                  <a:srgbClr val="FAF7F0"/>
-                </a:solidFill>
-                <a:latin typeface="Georgia"/>
-              </a:rPr>
-              <a:t>Twelve years</a:t>
-            </a:r>
-          </a:p>
-        </p:txBody>
-      </p:sp>
-      <p:sp>
-        <p:nvSpPr>
-          <p:cNvPr id="6" name="TextBox 5"/>
-          <p:cNvSpPr txBox="1"/>
-          <p:nvPr/>
-        </p:nvSpPr>
-        <p:spPr>
-          <a:xfrm>
-            <a:off x="8595360" y="256032"/>
-            <a:ext cx="3017520" cy="457200"/>
-          </a:xfrm>
-          <a:prstGeom prst="rect">
-            <a:avLst/>
-          </a:prstGeom>
-          <a:noFill/>
-        </p:spPr>
-        <p:txBody>
-          <a:bodyPr wrap="square">
-            <a:spAutoFit/>
-          </a:bodyPr>
-          <a:lstStyle/>
-          <a:p>
-            <a:pPr algn="r">
-              <a:lnSpc>
-                <a:spcPct val="100000"/>
-              </a:lnSpc>
-            </a:pPr>
-            <a:r>
-              <a:rPr sz="1500" b="0" i="0">
-                <a:solidFill>
-                  <a:srgbClr val="C49A45"/>
+              <a:rPr sz="1400" b="0" i="0">
+                <a:solidFill>
+                  <a:srgbClr val="104A43"/>
                 </a:solidFill>
                 <a:latin typeface="Segoe UI"/>
               </a:rPr>
-              <a:t>632 – 644</a:t>
+              <a:t>ABU BAKR AL-SIDDIQ  ·  AL-BIDAYA WA'L-NIHAYA, vol. 7 p. 21</a:t>
             </a:r>
           </a:p>
         </p:txBody>
@@ -9660,173 +11490,46 @@
           </a:p>
         </p:txBody>
       </p:sp>
-      <p:sp>
-        <p:nvSpPr>
-          <p:cNvPr id="3" name="TextBox 2"/>
-          <p:cNvSpPr txBox="1"/>
-          <p:nvPr/>
-        </p:nvSpPr>
-        <p:spPr>
-          <a:xfrm>
-            <a:off x="777240" y="420624"/>
-            <a:ext cx="8229600" cy="365760"/>
-          </a:xfrm>
-          <a:prstGeom prst="rect">
-            <a:avLst/>
-          </a:prstGeom>
-          <a:noFill/>
-        </p:spPr>
-        <p:txBody>
-          <a:bodyPr wrap="square">
-            <a:spAutoFit/>
-          </a:bodyPr>
-          <a:lstStyle/>
-          <a:p>
-            <a:pPr algn="l">
-              <a:lnSpc>
-                <a:spcPct val="100000"/>
-              </a:lnSpc>
-            </a:pPr>
-            <a:r>
-              <a:rPr sz="1200" b="1" i="0">
-                <a:solidFill>
-                  <a:srgbClr val="104A43"/>
-                </a:solidFill>
-                <a:latin typeface="Segoe UI"/>
-              </a:rPr>
-              <a:t>WHAT THEY SAID THEY WERE FOR</a:t>
-            </a:r>
-          </a:p>
-        </p:txBody>
-      </p:sp>
-      <p:sp>
-        <p:nvSpPr>
-          <p:cNvPr id="4" name="TextBox 3"/>
-          <p:cNvSpPr txBox="1"/>
-          <p:nvPr/>
-        </p:nvSpPr>
-        <p:spPr>
-          <a:xfrm>
-            <a:off x="640080" y="1325880"/>
-            <a:ext cx="10881360" cy="1554480"/>
-          </a:xfrm>
-          <a:prstGeom prst="rect">
-            <a:avLst/>
-          </a:prstGeom>
-          <a:noFill/>
-        </p:spPr>
-        <p:txBody>
-          <a:bodyPr wrap="square">
-            <a:spAutoFit/>
-          </a:bodyPr>
-          <a:lstStyle/>
-          <a:p>
-            <a:pPr algn="r" rtl="1">
-              <a:lnSpc>
-                <a:spcPct val="140000"/>
-              </a:lnSpc>
-            </a:pPr>
-            <a:r>
-              <a:rPr sz="3600" b="0" i="0">
-                <a:solidFill>
-                  <a:srgbClr val="0A322E"/>
-                </a:solidFill>
-                <a:latin typeface="Traditional Arabic"/>
-                <a:cs typeface="Traditional Arabic"/>
-              </a:rPr>
-              <a:t>وَإِخْرَاجُ الْعِبَادِ مِنْ عِبَادَةِ الْعِبَادِ إِلَى عِبَادَةِ اللهِ</a:t>
-            </a:r>
-          </a:p>
-          <a:p>
-            <a:pPr algn="r" rtl="1">
-              <a:lnSpc>
-                <a:spcPct val="140000"/>
-              </a:lnSpc>
-            </a:pPr>
-            <a:r>
-              <a:rPr sz="3600" b="0" i="0">
-                <a:solidFill>
-                  <a:srgbClr val="0A322E"/>
-                </a:solidFill>
-                <a:latin typeface="Traditional Arabic"/>
-                <a:cs typeface="Traditional Arabic"/>
-              </a:rPr>
-              <a:t>وَالنَّاسُ بَنُو آدَمَ، فَهُمْ إِخْوَةٌ لِأَبٍ وَأُمٍّ</a:t>
-            </a:r>
-          </a:p>
-        </p:txBody>
-      </p:sp>
-      <p:sp>
-        <p:nvSpPr>
-          <p:cNvPr id="5" name="TextBox 4"/>
-          <p:cNvSpPr txBox="1"/>
-          <p:nvPr/>
-        </p:nvSpPr>
-        <p:spPr>
-          <a:xfrm>
-            <a:off x="1188720" y="3017520"/>
-            <a:ext cx="9784080" cy="1371600"/>
-          </a:xfrm>
-          <a:prstGeom prst="rect">
-            <a:avLst/>
-          </a:prstGeom>
-          <a:noFill/>
-        </p:spPr>
-        <p:txBody>
-          <a:bodyPr wrap="square">
-            <a:spAutoFit/>
-          </a:bodyPr>
-          <a:lstStyle/>
-          <a:p>
-            <a:pPr algn="ctr">
-              <a:lnSpc>
-                <a:spcPct val="135000"/>
-              </a:lnSpc>
-            </a:pPr>
-            <a:r>
-              <a:rPr sz="2500" b="0" i="1">
-                <a:solidFill>
-                  <a:srgbClr val="1C2321"/>
-                </a:solidFill>
-                <a:latin typeface="Georgia"/>
-              </a:rPr>
-              <a:t>“To bring people out of the worship of servants into the worship of God…</a:t>
-            </a:r>
-          </a:p>
-          <a:p>
-            <a:pPr algn="ctr">
-              <a:lnSpc>
-                <a:spcPct val="135000"/>
-              </a:lnSpc>
-            </a:pPr>
-            <a:r>
-              <a:rPr sz="2500" b="0" i="1">
-                <a:solidFill>
-                  <a:srgbClr val="1C2321"/>
-                </a:solidFill>
-                <a:latin typeface="Georgia"/>
-              </a:rPr>
-              <a:t>and people are the children of Adam — brothers of one father and mother.”</a:t>
-            </a:r>
-          </a:p>
-        </p:txBody>
-      </p:sp>
-      <p:sp>
-        <p:nvSpPr>
-          <p:cNvPr id="6" name="Rectangle 5"/>
+      <p:pic>
+        <p:nvPicPr>
+          <p:cNvPr id="3" name="Picture 2" descr="map_s2_ridda.png"/>
+          <p:cNvPicPr>
+            <a:picLocks noChangeAspect="1"/>
+          </p:cNvPicPr>
+          <p:nvPr/>
+        </p:nvPicPr>
+        <p:blipFill>
+          <a:blip r:embed="rId2"/>
+          <a:stretch>
+            <a:fillRect/>
+          </a:stretch>
+        </p:blipFill>
+        <p:spPr>
+          <a:xfrm>
+            <a:off x="2917690" y="868680"/>
+            <a:ext cx="6356316" cy="5879592"/>
+          </a:xfrm>
+          <a:prstGeom prst="rect">
+            <a:avLst/>
+          </a:prstGeom>
+        </p:spPr>
+      </p:pic>
+      <p:sp>
+        <p:nvSpPr>
+          <p:cNvPr id="4" name="Rectangle 3"/>
           <p:cNvSpPr/>
           <p:nvPr/>
         </p:nvSpPr>
         <p:spPr>
           <a:xfrm>
-            <a:off x="5394960" y="4498848"/>
-            <a:ext cx="1371600" cy="19050"/>
+            <a:off x="0" y="0"/>
+            <a:ext cx="12191695" cy="868680"/>
           </a:xfrm>
           <a:prstGeom prst="rect">
             <a:avLst/>
           </a:prstGeom>
           <a:solidFill>
-            <a:srgbClr val="C49A45"/>
+            <a:srgbClr val="0A322E"/>
           </a:solidFill>
           <a:ln>
             <a:noFill/>
@@ -9857,14 +11560,14 @@
       </p:sp>
       <p:sp>
         <p:nvSpPr>
-          <p:cNvPr id="7" name="TextBox 6"/>
+          <p:cNvPr id="5" name="TextBox 4"/>
           <p:cNvSpPr txBox="1"/>
           <p:nvPr/>
         </p:nvSpPr>
         <p:spPr>
           <a:xfrm>
-            <a:off x="640080" y="4663440"/>
-            <a:ext cx="10881360" cy="457200"/>
+            <a:off x="640080" y="146304"/>
+            <a:ext cx="7863840" cy="640080"/>
           </a:xfrm>
           <a:prstGeom prst="rect">
             <a:avLst/>
@@ -9877,19 +11580,58 @@
           </a:bodyPr>
           <a:lstStyle/>
           <a:p>
-            <a:pPr algn="ctr">
+            <a:pPr algn="l">
               <a:lnSpc>
                 <a:spcPct val="100000"/>
               </a:lnSpc>
             </a:pPr>
             <a:r>
-              <a:rPr sz="1400" b="0" i="0">
-                <a:solidFill>
-                  <a:srgbClr val="104A43"/>
+              <a:rPr sz="3000" b="0" i="0">
+                <a:solidFill>
+                  <a:srgbClr val="FAF7F0"/>
+                </a:solidFill>
+                <a:latin typeface="Georgia"/>
+              </a:rPr>
+              <a:t>Eleven banners</a:t>
+            </a:r>
+          </a:p>
+        </p:txBody>
+      </p:sp>
+      <p:sp>
+        <p:nvSpPr>
+          <p:cNvPr id="6" name="TextBox 5"/>
+          <p:cNvSpPr txBox="1"/>
+          <p:nvPr/>
+        </p:nvSpPr>
+        <p:spPr>
+          <a:xfrm>
+            <a:off x="8595360" y="256032"/>
+            <a:ext cx="3017520" cy="457200"/>
+          </a:xfrm>
+          <a:prstGeom prst="rect">
+            <a:avLst/>
+          </a:prstGeom>
+          <a:noFill/>
+        </p:spPr>
+        <p:txBody>
+          <a:bodyPr wrap="square">
+            <a:spAutoFit/>
+          </a:bodyPr>
+          <a:lstStyle/>
+          <a:p>
+            <a:pPr algn="r">
+              <a:lnSpc>
+                <a:spcPct val="100000"/>
+              </a:lnSpc>
+            </a:pPr>
+            <a:r>
+              <a:rPr sz="1500" b="0" i="0">
+                <a:solidFill>
+                  <a:srgbClr val="C49A45"/>
                 </a:solidFill>
                 <a:latin typeface="Segoe UI"/>
               </a:rPr>
-              <a:t>THE ENVOY, IN RUSTAM'S COURT  ·  AL-BIDAYA WA'L-NIHAYA, vol. 7 p. 134</a:t>
+              <a:t>632 – 633</a:t>
             </a:r>
           </a:p>
         </p:txBody>

--- a/L02_baarah_saal/L02.pptx
+++ b/L02_baarah_saal/L02.pptx
@@ -10053,7 +10053,7 @@
         <p:spPr>
           <a:xfrm>
             <a:off x="0" y="0"/>
-            <a:ext cx="12191695" cy="1078992"/>
+            <a:ext cx="12191695" cy="1223263"/>
           </a:xfrm>
           <a:prstGeom prst="rect">
             <a:avLst/>
@@ -10096,7 +10096,7 @@
         </p:nvSpPr>
         <p:spPr>
           <a:xfrm>
-            <a:off x="0" y="1078992"/>
+            <a:off x="0" y="1223263"/>
             <a:ext cx="12191695" cy="57150"/>
           </a:xfrm>
           <a:prstGeom prst="rect">
@@ -10141,7 +10141,7 @@
         <p:spPr>
           <a:xfrm>
             <a:off x="566928" y="91440"/>
-            <a:ext cx="11057839" cy="292608"/>
+            <a:ext cx="11057839" cy="274320"/>
           </a:xfrm>
           <a:prstGeom prst="rect">
             <a:avLst/>
@@ -10181,22 +10181,22 @@
         <p:spPr>
           <a:xfrm>
             <a:off x="566928" y="402336"/>
-            <a:ext cx="11057839" cy="603504"/>
-          </a:xfrm>
-          <a:prstGeom prst="rect">
-            <a:avLst/>
-          </a:prstGeom>
-          <a:noFill/>
-        </p:spPr>
-        <p:txBody>
-          <a:bodyPr wrap="square" anchor="ctr" lIns="36576" rIns="36576" tIns="0" bIns="0">
+            <a:ext cx="11057839" cy="711199"/>
+          </a:xfrm>
+          <a:prstGeom prst="rect">
+            <a:avLst/>
+          </a:prstGeom>
+          <a:noFill/>
+        </p:spPr>
+        <p:txBody>
+          <a:bodyPr wrap="square" anchor="t" lIns="36576" rIns="36576" tIns="0" bIns="0">
             <a:spAutoFit/>
           </a:bodyPr>
           <a:lstStyle/>
           <a:p>
             <a:pPr algn="l">
               <a:lnSpc>
-                <a:spcPct val="125000"/>
+                <a:spcPct val="116000"/>
               </a:lnSpc>
             </a:pPr>
             <a:r>
@@ -10411,7 +10411,7 @@
         <p:spPr>
           <a:xfrm>
             <a:off x="0" y="0"/>
-            <a:ext cx="12191695" cy="1078992"/>
+            <a:ext cx="12191695" cy="1223263"/>
           </a:xfrm>
           <a:prstGeom prst="rect">
             <a:avLst/>
@@ -10454,7 +10454,7 @@
         </p:nvSpPr>
         <p:spPr>
           <a:xfrm>
-            <a:off x="0" y="1078992"/>
+            <a:off x="0" y="1223263"/>
             <a:ext cx="12191695" cy="57150"/>
           </a:xfrm>
           <a:prstGeom prst="rect">
@@ -10499,7 +10499,7 @@
         <p:spPr>
           <a:xfrm>
             <a:off x="566928" y="91440"/>
-            <a:ext cx="11057839" cy="292608"/>
+            <a:ext cx="11057839" cy="274320"/>
           </a:xfrm>
           <a:prstGeom prst="rect">
             <a:avLst/>
@@ -10539,22 +10539,22 @@
         <p:spPr>
           <a:xfrm>
             <a:off x="566928" y="402336"/>
-            <a:ext cx="11057839" cy="603504"/>
-          </a:xfrm>
-          <a:prstGeom prst="rect">
-            <a:avLst/>
-          </a:prstGeom>
-          <a:noFill/>
-        </p:spPr>
-        <p:txBody>
-          <a:bodyPr wrap="square" anchor="ctr" lIns="36576" rIns="36576" tIns="0" bIns="0">
+            <a:ext cx="11057839" cy="711199"/>
+          </a:xfrm>
+          <a:prstGeom prst="rect">
+            <a:avLst/>
+          </a:prstGeom>
+          <a:noFill/>
+        </p:spPr>
+        <p:txBody>
+          <a:bodyPr wrap="square" anchor="t" lIns="36576" rIns="36576" tIns="0" bIns="0">
             <a:spAutoFit/>
           </a:bodyPr>
           <a:lstStyle/>
           <a:p>
             <a:pPr algn="l">
               <a:lnSpc>
-                <a:spcPct val="125000"/>
+                <a:spcPct val="116000"/>
               </a:lnSpc>
             </a:pPr>
             <a:r>
@@ -10769,7 +10769,7 @@
         <p:spPr>
           <a:xfrm>
             <a:off x="0" y="0"/>
-            <a:ext cx="12191695" cy="1078992"/>
+            <a:ext cx="12191695" cy="1223263"/>
           </a:xfrm>
           <a:prstGeom prst="rect">
             <a:avLst/>
@@ -10812,7 +10812,7 @@
         </p:nvSpPr>
         <p:spPr>
           <a:xfrm>
-            <a:off x="0" y="1078992"/>
+            <a:off x="0" y="1223263"/>
             <a:ext cx="12191695" cy="57150"/>
           </a:xfrm>
           <a:prstGeom prst="rect">
@@ -10857,7 +10857,7 @@
         <p:spPr>
           <a:xfrm>
             <a:off x="566928" y="91440"/>
-            <a:ext cx="11057839" cy="292608"/>
+            <a:ext cx="11057839" cy="274320"/>
           </a:xfrm>
           <a:prstGeom prst="rect">
             <a:avLst/>
@@ -10897,22 +10897,22 @@
         <p:spPr>
           <a:xfrm>
             <a:off x="566928" y="402336"/>
-            <a:ext cx="11057839" cy="603504"/>
-          </a:xfrm>
-          <a:prstGeom prst="rect">
-            <a:avLst/>
-          </a:prstGeom>
-          <a:noFill/>
-        </p:spPr>
-        <p:txBody>
-          <a:bodyPr wrap="square" anchor="ctr" lIns="36576" rIns="36576" tIns="0" bIns="0">
+            <a:ext cx="11057839" cy="711199"/>
+          </a:xfrm>
+          <a:prstGeom prst="rect">
+            <a:avLst/>
+          </a:prstGeom>
+          <a:noFill/>
+        </p:spPr>
+        <p:txBody>
+          <a:bodyPr wrap="square" anchor="t" lIns="36576" rIns="36576" tIns="0" bIns="0">
             <a:spAutoFit/>
           </a:bodyPr>
           <a:lstStyle/>
           <a:p>
             <a:pPr algn="l">
               <a:lnSpc>
-                <a:spcPct val="125000"/>
+                <a:spcPct val="116000"/>
               </a:lnSpc>
             </a:pPr>
             <a:r>
@@ -11170,7 +11170,7 @@
         <p:spPr>
           <a:xfrm>
             <a:off x="0" y="0"/>
-            <a:ext cx="12191695" cy="1078992"/>
+            <a:ext cx="12191695" cy="1223263"/>
           </a:xfrm>
           <a:prstGeom prst="rect">
             <a:avLst/>
@@ -11213,7 +11213,7 @@
         </p:nvSpPr>
         <p:spPr>
           <a:xfrm>
-            <a:off x="0" y="1078992"/>
+            <a:off x="0" y="1223263"/>
             <a:ext cx="12191695" cy="57150"/>
           </a:xfrm>
           <a:prstGeom prst="rect">
@@ -11258,7 +11258,7 @@
         <p:spPr>
           <a:xfrm>
             <a:off x="566928" y="91440"/>
-            <a:ext cx="11057839" cy="292608"/>
+            <a:ext cx="11057839" cy="274320"/>
           </a:xfrm>
           <a:prstGeom prst="rect">
             <a:avLst/>
@@ -11298,22 +11298,22 @@
         <p:spPr>
           <a:xfrm>
             <a:off x="566928" y="402336"/>
-            <a:ext cx="11057839" cy="603504"/>
-          </a:xfrm>
-          <a:prstGeom prst="rect">
-            <a:avLst/>
-          </a:prstGeom>
-          <a:noFill/>
-        </p:spPr>
-        <p:txBody>
-          <a:bodyPr wrap="square" anchor="ctr" lIns="36576" rIns="36576" tIns="0" bIns="0">
+            <a:ext cx="11057839" cy="711199"/>
+          </a:xfrm>
+          <a:prstGeom prst="rect">
+            <a:avLst/>
+          </a:prstGeom>
+          <a:noFill/>
+        </p:spPr>
+        <p:txBody>
+          <a:bodyPr wrap="square" anchor="t" lIns="36576" rIns="36576" tIns="0" bIns="0">
             <a:spAutoFit/>
           </a:bodyPr>
           <a:lstStyle/>
           <a:p>
             <a:pPr algn="l">
               <a:lnSpc>
-                <a:spcPct val="125000"/>
+                <a:spcPct val="116000"/>
               </a:lnSpc>
             </a:pPr>
             <a:r>
@@ -11528,7 +11528,7 @@
         <p:spPr>
           <a:xfrm>
             <a:off x="0" y="0"/>
-            <a:ext cx="12191695" cy="1078992"/>
+            <a:ext cx="12191695" cy="1223263"/>
           </a:xfrm>
           <a:prstGeom prst="rect">
             <a:avLst/>
@@ -11571,7 +11571,7 @@
         </p:nvSpPr>
         <p:spPr>
           <a:xfrm>
-            <a:off x="0" y="1078992"/>
+            <a:off x="0" y="1223263"/>
             <a:ext cx="12191695" cy="57150"/>
           </a:xfrm>
           <a:prstGeom prst="rect">
@@ -11616,7 +11616,7 @@
         <p:spPr>
           <a:xfrm>
             <a:off x="566928" y="91440"/>
-            <a:ext cx="11057839" cy="292608"/>
+            <a:ext cx="11057839" cy="274320"/>
           </a:xfrm>
           <a:prstGeom prst="rect">
             <a:avLst/>
@@ -11656,22 +11656,22 @@
         <p:spPr>
           <a:xfrm>
             <a:off x="566928" y="402336"/>
-            <a:ext cx="11057839" cy="603504"/>
-          </a:xfrm>
-          <a:prstGeom prst="rect">
-            <a:avLst/>
-          </a:prstGeom>
-          <a:noFill/>
-        </p:spPr>
-        <p:txBody>
-          <a:bodyPr wrap="square" anchor="ctr" lIns="36576" rIns="36576" tIns="0" bIns="0">
+            <a:ext cx="11057839" cy="711199"/>
+          </a:xfrm>
+          <a:prstGeom prst="rect">
+            <a:avLst/>
+          </a:prstGeom>
+          <a:noFill/>
+        </p:spPr>
+        <p:txBody>
+          <a:bodyPr wrap="square" anchor="t" lIns="36576" rIns="36576" tIns="0" bIns="0">
             <a:spAutoFit/>
           </a:bodyPr>
           <a:lstStyle/>
           <a:p>
             <a:pPr algn="l">
               <a:lnSpc>
-                <a:spcPct val="125000"/>
+                <a:spcPct val="116000"/>
               </a:lnSpc>
             </a:pPr>
             <a:r>
@@ -12080,7 +12080,7 @@
         <p:spPr>
           <a:xfrm>
             <a:off x="0" y="0"/>
-            <a:ext cx="12191695" cy="1078992"/>
+            <a:ext cx="12191695" cy="1223263"/>
           </a:xfrm>
           <a:prstGeom prst="rect">
             <a:avLst/>
@@ -12123,7 +12123,7 @@
         </p:nvSpPr>
         <p:spPr>
           <a:xfrm>
-            <a:off x="0" y="1078992"/>
+            <a:off x="0" y="1223263"/>
             <a:ext cx="12191695" cy="57150"/>
           </a:xfrm>
           <a:prstGeom prst="rect">
@@ -12168,7 +12168,7 @@
         <p:spPr>
           <a:xfrm>
             <a:off x="566928" y="91440"/>
-            <a:ext cx="11057839" cy="292608"/>
+            <a:ext cx="11057839" cy="274320"/>
           </a:xfrm>
           <a:prstGeom prst="rect">
             <a:avLst/>
@@ -12208,22 +12208,22 @@
         <p:spPr>
           <a:xfrm>
             <a:off x="566928" y="402336"/>
-            <a:ext cx="11057839" cy="603504"/>
-          </a:xfrm>
-          <a:prstGeom prst="rect">
-            <a:avLst/>
-          </a:prstGeom>
-          <a:noFill/>
-        </p:spPr>
-        <p:txBody>
-          <a:bodyPr wrap="square" anchor="ctr" lIns="36576" rIns="36576" tIns="0" bIns="0">
+            <a:ext cx="11057839" cy="711199"/>
+          </a:xfrm>
+          <a:prstGeom prst="rect">
+            <a:avLst/>
+          </a:prstGeom>
+          <a:noFill/>
+        </p:spPr>
+        <p:txBody>
+          <a:bodyPr wrap="square" anchor="t" lIns="36576" rIns="36576" tIns="0" bIns="0">
             <a:spAutoFit/>
           </a:bodyPr>
           <a:lstStyle/>
           <a:p>
             <a:pPr algn="l">
               <a:lnSpc>
-                <a:spcPct val="125000"/>
+                <a:spcPct val="116000"/>
               </a:lnSpc>
             </a:pPr>
             <a:r>
@@ -12438,7 +12438,7 @@
         <p:spPr>
           <a:xfrm>
             <a:off x="0" y="0"/>
-            <a:ext cx="12191695" cy="1078992"/>
+            <a:ext cx="12191695" cy="1223263"/>
           </a:xfrm>
           <a:prstGeom prst="rect">
             <a:avLst/>
@@ -12481,7 +12481,7 @@
         </p:nvSpPr>
         <p:spPr>
           <a:xfrm>
-            <a:off x="0" y="1078992"/>
+            <a:off x="0" y="1223263"/>
             <a:ext cx="12191695" cy="57150"/>
           </a:xfrm>
           <a:prstGeom prst="rect">
@@ -12526,7 +12526,7 @@
         <p:spPr>
           <a:xfrm>
             <a:off x="566928" y="91440"/>
-            <a:ext cx="11057839" cy="292608"/>
+            <a:ext cx="11057839" cy="274320"/>
           </a:xfrm>
           <a:prstGeom prst="rect">
             <a:avLst/>
@@ -12566,22 +12566,22 @@
         <p:spPr>
           <a:xfrm>
             <a:off x="566928" y="402336"/>
-            <a:ext cx="11057839" cy="603504"/>
-          </a:xfrm>
-          <a:prstGeom prst="rect">
-            <a:avLst/>
-          </a:prstGeom>
-          <a:noFill/>
-        </p:spPr>
-        <p:txBody>
-          <a:bodyPr wrap="square" anchor="ctr" lIns="36576" rIns="36576" tIns="0" bIns="0">
+            <a:ext cx="11057839" cy="711199"/>
+          </a:xfrm>
+          <a:prstGeom prst="rect">
+            <a:avLst/>
+          </a:prstGeom>
+          <a:noFill/>
+        </p:spPr>
+        <p:txBody>
+          <a:bodyPr wrap="square" anchor="t" lIns="36576" rIns="36576" tIns="0" bIns="0">
             <a:spAutoFit/>
           </a:bodyPr>
           <a:lstStyle/>
           <a:p>
             <a:pPr algn="l">
               <a:lnSpc>
-                <a:spcPct val="125000"/>
+                <a:spcPct val="116000"/>
               </a:lnSpc>
             </a:pPr>
             <a:r>
@@ -12796,7 +12796,7 @@
         <p:spPr>
           <a:xfrm>
             <a:off x="0" y="0"/>
-            <a:ext cx="12191695" cy="1078992"/>
+            <a:ext cx="12191695" cy="1223263"/>
           </a:xfrm>
           <a:prstGeom prst="rect">
             <a:avLst/>
@@ -12839,7 +12839,7 @@
         </p:nvSpPr>
         <p:spPr>
           <a:xfrm>
-            <a:off x="0" y="1078992"/>
+            <a:off x="0" y="1223263"/>
             <a:ext cx="12191695" cy="57150"/>
           </a:xfrm>
           <a:prstGeom prst="rect">
@@ -12884,7 +12884,7 @@
         <p:spPr>
           <a:xfrm>
             <a:off x="566928" y="91440"/>
-            <a:ext cx="11057839" cy="292608"/>
+            <a:ext cx="11057839" cy="274320"/>
           </a:xfrm>
           <a:prstGeom prst="rect">
             <a:avLst/>
@@ -12924,22 +12924,22 @@
         <p:spPr>
           <a:xfrm>
             <a:off x="566928" y="402336"/>
-            <a:ext cx="11057839" cy="603504"/>
-          </a:xfrm>
-          <a:prstGeom prst="rect">
-            <a:avLst/>
-          </a:prstGeom>
-          <a:noFill/>
-        </p:spPr>
-        <p:txBody>
-          <a:bodyPr wrap="square" anchor="ctr" lIns="36576" rIns="36576" tIns="0" bIns="0">
+            <a:ext cx="11057839" cy="711199"/>
+          </a:xfrm>
+          <a:prstGeom prst="rect">
+            <a:avLst/>
+          </a:prstGeom>
+          <a:noFill/>
+        </p:spPr>
+        <p:txBody>
+          <a:bodyPr wrap="square" anchor="t" lIns="36576" rIns="36576" tIns="0" bIns="0">
             <a:spAutoFit/>
           </a:bodyPr>
           <a:lstStyle/>
           <a:p>
             <a:pPr algn="l">
               <a:lnSpc>
-                <a:spcPct val="125000"/>
+                <a:spcPct val="116000"/>
               </a:lnSpc>
             </a:pPr>
             <a:r>
@@ -13634,7 +13634,7 @@
         <p:spPr>
           <a:xfrm>
             <a:off x="0" y="0"/>
-            <a:ext cx="12191695" cy="1078992"/>
+            <a:ext cx="12191695" cy="1223263"/>
           </a:xfrm>
           <a:prstGeom prst="rect">
             <a:avLst/>
@@ -13677,7 +13677,7 @@
         </p:nvSpPr>
         <p:spPr>
           <a:xfrm>
-            <a:off x="0" y="1078992"/>
+            <a:off x="0" y="1223263"/>
             <a:ext cx="12191695" cy="57150"/>
           </a:xfrm>
           <a:prstGeom prst="rect">
@@ -13722,7 +13722,7 @@
         <p:spPr>
           <a:xfrm>
             <a:off x="566928" y="91440"/>
-            <a:ext cx="11057839" cy="292608"/>
+            <a:ext cx="11057839" cy="274320"/>
           </a:xfrm>
           <a:prstGeom prst="rect">
             <a:avLst/>
@@ -13762,22 +13762,22 @@
         <p:spPr>
           <a:xfrm>
             <a:off x="566928" y="402336"/>
-            <a:ext cx="11057839" cy="603504"/>
-          </a:xfrm>
-          <a:prstGeom prst="rect">
-            <a:avLst/>
-          </a:prstGeom>
-          <a:noFill/>
-        </p:spPr>
-        <p:txBody>
-          <a:bodyPr wrap="square" anchor="ctr" lIns="36576" rIns="36576" tIns="0" bIns="0">
+            <a:ext cx="11057839" cy="711199"/>
+          </a:xfrm>
+          <a:prstGeom prst="rect">
+            <a:avLst/>
+          </a:prstGeom>
+          <a:noFill/>
+        </p:spPr>
+        <p:txBody>
+          <a:bodyPr wrap="square" anchor="t" lIns="36576" rIns="36576" tIns="0" bIns="0">
             <a:spAutoFit/>
           </a:bodyPr>
           <a:lstStyle/>
           <a:p>
             <a:pPr algn="l">
               <a:lnSpc>
-                <a:spcPct val="125000"/>
+                <a:spcPct val="116000"/>
               </a:lnSpc>
             </a:pPr>
             <a:r>
@@ -13992,7 +13992,7 @@
         <p:spPr>
           <a:xfrm>
             <a:off x="0" y="0"/>
-            <a:ext cx="12191695" cy="1078992"/>
+            <a:ext cx="12191695" cy="1223263"/>
           </a:xfrm>
           <a:prstGeom prst="rect">
             <a:avLst/>
@@ -14035,7 +14035,7 @@
         </p:nvSpPr>
         <p:spPr>
           <a:xfrm>
-            <a:off x="0" y="1078992"/>
+            <a:off x="0" y="1223263"/>
             <a:ext cx="12191695" cy="57150"/>
           </a:xfrm>
           <a:prstGeom prst="rect">
@@ -14080,7 +14080,7 @@
         <p:spPr>
           <a:xfrm>
             <a:off x="566928" y="91440"/>
-            <a:ext cx="11057839" cy="292608"/>
+            <a:ext cx="11057839" cy="274320"/>
           </a:xfrm>
           <a:prstGeom prst="rect">
             <a:avLst/>
@@ -14120,22 +14120,22 @@
         <p:spPr>
           <a:xfrm>
             <a:off x="566928" y="402336"/>
-            <a:ext cx="11057839" cy="603504"/>
-          </a:xfrm>
-          <a:prstGeom prst="rect">
-            <a:avLst/>
-          </a:prstGeom>
-          <a:noFill/>
-        </p:spPr>
-        <p:txBody>
-          <a:bodyPr wrap="square" anchor="ctr" lIns="36576" rIns="36576" tIns="0" bIns="0">
+            <a:ext cx="11057839" cy="711199"/>
+          </a:xfrm>
+          <a:prstGeom prst="rect">
+            <a:avLst/>
+          </a:prstGeom>
+          <a:noFill/>
+        </p:spPr>
+        <p:txBody>
+          <a:bodyPr wrap="square" anchor="t" lIns="36576" rIns="36576" tIns="0" bIns="0">
             <a:spAutoFit/>
           </a:bodyPr>
           <a:lstStyle/>
           <a:p>
             <a:pPr algn="l">
               <a:lnSpc>
-                <a:spcPct val="125000"/>
+                <a:spcPct val="116000"/>
               </a:lnSpc>
             </a:pPr>
             <a:r>
@@ -14250,7 +14250,7 @@
         <p:spPr>
           <a:xfrm>
             <a:off x="0" y="0"/>
-            <a:ext cx="12191695" cy="1078992"/>
+            <a:ext cx="12191695" cy="1223263"/>
           </a:xfrm>
           <a:prstGeom prst="rect">
             <a:avLst/>
@@ -14293,7 +14293,7 @@
         </p:nvSpPr>
         <p:spPr>
           <a:xfrm>
-            <a:off x="0" y="1078992"/>
+            <a:off x="0" y="1223263"/>
             <a:ext cx="12191695" cy="57150"/>
           </a:xfrm>
           <a:prstGeom prst="rect">
@@ -14338,7 +14338,7 @@
         <p:spPr>
           <a:xfrm>
             <a:off x="566928" y="91440"/>
-            <a:ext cx="11057839" cy="292608"/>
+            <a:ext cx="11057839" cy="274320"/>
           </a:xfrm>
           <a:prstGeom prst="rect">
             <a:avLst/>
@@ -14378,22 +14378,22 @@
         <p:spPr>
           <a:xfrm>
             <a:off x="566928" y="402336"/>
-            <a:ext cx="11057839" cy="603504"/>
-          </a:xfrm>
-          <a:prstGeom prst="rect">
-            <a:avLst/>
-          </a:prstGeom>
-          <a:noFill/>
-        </p:spPr>
-        <p:txBody>
-          <a:bodyPr wrap="square" anchor="ctr" lIns="36576" rIns="36576" tIns="0" bIns="0">
+            <a:ext cx="11057839" cy="711199"/>
+          </a:xfrm>
+          <a:prstGeom prst="rect">
+            <a:avLst/>
+          </a:prstGeom>
+          <a:noFill/>
+        </p:spPr>
+        <p:txBody>
+          <a:bodyPr wrap="square" anchor="t" lIns="36576" rIns="36576" tIns="0" bIns="0">
             <a:spAutoFit/>
           </a:bodyPr>
           <a:lstStyle/>
           <a:p>
             <a:pPr algn="l">
               <a:lnSpc>
-                <a:spcPct val="125000"/>
+                <a:spcPct val="116000"/>
               </a:lnSpc>
             </a:pPr>
             <a:r>
@@ -14651,7 +14651,7 @@
         <p:spPr>
           <a:xfrm>
             <a:off x="0" y="0"/>
-            <a:ext cx="12191695" cy="1078992"/>
+            <a:ext cx="12191695" cy="1223263"/>
           </a:xfrm>
           <a:prstGeom prst="rect">
             <a:avLst/>
@@ -14694,7 +14694,7 @@
         </p:nvSpPr>
         <p:spPr>
           <a:xfrm>
-            <a:off x="0" y="1078992"/>
+            <a:off x="0" y="1223263"/>
             <a:ext cx="12191695" cy="57150"/>
           </a:xfrm>
           <a:prstGeom prst="rect">
@@ -14739,7 +14739,7 @@
         <p:spPr>
           <a:xfrm>
             <a:off x="566928" y="91440"/>
-            <a:ext cx="11057839" cy="292608"/>
+            <a:ext cx="11057839" cy="274320"/>
           </a:xfrm>
           <a:prstGeom prst="rect">
             <a:avLst/>
@@ -14779,22 +14779,22 @@
         <p:spPr>
           <a:xfrm>
             <a:off x="566928" y="402336"/>
-            <a:ext cx="11057839" cy="603504"/>
-          </a:xfrm>
-          <a:prstGeom prst="rect">
-            <a:avLst/>
-          </a:prstGeom>
-          <a:noFill/>
-        </p:spPr>
-        <p:txBody>
-          <a:bodyPr wrap="square" anchor="ctr" lIns="36576" rIns="36576" tIns="0" bIns="0">
+            <a:ext cx="11057839" cy="711199"/>
+          </a:xfrm>
+          <a:prstGeom prst="rect">
+            <a:avLst/>
+          </a:prstGeom>
+          <a:noFill/>
+        </p:spPr>
+        <p:txBody>
+          <a:bodyPr wrap="square" anchor="t" lIns="36576" rIns="36576" tIns="0" bIns="0">
             <a:spAutoFit/>
           </a:bodyPr>
           <a:lstStyle/>
           <a:p>
             <a:pPr algn="l">
               <a:lnSpc>
-                <a:spcPct val="125000"/>
+                <a:spcPct val="116000"/>
               </a:lnSpc>
             </a:pPr>
             <a:r>
@@ -15009,7 +15009,7 @@
         <p:spPr>
           <a:xfrm>
             <a:off x="0" y="0"/>
-            <a:ext cx="12191695" cy="1078992"/>
+            <a:ext cx="12191695" cy="1223263"/>
           </a:xfrm>
           <a:prstGeom prst="rect">
             <a:avLst/>
@@ -15052,7 +15052,7 @@
         </p:nvSpPr>
         <p:spPr>
           <a:xfrm>
-            <a:off x="0" y="1078992"/>
+            <a:off x="0" y="1223263"/>
             <a:ext cx="12191695" cy="57150"/>
           </a:xfrm>
           <a:prstGeom prst="rect">
@@ -15097,7 +15097,7 @@
         <p:spPr>
           <a:xfrm>
             <a:off x="566928" y="91440"/>
-            <a:ext cx="11057839" cy="292608"/>
+            <a:ext cx="11057839" cy="274320"/>
           </a:xfrm>
           <a:prstGeom prst="rect">
             <a:avLst/>
@@ -15137,22 +15137,22 @@
         <p:spPr>
           <a:xfrm>
             <a:off x="566928" y="402336"/>
-            <a:ext cx="11057839" cy="603504"/>
-          </a:xfrm>
-          <a:prstGeom prst="rect">
-            <a:avLst/>
-          </a:prstGeom>
-          <a:noFill/>
-        </p:spPr>
-        <p:txBody>
-          <a:bodyPr wrap="square" anchor="ctr" lIns="36576" rIns="36576" tIns="0" bIns="0">
+            <a:ext cx="11057839" cy="711199"/>
+          </a:xfrm>
+          <a:prstGeom prst="rect">
+            <a:avLst/>
+          </a:prstGeom>
+          <a:noFill/>
+        </p:spPr>
+        <p:txBody>
+          <a:bodyPr wrap="square" anchor="t" lIns="36576" rIns="36576" tIns="0" bIns="0">
             <a:spAutoFit/>
           </a:bodyPr>
           <a:lstStyle/>
           <a:p>
             <a:pPr algn="l">
               <a:lnSpc>
-                <a:spcPct val="125000"/>
+                <a:spcPct val="116000"/>
               </a:lnSpc>
             </a:pPr>
             <a:r>
@@ -15367,7 +15367,7 @@
         <p:spPr>
           <a:xfrm>
             <a:off x="0" y="0"/>
-            <a:ext cx="12191695" cy="1078992"/>
+            <a:ext cx="12191695" cy="1223263"/>
           </a:xfrm>
           <a:prstGeom prst="rect">
             <a:avLst/>
@@ -15410,7 +15410,7 @@
         </p:nvSpPr>
         <p:spPr>
           <a:xfrm>
-            <a:off x="0" y="1078992"/>
+            <a:off x="0" y="1223263"/>
             <a:ext cx="12191695" cy="57150"/>
           </a:xfrm>
           <a:prstGeom prst="rect">
@@ -15455,7 +15455,7 @@
         <p:spPr>
           <a:xfrm>
             <a:off x="566928" y="91440"/>
-            <a:ext cx="11057839" cy="292608"/>
+            <a:ext cx="11057839" cy="274320"/>
           </a:xfrm>
           <a:prstGeom prst="rect">
             <a:avLst/>
@@ -15495,22 +15495,22 @@
         <p:spPr>
           <a:xfrm>
             <a:off x="566928" y="402336"/>
-            <a:ext cx="11057839" cy="603504"/>
-          </a:xfrm>
-          <a:prstGeom prst="rect">
-            <a:avLst/>
-          </a:prstGeom>
-          <a:noFill/>
-        </p:spPr>
-        <p:txBody>
-          <a:bodyPr wrap="square" anchor="ctr" lIns="36576" rIns="36576" tIns="0" bIns="0">
+            <a:ext cx="11057839" cy="711199"/>
+          </a:xfrm>
+          <a:prstGeom prst="rect">
+            <a:avLst/>
+          </a:prstGeom>
+          <a:noFill/>
+        </p:spPr>
+        <p:txBody>
+          <a:bodyPr wrap="square" anchor="t" lIns="36576" rIns="36576" tIns="0" bIns="0">
             <a:spAutoFit/>
           </a:bodyPr>
           <a:lstStyle/>
           <a:p>
             <a:pPr algn="l">
               <a:lnSpc>
-                <a:spcPct val="125000"/>
+                <a:spcPct val="116000"/>
               </a:lnSpc>
             </a:pPr>
             <a:r>
@@ -16205,7 +16205,7 @@
         <p:spPr>
           <a:xfrm>
             <a:off x="0" y="0"/>
-            <a:ext cx="12191695" cy="1078992"/>
+            <a:ext cx="12191695" cy="1223263"/>
           </a:xfrm>
           <a:prstGeom prst="rect">
             <a:avLst/>
@@ -16248,7 +16248,7 @@
         </p:nvSpPr>
         <p:spPr>
           <a:xfrm>
-            <a:off x="0" y="1078992"/>
+            <a:off x="0" y="1223263"/>
             <a:ext cx="12191695" cy="57150"/>
           </a:xfrm>
           <a:prstGeom prst="rect">
@@ -16293,7 +16293,7 @@
         <p:spPr>
           <a:xfrm>
             <a:off x="566928" y="91440"/>
-            <a:ext cx="11057839" cy="292608"/>
+            <a:ext cx="11057839" cy="274320"/>
           </a:xfrm>
           <a:prstGeom prst="rect">
             <a:avLst/>
@@ -16333,22 +16333,22 @@
         <p:spPr>
           <a:xfrm>
             <a:off x="566928" y="402336"/>
-            <a:ext cx="11057839" cy="603504"/>
-          </a:xfrm>
-          <a:prstGeom prst="rect">
-            <a:avLst/>
-          </a:prstGeom>
-          <a:noFill/>
-        </p:spPr>
-        <p:txBody>
-          <a:bodyPr wrap="square" anchor="ctr" lIns="36576" rIns="36576" tIns="0" bIns="0">
+            <a:ext cx="11057839" cy="711199"/>
+          </a:xfrm>
+          <a:prstGeom prst="rect">
+            <a:avLst/>
+          </a:prstGeom>
+          <a:noFill/>
+        </p:spPr>
+        <p:txBody>
+          <a:bodyPr wrap="square" anchor="t" lIns="36576" rIns="36576" tIns="0" bIns="0">
             <a:spAutoFit/>
           </a:bodyPr>
           <a:lstStyle/>
           <a:p>
             <a:pPr algn="l">
               <a:lnSpc>
-                <a:spcPct val="125000"/>
+                <a:spcPct val="116000"/>
               </a:lnSpc>
             </a:pPr>
             <a:r>
@@ -16563,7 +16563,7 @@
         <p:spPr>
           <a:xfrm>
             <a:off x="0" y="0"/>
-            <a:ext cx="12191695" cy="1078992"/>
+            <a:ext cx="12191695" cy="1223263"/>
           </a:xfrm>
           <a:prstGeom prst="rect">
             <a:avLst/>
@@ -16606,7 +16606,7 @@
         </p:nvSpPr>
         <p:spPr>
           <a:xfrm>
-            <a:off x="0" y="1078992"/>
+            <a:off x="0" y="1223263"/>
             <a:ext cx="12191695" cy="57150"/>
           </a:xfrm>
           <a:prstGeom prst="rect">
@@ -16651,7 +16651,7 @@
         <p:spPr>
           <a:xfrm>
             <a:off x="566928" y="91440"/>
-            <a:ext cx="11057839" cy="292608"/>
+            <a:ext cx="11057839" cy="274320"/>
           </a:xfrm>
           <a:prstGeom prst="rect">
             <a:avLst/>
@@ -16691,22 +16691,22 @@
         <p:spPr>
           <a:xfrm>
             <a:off x="566928" y="402336"/>
-            <a:ext cx="11057839" cy="603504"/>
-          </a:xfrm>
-          <a:prstGeom prst="rect">
-            <a:avLst/>
-          </a:prstGeom>
-          <a:noFill/>
-        </p:spPr>
-        <p:txBody>
-          <a:bodyPr wrap="square" anchor="ctr" lIns="36576" rIns="36576" tIns="0" bIns="0">
+            <a:ext cx="11057839" cy="711199"/>
+          </a:xfrm>
+          <a:prstGeom prst="rect">
+            <a:avLst/>
+          </a:prstGeom>
+          <a:noFill/>
+        </p:spPr>
+        <p:txBody>
+          <a:bodyPr wrap="square" anchor="t" lIns="36576" rIns="36576" tIns="0" bIns="0">
             <a:spAutoFit/>
           </a:bodyPr>
           <a:lstStyle/>
           <a:p>
             <a:pPr algn="l">
               <a:lnSpc>
-                <a:spcPct val="125000"/>
+                <a:spcPct val="116000"/>
               </a:lnSpc>
             </a:pPr>
             <a:r>
@@ -16921,7 +16921,7 @@
         <p:spPr>
           <a:xfrm>
             <a:off x="0" y="0"/>
-            <a:ext cx="12191695" cy="1078992"/>
+            <a:ext cx="12191695" cy="1223263"/>
           </a:xfrm>
           <a:prstGeom prst="rect">
             <a:avLst/>
@@ -16964,7 +16964,7 @@
         </p:nvSpPr>
         <p:spPr>
           <a:xfrm>
-            <a:off x="0" y="1078992"/>
+            <a:off x="0" y="1223263"/>
             <a:ext cx="12191695" cy="57150"/>
           </a:xfrm>
           <a:prstGeom prst="rect">
@@ -17009,7 +17009,7 @@
         <p:spPr>
           <a:xfrm>
             <a:off x="566928" y="91440"/>
-            <a:ext cx="11057839" cy="292608"/>
+            <a:ext cx="11057839" cy="274320"/>
           </a:xfrm>
           <a:prstGeom prst="rect">
             <a:avLst/>
@@ -17049,22 +17049,22 @@
         <p:spPr>
           <a:xfrm>
             <a:off x="566928" y="402336"/>
-            <a:ext cx="11057839" cy="603504"/>
-          </a:xfrm>
-          <a:prstGeom prst="rect">
-            <a:avLst/>
-          </a:prstGeom>
-          <a:noFill/>
-        </p:spPr>
-        <p:txBody>
-          <a:bodyPr wrap="square" anchor="ctr" lIns="36576" rIns="36576" tIns="0" bIns="0">
+            <a:ext cx="11057839" cy="711199"/>
+          </a:xfrm>
+          <a:prstGeom prst="rect">
+            <a:avLst/>
+          </a:prstGeom>
+          <a:noFill/>
+        </p:spPr>
+        <p:txBody>
+          <a:bodyPr wrap="square" anchor="t" lIns="36576" rIns="36576" tIns="0" bIns="0">
             <a:spAutoFit/>
           </a:bodyPr>
           <a:lstStyle/>
           <a:p>
             <a:pPr algn="l">
               <a:lnSpc>
-                <a:spcPct val="125000"/>
+                <a:spcPct val="116000"/>
               </a:lnSpc>
             </a:pPr>
             <a:r>
@@ -17473,7 +17473,7 @@
         <p:spPr>
           <a:xfrm>
             <a:off x="0" y="0"/>
-            <a:ext cx="12191695" cy="1078992"/>
+            <a:ext cx="12191695" cy="1223263"/>
           </a:xfrm>
           <a:prstGeom prst="rect">
             <a:avLst/>
@@ -17516,7 +17516,7 @@
         </p:nvSpPr>
         <p:spPr>
           <a:xfrm>
-            <a:off x="0" y="1078992"/>
+            <a:off x="0" y="1223263"/>
             <a:ext cx="12191695" cy="57150"/>
           </a:xfrm>
           <a:prstGeom prst="rect">
@@ -17561,7 +17561,7 @@
         <p:spPr>
           <a:xfrm>
             <a:off x="566928" y="91440"/>
-            <a:ext cx="11057839" cy="292608"/>
+            <a:ext cx="11057839" cy="274320"/>
           </a:xfrm>
           <a:prstGeom prst="rect">
             <a:avLst/>
@@ -17601,22 +17601,22 @@
         <p:spPr>
           <a:xfrm>
             <a:off x="566928" y="402336"/>
-            <a:ext cx="11057839" cy="603504"/>
-          </a:xfrm>
-          <a:prstGeom prst="rect">
-            <a:avLst/>
-          </a:prstGeom>
-          <a:noFill/>
-        </p:spPr>
-        <p:txBody>
-          <a:bodyPr wrap="square" anchor="ctr" lIns="36576" rIns="36576" tIns="0" bIns="0">
+            <a:ext cx="11057839" cy="711199"/>
+          </a:xfrm>
+          <a:prstGeom prst="rect">
+            <a:avLst/>
+          </a:prstGeom>
+          <a:noFill/>
+        </p:spPr>
+        <p:txBody>
+          <a:bodyPr wrap="square" anchor="t" lIns="36576" rIns="36576" tIns="0" bIns="0">
             <a:spAutoFit/>
           </a:bodyPr>
           <a:lstStyle/>
           <a:p>
             <a:pPr algn="l">
               <a:lnSpc>
-                <a:spcPct val="125000"/>
+                <a:spcPct val="116000"/>
               </a:lnSpc>
             </a:pPr>
             <a:r>
@@ -17831,7 +17831,7 @@
         <p:spPr>
           <a:xfrm>
             <a:off x="0" y="0"/>
-            <a:ext cx="12191695" cy="1078992"/>
+            <a:ext cx="12191695" cy="1223263"/>
           </a:xfrm>
           <a:prstGeom prst="rect">
             <a:avLst/>
@@ -17874,7 +17874,7 @@
         </p:nvSpPr>
         <p:spPr>
           <a:xfrm>
-            <a:off x="0" y="1078992"/>
+            <a:off x="0" y="1223263"/>
             <a:ext cx="12191695" cy="57150"/>
           </a:xfrm>
           <a:prstGeom prst="rect">
@@ -17919,7 +17919,7 @@
         <p:spPr>
           <a:xfrm>
             <a:off x="566928" y="91440"/>
-            <a:ext cx="11057839" cy="292608"/>
+            <a:ext cx="11057839" cy="274320"/>
           </a:xfrm>
           <a:prstGeom prst="rect">
             <a:avLst/>
@@ -17959,22 +17959,22 @@
         <p:spPr>
           <a:xfrm>
             <a:off x="566928" y="402336"/>
-            <a:ext cx="11057839" cy="603504"/>
-          </a:xfrm>
-          <a:prstGeom prst="rect">
-            <a:avLst/>
-          </a:prstGeom>
-          <a:noFill/>
-        </p:spPr>
-        <p:txBody>
-          <a:bodyPr wrap="square" anchor="ctr" lIns="36576" rIns="36576" tIns="0" bIns="0">
+            <a:ext cx="11057839" cy="711199"/>
+          </a:xfrm>
+          <a:prstGeom prst="rect">
+            <a:avLst/>
+          </a:prstGeom>
+          <a:noFill/>
+        </p:spPr>
+        <p:txBody>
+          <a:bodyPr wrap="square" anchor="t" lIns="36576" rIns="36576" tIns="0" bIns="0">
             <a:spAutoFit/>
           </a:bodyPr>
           <a:lstStyle/>
           <a:p>
             <a:pPr algn="l">
               <a:lnSpc>
-                <a:spcPct val="125000"/>
+                <a:spcPct val="116000"/>
               </a:lnSpc>
             </a:pPr>
             <a:r>
@@ -18189,7 +18189,7 @@
         <p:spPr>
           <a:xfrm>
             <a:off x="0" y="0"/>
-            <a:ext cx="12191695" cy="1078992"/>
+            <a:ext cx="12191695" cy="1223263"/>
           </a:xfrm>
           <a:prstGeom prst="rect">
             <a:avLst/>
@@ -18232,7 +18232,7 @@
         </p:nvSpPr>
         <p:spPr>
           <a:xfrm>
-            <a:off x="0" y="1078992"/>
+            <a:off x="0" y="1223263"/>
             <a:ext cx="12191695" cy="57150"/>
           </a:xfrm>
           <a:prstGeom prst="rect">
@@ -18277,7 +18277,7 @@
         <p:spPr>
           <a:xfrm>
             <a:off x="566928" y="91440"/>
-            <a:ext cx="11057839" cy="292608"/>
+            <a:ext cx="11057839" cy="274320"/>
           </a:xfrm>
           <a:prstGeom prst="rect">
             <a:avLst/>
@@ -18317,22 +18317,22 @@
         <p:spPr>
           <a:xfrm>
             <a:off x="566928" y="402336"/>
-            <a:ext cx="11057839" cy="603504"/>
-          </a:xfrm>
-          <a:prstGeom prst="rect">
-            <a:avLst/>
-          </a:prstGeom>
-          <a:noFill/>
-        </p:spPr>
-        <p:txBody>
-          <a:bodyPr wrap="square" anchor="ctr" lIns="36576" rIns="36576" tIns="0" bIns="0">
+            <a:ext cx="11057839" cy="711199"/>
+          </a:xfrm>
+          <a:prstGeom prst="rect">
+            <a:avLst/>
+          </a:prstGeom>
+          <a:noFill/>
+        </p:spPr>
+        <p:txBody>
+          <a:bodyPr wrap="square" anchor="t" lIns="36576" rIns="36576" tIns="0" bIns="0">
             <a:spAutoFit/>
           </a:bodyPr>
           <a:lstStyle/>
           <a:p>
             <a:pPr algn="l">
               <a:lnSpc>
-                <a:spcPct val="125000"/>
+                <a:spcPct val="116000"/>
               </a:lnSpc>
             </a:pPr>
             <a:r>
@@ -18903,7 +18903,7 @@
         <p:spPr>
           <a:xfrm>
             <a:off x="0" y="0"/>
-            <a:ext cx="12191695" cy="1078992"/>
+            <a:ext cx="12191695" cy="1223263"/>
           </a:xfrm>
           <a:prstGeom prst="rect">
             <a:avLst/>
@@ -18946,7 +18946,7 @@
         </p:nvSpPr>
         <p:spPr>
           <a:xfrm>
-            <a:off x="0" y="1078992"/>
+            <a:off x="0" y="1223263"/>
             <a:ext cx="12191695" cy="57150"/>
           </a:xfrm>
           <a:prstGeom prst="rect">
@@ -18991,7 +18991,7 @@
         <p:spPr>
           <a:xfrm>
             <a:off x="566928" y="91440"/>
-            <a:ext cx="11057839" cy="292608"/>
+            <a:ext cx="11057839" cy="274320"/>
           </a:xfrm>
           <a:prstGeom prst="rect">
             <a:avLst/>
@@ -19031,22 +19031,22 @@
         <p:spPr>
           <a:xfrm>
             <a:off x="566928" y="402336"/>
-            <a:ext cx="11057839" cy="603504"/>
-          </a:xfrm>
-          <a:prstGeom prst="rect">
-            <a:avLst/>
-          </a:prstGeom>
-          <a:noFill/>
-        </p:spPr>
-        <p:txBody>
-          <a:bodyPr wrap="square" anchor="ctr" lIns="36576" rIns="36576" tIns="0" bIns="0">
+            <a:ext cx="11057839" cy="711199"/>
+          </a:xfrm>
+          <a:prstGeom prst="rect">
+            <a:avLst/>
+          </a:prstGeom>
+          <a:noFill/>
+        </p:spPr>
+        <p:txBody>
+          <a:bodyPr wrap="square" anchor="t" lIns="36576" rIns="36576" tIns="0" bIns="0">
             <a:spAutoFit/>
           </a:bodyPr>
           <a:lstStyle/>
           <a:p>
             <a:pPr algn="l">
               <a:lnSpc>
-                <a:spcPct val="125000"/>
+                <a:spcPct val="116000"/>
               </a:lnSpc>
             </a:pPr>
             <a:r>
@@ -19261,7 +19261,7 @@
         <p:spPr>
           <a:xfrm>
             <a:off x="0" y="0"/>
-            <a:ext cx="12191695" cy="1078992"/>
+            <a:ext cx="12191695" cy="1223263"/>
           </a:xfrm>
           <a:prstGeom prst="rect">
             <a:avLst/>
@@ -19304,7 +19304,7 @@
         </p:nvSpPr>
         <p:spPr>
           <a:xfrm>
-            <a:off x="0" y="1078992"/>
+            <a:off x="0" y="1223263"/>
             <a:ext cx="12191695" cy="57150"/>
           </a:xfrm>
           <a:prstGeom prst="rect">
@@ -19349,7 +19349,7 @@
         <p:spPr>
           <a:xfrm>
             <a:off x="566928" y="91440"/>
-            <a:ext cx="11057839" cy="292608"/>
+            <a:ext cx="11057839" cy="274320"/>
           </a:xfrm>
           <a:prstGeom prst="rect">
             <a:avLst/>
@@ -19389,22 +19389,22 @@
         <p:spPr>
           <a:xfrm>
             <a:off x="566928" y="402336"/>
-            <a:ext cx="11057839" cy="603504"/>
-          </a:xfrm>
-          <a:prstGeom prst="rect">
-            <a:avLst/>
-          </a:prstGeom>
-          <a:noFill/>
-        </p:spPr>
-        <p:txBody>
-          <a:bodyPr wrap="square" anchor="ctr" lIns="36576" rIns="36576" tIns="0" bIns="0">
+            <a:ext cx="11057839" cy="711199"/>
+          </a:xfrm>
+          <a:prstGeom prst="rect">
+            <a:avLst/>
+          </a:prstGeom>
+          <a:noFill/>
+        </p:spPr>
+        <p:txBody>
+          <a:bodyPr wrap="square" anchor="t" lIns="36576" rIns="36576" tIns="0" bIns="0">
             <a:spAutoFit/>
           </a:bodyPr>
           <a:lstStyle/>
           <a:p>
             <a:pPr algn="l">
               <a:lnSpc>
-                <a:spcPct val="125000"/>
+                <a:spcPct val="116000"/>
               </a:lnSpc>
             </a:pPr>
             <a:r>
@@ -19619,7 +19619,7 @@
         <p:spPr>
           <a:xfrm>
             <a:off x="0" y="0"/>
-            <a:ext cx="12191695" cy="1078992"/>
+            <a:ext cx="12191695" cy="1223263"/>
           </a:xfrm>
           <a:prstGeom prst="rect">
             <a:avLst/>
@@ -19662,7 +19662,7 @@
         </p:nvSpPr>
         <p:spPr>
           <a:xfrm>
-            <a:off x="0" y="1078992"/>
+            <a:off x="0" y="1223263"/>
             <a:ext cx="12191695" cy="57150"/>
           </a:xfrm>
           <a:prstGeom prst="rect">
@@ -19707,7 +19707,7 @@
         <p:spPr>
           <a:xfrm>
             <a:off x="566928" y="91440"/>
-            <a:ext cx="11057839" cy="292608"/>
+            <a:ext cx="11057839" cy="274320"/>
           </a:xfrm>
           <a:prstGeom prst="rect">
             <a:avLst/>
@@ -19747,22 +19747,22 @@
         <p:spPr>
           <a:xfrm>
             <a:off x="566928" y="402336"/>
-            <a:ext cx="11057839" cy="603504"/>
-          </a:xfrm>
-          <a:prstGeom prst="rect">
-            <a:avLst/>
-          </a:prstGeom>
-          <a:noFill/>
-        </p:spPr>
-        <p:txBody>
-          <a:bodyPr wrap="square" anchor="ctr" lIns="36576" rIns="36576" tIns="0" bIns="0">
+            <a:ext cx="11057839" cy="711199"/>
+          </a:xfrm>
+          <a:prstGeom prst="rect">
+            <a:avLst/>
+          </a:prstGeom>
+          <a:noFill/>
+        </p:spPr>
+        <p:txBody>
+          <a:bodyPr wrap="square" anchor="t" lIns="36576" rIns="36576" tIns="0" bIns="0">
             <a:spAutoFit/>
           </a:bodyPr>
           <a:lstStyle/>
           <a:p>
             <a:pPr algn="l">
               <a:lnSpc>
-                <a:spcPct val="125000"/>
+                <a:spcPct val="116000"/>
               </a:lnSpc>
             </a:pPr>
             <a:r>
@@ -19977,7 +19977,7 @@
         <p:spPr>
           <a:xfrm>
             <a:off x="0" y="0"/>
-            <a:ext cx="12191695" cy="1078992"/>
+            <a:ext cx="12191695" cy="1223263"/>
           </a:xfrm>
           <a:prstGeom prst="rect">
             <a:avLst/>
@@ -20020,7 +20020,7 @@
         </p:nvSpPr>
         <p:spPr>
           <a:xfrm>
-            <a:off x="0" y="1078992"/>
+            <a:off x="0" y="1223263"/>
             <a:ext cx="12191695" cy="57150"/>
           </a:xfrm>
           <a:prstGeom prst="rect">
@@ -20065,7 +20065,7 @@
         <p:spPr>
           <a:xfrm>
             <a:off x="566928" y="91440"/>
-            <a:ext cx="11057839" cy="292608"/>
+            <a:ext cx="11057839" cy="274320"/>
           </a:xfrm>
           <a:prstGeom prst="rect">
             <a:avLst/>
@@ -20105,22 +20105,22 @@
         <p:spPr>
           <a:xfrm>
             <a:off x="566928" y="402336"/>
-            <a:ext cx="11057839" cy="603504"/>
-          </a:xfrm>
-          <a:prstGeom prst="rect">
-            <a:avLst/>
-          </a:prstGeom>
-          <a:noFill/>
-        </p:spPr>
-        <p:txBody>
-          <a:bodyPr wrap="square" anchor="ctr" lIns="36576" rIns="36576" tIns="0" bIns="0">
+            <a:ext cx="11057839" cy="711199"/>
+          </a:xfrm>
+          <a:prstGeom prst="rect">
+            <a:avLst/>
+          </a:prstGeom>
+          <a:noFill/>
+        </p:spPr>
+        <p:txBody>
+          <a:bodyPr wrap="square" anchor="t" lIns="36576" rIns="36576" tIns="0" bIns="0">
             <a:spAutoFit/>
           </a:bodyPr>
           <a:lstStyle/>
           <a:p>
             <a:pPr algn="l">
               <a:lnSpc>
-                <a:spcPct val="125000"/>
+                <a:spcPct val="116000"/>
               </a:lnSpc>
             </a:pPr>
             <a:r>
@@ -20815,7 +20815,7 @@
         <p:spPr>
           <a:xfrm>
             <a:off x="0" y="0"/>
-            <a:ext cx="12191695" cy="1078992"/>
+            <a:ext cx="12191695" cy="1223263"/>
           </a:xfrm>
           <a:prstGeom prst="rect">
             <a:avLst/>
@@ -20858,7 +20858,7 @@
         </p:nvSpPr>
         <p:spPr>
           <a:xfrm>
-            <a:off x="0" y="1078992"/>
+            <a:off x="0" y="1223263"/>
             <a:ext cx="12191695" cy="57150"/>
           </a:xfrm>
           <a:prstGeom prst="rect">
@@ -20903,7 +20903,7 @@
         <p:spPr>
           <a:xfrm>
             <a:off x="566928" y="91440"/>
-            <a:ext cx="11057839" cy="292608"/>
+            <a:ext cx="11057839" cy="274320"/>
           </a:xfrm>
           <a:prstGeom prst="rect">
             <a:avLst/>
@@ -20943,22 +20943,22 @@
         <p:spPr>
           <a:xfrm>
             <a:off x="566928" y="402336"/>
-            <a:ext cx="11057839" cy="603504"/>
-          </a:xfrm>
-          <a:prstGeom prst="rect">
-            <a:avLst/>
-          </a:prstGeom>
-          <a:noFill/>
-        </p:spPr>
-        <p:txBody>
-          <a:bodyPr wrap="square" anchor="ctr" lIns="36576" rIns="36576" tIns="0" bIns="0">
+            <a:ext cx="11057839" cy="711199"/>
+          </a:xfrm>
+          <a:prstGeom prst="rect">
+            <a:avLst/>
+          </a:prstGeom>
+          <a:noFill/>
+        </p:spPr>
+        <p:txBody>
+          <a:bodyPr wrap="square" anchor="t" lIns="36576" rIns="36576" tIns="0" bIns="0">
             <a:spAutoFit/>
           </a:bodyPr>
           <a:lstStyle/>
           <a:p>
             <a:pPr algn="l">
               <a:lnSpc>
-                <a:spcPct val="125000"/>
+                <a:spcPct val="116000"/>
               </a:lnSpc>
             </a:pPr>
             <a:r>
@@ -21173,7 +21173,7 @@
         <p:spPr>
           <a:xfrm>
             <a:off x="0" y="0"/>
-            <a:ext cx="12191695" cy="1078992"/>
+            <a:ext cx="12191695" cy="1223263"/>
           </a:xfrm>
           <a:prstGeom prst="rect">
             <a:avLst/>
@@ -21216,7 +21216,7 @@
         </p:nvSpPr>
         <p:spPr>
           <a:xfrm>
-            <a:off x="0" y="1078992"/>
+            <a:off x="0" y="1223263"/>
             <a:ext cx="12191695" cy="57150"/>
           </a:xfrm>
           <a:prstGeom prst="rect">
@@ -21261,7 +21261,7 @@
         <p:spPr>
           <a:xfrm>
             <a:off x="566928" y="91440"/>
-            <a:ext cx="11057839" cy="292608"/>
+            <a:ext cx="11057839" cy="274320"/>
           </a:xfrm>
           <a:prstGeom prst="rect">
             <a:avLst/>
@@ -21301,22 +21301,22 @@
         <p:spPr>
           <a:xfrm>
             <a:off x="566928" y="402336"/>
-            <a:ext cx="11057839" cy="603504"/>
-          </a:xfrm>
-          <a:prstGeom prst="rect">
-            <a:avLst/>
-          </a:prstGeom>
-          <a:noFill/>
-        </p:spPr>
-        <p:txBody>
-          <a:bodyPr wrap="square" anchor="ctr" lIns="36576" rIns="36576" tIns="0" bIns="0">
+            <a:ext cx="11057839" cy="711199"/>
+          </a:xfrm>
+          <a:prstGeom prst="rect">
+            <a:avLst/>
+          </a:prstGeom>
+          <a:noFill/>
+        </p:spPr>
+        <p:txBody>
+          <a:bodyPr wrap="square" anchor="t" lIns="36576" rIns="36576" tIns="0" bIns="0">
             <a:spAutoFit/>
           </a:bodyPr>
           <a:lstStyle/>
           <a:p>
             <a:pPr algn="l">
               <a:lnSpc>
-                <a:spcPct val="125000"/>
+                <a:spcPct val="116000"/>
               </a:lnSpc>
             </a:pPr>
             <a:r>
@@ -21531,7 +21531,7 @@
         <p:spPr>
           <a:xfrm>
             <a:off x="0" y="0"/>
-            <a:ext cx="12191695" cy="1078992"/>
+            <a:ext cx="12191695" cy="1223263"/>
           </a:xfrm>
           <a:prstGeom prst="rect">
             <a:avLst/>
@@ -21574,7 +21574,7 @@
         </p:nvSpPr>
         <p:spPr>
           <a:xfrm>
-            <a:off x="0" y="1078992"/>
+            <a:off x="0" y="1223263"/>
             <a:ext cx="12191695" cy="57150"/>
           </a:xfrm>
           <a:prstGeom prst="rect">
@@ -21619,7 +21619,7 @@
         <p:spPr>
           <a:xfrm>
             <a:off x="566928" y="91440"/>
-            <a:ext cx="11057839" cy="292608"/>
+            <a:ext cx="11057839" cy="274320"/>
           </a:xfrm>
           <a:prstGeom prst="rect">
             <a:avLst/>
@@ -21659,22 +21659,22 @@
         <p:spPr>
           <a:xfrm>
             <a:off x="566928" y="402336"/>
-            <a:ext cx="11057839" cy="603504"/>
-          </a:xfrm>
-          <a:prstGeom prst="rect">
-            <a:avLst/>
-          </a:prstGeom>
-          <a:noFill/>
-        </p:spPr>
-        <p:txBody>
-          <a:bodyPr wrap="square" anchor="ctr" lIns="36576" rIns="36576" tIns="0" bIns="0">
+            <a:ext cx="11057839" cy="711199"/>
+          </a:xfrm>
+          <a:prstGeom prst="rect">
+            <a:avLst/>
+          </a:prstGeom>
+          <a:noFill/>
+        </p:spPr>
+        <p:txBody>
+          <a:bodyPr wrap="square" anchor="t" lIns="36576" rIns="36576" tIns="0" bIns="0">
             <a:spAutoFit/>
           </a:bodyPr>
           <a:lstStyle/>
           <a:p>
             <a:pPr algn="l">
               <a:lnSpc>
-                <a:spcPct val="125000"/>
+                <a:spcPct val="116000"/>
               </a:lnSpc>
             </a:pPr>
             <a:r>
@@ -21889,7 +21889,7 @@
         <p:spPr>
           <a:xfrm>
             <a:off x="0" y="0"/>
-            <a:ext cx="12191695" cy="1078992"/>
+            <a:ext cx="12191695" cy="1223263"/>
           </a:xfrm>
           <a:prstGeom prst="rect">
             <a:avLst/>
@@ -21932,7 +21932,7 @@
         </p:nvSpPr>
         <p:spPr>
           <a:xfrm>
-            <a:off x="0" y="1078992"/>
+            <a:off x="0" y="1223263"/>
             <a:ext cx="12191695" cy="57150"/>
           </a:xfrm>
           <a:prstGeom prst="rect">
@@ -21977,7 +21977,7 @@
         <p:spPr>
           <a:xfrm>
             <a:off x="566928" y="91440"/>
-            <a:ext cx="11057839" cy="292608"/>
+            <a:ext cx="11057839" cy="274320"/>
           </a:xfrm>
           <a:prstGeom prst="rect">
             <a:avLst/>
@@ -22017,22 +22017,22 @@
         <p:spPr>
           <a:xfrm>
             <a:off x="566928" y="402336"/>
-            <a:ext cx="11057839" cy="603504"/>
-          </a:xfrm>
-          <a:prstGeom prst="rect">
-            <a:avLst/>
-          </a:prstGeom>
-          <a:noFill/>
-        </p:spPr>
-        <p:txBody>
-          <a:bodyPr wrap="square" anchor="ctr" lIns="36576" rIns="36576" tIns="0" bIns="0">
+            <a:ext cx="11057839" cy="711199"/>
+          </a:xfrm>
+          <a:prstGeom prst="rect">
+            <a:avLst/>
+          </a:prstGeom>
+          <a:noFill/>
+        </p:spPr>
+        <p:txBody>
+          <a:bodyPr wrap="square" anchor="t" lIns="36576" rIns="36576" tIns="0" bIns="0">
             <a:spAutoFit/>
           </a:bodyPr>
           <a:lstStyle/>
           <a:p>
             <a:pPr algn="l">
               <a:lnSpc>
-                <a:spcPct val="125000"/>
+                <a:spcPct val="116000"/>
               </a:lnSpc>
             </a:pPr>
             <a:r>
@@ -22247,7 +22247,7 @@
         <p:spPr>
           <a:xfrm>
             <a:off x="0" y="0"/>
-            <a:ext cx="12191695" cy="1078992"/>
+            <a:ext cx="12191695" cy="1223263"/>
           </a:xfrm>
           <a:prstGeom prst="rect">
             <a:avLst/>
@@ -22290,7 +22290,7 @@
         </p:nvSpPr>
         <p:spPr>
           <a:xfrm>
-            <a:off x="0" y="1078992"/>
+            <a:off x="0" y="1223263"/>
             <a:ext cx="12191695" cy="57150"/>
           </a:xfrm>
           <a:prstGeom prst="rect">
@@ -22335,7 +22335,7 @@
         <p:spPr>
           <a:xfrm>
             <a:off x="566928" y="91440"/>
-            <a:ext cx="11057839" cy="292608"/>
+            <a:ext cx="11057839" cy="274320"/>
           </a:xfrm>
           <a:prstGeom prst="rect">
             <a:avLst/>
@@ -22375,22 +22375,22 @@
         <p:spPr>
           <a:xfrm>
             <a:off x="566928" y="402336"/>
-            <a:ext cx="11057839" cy="603504"/>
-          </a:xfrm>
-          <a:prstGeom prst="rect">
-            <a:avLst/>
-          </a:prstGeom>
-          <a:noFill/>
-        </p:spPr>
-        <p:txBody>
-          <a:bodyPr wrap="square" anchor="ctr" lIns="36576" rIns="36576" tIns="0" bIns="0">
+            <a:ext cx="11057839" cy="711199"/>
+          </a:xfrm>
+          <a:prstGeom prst="rect">
+            <a:avLst/>
+          </a:prstGeom>
+          <a:noFill/>
+        </p:spPr>
+        <p:txBody>
+          <a:bodyPr wrap="square" anchor="t" lIns="36576" rIns="36576" tIns="0" bIns="0">
             <a:spAutoFit/>
           </a:bodyPr>
           <a:lstStyle/>
           <a:p>
             <a:pPr algn="l">
               <a:lnSpc>
-                <a:spcPct val="125000"/>
+                <a:spcPct val="116000"/>
               </a:lnSpc>
             </a:pPr>
             <a:r>
@@ -22648,7 +22648,7 @@
         <p:spPr>
           <a:xfrm>
             <a:off x="0" y="0"/>
-            <a:ext cx="12191695" cy="1078992"/>
+            <a:ext cx="12191695" cy="1223263"/>
           </a:xfrm>
           <a:prstGeom prst="rect">
             <a:avLst/>
@@ -22691,7 +22691,7 @@
         </p:nvSpPr>
         <p:spPr>
           <a:xfrm>
-            <a:off x="0" y="1078992"/>
+            <a:off x="0" y="1223263"/>
             <a:ext cx="12191695" cy="57150"/>
           </a:xfrm>
           <a:prstGeom prst="rect">
@@ -22736,7 +22736,7 @@
         <p:spPr>
           <a:xfrm>
             <a:off x="566928" y="91440"/>
-            <a:ext cx="11057839" cy="292608"/>
+            <a:ext cx="11057839" cy="274320"/>
           </a:xfrm>
           <a:prstGeom prst="rect">
             <a:avLst/>
@@ -22776,22 +22776,22 @@
         <p:spPr>
           <a:xfrm>
             <a:off x="566928" y="402336"/>
-            <a:ext cx="11057839" cy="603504"/>
-          </a:xfrm>
-          <a:prstGeom prst="rect">
-            <a:avLst/>
-          </a:prstGeom>
-          <a:noFill/>
-        </p:spPr>
-        <p:txBody>
-          <a:bodyPr wrap="square" anchor="ctr" lIns="36576" rIns="36576" tIns="0" bIns="0">
+            <a:ext cx="11057839" cy="711199"/>
+          </a:xfrm>
+          <a:prstGeom prst="rect">
+            <a:avLst/>
+          </a:prstGeom>
+          <a:noFill/>
+        </p:spPr>
+        <p:txBody>
+          <a:bodyPr wrap="square" anchor="t" lIns="36576" rIns="36576" tIns="0" bIns="0">
             <a:spAutoFit/>
           </a:bodyPr>
           <a:lstStyle/>
           <a:p>
             <a:pPr algn="l">
               <a:lnSpc>
-                <a:spcPct val="125000"/>
+                <a:spcPct val="116000"/>
               </a:lnSpc>
             </a:pPr>
             <a:r>
@@ -23200,7 +23200,7 @@
         <p:spPr>
           <a:xfrm>
             <a:off x="0" y="0"/>
-            <a:ext cx="12191695" cy="1078992"/>
+            <a:ext cx="12191695" cy="1223263"/>
           </a:xfrm>
           <a:prstGeom prst="rect">
             <a:avLst/>
@@ -23243,7 +23243,7 @@
         </p:nvSpPr>
         <p:spPr>
           <a:xfrm>
-            <a:off x="0" y="1078992"/>
+            <a:off x="0" y="1223263"/>
             <a:ext cx="12191695" cy="57150"/>
           </a:xfrm>
           <a:prstGeom prst="rect">
@@ -23288,7 +23288,7 @@
         <p:spPr>
           <a:xfrm>
             <a:off x="566928" y="91440"/>
-            <a:ext cx="11057839" cy="292608"/>
+            <a:ext cx="11057839" cy="274320"/>
           </a:xfrm>
           <a:prstGeom prst="rect">
             <a:avLst/>
@@ -23328,22 +23328,22 @@
         <p:spPr>
           <a:xfrm>
             <a:off x="566928" y="402336"/>
-            <a:ext cx="11057839" cy="603504"/>
-          </a:xfrm>
-          <a:prstGeom prst="rect">
-            <a:avLst/>
-          </a:prstGeom>
-          <a:noFill/>
-        </p:spPr>
-        <p:txBody>
-          <a:bodyPr wrap="square" anchor="ctr" lIns="36576" rIns="36576" tIns="0" bIns="0">
+            <a:ext cx="11057839" cy="711199"/>
+          </a:xfrm>
+          <a:prstGeom prst="rect">
+            <a:avLst/>
+          </a:prstGeom>
+          <a:noFill/>
+        </p:spPr>
+        <p:txBody>
+          <a:bodyPr wrap="square" anchor="t" lIns="36576" rIns="36576" tIns="0" bIns="0">
             <a:spAutoFit/>
           </a:bodyPr>
           <a:lstStyle/>
           <a:p>
             <a:pPr algn="l">
               <a:lnSpc>
-                <a:spcPct val="125000"/>
+                <a:spcPct val="116000"/>
               </a:lnSpc>
             </a:pPr>
             <a:r>
@@ -23558,7 +23558,7 @@
         <p:spPr>
           <a:xfrm>
             <a:off x="0" y="0"/>
-            <a:ext cx="12191695" cy="1078992"/>
+            <a:ext cx="12191695" cy="1223263"/>
           </a:xfrm>
           <a:prstGeom prst="rect">
             <a:avLst/>
@@ -23601,7 +23601,7 @@
         </p:nvSpPr>
         <p:spPr>
           <a:xfrm>
-            <a:off x="0" y="1078992"/>
+            <a:off x="0" y="1223263"/>
             <a:ext cx="12191695" cy="57150"/>
           </a:xfrm>
           <a:prstGeom prst="rect">
@@ -23646,7 +23646,7 @@
         <p:spPr>
           <a:xfrm>
             <a:off x="566928" y="91440"/>
-            <a:ext cx="11057839" cy="292608"/>
+            <a:ext cx="11057839" cy="274320"/>
           </a:xfrm>
           <a:prstGeom prst="rect">
             <a:avLst/>
@@ -23686,22 +23686,22 @@
         <p:spPr>
           <a:xfrm>
             <a:off x="566928" y="402336"/>
-            <a:ext cx="11057839" cy="603504"/>
-          </a:xfrm>
-          <a:prstGeom prst="rect">
-            <a:avLst/>
-          </a:prstGeom>
-          <a:noFill/>
-        </p:spPr>
-        <p:txBody>
-          <a:bodyPr wrap="square" anchor="ctr" lIns="36576" rIns="36576" tIns="0" bIns="0">
+            <a:ext cx="11057839" cy="711199"/>
+          </a:xfrm>
+          <a:prstGeom prst="rect">
+            <a:avLst/>
+          </a:prstGeom>
+          <a:noFill/>
+        </p:spPr>
+        <p:txBody>
+          <a:bodyPr wrap="square" anchor="t" lIns="36576" rIns="36576" tIns="0" bIns="0">
             <a:spAutoFit/>
           </a:bodyPr>
           <a:lstStyle/>
           <a:p>
             <a:pPr algn="l">
               <a:lnSpc>
-                <a:spcPct val="125000"/>
+                <a:spcPct val="116000"/>
               </a:lnSpc>
             </a:pPr>
             <a:r>
@@ -23916,7 +23916,7 @@
         <p:spPr>
           <a:xfrm>
             <a:off x="0" y="0"/>
-            <a:ext cx="12191695" cy="1078992"/>
+            <a:ext cx="12191695" cy="1223263"/>
           </a:xfrm>
           <a:prstGeom prst="rect">
             <a:avLst/>
@@ -23959,7 +23959,7 @@
         </p:nvSpPr>
         <p:spPr>
           <a:xfrm>
-            <a:off x="0" y="1078992"/>
+            <a:off x="0" y="1223263"/>
             <a:ext cx="12191695" cy="57150"/>
           </a:xfrm>
           <a:prstGeom prst="rect">
@@ -24004,7 +24004,7 @@
         <p:spPr>
           <a:xfrm>
             <a:off x="566928" y="91440"/>
-            <a:ext cx="11057839" cy="292608"/>
+            <a:ext cx="11057839" cy="274320"/>
           </a:xfrm>
           <a:prstGeom prst="rect">
             <a:avLst/>
@@ -24044,22 +24044,22 @@
         <p:spPr>
           <a:xfrm>
             <a:off x="566928" y="402336"/>
-            <a:ext cx="11057839" cy="603504"/>
-          </a:xfrm>
-          <a:prstGeom prst="rect">
-            <a:avLst/>
-          </a:prstGeom>
-          <a:noFill/>
-        </p:spPr>
-        <p:txBody>
-          <a:bodyPr wrap="square" anchor="ctr" lIns="36576" rIns="36576" tIns="0" bIns="0">
+            <a:ext cx="11057839" cy="711199"/>
+          </a:xfrm>
+          <a:prstGeom prst="rect">
+            <a:avLst/>
+          </a:prstGeom>
+          <a:noFill/>
+        </p:spPr>
+        <p:txBody>
+          <a:bodyPr wrap="square" anchor="t" lIns="36576" rIns="36576" tIns="0" bIns="0">
             <a:spAutoFit/>
           </a:bodyPr>
           <a:lstStyle/>
           <a:p>
             <a:pPr algn="l">
               <a:lnSpc>
-                <a:spcPct val="125000"/>
+                <a:spcPct val="116000"/>
               </a:lnSpc>
             </a:pPr>
             <a:r>
@@ -24317,7 +24317,7 @@
         <p:spPr>
           <a:xfrm>
             <a:off x="0" y="0"/>
-            <a:ext cx="12191695" cy="1078992"/>
+            <a:ext cx="12191695" cy="1223263"/>
           </a:xfrm>
           <a:prstGeom prst="rect">
             <a:avLst/>
@@ -24360,7 +24360,7 @@
         </p:nvSpPr>
         <p:spPr>
           <a:xfrm>
-            <a:off x="0" y="1078992"/>
+            <a:off x="0" y="1223263"/>
             <a:ext cx="12191695" cy="57150"/>
           </a:xfrm>
           <a:prstGeom prst="rect">
@@ -24405,7 +24405,7 @@
         <p:spPr>
           <a:xfrm>
             <a:off x="566928" y="91440"/>
-            <a:ext cx="11057839" cy="292608"/>
+            <a:ext cx="11057839" cy="274320"/>
           </a:xfrm>
           <a:prstGeom prst="rect">
             <a:avLst/>
@@ -24445,22 +24445,22 @@
         <p:spPr>
           <a:xfrm>
             <a:off x="566928" y="402336"/>
-            <a:ext cx="11057839" cy="603504"/>
-          </a:xfrm>
-          <a:prstGeom prst="rect">
-            <a:avLst/>
-          </a:prstGeom>
-          <a:noFill/>
-        </p:spPr>
-        <p:txBody>
-          <a:bodyPr wrap="square" anchor="ctr" lIns="36576" rIns="36576" tIns="0" bIns="0">
+            <a:ext cx="11057839" cy="711199"/>
+          </a:xfrm>
+          <a:prstGeom prst="rect">
+            <a:avLst/>
+          </a:prstGeom>
+          <a:noFill/>
+        </p:spPr>
+        <p:txBody>
+          <a:bodyPr wrap="square" anchor="t" lIns="36576" rIns="36576" tIns="0" bIns="0">
             <a:spAutoFit/>
           </a:bodyPr>
           <a:lstStyle/>
           <a:p>
             <a:pPr algn="l">
               <a:lnSpc>
-                <a:spcPct val="125000"/>
+                <a:spcPct val="116000"/>
               </a:lnSpc>
             </a:pPr>
             <a:r>
@@ -24675,7 +24675,7 @@
         <p:spPr>
           <a:xfrm>
             <a:off x="0" y="0"/>
-            <a:ext cx="12191695" cy="1078992"/>
+            <a:ext cx="12191695" cy="1223263"/>
           </a:xfrm>
           <a:prstGeom prst="rect">
             <a:avLst/>
@@ -24718,7 +24718,7 @@
         </p:nvSpPr>
         <p:spPr>
           <a:xfrm>
-            <a:off x="0" y="1078992"/>
+            <a:off x="0" y="1223263"/>
             <a:ext cx="12191695" cy="57150"/>
           </a:xfrm>
           <a:prstGeom prst="rect">
@@ -24763,7 +24763,7 @@
         <p:spPr>
           <a:xfrm>
             <a:off x="566928" y="91440"/>
-            <a:ext cx="11057839" cy="292608"/>
+            <a:ext cx="11057839" cy="274320"/>
           </a:xfrm>
           <a:prstGeom prst="rect">
             <a:avLst/>
@@ -24803,22 +24803,22 @@
         <p:spPr>
           <a:xfrm>
             <a:off x="566928" y="402336"/>
-            <a:ext cx="11057839" cy="603504"/>
-          </a:xfrm>
-          <a:prstGeom prst="rect">
-            <a:avLst/>
-          </a:prstGeom>
-          <a:noFill/>
-        </p:spPr>
-        <p:txBody>
-          <a:bodyPr wrap="square" anchor="ctr" lIns="36576" rIns="36576" tIns="0" bIns="0">
+            <a:ext cx="11057839" cy="711199"/>
+          </a:xfrm>
+          <a:prstGeom prst="rect">
+            <a:avLst/>
+          </a:prstGeom>
+          <a:noFill/>
+        </p:spPr>
+        <p:txBody>
+          <a:bodyPr wrap="square" anchor="t" lIns="36576" rIns="36576" tIns="0" bIns="0">
             <a:spAutoFit/>
           </a:bodyPr>
           <a:lstStyle/>
           <a:p>
             <a:pPr algn="l">
               <a:lnSpc>
-                <a:spcPct val="125000"/>
+                <a:spcPct val="116000"/>
               </a:lnSpc>
             </a:pPr>
             <a:r>
@@ -25033,7 +25033,7 @@
         <p:spPr>
           <a:xfrm>
             <a:off x="0" y="0"/>
-            <a:ext cx="12191695" cy="1078992"/>
+            <a:ext cx="12191695" cy="1223263"/>
           </a:xfrm>
           <a:prstGeom prst="rect">
             <a:avLst/>
@@ -25076,7 +25076,7 @@
         </p:nvSpPr>
         <p:spPr>
           <a:xfrm>
-            <a:off x="0" y="1078992"/>
+            <a:off x="0" y="1223263"/>
             <a:ext cx="12191695" cy="57150"/>
           </a:xfrm>
           <a:prstGeom prst="rect">
@@ -25121,7 +25121,7 @@
         <p:spPr>
           <a:xfrm>
             <a:off x="566928" y="91440"/>
-            <a:ext cx="11057839" cy="292608"/>
+            <a:ext cx="11057839" cy="274320"/>
           </a:xfrm>
           <a:prstGeom prst="rect">
             <a:avLst/>
@@ -25161,22 +25161,22 @@
         <p:spPr>
           <a:xfrm>
             <a:off x="566928" y="402336"/>
-            <a:ext cx="11057839" cy="603504"/>
-          </a:xfrm>
-          <a:prstGeom prst="rect">
-            <a:avLst/>
-          </a:prstGeom>
-          <a:noFill/>
-        </p:spPr>
-        <p:txBody>
-          <a:bodyPr wrap="square" anchor="ctr" lIns="36576" rIns="36576" tIns="0" bIns="0">
+            <a:ext cx="11057839" cy="711199"/>
+          </a:xfrm>
+          <a:prstGeom prst="rect">
+            <a:avLst/>
+          </a:prstGeom>
+          <a:noFill/>
+        </p:spPr>
+        <p:txBody>
+          <a:bodyPr wrap="square" anchor="t" lIns="36576" rIns="36576" tIns="0" bIns="0">
             <a:spAutoFit/>
           </a:bodyPr>
           <a:lstStyle/>
           <a:p>
             <a:pPr algn="l">
               <a:lnSpc>
-                <a:spcPct val="125000"/>
+                <a:spcPct val="116000"/>
               </a:lnSpc>
             </a:pPr>
             <a:r>
@@ -25391,7 +25391,7 @@
         <p:spPr>
           <a:xfrm>
             <a:off x="0" y="0"/>
-            <a:ext cx="12191695" cy="1078992"/>
+            <a:ext cx="12191695" cy="1223263"/>
           </a:xfrm>
           <a:prstGeom prst="rect">
             <a:avLst/>
@@ -25434,7 +25434,7 @@
         </p:nvSpPr>
         <p:spPr>
           <a:xfrm>
-            <a:off x="0" y="1078992"/>
+            <a:off x="0" y="1223263"/>
             <a:ext cx="12191695" cy="57150"/>
           </a:xfrm>
           <a:prstGeom prst="rect">
@@ -25479,7 +25479,7 @@
         <p:spPr>
           <a:xfrm>
             <a:off x="566928" y="91440"/>
-            <a:ext cx="11057839" cy="292608"/>
+            <a:ext cx="11057839" cy="274320"/>
           </a:xfrm>
           <a:prstGeom prst="rect">
             <a:avLst/>
@@ -25519,22 +25519,22 @@
         <p:spPr>
           <a:xfrm>
             <a:off x="566928" y="402336"/>
-            <a:ext cx="11057839" cy="603504"/>
-          </a:xfrm>
-          <a:prstGeom prst="rect">
-            <a:avLst/>
-          </a:prstGeom>
-          <a:noFill/>
-        </p:spPr>
-        <p:txBody>
-          <a:bodyPr wrap="square" anchor="ctr" lIns="36576" rIns="36576" tIns="0" bIns="0">
+            <a:ext cx="11057839" cy="711199"/>
+          </a:xfrm>
+          <a:prstGeom prst="rect">
+            <a:avLst/>
+          </a:prstGeom>
+          <a:noFill/>
+        </p:spPr>
+        <p:txBody>
+          <a:bodyPr wrap="square" anchor="t" lIns="36576" rIns="36576" tIns="0" bIns="0">
             <a:spAutoFit/>
           </a:bodyPr>
           <a:lstStyle/>
           <a:p>
             <a:pPr algn="l">
               <a:lnSpc>
-                <a:spcPct val="125000"/>
+                <a:spcPct val="116000"/>
               </a:lnSpc>
             </a:pPr>
             <a:r>
@@ -25749,7 +25749,7 @@
         <p:spPr>
           <a:xfrm>
             <a:off x="0" y="0"/>
-            <a:ext cx="12191695" cy="1078992"/>
+            <a:ext cx="12191695" cy="1223263"/>
           </a:xfrm>
           <a:prstGeom prst="rect">
             <a:avLst/>
@@ -25792,7 +25792,7 @@
         </p:nvSpPr>
         <p:spPr>
           <a:xfrm>
-            <a:off x="0" y="1078992"/>
+            <a:off x="0" y="1223263"/>
             <a:ext cx="12191695" cy="57150"/>
           </a:xfrm>
           <a:prstGeom prst="rect">
@@ -25837,7 +25837,7 @@
         <p:spPr>
           <a:xfrm>
             <a:off x="566928" y="91440"/>
-            <a:ext cx="11057839" cy="292608"/>
+            <a:ext cx="11057839" cy="274320"/>
           </a:xfrm>
           <a:prstGeom prst="rect">
             <a:avLst/>
@@ -25877,22 +25877,22 @@
         <p:spPr>
           <a:xfrm>
             <a:off x="566928" y="402336"/>
-            <a:ext cx="11057839" cy="603504"/>
-          </a:xfrm>
-          <a:prstGeom prst="rect">
-            <a:avLst/>
-          </a:prstGeom>
-          <a:noFill/>
-        </p:spPr>
-        <p:txBody>
-          <a:bodyPr wrap="square" anchor="ctr" lIns="36576" rIns="36576" tIns="0" bIns="0">
+            <a:ext cx="11057839" cy="711199"/>
+          </a:xfrm>
+          <a:prstGeom prst="rect">
+            <a:avLst/>
+          </a:prstGeom>
+          <a:noFill/>
+        </p:spPr>
+        <p:txBody>
+          <a:bodyPr wrap="square" anchor="t" lIns="36576" rIns="36576" tIns="0" bIns="0">
             <a:spAutoFit/>
           </a:bodyPr>
           <a:lstStyle/>
           <a:p>
             <a:pPr algn="l">
               <a:lnSpc>
-                <a:spcPct val="125000"/>
+                <a:spcPct val="116000"/>
               </a:lnSpc>
             </a:pPr>
             <a:r>
@@ -26150,7 +26150,7 @@
         <p:spPr>
           <a:xfrm>
             <a:off x="0" y="0"/>
-            <a:ext cx="12191695" cy="1078992"/>
+            <a:ext cx="12191695" cy="1223263"/>
           </a:xfrm>
           <a:prstGeom prst="rect">
             <a:avLst/>
@@ -26193,7 +26193,7 @@
         </p:nvSpPr>
         <p:spPr>
           <a:xfrm>
-            <a:off x="0" y="1078992"/>
+            <a:off x="0" y="1223263"/>
             <a:ext cx="12191695" cy="57150"/>
           </a:xfrm>
           <a:prstGeom prst="rect">
@@ -26238,7 +26238,7 @@
         <p:spPr>
           <a:xfrm>
             <a:off x="566928" y="91440"/>
-            <a:ext cx="11057839" cy="292608"/>
+            <a:ext cx="11057839" cy="274320"/>
           </a:xfrm>
           <a:prstGeom prst="rect">
             <a:avLst/>
@@ -26278,22 +26278,22 @@
         <p:spPr>
           <a:xfrm>
             <a:off x="566928" y="402336"/>
-            <a:ext cx="11057839" cy="603504"/>
-          </a:xfrm>
-          <a:prstGeom prst="rect">
-            <a:avLst/>
-          </a:prstGeom>
-          <a:noFill/>
-        </p:spPr>
-        <p:txBody>
-          <a:bodyPr wrap="square" anchor="ctr" lIns="36576" rIns="36576" tIns="0" bIns="0">
+            <a:ext cx="11057839" cy="711199"/>
+          </a:xfrm>
+          <a:prstGeom prst="rect">
+            <a:avLst/>
+          </a:prstGeom>
+          <a:noFill/>
+        </p:spPr>
+        <p:txBody>
+          <a:bodyPr wrap="square" anchor="t" lIns="36576" rIns="36576" tIns="0" bIns="0">
             <a:spAutoFit/>
           </a:bodyPr>
           <a:lstStyle/>
           <a:p>
             <a:pPr algn="l">
               <a:lnSpc>
-                <a:spcPct val="125000"/>
+                <a:spcPct val="116000"/>
               </a:lnSpc>
             </a:pPr>
             <a:r>
@@ -26508,7 +26508,7 @@
         <p:spPr>
           <a:xfrm>
             <a:off x="0" y="0"/>
-            <a:ext cx="12191695" cy="1078992"/>
+            <a:ext cx="12191695" cy="1223263"/>
           </a:xfrm>
           <a:prstGeom prst="rect">
             <a:avLst/>
@@ -26551,7 +26551,7 @@
         </p:nvSpPr>
         <p:spPr>
           <a:xfrm>
-            <a:off x="0" y="1078992"/>
+            <a:off x="0" y="1223263"/>
             <a:ext cx="12191695" cy="57150"/>
           </a:xfrm>
           <a:prstGeom prst="rect">
@@ -26596,7 +26596,7 @@
         <p:spPr>
           <a:xfrm>
             <a:off x="566928" y="91440"/>
-            <a:ext cx="11057839" cy="292608"/>
+            <a:ext cx="11057839" cy="274320"/>
           </a:xfrm>
           <a:prstGeom prst="rect">
             <a:avLst/>
@@ -26636,22 +26636,22 @@
         <p:spPr>
           <a:xfrm>
             <a:off x="566928" y="402336"/>
-            <a:ext cx="11057839" cy="603504"/>
-          </a:xfrm>
-          <a:prstGeom prst="rect">
-            <a:avLst/>
-          </a:prstGeom>
-          <a:noFill/>
-        </p:spPr>
-        <p:txBody>
-          <a:bodyPr wrap="square" anchor="ctr" lIns="36576" rIns="36576" tIns="0" bIns="0">
+            <a:ext cx="11057839" cy="711199"/>
+          </a:xfrm>
+          <a:prstGeom prst="rect">
+            <a:avLst/>
+          </a:prstGeom>
+          <a:noFill/>
+        </p:spPr>
+        <p:txBody>
+          <a:bodyPr wrap="square" anchor="t" lIns="36576" rIns="36576" tIns="0" bIns="0">
             <a:spAutoFit/>
           </a:bodyPr>
           <a:lstStyle/>
           <a:p>
             <a:pPr algn="l">
               <a:lnSpc>
-                <a:spcPct val="125000"/>
+                <a:spcPct val="116000"/>
               </a:lnSpc>
             </a:pPr>
             <a:r>
@@ -27334,22 +27334,22 @@
         <p:spPr>
           <a:xfrm>
             <a:off x="566928" y="182880"/>
-            <a:ext cx="11057839" cy="731520"/>
-          </a:xfrm>
-          <a:prstGeom prst="rect">
-            <a:avLst/>
-          </a:prstGeom>
-          <a:noFill/>
-        </p:spPr>
-        <p:txBody>
-          <a:bodyPr wrap="square" anchor="ctr" lIns="36576" rIns="36576" tIns="0" bIns="0">
+            <a:ext cx="11057839" cy="711199"/>
+          </a:xfrm>
+          <a:prstGeom prst="rect">
+            <a:avLst/>
+          </a:prstGeom>
+          <a:noFill/>
+        </p:spPr>
+        <p:txBody>
+          <a:bodyPr wrap="square" anchor="t" lIns="36576" rIns="36576" tIns="0" bIns="0">
             <a:spAutoFit/>
           </a:bodyPr>
           <a:lstStyle/>
           <a:p>
             <a:pPr algn="l">
               <a:lnSpc>
-                <a:spcPct val="125000"/>
+                <a:spcPct val="116000"/>
               </a:lnSpc>
             </a:pPr>
             <a:r>
@@ -27440,7 +27440,7 @@
         <p:spPr>
           <a:xfrm>
             <a:off x="0" y="0"/>
-            <a:ext cx="12191695" cy="1078992"/>
+            <a:ext cx="12191695" cy="1223263"/>
           </a:xfrm>
           <a:prstGeom prst="rect">
             <a:avLst/>
@@ -27483,7 +27483,7 @@
         </p:nvSpPr>
         <p:spPr>
           <a:xfrm>
-            <a:off x="0" y="1078992"/>
+            <a:off x="0" y="1223263"/>
             <a:ext cx="12191695" cy="57150"/>
           </a:xfrm>
           <a:prstGeom prst="rect">
@@ -27528,7 +27528,7 @@
         <p:spPr>
           <a:xfrm>
             <a:off x="566928" y="91440"/>
-            <a:ext cx="11057839" cy="292608"/>
+            <a:ext cx="11057839" cy="274320"/>
           </a:xfrm>
           <a:prstGeom prst="rect">
             <a:avLst/>
@@ -27568,22 +27568,22 @@
         <p:spPr>
           <a:xfrm>
             <a:off x="566928" y="402336"/>
-            <a:ext cx="11057839" cy="603504"/>
-          </a:xfrm>
-          <a:prstGeom prst="rect">
-            <a:avLst/>
-          </a:prstGeom>
-          <a:noFill/>
-        </p:spPr>
-        <p:txBody>
-          <a:bodyPr wrap="square" anchor="ctr" lIns="36576" rIns="36576" tIns="0" bIns="0">
+            <a:ext cx="11057839" cy="711199"/>
+          </a:xfrm>
+          <a:prstGeom prst="rect">
+            <a:avLst/>
+          </a:prstGeom>
+          <a:noFill/>
+        </p:spPr>
+        <p:txBody>
+          <a:bodyPr wrap="square" anchor="t" lIns="36576" rIns="36576" tIns="0" bIns="0">
             <a:spAutoFit/>
           </a:bodyPr>
           <a:lstStyle/>
           <a:p>
             <a:pPr algn="l">
               <a:lnSpc>
-                <a:spcPct val="125000"/>
+                <a:spcPct val="116000"/>
               </a:lnSpc>
             </a:pPr>
             <a:r>
@@ -27798,7 +27798,7 @@
         <p:spPr>
           <a:xfrm>
             <a:off x="0" y="0"/>
-            <a:ext cx="12191695" cy="1078992"/>
+            <a:ext cx="12191695" cy="1223263"/>
           </a:xfrm>
           <a:prstGeom prst="rect">
             <a:avLst/>
@@ -27841,7 +27841,7 @@
         </p:nvSpPr>
         <p:spPr>
           <a:xfrm>
-            <a:off x="0" y="1078992"/>
+            <a:off x="0" y="1223263"/>
             <a:ext cx="12191695" cy="57150"/>
           </a:xfrm>
           <a:prstGeom prst="rect">
@@ -27886,7 +27886,7 @@
         <p:spPr>
           <a:xfrm>
             <a:off x="566928" y="91440"/>
-            <a:ext cx="11057839" cy="292608"/>
+            <a:ext cx="11057839" cy="274320"/>
           </a:xfrm>
           <a:prstGeom prst="rect">
             <a:avLst/>
@@ -27926,22 +27926,22 @@
         <p:spPr>
           <a:xfrm>
             <a:off x="566928" y="402336"/>
-            <a:ext cx="11057839" cy="603504"/>
-          </a:xfrm>
-          <a:prstGeom prst="rect">
-            <a:avLst/>
-          </a:prstGeom>
-          <a:noFill/>
-        </p:spPr>
-        <p:txBody>
-          <a:bodyPr wrap="square" anchor="ctr" lIns="36576" rIns="36576" tIns="0" bIns="0">
+            <a:ext cx="11057839" cy="711199"/>
+          </a:xfrm>
+          <a:prstGeom prst="rect">
+            <a:avLst/>
+          </a:prstGeom>
+          <a:noFill/>
+        </p:spPr>
+        <p:txBody>
+          <a:bodyPr wrap="square" anchor="t" lIns="36576" rIns="36576" tIns="0" bIns="0">
             <a:spAutoFit/>
           </a:bodyPr>
           <a:lstStyle/>
           <a:p>
             <a:pPr algn="l">
               <a:lnSpc>
-                <a:spcPct val="125000"/>
+                <a:spcPct val="116000"/>
               </a:lnSpc>
             </a:pPr>
             <a:r>
@@ -28156,7 +28156,7 @@
         <p:spPr>
           <a:xfrm>
             <a:off x="0" y="0"/>
-            <a:ext cx="12191695" cy="1078992"/>
+            <a:ext cx="12191695" cy="1223263"/>
           </a:xfrm>
           <a:prstGeom prst="rect">
             <a:avLst/>
@@ -28199,7 +28199,7 @@
         </p:nvSpPr>
         <p:spPr>
           <a:xfrm>
-            <a:off x="0" y="1078992"/>
+            <a:off x="0" y="1223263"/>
             <a:ext cx="12191695" cy="57150"/>
           </a:xfrm>
           <a:prstGeom prst="rect">
@@ -28244,7 +28244,7 @@
         <p:spPr>
           <a:xfrm>
             <a:off x="566928" y="91440"/>
-            <a:ext cx="11057839" cy="292608"/>
+            <a:ext cx="11057839" cy="274320"/>
           </a:xfrm>
           <a:prstGeom prst="rect">
             <a:avLst/>
@@ -28284,22 +28284,22 @@
         <p:spPr>
           <a:xfrm>
             <a:off x="566928" y="402336"/>
-            <a:ext cx="11057839" cy="603504"/>
-          </a:xfrm>
-          <a:prstGeom prst="rect">
-            <a:avLst/>
-          </a:prstGeom>
-          <a:noFill/>
-        </p:spPr>
-        <p:txBody>
-          <a:bodyPr wrap="square" anchor="ctr" lIns="36576" rIns="36576" tIns="0" bIns="0">
+            <a:ext cx="11057839" cy="711199"/>
+          </a:xfrm>
+          <a:prstGeom prst="rect">
+            <a:avLst/>
+          </a:prstGeom>
+          <a:noFill/>
+        </p:spPr>
+        <p:txBody>
+          <a:bodyPr wrap="square" anchor="t" lIns="36576" rIns="36576" tIns="0" bIns="0">
             <a:spAutoFit/>
           </a:bodyPr>
           <a:lstStyle/>
           <a:p>
             <a:pPr algn="l">
               <a:lnSpc>
-                <a:spcPct val="125000"/>
+                <a:spcPct val="116000"/>
               </a:lnSpc>
             </a:pPr>
             <a:r>
@@ -28514,7 +28514,7 @@
         <p:spPr>
           <a:xfrm>
             <a:off x="0" y="0"/>
-            <a:ext cx="12191695" cy="1078992"/>
+            <a:ext cx="12191695" cy="1223263"/>
           </a:xfrm>
           <a:prstGeom prst="rect">
             <a:avLst/>
@@ -28557,7 +28557,7 @@
         </p:nvSpPr>
         <p:spPr>
           <a:xfrm>
-            <a:off x="0" y="1078992"/>
+            <a:off x="0" y="1223263"/>
             <a:ext cx="12191695" cy="57150"/>
           </a:xfrm>
           <a:prstGeom prst="rect">
@@ -28602,7 +28602,7 @@
         <p:spPr>
           <a:xfrm>
             <a:off x="566928" y="91440"/>
-            <a:ext cx="11057839" cy="292608"/>
+            <a:ext cx="11057839" cy="274320"/>
           </a:xfrm>
           <a:prstGeom prst="rect">
             <a:avLst/>
@@ -28642,22 +28642,22 @@
         <p:spPr>
           <a:xfrm>
             <a:off x="566928" y="402336"/>
-            <a:ext cx="11057839" cy="603504"/>
-          </a:xfrm>
-          <a:prstGeom prst="rect">
-            <a:avLst/>
-          </a:prstGeom>
-          <a:noFill/>
-        </p:spPr>
-        <p:txBody>
-          <a:bodyPr wrap="square" anchor="ctr" lIns="36576" rIns="36576" tIns="0" bIns="0">
+            <a:ext cx="11057839" cy="711199"/>
+          </a:xfrm>
+          <a:prstGeom prst="rect">
+            <a:avLst/>
+          </a:prstGeom>
+          <a:noFill/>
+        </p:spPr>
+        <p:txBody>
+          <a:bodyPr wrap="square" anchor="t" lIns="36576" rIns="36576" tIns="0" bIns="0">
             <a:spAutoFit/>
           </a:bodyPr>
           <a:lstStyle/>
           <a:p>
             <a:pPr algn="l">
               <a:lnSpc>
-                <a:spcPct val="125000"/>
+                <a:spcPct val="116000"/>
               </a:lnSpc>
             </a:pPr>
             <a:r>
@@ -28872,7 +28872,7 @@
         <p:spPr>
           <a:xfrm>
             <a:off x="0" y="0"/>
-            <a:ext cx="12191695" cy="1078992"/>
+            <a:ext cx="12191695" cy="1223263"/>
           </a:xfrm>
           <a:prstGeom prst="rect">
             <a:avLst/>
@@ -28915,7 +28915,7 @@
         </p:nvSpPr>
         <p:spPr>
           <a:xfrm>
-            <a:off x="0" y="1078992"/>
+            <a:off x="0" y="1223263"/>
             <a:ext cx="12191695" cy="57150"/>
           </a:xfrm>
           <a:prstGeom prst="rect">
@@ -28960,7 +28960,7 @@
         <p:spPr>
           <a:xfrm>
             <a:off x="566928" y="91440"/>
-            <a:ext cx="11057839" cy="292608"/>
+            <a:ext cx="11057839" cy="274320"/>
           </a:xfrm>
           <a:prstGeom prst="rect">
             <a:avLst/>
@@ -29000,22 +29000,22 @@
         <p:spPr>
           <a:xfrm>
             <a:off x="566928" y="402336"/>
-            <a:ext cx="11057839" cy="603504"/>
-          </a:xfrm>
-          <a:prstGeom prst="rect">
-            <a:avLst/>
-          </a:prstGeom>
-          <a:noFill/>
-        </p:spPr>
-        <p:txBody>
-          <a:bodyPr wrap="square" anchor="ctr" lIns="36576" rIns="36576" tIns="0" bIns="0">
+            <a:ext cx="11057839" cy="711199"/>
+          </a:xfrm>
+          <a:prstGeom prst="rect">
+            <a:avLst/>
+          </a:prstGeom>
+          <a:noFill/>
+        </p:spPr>
+        <p:txBody>
+          <a:bodyPr wrap="square" anchor="t" lIns="36576" rIns="36576" tIns="0" bIns="0">
             <a:spAutoFit/>
           </a:bodyPr>
           <a:lstStyle/>
           <a:p>
             <a:pPr algn="l">
               <a:lnSpc>
-                <a:spcPct val="125000"/>
+                <a:spcPct val="116000"/>
               </a:lnSpc>
             </a:pPr>
             <a:r>
@@ -29230,7 +29230,7 @@
         <p:spPr>
           <a:xfrm>
             <a:off x="0" y="0"/>
-            <a:ext cx="12191695" cy="1078992"/>
+            <a:ext cx="12191695" cy="1223263"/>
           </a:xfrm>
           <a:prstGeom prst="rect">
             <a:avLst/>
@@ -29273,7 +29273,7 @@
         </p:nvSpPr>
         <p:spPr>
           <a:xfrm>
-            <a:off x="0" y="1078992"/>
+            <a:off x="0" y="1223263"/>
             <a:ext cx="12191695" cy="57150"/>
           </a:xfrm>
           <a:prstGeom prst="rect">
@@ -29318,7 +29318,7 @@
         <p:spPr>
           <a:xfrm>
             <a:off x="566928" y="91440"/>
-            <a:ext cx="11057839" cy="292608"/>
+            <a:ext cx="11057839" cy="274320"/>
           </a:xfrm>
           <a:prstGeom prst="rect">
             <a:avLst/>
@@ -29358,22 +29358,22 @@
         <p:spPr>
           <a:xfrm>
             <a:off x="566928" y="402336"/>
-            <a:ext cx="11057839" cy="603504"/>
-          </a:xfrm>
-          <a:prstGeom prst="rect">
-            <a:avLst/>
-          </a:prstGeom>
-          <a:noFill/>
-        </p:spPr>
-        <p:txBody>
-          <a:bodyPr wrap="square" anchor="ctr" lIns="36576" rIns="36576" tIns="0" bIns="0">
+            <a:ext cx="11057839" cy="711199"/>
+          </a:xfrm>
+          <a:prstGeom prst="rect">
+            <a:avLst/>
+          </a:prstGeom>
+          <a:noFill/>
+        </p:spPr>
+        <p:txBody>
+          <a:bodyPr wrap="square" anchor="t" lIns="36576" rIns="36576" tIns="0" bIns="0">
             <a:spAutoFit/>
           </a:bodyPr>
           <a:lstStyle/>
           <a:p>
             <a:pPr algn="l">
               <a:lnSpc>
-                <a:spcPct val="125000"/>
+                <a:spcPct val="116000"/>
               </a:lnSpc>
             </a:pPr>
             <a:r>
@@ -29588,7 +29588,7 @@
         <p:spPr>
           <a:xfrm>
             <a:off x="0" y="0"/>
-            <a:ext cx="12191695" cy="1078992"/>
+            <a:ext cx="12191695" cy="1223263"/>
           </a:xfrm>
           <a:prstGeom prst="rect">
             <a:avLst/>
@@ -29631,7 +29631,7 @@
         </p:nvSpPr>
         <p:spPr>
           <a:xfrm>
-            <a:off x="0" y="1078992"/>
+            <a:off x="0" y="1223263"/>
             <a:ext cx="12191695" cy="57150"/>
           </a:xfrm>
           <a:prstGeom prst="rect">
@@ -29676,7 +29676,7 @@
         <p:spPr>
           <a:xfrm>
             <a:off x="566928" y="91440"/>
-            <a:ext cx="11057839" cy="292608"/>
+            <a:ext cx="11057839" cy="274320"/>
           </a:xfrm>
           <a:prstGeom prst="rect">
             <a:avLst/>
@@ -29716,22 +29716,22 @@
         <p:spPr>
           <a:xfrm>
             <a:off x="566928" y="402336"/>
-            <a:ext cx="11057839" cy="603504"/>
-          </a:xfrm>
-          <a:prstGeom prst="rect">
-            <a:avLst/>
-          </a:prstGeom>
-          <a:noFill/>
-        </p:spPr>
-        <p:txBody>
-          <a:bodyPr wrap="square" anchor="ctr" lIns="36576" rIns="36576" tIns="0" bIns="0">
+            <a:ext cx="11057839" cy="711199"/>
+          </a:xfrm>
+          <a:prstGeom prst="rect">
+            <a:avLst/>
+          </a:prstGeom>
+          <a:noFill/>
+        </p:spPr>
+        <p:txBody>
+          <a:bodyPr wrap="square" anchor="t" lIns="36576" rIns="36576" tIns="0" bIns="0">
             <a:spAutoFit/>
           </a:bodyPr>
           <a:lstStyle/>
           <a:p>
             <a:pPr algn="l">
               <a:lnSpc>
-                <a:spcPct val="125000"/>
+                <a:spcPct val="116000"/>
               </a:lnSpc>
             </a:pPr>
             <a:r>
@@ -29946,7 +29946,7 @@
         <p:spPr>
           <a:xfrm>
             <a:off x="0" y="0"/>
-            <a:ext cx="12191695" cy="1078992"/>
+            <a:ext cx="12191695" cy="1223263"/>
           </a:xfrm>
           <a:prstGeom prst="rect">
             <a:avLst/>
@@ -29989,7 +29989,7 @@
         </p:nvSpPr>
         <p:spPr>
           <a:xfrm>
-            <a:off x="0" y="1078992"/>
+            <a:off x="0" y="1223263"/>
             <a:ext cx="12191695" cy="57150"/>
           </a:xfrm>
           <a:prstGeom prst="rect">
@@ -30034,7 +30034,7 @@
         <p:spPr>
           <a:xfrm>
             <a:off x="566928" y="91440"/>
-            <a:ext cx="11057839" cy="292608"/>
+            <a:ext cx="11057839" cy="274320"/>
           </a:xfrm>
           <a:prstGeom prst="rect">
             <a:avLst/>
@@ -30074,22 +30074,22 @@
         <p:spPr>
           <a:xfrm>
             <a:off x="566928" y="402336"/>
-            <a:ext cx="11057839" cy="603504"/>
-          </a:xfrm>
-          <a:prstGeom prst="rect">
-            <a:avLst/>
-          </a:prstGeom>
-          <a:noFill/>
-        </p:spPr>
-        <p:txBody>
-          <a:bodyPr wrap="square" anchor="ctr" lIns="36576" rIns="36576" tIns="0" bIns="0">
+            <a:ext cx="11057839" cy="711199"/>
+          </a:xfrm>
+          <a:prstGeom prst="rect">
+            <a:avLst/>
+          </a:prstGeom>
+          <a:noFill/>
+        </p:spPr>
+        <p:txBody>
+          <a:bodyPr wrap="square" anchor="t" lIns="36576" rIns="36576" tIns="0" bIns="0">
             <a:spAutoFit/>
           </a:bodyPr>
           <a:lstStyle/>
           <a:p>
             <a:pPr algn="l">
               <a:lnSpc>
-                <a:spcPct val="125000"/>
+                <a:spcPct val="116000"/>
               </a:lnSpc>
             </a:pPr>
             <a:r>
@@ -30304,7 +30304,7 @@
         <p:spPr>
           <a:xfrm>
             <a:off x="0" y="0"/>
-            <a:ext cx="12191695" cy="1078992"/>
+            <a:ext cx="12191695" cy="1223263"/>
           </a:xfrm>
           <a:prstGeom prst="rect">
             <a:avLst/>
@@ -30347,7 +30347,7 @@
         </p:nvSpPr>
         <p:spPr>
           <a:xfrm>
-            <a:off x="0" y="1078992"/>
+            <a:off x="0" y="1223263"/>
             <a:ext cx="12191695" cy="57150"/>
           </a:xfrm>
           <a:prstGeom prst="rect">
@@ -30392,7 +30392,7 @@
         <p:spPr>
           <a:xfrm>
             <a:off x="566928" y="91440"/>
-            <a:ext cx="11057839" cy="292608"/>
+            <a:ext cx="11057839" cy="274320"/>
           </a:xfrm>
           <a:prstGeom prst="rect">
             <a:avLst/>
@@ -30432,22 +30432,22 @@
         <p:spPr>
           <a:xfrm>
             <a:off x="566928" y="402336"/>
-            <a:ext cx="11057839" cy="603504"/>
-          </a:xfrm>
-          <a:prstGeom prst="rect">
-            <a:avLst/>
-          </a:prstGeom>
-          <a:noFill/>
-        </p:spPr>
-        <p:txBody>
-          <a:bodyPr wrap="square" anchor="ctr" lIns="36576" rIns="36576" tIns="0" bIns="0">
+            <a:ext cx="11057839" cy="711199"/>
+          </a:xfrm>
+          <a:prstGeom prst="rect">
+            <a:avLst/>
+          </a:prstGeom>
+          <a:noFill/>
+        </p:spPr>
+        <p:txBody>
+          <a:bodyPr wrap="square" anchor="t" lIns="36576" rIns="36576" tIns="0" bIns="0">
             <a:spAutoFit/>
           </a:bodyPr>
           <a:lstStyle/>
           <a:p>
             <a:pPr algn="l">
               <a:lnSpc>
-                <a:spcPct val="125000"/>
+                <a:spcPct val="116000"/>
               </a:lnSpc>
             </a:pPr>
             <a:r>
@@ -30705,7 +30705,7 @@
         <p:spPr>
           <a:xfrm>
             <a:off x="0" y="0"/>
-            <a:ext cx="12191695" cy="1078992"/>
+            <a:ext cx="12191695" cy="1223263"/>
           </a:xfrm>
           <a:prstGeom prst="rect">
             <a:avLst/>
@@ -30748,7 +30748,7 @@
         </p:nvSpPr>
         <p:spPr>
           <a:xfrm>
-            <a:off x="0" y="1078992"/>
+            <a:off x="0" y="1223263"/>
             <a:ext cx="12191695" cy="57150"/>
           </a:xfrm>
           <a:prstGeom prst="rect">
@@ -30793,7 +30793,7 @@
         <p:spPr>
           <a:xfrm>
             <a:off x="566928" y="91440"/>
-            <a:ext cx="11057839" cy="292608"/>
+            <a:ext cx="11057839" cy="274320"/>
           </a:xfrm>
           <a:prstGeom prst="rect">
             <a:avLst/>
@@ -30833,22 +30833,22 @@
         <p:spPr>
           <a:xfrm>
             <a:off x="566928" y="402336"/>
-            <a:ext cx="11057839" cy="603504"/>
-          </a:xfrm>
-          <a:prstGeom prst="rect">
-            <a:avLst/>
-          </a:prstGeom>
-          <a:noFill/>
-        </p:spPr>
-        <p:txBody>
-          <a:bodyPr wrap="square" anchor="ctr" lIns="36576" rIns="36576" tIns="0" bIns="0">
+            <a:ext cx="11057839" cy="711199"/>
+          </a:xfrm>
+          <a:prstGeom prst="rect">
+            <a:avLst/>
+          </a:prstGeom>
+          <a:noFill/>
+        </p:spPr>
+        <p:txBody>
+          <a:bodyPr wrap="square" anchor="t" lIns="36576" rIns="36576" tIns="0" bIns="0">
             <a:spAutoFit/>
           </a:bodyPr>
           <a:lstStyle/>
           <a:p>
             <a:pPr algn="l">
               <a:lnSpc>
-                <a:spcPct val="125000"/>
+                <a:spcPct val="116000"/>
               </a:lnSpc>
             </a:pPr>
             <a:r>
@@ -31063,7 +31063,7 @@
         <p:spPr>
           <a:xfrm>
             <a:off x="0" y="0"/>
-            <a:ext cx="12191695" cy="1078992"/>
+            <a:ext cx="12191695" cy="1223263"/>
           </a:xfrm>
           <a:prstGeom prst="rect">
             <a:avLst/>
@@ -31106,7 +31106,7 @@
         </p:nvSpPr>
         <p:spPr>
           <a:xfrm>
-            <a:off x="0" y="1078992"/>
+            <a:off x="0" y="1223263"/>
             <a:ext cx="12191695" cy="57150"/>
           </a:xfrm>
           <a:prstGeom prst="rect">
@@ -31151,7 +31151,7 @@
         <p:spPr>
           <a:xfrm>
             <a:off x="566928" y="91440"/>
-            <a:ext cx="11057839" cy="292608"/>
+            <a:ext cx="11057839" cy="274320"/>
           </a:xfrm>
           <a:prstGeom prst="rect">
             <a:avLst/>
@@ -31191,22 +31191,22 @@
         <p:spPr>
           <a:xfrm>
             <a:off x="566928" y="402336"/>
-            <a:ext cx="11057839" cy="603504"/>
-          </a:xfrm>
-          <a:prstGeom prst="rect">
-            <a:avLst/>
-          </a:prstGeom>
-          <a:noFill/>
-        </p:spPr>
-        <p:txBody>
-          <a:bodyPr wrap="square" anchor="ctr" lIns="36576" rIns="36576" tIns="0" bIns="0">
+            <a:ext cx="11057839" cy="711199"/>
+          </a:xfrm>
+          <a:prstGeom prst="rect">
+            <a:avLst/>
+          </a:prstGeom>
+          <a:noFill/>
+        </p:spPr>
+        <p:txBody>
+          <a:bodyPr wrap="square" anchor="t" lIns="36576" rIns="36576" tIns="0" bIns="0">
             <a:spAutoFit/>
           </a:bodyPr>
           <a:lstStyle/>
           <a:p>
             <a:pPr algn="l">
               <a:lnSpc>
-                <a:spcPct val="125000"/>
+                <a:spcPct val="116000"/>
               </a:lnSpc>
             </a:pPr>
             <a:r>
@@ -31995,7 +31995,7 @@
         <p:spPr>
           <a:xfrm>
             <a:off x="0" y="0"/>
-            <a:ext cx="12191695" cy="1078992"/>
+            <a:ext cx="12191695" cy="1223263"/>
           </a:xfrm>
           <a:prstGeom prst="rect">
             <a:avLst/>
@@ -32038,7 +32038,7 @@
         </p:nvSpPr>
         <p:spPr>
           <a:xfrm>
-            <a:off x="0" y="1078992"/>
+            <a:off x="0" y="1223263"/>
             <a:ext cx="12191695" cy="57150"/>
           </a:xfrm>
           <a:prstGeom prst="rect">
@@ -32083,7 +32083,7 @@
         <p:spPr>
           <a:xfrm>
             <a:off x="566928" y="91440"/>
-            <a:ext cx="11057839" cy="292608"/>
+            <a:ext cx="11057839" cy="274320"/>
           </a:xfrm>
           <a:prstGeom prst="rect">
             <a:avLst/>
@@ -32123,22 +32123,22 @@
         <p:spPr>
           <a:xfrm>
             <a:off x="566928" y="402336"/>
-            <a:ext cx="11057839" cy="603504"/>
-          </a:xfrm>
-          <a:prstGeom prst="rect">
-            <a:avLst/>
-          </a:prstGeom>
-          <a:noFill/>
-        </p:spPr>
-        <p:txBody>
-          <a:bodyPr wrap="square" anchor="ctr" lIns="36576" rIns="36576" tIns="0" bIns="0">
+            <a:ext cx="11057839" cy="711199"/>
+          </a:xfrm>
+          <a:prstGeom prst="rect">
+            <a:avLst/>
+          </a:prstGeom>
+          <a:noFill/>
+        </p:spPr>
+        <p:txBody>
+          <a:bodyPr wrap="square" anchor="t" lIns="36576" rIns="36576" tIns="0" bIns="0">
             <a:spAutoFit/>
           </a:bodyPr>
           <a:lstStyle/>
           <a:p>
             <a:pPr algn="l">
               <a:lnSpc>
-                <a:spcPct val="125000"/>
+                <a:spcPct val="116000"/>
               </a:lnSpc>
             </a:pPr>
             <a:r>
@@ -32353,7 +32353,7 @@
         <p:spPr>
           <a:xfrm>
             <a:off x="0" y="0"/>
-            <a:ext cx="12191695" cy="1078992"/>
+            <a:ext cx="12191695" cy="1223263"/>
           </a:xfrm>
           <a:prstGeom prst="rect">
             <a:avLst/>
@@ -32396,7 +32396,7 @@
         </p:nvSpPr>
         <p:spPr>
           <a:xfrm>
-            <a:off x="0" y="1078992"/>
+            <a:off x="0" y="1223263"/>
             <a:ext cx="12191695" cy="57150"/>
           </a:xfrm>
           <a:prstGeom prst="rect">
@@ -32441,7 +32441,7 @@
         <p:spPr>
           <a:xfrm>
             <a:off x="566928" y="91440"/>
-            <a:ext cx="11057839" cy="292608"/>
+            <a:ext cx="11057839" cy="274320"/>
           </a:xfrm>
           <a:prstGeom prst="rect">
             <a:avLst/>
@@ -32481,22 +32481,22 @@
         <p:spPr>
           <a:xfrm>
             <a:off x="566928" y="402336"/>
-            <a:ext cx="11057839" cy="603504"/>
-          </a:xfrm>
-          <a:prstGeom prst="rect">
-            <a:avLst/>
-          </a:prstGeom>
-          <a:noFill/>
-        </p:spPr>
-        <p:txBody>
-          <a:bodyPr wrap="square" anchor="ctr" lIns="36576" rIns="36576" tIns="0" bIns="0">
+            <a:ext cx="11057839" cy="711199"/>
+          </a:xfrm>
+          <a:prstGeom prst="rect">
+            <a:avLst/>
+          </a:prstGeom>
+          <a:noFill/>
+        </p:spPr>
+        <p:txBody>
+          <a:bodyPr wrap="square" anchor="t" lIns="36576" rIns="36576" tIns="0" bIns="0">
             <a:spAutoFit/>
           </a:bodyPr>
           <a:lstStyle/>
           <a:p>
             <a:pPr algn="l">
               <a:lnSpc>
-                <a:spcPct val="125000"/>
+                <a:spcPct val="116000"/>
               </a:lnSpc>
             </a:pPr>
             <a:r>
@@ -32711,7 +32711,7 @@
         <p:spPr>
           <a:xfrm>
             <a:off x="0" y="0"/>
-            <a:ext cx="12191695" cy="1078992"/>
+            <a:ext cx="12191695" cy="1223263"/>
           </a:xfrm>
           <a:prstGeom prst="rect">
             <a:avLst/>
@@ -32754,7 +32754,7 @@
         </p:nvSpPr>
         <p:spPr>
           <a:xfrm>
-            <a:off x="0" y="1078992"/>
+            <a:off x="0" y="1223263"/>
             <a:ext cx="12191695" cy="57150"/>
           </a:xfrm>
           <a:prstGeom prst="rect">
@@ -32799,7 +32799,7 @@
         <p:spPr>
           <a:xfrm>
             <a:off x="566928" y="91440"/>
-            <a:ext cx="11057839" cy="292608"/>
+            <a:ext cx="11057839" cy="274320"/>
           </a:xfrm>
           <a:prstGeom prst="rect">
             <a:avLst/>
@@ -32839,22 +32839,22 @@
         <p:spPr>
           <a:xfrm>
             <a:off x="566928" y="402336"/>
-            <a:ext cx="11057839" cy="603504"/>
-          </a:xfrm>
-          <a:prstGeom prst="rect">
-            <a:avLst/>
-          </a:prstGeom>
-          <a:noFill/>
-        </p:spPr>
-        <p:txBody>
-          <a:bodyPr wrap="square" anchor="ctr" lIns="36576" rIns="36576" tIns="0" bIns="0">
+            <a:ext cx="11057839" cy="711199"/>
+          </a:xfrm>
+          <a:prstGeom prst="rect">
+            <a:avLst/>
+          </a:prstGeom>
+          <a:noFill/>
+        </p:spPr>
+        <p:txBody>
+          <a:bodyPr wrap="square" anchor="t" lIns="36576" rIns="36576" tIns="0" bIns="0">
             <a:spAutoFit/>
           </a:bodyPr>
           <a:lstStyle/>
           <a:p>
             <a:pPr algn="l">
               <a:lnSpc>
-                <a:spcPct val="125000"/>
+                <a:spcPct val="116000"/>
               </a:lnSpc>
             </a:pPr>
             <a:r>
@@ -33069,7 +33069,7 @@
         <p:spPr>
           <a:xfrm>
             <a:off x="0" y="0"/>
-            <a:ext cx="12191695" cy="1078992"/>
+            <a:ext cx="12191695" cy="1223263"/>
           </a:xfrm>
           <a:prstGeom prst="rect">
             <a:avLst/>
@@ -33112,7 +33112,7 @@
         </p:nvSpPr>
         <p:spPr>
           <a:xfrm>
-            <a:off x="0" y="1078992"/>
+            <a:off x="0" y="1223263"/>
             <a:ext cx="12191695" cy="57150"/>
           </a:xfrm>
           <a:prstGeom prst="rect">
@@ -33157,7 +33157,7 @@
         <p:spPr>
           <a:xfrm>
             <a:off x="566928" y="91440"/>
-            <a:ext cx="11057839" cy="292608"/>
+            <a:ext cx="11057839" cy="274320"/>
           </a:xfrm>
           <a:prstGeom prst="rect">
             <a:avLst/>
@@ -33197,22 +33197,22 @@
         <p:spPr>
           <a:xfrm>
             <a:off x="566928" y="402336"/>
-            <a:ext cx="11057839" cy="603504"/>
-          </a:xfrm>
-          <a:prstGeom prst="rect">
-            <a:avLst/>
-          </a:prstGeom>
-          <a:noFill/>
-        </p:spPr>
-        <p:txBody>
-          <a:bodyPr wrap="square" anchor="ctr" lIns="36576" rIns="36576" tIns="0" bIns="0">
+            <a:ext cx="11057839" cy="711199"/>
+          </a:xfrm>
+          <a:prstGeom prst="rect">
+            <a:avLst/>
+          </a:prstGeom>
+          <a:noFill/>
+        </p:spPr>
+        <p:txBody>
+          <a:bodyPr wrap="square" anchor="t" lIns="36576" rIns="36576" tIns="0" bIns="0">
             <a:spAutoFit/>
           </a:bodyPr>
           <a:lstStyle/>
           <a:p>
             <a:pPr algn="l">
               <a:lnSpc>
-                <a:spcPct val="125000"/>
+                <a:spcPct val="116000"/>
               </a:lnSpc>
             </a:pPr>
             <a:r>
@@ -33427,7 +33427,7 @@
         <p:spPr>
           <a:xfrm>
             <a:off x="0" y="0"/>
-            <a:ext cx="12191695" cy="1078992"/>
+            <a:ext cx="12191695" cy="1223263"/>
           </a:xfrm>
           <a:prstGeom prst="rect">
             <a:avLst/>
@@ -33470,7 +33470,7 @@
         </p:nvSpPr>
         <p:spPr>
           <a:xfrm>
-            <a:off x="0" y="1078992"/>
+            <a:off x="0" y="1223263"/>
             <a:ext cx="12191695" cy="57150"/>
           </a:xfrm>
           <a:prstGeom prst="rect">
@@ -33515,7 +33515,7 @@
         <p:spPr>
           <a:xfrm>
             <a:off x="566928" y="91440"/>
-            <a:ext cx="11057839" cy="292608"/>
+            <a:ext cx="11057839" cy="274320"/>
           </a:xfrm>
           <a:prstGeom prst="rect">
             <a:avLst/>
@@ -33555,22 +33555,22 @@
         <p:spPr>
           <a:xfrm>
             <a:off x="566928" y="402336"/>
-            <a:ext cx="11057839" cy="603504"/>
-          </a:xfrm>
-          <a:prstGeom prst="rect">
-            <a:avLst/>
-          </a:prstGeom>
-          <a:noFill/>
-        </p:spPr>
-        <p:txBody>
-          <a:bodyPr wrap="square" anchor="ctr" lIns="36576" rIns="36576" tIns="0" bIns="0">
+            <a:ext cx="11057839" cy="711199"/>
+          </a:xfrm>
+          <a:prstGeom prst="rect">
+            <a:avLst/>
+          </a:prstGeom>
+          <a:noFill/>
+        </p:spPr>
+        <p:txBody>
+          <a:bodyPr wrap="square" anchor="t" lIns="36576" rIns="36576" tIns="0" bIns="0">
             <a:spAutoFit/>
           </a:bodyPr>
           <a:lstStyle/>
           <a:p>
             <a:pPr algn="l">
               <a:lnSpc>
-                <a:spcPct val="125000"/>
+                <a:spcPct val="116000"/>
               </a:lnSpc>
             </a:pPr>
             <a:r>
@@ -33828,7 +33828,7 @@
         <p:spPr>
           <a:xfrm>
             <a:off x="0" y="0"/>
-            <a:ext cx="12191695" cy="1078992"/>
+            <a:ext cx="12191695" cy="1223263"/>
           </a:xfrm>
           <a:prstGeom prst="rect">
             <a:avLst/>
@@ -33871,7 +33871,7 @@
         </p:nvSpPr>
         <p:spPr>
           <a:xfrm>
-            <a:off x="0" y="1078992"/>
+            <a:off x="0" y="1223263"/>
             <a:ext cx="12191695" cy="57150"/>
           </a:xfrm>
           <a:prstGeom prst="rect">
@@ -33916,7 +33916,7 @@
         <p:spPr>
           <a:xfrm>
             <a:off x="566928" y="91440"/>
-            <a:ext cx="11057839" cy="292608"/>
+            <a:ext cx="11057839" cy="274320"/>
           </a:xfrm>
           <a:prstGeom prst="rect">
             <a:avLst/>
@@ -33956,22 +33956,22 @@
         <p:spPr>
           <a:xfrm>
             <a:off x="566928" y="402336"/>
-            <a:ext cx="11057839" cy="603504"/>
-          </a:xfrm>
-          <a:prstGeom prst="rect">
-            <a:avLst/>
-          </a:prstGeom>
-          <a:noFill/>
-        </p:spPr>
-        <p:txBody>
-          <a:bodyPr wrap="square" anchor="ctr" lIns="36576" rIns="36576" tIns="0" bIns="0">
+            <a:ext cx="11057839" cy="711199"/>
+          </a:xfrm>
+          <a:prstGeom prst="rect">
+            <a:avLst/>
+          </a:prstGeom>
+          <a:noFill/>
+        </p:spPr>
+        <p:txBody>
+          <a:bodyPr wrap="square" anchor="t" lIns="36576" rIns="36576" tIns="0" bIns="0">
             <a:spAutoFit/>
           </a:bodyPr>
           <a:lstStyle/>
           <a:p>
             <a:pPr algn="l">
               <a:lnSpc>
-                <a:spcPct val="125000"/>
+                <a:spcPct val="116000"/>
               </a:lnSpc>
             </a:pPr>
             <a:r>
@@ -34380,7 +34380,7 @@
         <p:spPr>
           <a:xfrm>
             <a:off x="0" y="0"/>
-            <a:ext cx="12191695" cy="1078992"/>
+            <a:ext cx="12191695" cy="1223263"/>
           </a:xfrm>
           <a:prstGeom prst="rect">
             <a:avLst/>
@@ -34423,7 +34423,7 @@
         </p:nvSpPr>
         <p:spPr>
           <a:xfrm>
-            <a:off x="0" y="1078992"/>
+            <a:off x="0" y="1223263"/>
             <a:ext cx="12191695" cy="57150"/>
           </a:xfrm>
           <a:prstGeom prst="rect">
@@ -34468,7 +34468,7 @@
         <p:spPr>
           <a:xfrm>
             <a:off x="566928" y="91440"/>
-            <a:ext cx="11057839" cy="292608"/>
+            <a:ext cx="11057839" cy="274320"/>
           </a:xfrm>
           <a:prstGeom prst="rect">
             <a:avLst/>
@@ -34508,22 +34508,22 @@
         <p:spPr>
           <a:xfrm>
             <a:off x="566928" y="402336"/>
-            <a:ext cx="11057839" cy="603504"/>
-          </a:xfrm>
-          <a:prstGeom prst="rect">
-            <a:avLst/>
-          </a:prstGeom>
-          <a:noFill/>
-        </p:spPr>
-        <p:txBody>
-          <a:bodyPr wrap="square" anchor="ctr" lIns="36576" rIns="36576" tIns="0" bIns="0">
+            <a:ext cx="11057839" cy="711199"/>
+          </a:xfrm>
+          <a:prstGeom prst="rect">
+            <a:avLst/>
+          </a:prstGeom>
+          <a:noFill/>
+        </p:spPr>
+        <p:txBody>
+          <a:bodyPr wrap="square" anchor="t" lIns="36576" rIns="36576" tIns="0" bIns="0">
             <a:spAutoFit/>
           </a:bodyPr>
           <a:lstStyle/>
           <a:p>
             <a:pPr algn="l">
               <a:lnSpc>
-                <a:spcPct val="125000"/>
+                <a:spcPct val="116000"/>
               </a:lnSpc>
             </a:pPr>
             <a:r>
@@ -35218,7 +35218,7 @@
         <p:spPr>
           <a:xfrm>
             <a:off x="0" y="0"/>
-            <a:ext cx="12191695" cy="1078992"/>
+            <a:ext cx="12191695" cy="1223263"/>
           </a:xfrm>
           <a:prstGeom prst="rect">
             <a:avLst/>
@@ -35261,7 +35261,7 @@
         </p:nvSpPr>
         <p:spPr>
           <a:xfrm>
-            <a:off x="0" y="1078992"/>
+            <a:off x="0" y="1223263"/>
             <a:ext cx="12191695" cy="57150"/>
           </a:xfrm>
           <a:prstGeom prst="rect">
@@ -35306,7 +35306,7 @@
         <p:spPr>
           <a:xfrm>
             <a:off x="566928" y="91440"/>
-            <a:ext cx="11057839" cy="292608"/>
+            <a:ext cx="11057839" cy="274320"/>
           </a:xfrm>
           <a:prstGeom prst="rect">
             <a:avLst/>
@@ -35346,22 +35346,22 @@
         <p:spPr>
           <a:xfrm>
             <a:off x="566928" y="402336"/>
-            <a:ext cx="11057839" cy="603504"/>
-          </a:xfrm>
-          <a:prstGeom prst="rect">
-            <a:avLst/>
-          </a:prstGeom>
-          <a:noFill/>
-        </p:spPr>
-        <p:txBody>
-          <a:bodyPr wrap="square" anchor="ctr" lIns="36576" rIns="36576" tIns="0" bIns="0">
+            <a:ext cx="11057839" cy="711199"/>
+          </a:xfrm>
+          <a:prstGeom prst="rect">
+            <a:avLst/>
+          </a:prstGeom>
+          <a:noFill/>
+        </p:spPr>
+        <p:txBody>
+          <a:bodyPr wrap="square" anchor="t" lIns="36576" rIns="36576" tIns="0" bIns="0">
             <a:spAutoFit/>
           </a:bodyPr>
           <a:lstStyle/>
           <a:p>
             <a:pPr algn="l">
               <a:lnSpc>
-                <a:spcPct val="125000"/>
+                <a:spcPct val="116000"/>
               </a:lnSpc>
             </a:pPr>
             <a:r>
@@ -35576,7 +35576,7 @@
         <p:spPr>
           <a:xfrm>
             <a:off x="0" y="0"/>
-            <a:ext cx="12191695" cy="1078992"/>
+            <a:ext cx="12191695" cy="1223263"/>
           </a:xfrm>
           <a:prstGeom prst="rect">
             <a:avLst/>
@@ -35619,7 +35619,7 @@
         </p:nvSpPr>
         <p:spPr>
           <a:xfrm>
-            <a:off x="0" y="1078992"/>
+            <a:off x="0" y="1223263"/>
             <a:ext cx="12191695" cy="57150"/>
           </a:xfrm>
           <a:prstGeom prst="rect">
@@ -35664,7 +35664,7 @@
         <p:spPr>
           <a:xfrm>
             <a:off x="566928" y="91440"/>
-            <a:ext cx="11057839" cy="292608"/>
+            <a:ext cx="11057839" cy="274320"/>
           </a:xfrm>
           <a:prstGeom prst="rect">
             <a:avLst/>
@@ -35704,22 +35704,22 @@
         <p:spPr>
           <a:xfrm>
             <a:off x="566928" y="402336"/>
-            <a:ext cx="11057839" cy="603504"/>
-          </a:xfrm>
-          <a:prstGeom prst="rect">
-            <a:avLst/>
-          </a:prstGeom>
-          <a:noFill/>
-        </p:spPr>
-        <p:txBody>
-          <a:bodyPr wrap="square" anchor="ctr" lIns="36576" rIns="36576" tIns="0" bIns="0">
+            <a:ext cx="11057839" cy="711199"/>
+          </a:xfrm>
+          <a:prstGeom prst="rect">
+            <a:avLst/>
+          </a:prstGeom>
+          <a:noFill/>
+        </p:spPr>
+        <p:txBody>
+          <a:bodyPr wrap="square" anchor="t" lIns="36576" rIns="36576" tIns="0" bIns="0">
             <a:spAutoFit/>
           </a:bodyPr>
           <a:lstStyle/>
           <a:p>
             <a:pPr algn="l">
               <a:lnSpc>
-                <a:spcPct val="125000"/>
+                <a:spcPct val="116000"/>
               </a:lnSpc>
             </a:pPr>
             <a:r>
@@ -35934,7 +35934,7 @@
         <p:spPr>
           <a:xfrm>
             <a:off x="0" y="0"/>
-            <a:ext cx="12191695" cy="1078992"/>
+            <a:ext cx="12191695" cy="1223263"/>
           </a:xfrm>
           <a:prstGeom prst="rect">
             <a:avLst/>
@@ -35977,7 +35977,7 @@
         </p:nvSpPr>
         <p:spPr>
           <a:xfrm>
-            <a:off x="0" y="1078992"/>
+            <a:off x="0" y="1223263"/>
             <a:ext cx="12191695" cy="57150"/>
           </a:xfrm>
           <a:prstGeom prst="rect">
@@ -36022,7 +36022,7 @@
         <p:spPr>
           <a:xfrm>
             <a:off x="566928" y="91440"/>
-            <a:ext cx="11057839" cy="292608"/>
+            <a:ext cx="11057839" cy="274320"/>
           </a:xfrm>
           <a:prstGeom prst="rect">
             <a:avLst/>
@@ -36062,22 +36062,22 @@
         <p:spPr>
           <a:xfrm>
             <a:off x="566928" y="402336"/>
-            <a:ext cx="11057839" cy="603504"/>
-          </a:xfrm>
-          <a:prstGeom prst="rect">
-            <a:avLst/>
-          </a:prstGeom>
-          <a:noFill/>
-        </p:spPr>
-        <p:txBody>
-          <a:bodyPr wrap="square" anchor="ctr" lIns="36576" rIns="36576" tIns="0" bIns="0">
+            <a:ext cx="11057839" cy="711199"/>
+          </a:xfrm>
+          <a:prstGeom prst="rect">
+            <a:avLst/>
+          </a:prstGeom>
+          <a:noFill/>
+        </p:spPr>
+        <p:txBody>
+          <a:bodyPr wrap="square" anchor="t" lIns="36576" rIns="36576" tIns="0" bIns="0">
             <a:spAutoFit/>
           </a:bodyPr>
           <a:lstStyle/>
           <a:p>
             <a:pPr algn="l">
               <a:lnSpc>
-                <a:spcPct val="125000"/>
+                <a:spcPct val="116000"/>
               </a:lnSpc>
             </a:pPr>
             <a:r>
@@ -36292,7 +36292,7 @@
         <p:spPr>
           <a:xfrm>
             <a:off x="0" y="0"/>
-            <a:ext cx="12191695" cy="1078992"/>
+            <a:ext cx="12191695" cy="1223263"/>
           </a:xfrm>
           <a:prstGeom prst="rect">
             <a:avLst/>
@@ -36335,7 +36335,7 @@
         </p:nvSpPr>
         <p:spPr>
           <a:xfrm>
-            <a:off x="0" y="1078992"/>
+            <a:off x="0" y="1223263"/>
             <a:ext cx="12191695" cy="57150"/>
           </a:xfrm>
           <a:prstGeom prst="rect">
@@ -36380,7 +36380,7 @@
         <p:spPr>
           <a:xfrm>
             <a:off x="566928" y="91440"/>
-            <a:ext cx="11057839" cy="292608"/>
+            <a:ext cx="11057839" cy="274320"/>
           </a:xfrm>
           <a:prstGeom prst="rect">
             <a:avLst/>
@@ -36420,22 +36420,22 @@
         <p:spPr>
           <a:xfrm>
             <a:off x="566928" y="402336"/>
-            <a:ext cx="11057839" cy="603504"/>
-          </a:xfrm>
-          <a:prstGeom prst="rect">
-            <a:avLst/>
-          </a:prstGeom>
-          <a:noFill/>
-        </p:spPr>
-        <p:txBody>
-          <a:bodyPr wrap="square" anchor="ctr" lIns="36576" rIns="36576" tIns="0" bIns="0">
+            <a:ext cx="11057839" cy="711199"/>
+          </a:xfrm>
+          <a:prstGeom prst="rect">
+            <a:avLst/>
+          </a:prstGeom>
+          <a:noFill/>
+        </p:spPr>
+        <p:txBody>
+          <a:bodyPr wrap="square" anchor="t" lIns="36576" rIns="36576" tIns="0" bIns="0">
             <a:spAutoFit/>
           </a:bodyPr>
           <a:lstStyle/>
           <a:p>
             <a:pPr algn="l">
               <a:lnSpc>
-                <a:spcPct val="125000"/>
+                <a:spcPct val="116000"/>
               </a:lnSpc>
             </a:pPr>
             <a:r>
@@ -36884,7 +36884,7 @@
         <p:spPr>
           <a:xfrm>
             <a:off x="0" y="0"/>
-            <a:ext cx="12191695" cy="1078992"/>
+            <a:ext cx="12191695" cy="1223263"/>
           </a:xfrm>
           <a:prstGeom prst="rect">
             <a:avLst/>
@@ -36927,7 +36927,7 @@
         </p:nvSpPr>
         <p:spPr>
           <a:xfrm>
-            <a:off x="0" y="1078992"/>
+            <a:off x="0" y="1223263"/>
             <a:ext cx="12191695" cy="57150"/>
           </a:xfrm>
           <a:prstGeom prst="rect">
@@ -36972,7 +36972,7 @@
         <p:spPr>
           <a:xfrm>
             <a:off x="566928" y="91440"/>
-            <a:ext cx="11057839" cy="292608"/>
+            <a:ext cx="11057839" cy="274320"/>
           </a:xfrm>
           <a:prstGeom prst="rect">
             <a:avLst/>
@@ -37012,22 +37012,22 @@
         <p:spPr>
           <a:xfrm>
             <a:off x="566928" y="402336"/>
-            <a:ext cx="11057839" cy="603504"/>
-          </a:xfrm>
-          <a:prstGeom prst="rect">
-            <a:avLst/>
-          </a:prstGeom>
-          <a:noFill/>
-        </p:spPr>
-        <p:txBody>
-          <a:bodyPr wrap="square" anchor="ctr" lIns="36576" rIns="36576" tIns="0" bIns="0">
+            <a:ext cx="11057839" cy="711199"/>
+          </a:xfrm>
+          <a:prstGeom prst="rect">
+            <a:avLst/>
+          </a:prstGeom>
+          <a:noFill/>
+        </p:spPr>
+        <p:txBody>
+          <a:bodyPr wrap="square" anchor="t" lIns="36576" rIns="36576" tIns="0" bIns="0">
             <a:spAutoFit/>
           </a:bodyPr>
           <a:lstStyle/>
           <a:p>
             <a:pPr algn="l">
               <a:lnSpc>
-                <a:spcPct val="125000"/>
+                <a:spcPct val="116000"/>
               </a:lnSpc>
             </a:pPr>
             <a:r>
@@ -37722,7 +37722,7 @@
         <p:spPr>
           <a:xfrm>
             <a:off x="0" y="0"/>
-            <a:ext cx="12191695" cy="1078992"/>
+            <a:ext cx="12191695" cy="1223263"/>
           </a:xfrm>
           <a:prstGeom prst="rect">
             <a:avLst/>
@@ -37765,7 +37765,7 @@
         </p:nvSpPr>
         <p:spPr>
           <a:xfrm>
-            <a:off x="0" y="1078992"/>
+            <a:off x="0" y="1223263"/>
             <a:ext cx="12191695" cy="57150"/>
           </a:xfrm>
           <a:prstGeom prst="rect">
@@ -37810,7 +37810,7 @@
         <p:spPr>
           <a:xfrm>
             <a:off x="566928" y="91440"/>
-            <a:ext cx="11057839" cy="292608"/>
+            <a:ext cx="11057839" cy="274320"/>
           </a:xfrm>
           <a:prstGeom prst="rect">
             <a:avLst/>
@@ -37850,22 +37850,22 @@
         <p:spPr>
           <a:xfrm>
             <a:off x="566928" y="402336"/>
-            <a:ext cx="11057839" cy="603504"/>
-          </a:xfrm>
-          <a:prstGeom prst="rect">
-            <a:avLst/>
-          </a:prstGeom>
-          <a:noFill/>
-        </p:spPr>
-        <p:txBody>
-          <a:bodyPr wrap="square" anchor="ctr" lIns="36576" rIns="36576" tIns="0" bIns="0">
+            <a:ext cx="11057839" cy="711199"/>
+          </a:xfrm>
+          <a:prstGeom prst="rect">
+            <a:avLst/>
+          </a:prstGeom>
+          <a:noFill/>
+        </p:spPr>
+        <p:txBody>
+          <a:bodyPr wrap="square" anchor="t" lIns="36576" rIns="36576" tIns="0" bIns="0">
             <a:spAutoFit/>
           </a:bodyPr>
           <a:lstStyle/>
           <a:p>
             <a:pPr algn="l">
               <a:lnSpc>
-                <a:spcPct val="125000"/>
+                <a:spcPct val="116000"/>
               </a:lnSpc>
             </a:pPr>
             <a:r>
@@ -38402,22 +38402,22 @@
         <p:spPr>
           <a:xfrm>
             <a:off x="566928" y="182880"/>
-            <a:ext cx="11057839" cy="731520"/>
-          </a:xfrm>
-          <a:prstGeom prst="rect">
-            <a:avLst/>
-          </a:prstGeom>
-          <a:noFill/>
-        </p:spPr>
-        <p:txBody>
-          <a:bodyPr wrap="square" anchor="ctr" lIns="36576" rIns="36576" tIns="0" bIns="0">
+            <a:ext cx="11057839" cy="711199"/>
+          </a:xfrm>
+          <a:prstGeom prst="rect">
+            <a:avLst/>
+          </a:prstGeom>
+          <a:noFill/>
+        </p:spPr>
+        <p:txBody>
+          <a:bodyPr wrap="square" anchor="t" lIns="36576" rIns="36576" tIns="0" bIns="0">
             <a:spAutoFit/>
           </a:bodyPr>
           <a:lstStyle/>
           <a:p>
             <a:pPr algn="l">
               <a:lnSpc>
-                <a:spcPct val="125000"/>
+                <a:spcPct val="116000"/>
               </a:lnSpc>
             </a:pPr>
             <a:r>
@@ -38702,7 +38702,7 @@
         <p:spPr>
           <a:xfrm>
             <a:off x="0" y="0"/>
-            <a:ext cx="12191695" cy="1078992"/>
+            <a:ext cx="12191695" cy="1223263"/>
           </a:xfrm>
           <a:prstGeom prst="rect">
             <a:avLst/>
@@ -38745,7 +38745,7 @@
         </p:nvSpPr>
         <p:spPr>
           <a:xfrm>
-            <a:off x="0" y="1078992"/>
+            <a:off x="0" y="1223263"/>
             <a:ext cx="12191695" cy="57150"/>
           </a:xfrm>
           <a:prstGeom prst="rect">
@@ -38790,7 +38790,7 @@
         <p:spPr>
           <a:xfrm>
             <a:off x="566928" y="91440"/>
-            <a:ext cx="11057839" cy="292608"/>
+            <a:ext cx="11057839" cy="274320"/>
           </a:xfrm>
           <a:prstGeom prst="rect">
             <a:avLst/>
@@ -38830,22 +38830,22 @@
         <p:spPr>
           <a:xfrm>
             <a:off x="566928" y="402336"/>
-            <a:ext cx="11057839" cy="603504"/>
-          </a:xfrm>
-          <a:prstGeom prst="rect">
-            <a:avLst/>
-          </a:prstGeom>
-          <a:noFill/>
-        </p:spPr>
-        <p:txBody>
-          <a:bodyPr wrap="square" anchor="ctr" lIns="36576" rIns="36576" tIns="0" bIns="0">
+            <a:ext cx="11057839" cy="711199"/>
+          </a:xfrm>
+          <a:prstGeom prst="rect">
+            <a:avLst/>
+          </a:prstGeom>
+          <a:noFill/>
+        </p:spPr>
+        <p:txBody>
+          <a:bodyPr wrap="square" anchor="t" lIns="36576" rIns="36576" tIns="0" bIns="0">
             <a:spAutoFit/>
           </a:bodyPr>
           <a:lstStyle/>
           <a:p>
             <a:pPr algn="l">
               <a:lnSpc>
-                <a:spcPct val="125000"/>
+                <a:spcPct val="116000"/>
               </a:lnSpc>
             </a:pPr>
             <a:r>
@@ -39060,7 +39060,7 @@
         <p:spPr>
           <a:xfrm>
             <a:off x="0" y="0"/>
-            <a:ext cx="12191695" cy="1078992"/>
+            <a:ext cx="12191695" cy="1223263"/>
           </a:xfrm>
           <a:prstGeom prst="rect">
             <a:avLst/>
@@ -39103,7 +39103,7 @@
         </p:nvSpPr>
         <p:spPr>
           <a:xfrm>
-            <a:off x="0" y="1078992"/>
+            <a:off x="0" y="1223263"/>
             <a:ext cx="12191695" cy="57150"/>
           </a:xfrm>
           <a:prstGeom prst="rect">
@@ -39148,7 +39148,7 @@
         <p:spPr>
           <a:xfrm>
             <a:off x="566928" y="91440"/>
-            <a:ext cx="11057839" cy="292608"/>
+            <a:ext cx="11057839" cy="274320"/>
           </a:xfrm>
           <a:prstGeom prst="rect">
             <a:avLst/>
@@ -39188,22 +39188,22 @@
         <p:spPr>
           <a:xfrm>
             <a:off x="566928" y="402336"/>
-            <a:ext cx="11057839" cy="603504"/>
-          </a:xfrm>
-          <a:prstGeom prst="rect">
-            <a:avLst/>
-          </a:prstGeom>
-          <a:noFill/>
-        </p:spPr>
-        <p:txBody>
-          <a:bodyPr wrap="square" anchor="ctr" lIns="36576" rIns="36576" tIns="0" bIns="0">
+            <a:ext cx="11057839" cy="711199"/>
+          </a:xfrm>
+          <a:prstGeom prst="rect">
+            <a:avLst/>
+          </a:prstGeom>
+          <a:noFill/>
+        </p:spPr>
+        <p:txBody>
+          <a:bodyPr wrap="square" anchor="t" lIns="36576" rIns="36576" tIns="0" bIns="0">
             <a:spAutoFit/>
           </a:bodyPr>
           <a:lstStyle/>
           <a:p>
             <a:pPr algn="l">
               <a:lnSpc>
-                <a:spcPct val="125000"/>
+                <a:spcPct val="116000"/>
               </a:lnSpc>
             </a:pPr>
             <a:r>
@@ -39418,7 +39418,7 @@
         <p:spPr>
           <a:xfrm>
             <a:off x="0" y="0"/>
-            <a:ext cx="12191695" cy="1078992"/>
+            <a:ext cx="12191695" cy="1223263"/>
           </a:xfrm>
           <a:prstGeom prst="rect">
             <a:avLst/>
@@ -39461,7 +39461,7 @@
         </p:nvSpPr>
         <p:spPr>
           <a:xfrm>
-            <a:off x="0" y="1078992"/>
+            <a:off x="0" y="1223263"/>
             <a:ext cx="12191695" cy="57150"/>
           </a:xfrm>
           <a:prstGeom prst="rect">
@@ -39506,7 +39506,7 @@
         <p:spPr>
           <a:xfrm>
             <a:off x="566928" y="91440"/>
-            <a:ext cx="11057839" cy="292608"/>
+            <a:ext cx="11057839" cy="274320"/>
           </a:xfrm>
           <a:prstGeom prst="rect">
             <a:avLst/>
@@ -39546,22 +39546,22 @@
         <p:spPr>
           <a:xfrm>
             <a:off x="566928" y="402336"/>
-            <a:ext cx="11057839" cy="603504"/>
-          </a:xfrm>
-          <a:prstGeom prst="rect">
-            <a:avLst/>
-          </a:prstGeom>
-          <a:noFill/>
-        </p:spPr>
-        <p:txBody>
-          <a:bodyPr wrap="square" anchor="ctr" lIns="36576" rIns="36576" tIns="0" bIns="0">
+            <a:ext cx="11057839" cy="711199"/>
+          </a:xfrm>
+          <a:prstGeom prst="rect">
+            <a:avLst/>
+          </a:prstGeom>
+          <a:noFill/>
+        </p:spPr>
+        <p:txBody>
+          <a:bodyPr wrap="square" anchor="t" lIns="36576" rIns="36576" tIns="0" bIns="0">
             <a:spAutoFit/>
           </a:bodyPr>
           <a:lstStyle/>
           <a:p>
             <a:pPr algn="l">
               <a:lnSpc>
-                <a:spcPct val="125000"/>
+                <a:spcPct val="116000"/>
               </a:lnSpc>
             </a:pPr>
             <a:r>
@@ -40256,7 +40256,7 @@
         <p:spPr>
           <a:xfrm>
             <a:off x="0" y="0"/>
-            <a:ext cx="12191695" cy="1078992"/>
+            <a:ext cx="12191695" cy="1223263"/>
           </a:xfrm>
           <a:prstGeom prst="rect">
             <a:avLst/>
@@ -40299,7 +40299,7 @@
         </p:nvSpPr>
         <p:spPr>
           <a:xfrm>
-            <a:off x="0" y="1078992"/>
+            <a:off x="0" y="1223263"/>
             <a:ext cx="12191695" cy="57150"/>
           </a:xfrm>
           <a:prstGeom prst="rect">
@@ -40344,7 +40344,7 @@
         <p:spPr>
           <a:xfrm>
             <a:off x="566928" y="91440"/>
-            <a:ext cx="11057839" cy="292608"/>
+            <a:ext cx="11057839" cy="274320"/>
           </a:xfrm>
           <a:prstGeom prst="rect">
             <a:avLst/>
@@ -40384,22 +40384,22 @@
         <p:spPr>
           <a:xfrm>
             <a:off x="566928" y="402336"/>
-            <a:ext cx="11057839" cy="603504"/>
-          </a:xfrm>
-          <a:prstGeom prst="rect">
-            <a:avLst/>
-          </a:prstGeom>
-          <a:noFill/>
-        </p:spPr>
-        <p:txBody>
-          <a:bodyPr wrap="square" anchor="ctr" lIns="36576" rIns="36576" tIns="0" bIns="0">
+            <a:ext cx="11057839" cy="711199"/>
+          </a:xfrm>
+          <a:prstGeom prst="rect">
+            <a:avLst/>
+          </a:prstGeom>
+          <a:noFill/>
+        </p:spPr>
+        <p:txBody>
+          <a:bodyPr wrap="square" anchor="t" lIns="36576" rIns="36576" tIns="0" bIns="0">
             <a:spAutoFit/>
           </a:bodyPr>
           <a:lstStyle/>
           <a:p>
             <a:pPr algn="l">
               <a:lnSpc>
-                <a:spcPct val="125000"/>
+                <a:spcPct val="116000"/>
               </a:lnSpc>
             </a:pPr>
             <a:r>
@@ -41094,7 +41094,7 @@
         <p:spPr>
           <a:xfrm>
             <a:off x="0" y="0"/>
-            <a:ext cx="12191695" cy="1078992"/>
+            <a:ext cx="12191695" cy="1223263"/>
           </a:xfrm>
           <a:prstGeom prst="rect">
             <a:avLst/>
@@ -41137,7 +41137,7 @@
         </p:nvSpPr>
         <p:spPr>
           <a:xfrm>
-            <a:off x="0" y="1078992"/>
+            <a:off x="0" y="1223263"/>
             <a:ext cx="12191695" cy="57150"/>
           </a:xfrm>
           <a:prstGeom prst="rect">
@@ -41182,7 +41182,7 @@
         <p:spPr>
           <a:xfrm>
             <a:off x="566928" y="91440"/>
-            <a:ext cx="11057839" cy="292608"/>
+            <a:ext cx="11057839" cy="274320"/>
           </a:xfrm>
           <a:prstGeom prst="rect">
             <a:avLst/>
@@ -41222,22 +41222,22 @@
         <p:spPr>
           <a:xfrm>
             <a:off x="566928" y="402336"/>
-            <a:ext cx="11057839" cy="603504"/>
-          </a:xfrm>
-          <a:prstGeom prst="rect">
-            <a:avLst/>
-          </a:prstGeom>
-          <a:noFill/>
-        </p:spPr>
-        <p:txBody>
-          <a:bodyPr wrap="square" anchor="ctr" lIns="36576" rIns="36576" tIns="0" bIns="0">
+            <a:ext cx="11057839" cy="711199"/>
+          </a:xfrm>
+          <a:prstGeom prst="rect">
+            <a:avLst/>
+          </a:prstGeom>
+          <a:noFill/>
+        </p:spPr>
+        <p:txBody>
+          <a:bodyPr wrap="square" anchor="t" lIns="36576" rIns="36576" tIns="0" bIns="0">
             <a:spAutoFit/>
           </a:bodyPr>
           <a:lstStyle/>
           <a:p>
             <a:pPr algn="l">
               <a:lnSpc>
-                <a:spcPct val="125000"/>
+                <a:spcPct val="116000"/>
               </a:lnSpc>
             </a:pPr>
             <a:r>
@@ -41686,7 +41686,7 @@
         <p:spPr>
           <a:xfrm>
             <a:off x="0" y="0"/>
-            <a:ext cx="12191695" cy="1078992"/>
+            <a:ext cx="12191695" cy="1223263"/>
           </a:xfrm>
           <a:prstGeom prst="rect">
             <a:avLst/>
@@ -41729,7 +41729,7 @@
         </p:nvSpPr>
         <p:spPr>
           <a:xfrm>
-            <a:off x="0" y="1078992"/>
+            <a:off x="0" y="1223263"/>
             <a:ext cx="12191695" cy="57150"/>
           </a:xfrm>
           <a:prstGeom prst="rect">
@@ -41774,7 +41774,7 @@
         <p:spPr>
           <a:xfrm>
             <a:off x="566928" y="91440"/>
-            <a:ext cx="11057839" cy="292608"/>
+            <a:ext cx="11057839" cy="274320"/>
           </a:xfrm>
           <a:prstGeom prst="rect">
             <a:avLst/>
@@ -41814,22 +41814,22 @@
         <p:spPr>
           <a:xfrm>
             <a:off x="566928" y="402336"/>
-            <a:ext cx="11057839" cy="603504"/>
-          </a:xfrm>
-          <a:prstGeom prst="rect">
-            <a:avLst/>
-          </a:prstGeom>
-          <a:noFill/>
-        </p:spPr>
-        <p:txBody>
-          <a:bodyPr wrap="square" anchor="ctr" lIns="36576" rIns="36576" tIns="0" bIns="0">
+            <a:ext cx="11057839" cy="711199"/>
+          </a:xfrm>
+          <a:prstGeom prst="rect">
+            <a:avLst/>
+          </a:prstGeom>
+          <a:noFill/>
+        </p:spPr>
+        <p:txBody>
+          <a:bodyPr wrap="square" anchor="t" lIns="36576" rIns="36576" tIns="0" bIns="0">
             <a:spAutoFit/>
           </a:bodyPr>
           <a:lstStyle/>
           <a:p>
             <a:pPr algn="l">
               <a:lnSpc>
-                <a:spcPct val="125000"/>
+                <a:spcPct val="116000"/>
               </a:lnSpc>
             </a:pPr>
             <a:r>
@@ -42238,7 +42238,7 @@
         <p:spPr>
           <a:xfrm>
             <a:off x="0" y="0"/>
-            <a:ext cx="12191695" cy="1078992"/>
+            <a:ext cx="12191695" cy="1223263"/>
           </a:xfrm>
           <a:prstGeom prst="rect">
             <a:avLst/>
@@ -42281,7 +42281,7 @@
         </p:nvSpPr>
         <p:spPr>
           <a:xfrm>
-            <a:off x="0" y="1078992"/>
+            <a:off x="0" y="1223263"/>
             <a:ext cx="12191695" cy="57150"/>
           </a:xfrm>
           <a:prstGeom prst="rect">
@@ -42326,7 +42326,7 @@
         <p:spPr>
           <a:xfrm>
             <a:off x="566928" y="91440"/>
-            <a:ext cx="11057839" cy="292608"/>
+            <a:ext cx="11057839" cy="274320"/>
           </a:xfrm>
           <a:prstGeom prst="rect">
             <a:avLst/>
@@ -42366,22 +42366,22 @@
         <p:spPr>
           <a:xfrm>
             <a:off x="566928" y="402336"/>
-            <a:ext cx="11057839" cy="603504"/>
-          </a:xfrm>
-          <a:prstGeom prst="rect">
-            <a:avLst/>
-          </a:prstGeom>
-          <a:noFill/>
-        </p:spPr>
-        <p:txBody>
-          <a:bodyPr wrap="square" anchor="ctr" lIns="36576" rIns="36576" tIns="0" bIns="0">
+            <a:ext cx="11057839" cy="711199"/>
+          </a:xfrm>
+          <a:prstGeom prst="rect">
+            <a:avLst/>
+          </a:prstGeom>
+          <a:noFill/>
+        </p:spPr>
+        <p:txBody>
+          <a:bodyPr wrap="square" anchor="t" lIns="36576" rIns="36576" tIns="0" bIns="0">
             <a:spAutoFit/>
           </a:bodyPr>
           <a:lstStyle/>
           <a:p>
             <a:pPr algn="l">
               <a:lnSpc>
-                <a:spcPct val="125000"/>
+                <a:spcPct val="116000"/>
               </a:lnSpc>
             </a:pPr>
             <a:r>
@@ -42596,7 +42596,7 @@
         <p:spPr>
           <a:xfrm>
             <a:off x="0" y="0"/>
-            <a:ext cx="12191695" cy="1078992"/>
+            <a:ext cx="12191695" cy="1223263"/>
           </a:xfrm>
           <a:prstGeom prst="rect">
             <a:avLst/>
@@ -42639,7 +42639,7 @@
         </p:nvSpPr>
         <p:spPr>
           <a:xfrm>
-            <a:off x="0" y="1078992"/>
+            <a:off x="0" y="1223263"/>
             <a:ext cx="12191695" cy="57150"/>
           </a:xfrm>
           <a:prstGeom prst="rect">
@@ -42684,7 +42684,7 @@
         <p:spPr>
           <a:xfrm>
             <a:off x="566928" y="91440"/>
-            <a:ext cx="11057839" cy="292608"/>
+            <a:ext cx="11057839" cy="274320"/>
           </a:xfrm>
           <a:prstGeom prst="rect">
             <a:avLst/>
@@ -42724,22 +42724,22 @@
         <p:spPr>
           <a:xfrm>
             <a:off x="566928" y="402336"/>
-            <a:ext cx="11057839" cy="603504"/>
-          </a:xfrm>
-          <a:prstGeom prst="rect">
-            <a:avLst/>
-          </a:prstGeom>
-          <a:noFill/>
-        </p:spPr>
-        <p:txBody>
-          <a:bodyPr wrap="square" anchor="ctr" lIns="36576" rIns="36576" tIns="0" bIns="0">
+            <a:ext cx="11057839" cy="711199"/>
+          </a:xfrm>
+          <a:prstGeom prst="rect">
+            <a:avLst/>
+          </a:prstGeom>
+          <a:noFill/>
+        </p:spPr>
+        <p:txBody>
+          <a:bodyPr wrap="square" anchor="t" lIns="36576" rIns="36576" tIns="0" bIns="0">
             <a:spAutoFit/>
           </a:bodyPr>
           <a:lstStyle/>
           <a:p>
             <a:pPr algn="l">
               <a:lnSpc>
-                <a:spcPct val="125000"/>
+                <a:spcPct val="116000"/>
               </a:lnSpc>
             </a:pPr>
             <a:r>
@@ -42954,7 +42954,7 @@
         <p:spPr>
           <a:xfrm>
             <a:off x="0" y="0"/>
-            <a:ext cx="12191695" cy="1078992"/>
+            <a:ext cx="12191695" cy="1223263"/>
           </a:xfrm>
           <a:prstGeom prst="rect">
             <a:avLst/>
@@ -42997,7 +42997,7 @@
         </p:nvSpPr>
         <p:spPr>
           <a:xfrm>
-            <a:off x="0" y="1078992"/>
+            <a:off x="0" y="1223263"/>
             <a:ext cx="12191695" cy="57150"/>
           </a:xfrm>
           <a:prstGeom prst="rect">
@@ -43042,7 +43042,7 @@
         <p:spPr>
           <a:xfrm>
             <a:off x="566928" y="91440"/>
-            <a:ext cx="11057839" cy="292608"/>
+            <a:ext cx="11057839" cy="274320"/>
           </a:xfrm>
           <a:prstGeom prst="rect">
             <a:avLst/>
@@ -43082,22 +43082,22 @@
         <p:spPr>
           <a:xfrm>
             <a:off x="566928" y="402336"/>
-            <a:ext cx="11057839" cy="603504"/>
-          </a:xfrm>
-          <a:prstGeom prst="rect">
-            <a:avLst/>
-          </a:prstGeom>
-          <a:noFill/>
-        </p:spPr>
-        <p:txBody>
-          <a:bodyPr wrap="square" anchor="ctr" lIns="36576" rIns="36576" tIns="0" bIns="0">
+            <a:ext cx="11057839" cy="711199"/>
+          </a:xfrm>
+          <a:prstGeom prst="rect">
+            <a:avLst/>
+          </a:prstGeom>
+          <a:noFill/>
+        </p:spPr>
+        <p:txBody>
+          <a:bodyPr wrap="square" anchor="t" lIns="36576" rIns="36576" tIns="0" bIns="0">
             <a:spAutoFit/>
           </a:bodyPr>
           <a:lstStyle/>
           <a:p>
             <a:pPr algn="l">
               <a:lnSpc>
-                <a:spcPct val="125000"/>
+                <a:spcPct val="116000"/>
               </a:lnSpc>
             </a:pPr>
             <a:r>
@@ -43692,7 +43692,7 @@
         <p:spPr>
           <a:xfrm>
             <a:off x="0" y="0"/>
-            <a:ext cx="12191695" cy="1078992"/>
+            <a:ext cx="12191695" cy="1223263"/>
           </a:xfrm>
           <a:prstGeom prst="rect">
             <a:avLst/>
@@ -43735,7 +43735,7 @@
         </p:nvSpPr>
         <p:spPr>
           <a:xfrm>
-            <a:off x="0" y="1078992"/>
+            <a:off x="0" y="1223263"/>
             <a:ext cx="12191695" cy="57150"/>
           </a:xfrm>
           <a:prstGeom prst="rect">
@@ -43780,7 +43780,7 @@
         <p:spPr>
           <a:xfrm>
             <a:off x="566928" y="91440"/>
-            <a:ext cx="11057839" cy="292608"/>
+            <a:ext cx="11057839" cy="274320"/>
           </a:xfrm>
           <a:prstGeom prst="rect">
             <a:avLst/>
@@ -43820,22 +43820,22 @@
         <p:spPr>
           <a:xfrm>
             <a:off x="566928" y="402336"/>
-            <a:ext cx="11057839" cy="603504"/>
-          </a:xfrm>
-          <a:prstGeom prst="rect">
-            <a:avLst/>
-          </a:prstGeom>
-          <a:noFill/>
-        </p:spPr>
-        <p:txBody>
-          <a:bodyPr wrap="square" anchor="ctr" lIns="36576" rIns="36576" tIns="0" bIns="0">
+            <a:ext cx="11057839" cy="711199"/>
+          </a:xfrm>
+          <a:prstGeom prst="rect">
+            <a:avLst/>
+          </a:prstGeom>
+          <a:noFill/>
+        </p:spPr>
+        <p:txBody>
+          <a:bodyPr wrap="square" anchor="t" lIns="36576" rIns="36576" tIns="0" bIns="0">
             <a:spAutoFit/>
           </a:bodyPr>
           <a:lstStyle/>
           <a:p>
             <a:pPr algn="l">
               <a:lnSpc>
-                <a:spcPct val="125000"/>
+                <a:spcPct val="116000"/>
               </a:lnSpc>
             </a:pPr>
             <a:r>
@@ -44050,7 +44050,7 @@
         <p:spPr>
           <a:xfrm>
             <a:off x="0" y="0"/>
-            <a:ext cx="12191695" cy="1078992"/>
+            <a:ext cx="12191695" cy="1223263"/>
           </a:xfrm>
           <a:prstGeom prst="rect">
             <a:avLst/>
@@ -44093,7 +44093,7 @@
         </p:nvSpPr>
         <p:spPr>
           <a:xfrm>
-            <a:off x="0" y="1078992"/>
+            <a:off x="0" y="1223263"/>
             <a:ext cx="12191695" cy="57150"/>
           </a:xfrm>
           <a:prstGeom prst="rect">
@@ -44138,7 +44138,7 @@
         <p:spPr>
           <a:xfrm>
             <a:off x="566928" y="91440"/>
-            <a:ext cx="11057839" cy="292608"/>
+            <a:ext cx="11057839" cy="274320"/>
           </a:xfrm>
           <a:prstGeom prst="rect">
             <a:avLst/>
@@ -44178,22 +44178,22 @@
         <p:spPr>
           <a:xfrm>
             <a:off x="566928" y="402336"/>
-            <a:ext cx="11057839" cy="603504"/>
-          </a:xfrm>
-          <a:prstGeom prst="rect">
-            <a:avLst/>
-          </a:prstGeom>
-          <a:noFill/>
-        </p:spPr>
-        <p:txBody>
-          <a:bodyPr wrap="square" anchor="ctr" lIns="36576" rIns="36576" tIns="0" bIns="0">
+            <a:ext cx="11057839" cy="711199"/>
+          </a:xfrm>
+          <a:prstGeom prst="rect">
+            <a:avLst/>
+          </a:prstGeom>
+          <a:noFill/>
+        </p:spPr>
+        <p:txBody>
+          <a:bodyPr wrap="square" anchor="t" lIns="36576" rIns="36576" tIns="0" bIns="0">
             <a:spAutoFit/>
           </a:bodyPr>
           <a:lstStyle/>
           <a:p>
             <a:pPr algn="l">
               <a:lnSpc>
-                <a:spcPct val="125000"/>
+                <a:spcPct val="116000"/>
               </a:lnSpc>
             </a:pPr>
             <a:r>
@@ -44408,7 +44408,7 @@
         <p:spPr>
           <a:xfrm>
             <a:off x="0" y="0"/>
-            <a:ext cx="12191695" cy="1078992"/>
+            <a:ext cx="12191695" cy="1223263"/>
           </a:xfrm>
           <a:prstGeom prst="rect">
             <a:avLst/>
@@ -44451,7 +44451,7 @@
         </p:nvSpPr>
         <p:spPr>
           <a:xfrm>
-            <a:off x="0" y="1078992"/>
+            <a:off x="0" y="1223263"/>
             <a:ext cx="12191695" cy="57150"/>
           </a:xfrm>
           <a:prstGeom prst="rect">
@@ -44496,7 +44496,7 @@
         <p:spPr>
           <a:xfrm>
             <a:off x="566928" y="91440"/>
-            <a:ext cx="11057839" cy="292608"/>
+            <a:ext cx="11057839" cy="274320"/>
           </a:xfrm>
           <a:prstGeom prst="rect">
             <a:avLst/>
@@ -44536,22 +44536,22 @@
         <p:spPr>
           <a:xfrm>
             <a:off x="566928" y="402336"/>
-            <a:ext cx="11057839" cy="603504"/>
-          </a:xfrm>
-          <a:prstGeom prst="rect">
-            <a:avLst/>
-          </a:prstGeom>
-          <a:noFill/>
-        </p:spPr>
-        <p:txBody>
-          <a:bodyPr wrap="square" anchor="ctr" lIns="36576" rIns="36576" tIns="0" bIns="0">
+            <a:ext cx="11057839" cy="711199"/>
+          </a:xfrm>
+          <a:prstGeom prst="rect">
+            <a:avLst/>
+          </a:prstGeom>
+          <a:noFill/>
+        </p:spPr>
+        <p:txBody>
+          <a:bodyPr wrap="square" anchor="t" lIns="36576" rIns="36576" tIns="0" bIns="0">
             <a:spAutoFit/>
           </a:bodyPr>
           <a:lstStyle/>
           <a:p>
             <a:pPr algn="l">
               <a:lnSpc>
-                <a:spcPct val="125000"/>
+                <a:spcPct val="116000"/>
               </a:lnSpc>
             </a:pPr>
             <a:r>
@@ -44766,7 +44766,7 @@
         <p:spPr>
           <a:xfrm>
             <a:off x="0" y="0"/>
-            <a:ext cx="12191695" cy="1078992"/>
+            <a:ext cx="12191695" cy="1223263"/>
           </a:xfrm>
           <a:prstGeom prst="rect">
             <a:avLst/>
@@ -44809,7 +44809,7 @@
         </p:nvSpPr>
         <p:spPr>
           <a:xfrm>
-            <a:off x="0" y="1078992"/>
+            <a:off x="0" y="1223263"/>
             <a:ext cx="12191695" cy="57150"/>
           </a:xfrm>
           <a:prstGeom prst="rect">
@@ -44854,7 +44854,7 @@
         <p:spPr>
           <a:xfrm>
             <a:off x="566928" y="91440"/>
-            <a:ext cx="11057839" cy="292608"/>
+            <a:ext cx="11057839" cy="274320"/>
           </a:xfrm>
           <a:prstGeom prst="rect">
             <a:avLst/>
@@ -44894,22 +44894,22 @@
         <p:spPr>
           <a:xfrm>
             <a:off x="566928" y="402336"/>
-            <a:ext cx="11057839" cy="603504"/>
-          </a:xfrm>
-          <a:prstGeom prst="rect">
-            <a:avLst/>
-          </a:prstGeom>
-          <a:noFill/>
-        </p:spPr>
-        <p:txBody>
-          <a:bodyPr wrap="square" anchor="ctr" lIns="36576" rIns="36576" tIns="0" bIns="0">
+            <a:ext cx="11057839" cy="711199"/>
+          </a:xfrm>
+          <a:prstGeom prst="rect">
+            <a:avLst/>
+          </a:prstGeom>
+          <a:noFill/>
+        </p:spPr>
+        <p:txBody>
+          <a:bodyPr wrap="square" anchor="t" lIns="36576" rIns="36576" tIns="0" bIns="0">
             <a:spAutoFit/>
           </a:bodyPr>
           <a:lstStyle/>
           <a:p>
             <a:pPr algn="l">
               <a:lnSpc>
-                <a:spcPct val="125000"/>
+                <a:spcPct val="116000"/>
               </a:lnSpc>
             </a:pPr>
             <a:r>
@@ -45124,7 +45124,7 @@
         <p:spPr>
           <a:xfrm>
             <a:off x="0" y="0"/>
-            <a:ext cx="12191695" cy="1078992"/>
+            <a:ext cx="12191695" cy="1223263"/>
           </a:xfrm>
           <a:prstGeom prst="rect">
             <a:avLst/>
@@ -45167,7 +45167,7 @@
         </p:nvSpPr>
         <p:spPr>
           <a:xfrm>
-            <a:off x="0" y="1078992"/>
+            <a:off x="0" y="1223263"/>
             <a:ext cx="12191695" cy="57150"/>
           </a:xfrm>
           <a:prstGeom prst="rect">
@@ -45212,7 +45212,7 @@
         <p:spPr>
           <a:xfrm>
             <a:off x="566928" y="91440"/>
-            <a:ext cx="11057839" cy="292608"/>
+            <a:ext cx="11057839" cy="274320"/>
           </a:xfrm>
           <a:prstGeom prst="rect">
             <a:avLst/>
@@ -45252,22 +45252,22 @@
         <p:spPr>
           <a:xfrm>
             <a:off x="566928" y="402336"/>
-            <a:ext cx="11057839" cy="603504"/>
-          </a:xfrm>
-          <a:prstGeom prst="rect">
-            <a:avLst/>
-          </a:prstGeom>
-          <a:noFill/>
-        </p:spPr>
-        <p:txBody>
-          <a:bodyPr wrap="square" anchor="ctr" lIns="36576" rIns="36576" tIns="0" bIns="0">
+            <a:ext cx="11057839" cy="711199"/>
+          </a:xfrm>
+          <a:prstGeom prst="rect">
+            <a:avLst/>
+          </a:prstGeom>
+          <a:noFill/>
+        </p:spPr>
+        <p:txBody>
+          <a:bodyPr wrap="square" anchor="t" lIns="36576" rIns="36576" tIns="0" bIns="0">
             <a:spAutoFit/>
           </a:bodyPr>
           <a:lstStyle/>
           <a:p>
             <a:pPr algn="l">
               <a:lnSpc>
-                <a:spcPct val="125000"/>
+                <a:spcPct val="116000"/>
               </a:lnSpc>
             </a:pPr>
             <a:r>
@@ -45862,7 +45862,7 @@
         <p:spPr>
           <a:xfrm>
             <a:off x="0" y="0"/>
-            <a:ext cx="12191695" cy="1078992"/>
+            <a:ext cx="12191695" cy="1223263"/>
           </a:xfrm>
           <a:prstGeom prst="rect">
             <a:avLst/>
@@ -45905,7 +45905,7 @@
         </p:nvSpPr>
         <p:spPr>
           <a:xfrm>
-            <a:off x="0" y="1078992"/>
+            <a:off x="0" y="1223263"/>
             <a:ext cx="12191695" cy="57150"/>
           </a:xfrm>
           <a:prstGeom prst="rect">
@@ -45950,7 +45950,7 @@
         <p:spPr>
           <a:xfrm>
             <a:off x="566928" y="91440"/>
-            <a:ext cx="11057839" cy="292608"/>
+            <a:ext cx="11057839" cy="274320"/>
           </a:xfrm>
           <a:prstGeom prst="rect">
             <a:avLst/>
@@ -45990,22 +45990,22 @@
         <p:spPr>
           <a:xfrm>
             <a:off x="566928" y="402336"/>
-            <a:ext cx="11057839" cy="603504"/>
-          </a:xfrm>
-          <a:prstGeom prst="rect">
-            <a:avLst/>
-          </a:prstGeom>
-          <a:noFill/>
-        </p:spPr>
-        <p:txBody>
-          <a:bodyPr wrap="square" anchor="ctr" lIns="36576" rIns="36576" tIns="0" bIns="0">
+            <a:ext cx="11057839" cy="711199"/>
+          </a:xfrm>
+          <a:prstGeom prst="rect">
+            <a:avLst/>
+          </a:prstGeom>
+          <a:noFill/>
+        </p:spPr>
+        <p:txBody>
+          <a:bodyPr wrap="square" anchor="t" lIns="36576" rIns="36576" tIns="0" bIns="0">
             <a:spAutoFit/>
           </a:bodyPr>
           <a:lstStyle/>
           <a:p>
             <a:pPr algn="l">
               <a:lnSpc>
-                <a:spcPct val="125000"/>
+                <a:spcPct val="116000"/>
               </a:lnSpc>
             </a:pPr>
             <a:r>
@@ -46220,7 +46220,7 @@
         <p:spPr>
           <a:xfrm>
             <a:off x="0" y="0"/>
-            <a:ext cx="12191695" cy="1078992"/>
+            <a:ext cx="12191695" cy="1223263"/>
           </a:xfrm>
           <a:prstGeom prst="rect">
             <a:avLst/>
@@ -46263,7 +46263,7 @@
         </p:nvSpPr>
         <p:spPr>
           <a:xfrm>
-            <a:off x="0" y="1078992"/>
+            <a:off x="0" y="1223263"/>
             <a:ext cx="12191695" cy="57150"/>
           </a:xfrm>
           <a:prstGeom prst="rect">
@@ -46308,7 +46308,7 @@
         <p:spPr>
           <a:xfrm>
             <a:off x="566928" y="91440"/>
-            <a:ext cx="11057839" cy="292608"/>
+            <a:ext cx="11057839" cy="274320"/>
           </a:xfrm>
           <a:prstGeom prst="rect">
             <a:avLst/>
@@ -46348,22 +46348,22 @@
         <p:spPr>
           <a:xfrm>
             <a:off x="566928" y="402336"/>
-            <a:ext cx="11057839" cy="603504"/>
-          </a:xfrm>
-          <a:prstGeom prst="rect">
-            <a:avLst/>
-          </a:prstGeom>
-          <a:noFill/>
-        </p:spPr>
-        <p:txBody>
-          <a:bodyPr wrap="square" anchor="ctr" lIns="36576" rIns="36576" tIns="0" bIns="0">
+            <a:ext cx="11057839" cy="711199"/>
+          </a:xfrm>
+          <a:prstGeom prst="rect">
+            <a:avLst/>
+          </a:prstGeom>
+          <a:noFill/>
+        </p:spPr>
+        <p:txBody>
+          <a:bodyPr wrap="square" anchor="t" lIns="36576" rIns="36576" tIns="0" bIns="0">
             <a:spAutoFit/>
           </a:bodyPr>
           <a:lstStyle/>
           <a:p>
             <a:pPr algn="l">
               <a:lnSpc>
-                <a:spcPct val="125000"/>
+                <a:spcPct val="116000"/>
               </a:lnSpc>
             </a:pPr>
             <a:r>
@@ -46578,7 +46578,7 @@
         <p:spPr>
           <a:xfrm>
             <a:off x="0" y="0"/>
-            <a:ext cx="12191695" cy="1078992"/>
+            <a:ext cx="12191695" cy="1223263"/>
           </a:xfrm>
           <a:prstGeom prst="rect">
             <a:avLst/>
@@ -46621,7 +46621,7 @@
         </p:nvSpPr>
         <p:spPr>
           <a:xfrm>
-            <a:off x="0" y="1078992"/>
+            <a:off x="0" y="1223263"/>
             <a:ext cx="12191695" cy="57150"/>
           </a:xfrm>
           <a:prstGeom prst="rect">
@@ -46666,7 +46666,7 @@
         <p:spPr>
           <a:xfrm>
             <a:off x="566928" y="91440"/>
-            <a:ext cx="11057839" cy="292608"/>
+            <a:ext cx="11057839" cy="274320"/>
           </a:xfrm>
           <a:prstGeom prst="rect">
             <a:avLst/>
@@ -46706,22 +46706,22 @@
         <p:spPr>
           <a:xfrm>
             <a:off x="566928" y="402336"/>
-            <a:ext cx="11057839" cy="603504"/>
-          </a:xfrm>
-          <a:prstGeom prst="rect">
-            <a:avLst/>
-          </a:prstGeom>
-          <a:noFill/>
-        </p:spPr>
-        <p:txBody>
-          <a:bodyPr wrap="square" anchor="ctr" lIns="36576" rIns="36576" tIns="0" bIns="0">
+            <a:ext cx="11057839" cy="711199"/>
+          </a:xfrm>
+          <a:prstGeom prst="rect">
+            <a:avLst/>
+          </a:prstGeom>
+          <a:noFill/>
+        </p:spPr>
+        <p:txBody>
+          <a:bodyPr wrap="square" anchor="t" lIns="36576" rIns="36576" tIns="0" bIns="0">
             <a:spAutoFit/>
           </a:bodyPr>
           <a:lstStyle/>
           <a:p>
             <a:pPr algn="l">
               <a:lnSpc>
-                <a:spcPct val="125000"/>
+                <a:spcPct val="116000"/>
               </a:lnSpc>
             </a:pPr>
             <a:r>
@@ -46836,7 +46836,7 @@
         <p:spPr>
           <a:xfrm>
             <a:off x="0" y="0"/>
-            <a:ext cx="12191695" cy="1078992"/>
+            <a:ext cx="12191695" cy="1223263"/>
           </a:xfrm>
           <a:prstGeom prst="rect">
             <a:avLst/>
@@ -46879,7 +46879,7 @@
         </p:nvSpPr>
         <p:spPr>
           <a:xfrm>
-            <a:off x="0" y="1078992"/>
+            <a:off x="0" y="1223263"/>
             <a:ext cx="12191695" cy="57150"/>
           </a:xfrm>
           <a:prstGeom prst="rect">
@@ -46924,7 +46924,7 @@
         <p:spPr>
           <a:xfrm>
             <a:off x="566928" y="91440"/>
-            <a:ext cx="11057839" cy="292608"/>
+            <a:ext cx="11057839" cy="274320"/>
           </a:xfrm>
           <a:prstGeom prst="rect">
             <a:avLst/>
@@ -46964,22 +46964,22 @@
         <p:spPr>
           <a:xfrm>
             <a:off x="566928" y="402336"/>
-            <a:ext cx="11057839" cy="603504"/>
-          </a:xfrm>
-          <a:prstGeom prst="rect">
-            <a:avLst/>
-          </a:prstGeom>
-          <a:noFill/>
-        </p:spPr>
-        <p:txBody>
-          <a:bodyPr wrap="square" anchor="ctr" lIns="36576" rIns="36576" tIns="0" bIns="0">
+            <a:ext cx="11057839" cy="711199"/>
+          </a:xfrm>
+          <a:prstGeom prst="rect">
+            <a:avLst/>
+          </a:prstGeom>
+          <a:noFill/>
+        </p:spPr>
+        <p:txBody>
+          <a:bodyPr wrap="square" anchor="t" lIns="36576" rIns="36576" tIns="0" bIns="0">
             <a:spAutoFit/>
           </a:bodyPr>
           <a:lstStyle/>
           <a:p>
             <a:pPr algn="l">
               <a:lnSpc>
-                <a:spcPct val="125000"/>
+                <a:spcPct val="116000"/>
               </a:lnSpc>
             </a:pPr>
             <a:r>
@@ -47638,22 +47638,22 @@
         <p:spPr>
           <a:xfrm>
             <a:off x="566928" y="182880"/>
-            <a:ext cx="11057839" cy="731520"/>
-          </a:xfrm>
-          <a:prstGeom prst="rect">
-            <a:avLst/>
-          </a:prstGeom>
-          <a:noFill/>
-        </p:spPr>
-        <p:txBody>
-          <a:bodyPr wrap="square" anchor="ctr" lIns="36576" rIns="36576" tIns="0" bIns="0">
+            <a:ext cx="11057839" cy="711199"/>
+          </a:xfrm>
+          <a:prstGeom prst="rect">
+            <a:avLst/>
+          </a:prstGeom>
+          <a:noFill/>
+        </p:spPr>
+        <p:txBody>
+          <a:bodyPr wrap="square" anchor="t" lIns="36576" rIns="36576" tIns="0" bIns="0">
             <a:spAutoFit/>
           </a:bodyPr>
           <a:lstStyle/>
           <a:p>
             <a:pPr algn="l">
               <a:lnSpc>
-                <a:spcPct val="125000"/>
+                <a:spcPct val="116000"/>
               </a:lnSpc>
             </a:pPr>
             <a:r>
